--- a/Final/Figures/ffig.pptx
+++ b/Final/Figures/ffig.pptx
@@ -2,12 +2,12 @@
 <file path=ppt/presentation.xml><?xml version="1.0" encoding="utf-8"?>
 <p:presentation xmlns:a="http://schemas.openxmlformats.org/drawingml/2006/main" xmlns:r="http://schemas.openxmlformats.org/officeDocument/2006/relationships" xmlns:p="http://schemas.openxmlformats.org/presentationml/2006/main" saveSubsetFonts="1">
   <p:sldMasterIdLst>
-    <p:sldMasterId id="2147483696" r:id="rId1"/>
+    <p:sldMasterId id="2147483732" r:id="rId1"/>
   </p:sldMasterIdLst>
   <p:sldIdLst>
     <p:sldId id="256" r:id="rId2"/>
   </p:sldIdLst>
-  <p:sldSz cx="12192000" cy="3851275"/>
+  <p:sldSz cx="9906000" cy="3222625"/>
   <p:notesSz cx="6858000" cy="9144000"/>
   <p:defaultTextStyle>
     <a:defPPr>
@@ -141,15 +141,15 @@
         </p:nvSpPr>
         <p:spPr>
           <a:xfrm>
-            <a:off x="1524000" y="630290"/>
-            <a:ext cx="9144000" cy="1340814"/>
+            <a:off x="1238250" y="527407"/>
+            <a:ext cx="7429500" cy="1121951"/>
           </a:xfrm>
         </p:spPr>
         <p:txBody>
           <a:bodyPr anchor="b"/>
           <a:lstStyle>
             <a:lvl1pPr algn="ctr">
-              <a:defRPr sz="3370"/>
+              <a:defRPr sz="2819"/>
             </a:lvl1pPr>
           </a:lstStyle>
           <a:p>
@@ -173,8 +173,8 @@
         </p:nvSpPr>
         <p:spPr>
           <a:xfrm>
-            <a:off x="1524000" y="2022811"/>
-            <a:ext cx="9144000" cy="929833"/>
+            <a:off x="1238250" y="1692624"/>
+            <a:ext cx="7429500" cy="778055"/>
           </a:xfrm>
         </p:spPr>
         <p:txBody>
@@ -182,39 +182,39 @@
           <a:lstStyle>
             <a:lvl1pPr marL="0" indent="0" algn="ctr">
               <a:buNone/>
-              <a:defRPr sz="1348"/>
+              <a:defRPr sz="1128"/>
             </a:lvl1pPr>
-            <a:lvl2pPr marL="256764" indent="0" algn="ctr">
-              <a:buNone/>
-              <a:defRPr sz="1123"/>
+            <a:lvl2pPr marL="214838" indent="0" algn="ctr">
+              <a:buNone/>
+              <a:defRPr sz="940"/>
             </a:lvl2pPr>
-            <a:lvl3pPr marL="513527" indent="0" algn="ctr">
-              <a:buNone/>
-              <a:defRPr sz="1011"/>
+            <a:lvl3pPr marL="429677" indent="0" algn="ctr">
+              <a:buNone/>
+              <a:defRPr sz="846"/>
             </a:lvl3pPr>
-            <a:lvl4pPr marL="770291" indent="0" algn="ctr">
-              <a:buNone/>
-              <a:defRPr sz="899"/>
+            <a:lvl4pPr marL="644515" indent="0" algn="ctr">
+              <a:buNone/>
+              <a:defRPr sz="752"/>
             </a:lvl4pPr>
-            <a:lvl5pPr marL="1027054" indent="0" algn="ctr">
-              <a:buNone/>
-              <a:defRPr sz="899"/>
+            <a:lvl5pPr marL="859353" indent="0" algn="ctr">
+              <a:buNone/>
+              <a:defRPr sz="752"/>
             </a:lvl5pPr>
-            <a:lvl6pPr marL="1283818" indent="0" algn="ctr">
-              <a:buNone/>
-              <a:defRPr sz="899"/>
+            <a:lvl6pPr marL="1074191" indent="0" algn="ctr">
+              <a:buNone/>
+              <a:defRPr sz="752"/>
             </a:lvl6pPr>
-            <a:lvl7pPr marL="1540581" indent="0" algn="ctr">
-              <a:buNone/>
-              <a:defRPr sz="899"/>
+            <a:lvl7pPr marL="1289030" indent="0" algn="ctr">
+              <a:buNone/>
+              <a:defRPr sz="752"/>
             </a:lvl7pPr>
-            <a:lvl8pPr marL="1797345" indent="0" algn="ctr">
-              <a:buNone/>
-              <a:defRPr sz="899"/>
+            <a:lvl8pPr marL="1503868" indent="0" algn="ctr">
+              <a:buNone/>
+              <a:defRPr sz="752"/>
             </a:lvl8pPr>
-            <a:lvl9pPr marL="2054108" indent="0" algn="ctr">
-              <a:buNone/>
-              <a:defRPr sz="899"/>
+            <a:lvl9pPr marL="1718706" indent="0" algn="ctr">
+              <a:buNone/>
+              <a:defRPr sz="752"/>
             </a:lvl9pPr>
           </a:lstStyle>
           <a:p>
@@ -243,7 +243,7 @@
           <a:p>
             <a:fld id="{CC6FB895-B65F-4EA9-9907-69D32227E72B}" type="datetimeFigureOut">
               <a:rPr lang="zh-TW" altLang="en-US" smtClean="0"/>
-              <a:t>2026/3/30</a:t>
+              <a:t>2026/5/20</a:t>
             </a:fld>
             <a:endParaRPr lang="zh-TW" altLang="en-US"/>
           </a:p>
@@ -294,7 +294,7 @@
     </p:spTree>
     <p:extLst>
       <p:ext uri="{BB962C8B-B14F-4D97-AF65-F5344CB8AC3E}">
-        <p14:creationId xmlns:p14="http://schemas.microsoft.com/office/powerpoint/2010/main" val="1264923857"/>
+        <p14:creationId xmlns:p14="http://schemas.microsoft.com/office/powerpoint/2010/main" val="918337850"/>
       </p:ext>
     </p:extLst>
   </p:cSld>
@@ -413,7 +413,7 @@
           <a:p>
             <a:fld id="{CC6FB895-B65F-4EA9-9907-69D32227E72B}" type="datetimeFigureOut">
               <a:rPr lang="zh-TW" altLang="en-US" smtClean="0"/>
-              <a:t>2026/3/30</a:t>
+              <a:t>2026/5/20</a:t>
             </a:fld>
             <a:endParaRPr lang="zh-TW" altLang="en-US"/>
           </a:p>
@@ -464,7 +464,7 @@
     </p:spTree>
     <p:extLst>
       <p:ext uri="{BB962C8B-B14F-4D97-AF65-F5344CB8AC3E}">
-        <p14:creationId xmlns:p14="http://schemas.microsoft.com/office/powerpoint/2010/main" val="2503257649"/>
+        <p14:creationId xmlns:p14="http://schemas.microsoft.com/office/powerpoint/2010/main" val="3886090321"/>
       </p:ext>
     </p:extLst>
   </p:cSld>
@@ -503,8 +503,8 @@
         </p:nvSpPr>
         <p:spPr>
           <a:xfrm>
-            <a:off x="8724900" y="205045"/>
-            <a:ext cx="2628900" cy="3263778"/>
+            <a:off x="7088981" y="171575"/>
+            <a:ext cx="2135981" cy="2731026"/>
           </a:xfrm>
         </p:spPr>
         <p:txBody>
@@ -531,8 +531,8 @@
         </p:nvSpPr>
         <p:spPr>
           <a:xfrm>
-            <a:off x="838200" y="205045"/>
-            <a:ext cx="7734300" cy="3263778"/>
+            <a:off x="681037" y="171575"/>
+            <a:ext cx="6284119" cy="2731026"/>
           </a:xfrm>
         </p:spPr>
         <p:txBody>
@@ -593,7 +593,7 @@
           <a:p>
             <a:fld id="{CC6FB895-B65F-4EA9-9907-69D32227E72B}" type="datetimeFigureOut">
               <a:rPr lang="zh-TW" altLang="en-US" smtClean="0"/>
-              <a:t>2026/3/30</a:t>
+              <a:t>2026/5/20</a:t>
             </a:fld>
             <a:endParaRPr lang="zh-TW" altLang="en-US"/>
           </a:p>
@@ -644,7 +644,7 @@
     </p:spTree>
     <p:extLst>
       <p:ext uri="{BB962C8B-B14F-4D97-AF65-F5344CB8AC3E}">
-        <p14:creationId xmlns:p14="http://schemas.microsoft.com/office/powerpoint/2010/main" val="4141934928"/>
+        <p14:creationId xmlns:p14="http://schemas.microsoft.com/office/powerpoint/2010/main" val="3036669150"/>
       </p:ext>
     </p:extLst>
   </p:cSld>
@@ -763,7 +763,7 @@
           <a:p>
             <a:fld id="{CC6FB895-B65F-4EA9-9907-69D32227E72B}" type="datetimeFigureOut">
               <a:rPr lang="zh-TW" altLang="en-US" smtClean="0"/>
-              <a:t>2026/3/30</a:t>
+              <a:t>2026/5/20</a:t>
             </a:fld>
             <a:endParaRPr lang="zh-TW" altLang="en-US"/>
           </a:p>
@@ -814,7 +814,7 @@
     </p:spTree>
     <p:extLst>
       <p:ext uri="{BB962C8B-B14F-4D97-AF65-F5344CB8AC3E}">
-        <p14:creationId xmlns:p14="http://schemas.microsoft.com/office/powerpoint/2010/main" val="3652557050"/>
+        <p14:creationId xmlns:p14="http://schemas.microsoft.com/office/powerpoint/2010/main" val="3927614179"/>
       </p:ext>
     </p:extLst>
   </p:cSld>
@@ -853,15 +853,15 @@
         </p:nvSpPr>
         <p:spPr>
           <a:xfrm>
-            <a:off x="831850" y="960145"/>
-            <a:ext cx="10515600" cy="1602023"/>
+            <a:off x="675878" y="803419"/>
+            <a:ext cx="8543925" cy="1340522"/>
           </a:xfrm>
         </p:spPr>
         <p:txBody>
           <a:bodyPr anchor="b"/>
           <a:lstStyle>
             <a:lvl1pPr>
-              <a:defRPr sz="3370"/>
+              <a:defRPr sz="2819"/>
             </a:lvl1pPr>
           </a:lstStyle>
           <a:p>
@@ -885,8 +885,8 @@
         </p:nvSpPr>
         <p:spPr>
           <a:xfrm>
-            <a:off x="831850" y="2577324"/>
-            <a:ext cx="10515600" cy="842466"/>
+            <a:off x="675878" y="2156623"/>
+            <a:ext cx="8543925" cy="704949"/>
           </a:xfrm>
         </p:spPr>
         <p:txBody>
@@ -894,7 +894,7 @@
           <a:lstStyle>
             <a:lvl1pPr marL="0" indent="0">
               <a:buNone/>
-              <a:defRPr sz="1348">
+              <a:defRPr sz="1128">
                 <a:solidFill>
                   <a:schemeClr val="tx1">
                     <a:tint val="75000"/>
@@ -902,9 +902,9 @@
                 </a:solidFill>
               </a:defRPr>
             </a:lvl1pPr>
-            <a:lvl2pPr marL="256764" indent="0">
-              <a:buNone/>
-              <a:defRPr sz="1123">
+            <a:lvl2pPr marL="214838" indent="0">
+              <a:buNone/>
+              <a:defRPr sz="940">
                 <a:solidFill>
                   <a:schemeClr val="tx1">
                     <a:tint val="75000"/>
@@ -912,9 +912,9 @@
                 </a:solidFill>
               </a:defRPr>
             </a:lvl2pPr>
-            <a:lvl3pPr marL="513527" indent="0">
-              <a:buNone/>
-              <a:defRPr sz="1011">
+            <a:lvl3pPr marL="429677" indent="0">
+              <a:buNone/>
+              <a:defRPr sz="846">
                 <a:solidFill>
                   <a:schemeClr val="tx1">
                     <a:tint val="75000"/>
@@ -922,9 +922,9 @@
                 </a:solidFill>
               </a:defRPr>
             </a:lvl3pPr>
-            <a:lvl4pPr marL="770291" indent="0">
-              <a:buNone/>
-              <a:defRPr sz="899">
+            <a:lvl4pPr marL="644515" indent="0">
+              <a:buNone/>
+              <a:defRPr sz="752">
                 <a:solidFill>
                   <a:schemeClr val="tx1">
                     <a:tint val="75000"/>
@@ -932,9 +932,9 @@
                 </a:solidFill>
               </a:defRPr>
             </a:lvl4pPr>
-            <a:lvl5pPr marL="1027054" indent="0">
-              <a:buNone/>
-              <a:defRPr sz="899">
+            <a:lvl5pPr marL="859353" indent="0">
+              <a:buNone/>
+              <a:defRPr sz="752">
                 <a:solidFill>
                   <a:schemeClr val="tx1">
                     <a:tint val="75000"/>
@@ -942,9 +942,9 @@
                 </a:solidFill>
               </a:defRPr>
             </a:lvl5pPr>
-            <a:lvl6pPr marL="1283818" indent="0">
-              <a:buNone/>
-              <a:defRPr sz="899">
+            <a:lvl6pPr marL="1074191" indent="0">
+              <a:buNone/>
+              <a:defRPr sz="752">
                 <a:solidFill>
                   <a:schemeClr val="tx1">
                     <a:tint val="75000"/>
@@ -952,9 +952,9 @@
                 </a:solidFill>
               </a:defRPr>
             </a:lvl6pPr>
-            <a:lvl7pPr marL="1540581" indent="0">
-              <a:buNone/>
-              <a:defRPr sz="899">
+            <a:lvl7pPr marL="1289030" indent="0">
+              <a:buNone/>
+              <a:defRPr sz="752">
                 <a:solidFill>
                   <a:schemeClr val="tx1">
                     <a:tint val="75000"/>
@@ -962,9 +962,9 @@
                 </a:solidFill>
               </a:defRPr>
             </a:lvl7pPr>
-            <a:lvl8pPr marL="1797345" indent="0">
-              <a:buNone/>
-              <a:defRPr sz="899">
+            <a:lvl8pPr marL="1503868" indent="0">
+              <a:buNone/>
+              <a:defRPr sz="752">
                 <a:solidFill>
                   <a:schemeClr val="tx1">
                     <a:tint val="75000"/>
@@ -972,9 +972,9 @@
                 </a:solidFill>
               </a:defRPr>
             </a:lvl8pPr>
-            <a:lvl9pPr marL="2054108" indent="0">
-              <a:buNone/>
-              <a:defRPr sz="899">
+            <a:lvl9pPr marL="1718706" indent="0">
+              <a:buNone/>
+              <a:defRPr sz="752">
                 <a:solidFill>
                   <a:schemeClr val="tx1">
                     <a:tint val="75000"/>
@@ -1009,7 +1009,7 @@
           <a:p>
             <a:fld id="{CC6FB895-B65F-4EA9-9907-69D32227E72B}" type="datetimeFigureOut">
               <a:rPr lang="zh-TW" altLang="en-US" smtClean="0"/>
-              <a:t>2026/3/30</a:t>
+              <a:t>2026/5/20</a:t>
             </a:fld>
             <a:endParaRPr lang="zh-TW" altLang="en-US"/>
           </a:p>
@@ -1060,7 +1060,7 @@
     </p:spTree>
     <p:extLst>
       <p:ext uri="{BB962C8B-B14F-4D97-AF65-F5344CB8AC3E}">
-        <p14:creationId xmlns:p14="http://schemas.microsoft.com/office/powerpoint/2010/main" val="3545104495"/>
+        <p14:creationId xmlns:p14="http://schemas.microsoft.com/office/powerpoint/2010/main" val="3566186034"/>
       </p:ext>
     </p:extLst>
   </p:cSld>
@@ -1122,8 +1122,8 @@
         </p:nvSpPr>
         <p:spPr>
           <a:xfrm>
-            <a:off x="838200" y="1025223"/>
-            <a:ext cx="5181600" cy="2443599"/>
+            <a:off x="681038" y="857875"/>
+            <a:ext cx="4210050" cy="2044726"/>
           </a:xfrm>
         </p:spPr>
         <p:txBody>
@@ -1179,8 +1179,8 @@
         </p:nvSpPr>
         <p:spPr>
           <a:xfrm>
-            <a:off x="6172200" y="1025223"/>
-            <a:ext cx="5181600" cy="2443599"/>
+            <a:off x="5014913" y="857875"/>
+            <a:ext cx="4210050" cy="2044726"/>
           </a:xfrm>
         </p:spPr>
         <p:txBody>
@@ -1241,7 +1241,7 @@
           <a:p>
             <a:fld id="{CC6FB895-B65F-4EA9-9907-69D32227E72B}" type="datetimeFigureOut">
               <a:rPr lang="zh-TW" altLang="en-US" smtClean="0"/>
-              <a:t>2026/3/30</a:t>
+              <a:t>2026/5/20</a:t>
             </a:fld>
             <a:endParaRPr lang="zh-TW" altLang="en-US"/>
           </a:p>
@@ -1292,7 +1292,7 @@
     </p:spTree>
     <p:extLst>
       <p:ext uri="{BB962C8B-B14F-4D97-AF65-F5344CB8AC3E}">
-        <p14:creationId xmlns:p14="http://schemas.microsoft.com/office/powerpoint/2010/main" val="1628679009"/>
+        <p14:creationId xmlns:p14="http://schemas.microsoft.com/office/powerpoint/2010/main" val="4114866199"/>
       </p:ext>
     </p:extLst>
   </p:cSld>
@@ -1331,8 +1331,8 @@
         </p:nvSpPr>
         <p:spPr>
           <a:xfrm>
-            <a:off x="839788" y="205045"/>
-            <a:ext cx="10515600" cy="744402"/>
+            <a:off x="682328" y="171575"/>
+            <a:ext cx="8543925" cy="622892"/>
           </a:xfrm>
         </p:spPr>
         <p:txBody>
@@ -1359,8 +1359,8 @@
         </p:nvSpPr>
         <p:spPr>
           <a:xfrm>
-            <a:off x="839789" y="944097"/>
-            <a:ext cx="5157787" cy="462688"/>
+            <a:off x="682328" y="789991"/>
+            <a:ext cx="4190702" cy="387162"/>
           </a:xfrm>
         </p:spPr>
         <p:txBody>
@@ -1368,39 +1368,39 @@
           <a:lstStyle>
             <a:lvl1pPr marL="0" indent="0">
               <a:buNone/>
-              <a:defRPr sz="1348" b="1"/>
+              <a:defRPr sz="1128" b="1"/>
             </a:lvl1pPr>
-            <a:lvl2pPr marL="256764" indent="0">
-              <a:buNone/>
-              <a:defRPr sz="1123" b="1"/>
+            <a:lvl2pPr marL="214838" indent="0">
+              <a:buNone/>
+              <a:defRPr sz="940" b="1"/>
             </a:lvl2pPr>
-            <a:lvl3pPr marL="513527" indent="0">
-              <a:buNone/>
-              <a:defRPr sz="1011" b="1"/>
+            <a:lvl3pPr marL="429677" indent="0">
+              <a:buNone/>
+              <a:defRPr sz="846" b="1"/>
             </a:lvl3pPr>
-            <a:lvl4pPr marL="770291" indent="0">
-              <a:buNone/>
-              <a:defRPr sz="899" b="1"/>
+            <a:lvl4pPr marL="644515" indent="0">
+              <a:buNone/>
+              <a:defRPr sz="752" b="1"/>
             </a:lvl4pPr>
-            <a:lvl5pPr marL="1027054" indent="0">
-              <a:buNone/>
-              <a:defRPr sz="899" b="1"/>
+            <a:lvl5pPr marL="859353" indent="0">
+              <a:buNone/>
+              <a:defRPr sz="752" b="1"/>
             </a:lvl5pPr>
-            <a:lvl6pPr marL="1283818" indent="0">
-              <a:buNone/>
-              <a:defRPr sz="899" b="1"/>
+            <a:lvl6pPr marL="1074191" indent="0">
+              <a:buNone/>
+              <a:defRPr sz="752" b="1"/>
             </a:lvl6pPr>
-            <a:lvl7pPr marL="1540581" indent="0">
-              <a:buNone/>
-              <a:defRPr sz="899" b="1"/>
+            <a:lvl7pPr marL="1289030" indent="0">
+              <a:buNone/>
+              <a:defRPr sz="752" b="1"/>
             </a:lvl7pPr>
-            <a:lvl8pPr marL="1797345" indent="0">
-              <a:buNone/>
-              <a:defRPr sz="899" b="1"/>
+            <a:lvl8pPr marL="1503868" indent="0">
+              <a:buNone/>
+              <a:defRPr sz="752" b="1"/>
             </a:lvl8pPr>
-            <a:lvl9pPr marL="2054108" indent="0">
-              <a:buNone/>
-              <a:defRPr sz="899" b="1"/>
+            <a:lvl9pPr marL="1718706" indent="0">
+              <a:buNone/>
+              <a:defRPr sz="752" b="1"/>
             </a:lvl9pPr>
           </a:lstStyle>
           <a:p>
@@ -1424,8 +1424,8 @@
         </p:nvSpPr>
         <p:spPr>
           <a:xfrm>
-            <a:off x="839789" y="1406785"/>
-            <a:ext cx="5157787" cy="2069169"/>
+            <a:off x="682328" y="1177153"/>
+            <a:ext cx="4190702" cy="1731415"/>
           </a:xfrm>
         </p:spPr>
         <p:txBody>
@@ -1481,8 +1481,8 @@
         </p:nvSpPr>
         <p:spPr>
           <a:xfrm>
-            <a:off x="6172200" y="944097"/>
-            <a:ext cx="5183188" cy="462688"/>
+            <a:off x="5014913" y="789991"/>
+            <a:ext cx="4211340" cy="387162"/>
           </a:xfrm>
         </p:spPr>
         <p:txBody>
@@ -1490,39 +1490,39 @@
           <a:lstStyle>
             <a:lvl1pPr marL="0" indent="0">
               <a:buNone/>
-              <a:defRPr sz="1348" b="1"/>
+              <a:defRPr sz="1128" b="1"/>
             </a:lvl1pPr>
-            <a:lvl2pPr marL="256764" indent="0">
-              <a:buNone/>
-              <a:defRPr sz="1123" b="1"/>
+            <a:lvl2pPr marL="214838" indent="0">
+              <a:buNone/>
+              <a:defRPr sz="940" b="1"/>
             </a:lvl2pPr>
-            <a:lvl3pPr marL="513527" indent="0">
-              <a:buNone/>
-              <a:defRPr sz="1011" b="1"/>
+            <a:lvl3pPr marL="429677" indent="0">
+              <a:buNone/>
+              <a:defRPr sz="846" b="1"/>
             </a:lvl3pPr>
-            <a:lvl4pPr marL="770291" indent="0">
-              <a:buNone/>
-              <a:defRPr sz="899" b="1"/>
+            <a:lvl4pPr marL="644515" indent="0">
+              <a:buNone/>
+              <a:defRPr sz="752" b="1"/>
             </a:lvl4pPr>
-            <a:lvl5pPr marL="1027054" indent="0">
-              <a:buNone/>
-              <a:defRPr sz="899" b="1"/>
+            <a:lvl5pPr marL="859353" indent="0">
+              <a:buNone/>
+              <a:defRPr sz="752" b="1"/>
             </a:lvl5pPr>
-            <a:lvl6pPr marL="1283818" indent="0">
-              <a:buNone/>
-              <a:defRPr sz="899" b="1"/>
+            <a:lvl6pPr marL="1074191" indent="0">
+              <a:buNone/>
+              <a:defRPr sz="752" b="1"/>
             </a:lvl6pPr>
-            <a:lvl7pPr marL="1540581" indent="0">
-              <a:buNone/>
-              <a:defRPr sz="899" b="1"/>
+            <a:lvl7pPr marL="1289030" indent="0">
+              <a:buNone/>
+              <a:defRPr sz="752" b="1"/>
             </a:lvl7pPr>
-            <a:lvl8pPr marL="1797345" indent="0">
-              <a:buNone/>
-              <a:defRPr sz="899" b="1"/>
+            <a:lvl8pPr marL="1503868" indent="0">
+              <a:buNone/>
+              <a:defRPr sz="752" b="1"/>
             </a:lvl8pPr>
-            <a:lvl9pPr marL="2054108" indent="0">
-              <a:buNone/>
-              <a:defRPr sz="899" b="1"/>
+            <a:lvl9pPr marL="1718706" indent="0">
+              <a:buNone/>
+              <a:defRPr sz="752" b="1"/>
             </a:lvl9pPr>
           </a:lstStyle>
           <a:p>
@@ -1546,8 +1546,8 @@
         </p:nvSpPr>
         <p:spPr>
           <a:xfrm>
-            <a:off x="6172200" y="1406785"/>
-            <a:ext cx="5183188" cy="2069169"/>
+            <a:off x="5014913" y="1177153"/>
+            <a:ext cx="4211340" cy="1731415"/>
           </a:xfrm>
         </p:spPr>
         <p:txBody>
@@ -1608,7 +1608,7 @@
           <a:p>
             <a:fld id="{CC6FB895-B65F-4EA9-9907-69D32227E72B}" type="datetimeFigureOut">
               <a:rPr lang="zh-TW" altLang="en-US" smtClean="0"/>
-              <a:t>2026/3/30</a:t>
+              <a:t>2026/5/20</a:t>
             </a:fld>
             <a:endParaRPr lang="zh-TW" altLang="en-US"/>
           </a:p>
@@ -1659,7 +1659,7 @@
     </p:spTree>
     <p:extLst>
       <p:ext uri="{BB962C8B-B14F-4D97-AF65-F5344CB8AC3E}">
-        <p14:creationId xmlns:p14="http://schemas.microsoft.com/office/powerpoint/2010/main" val="2412142219"/>
+        <p14:creationId xmlns:p14="http://schemas.microsoft.com/office/powerpoint/2010/main" val="4155828049"/>
       </p:ext>
     </p:extLst>
   </p:cSld>
@@ -1726,7 +1726,7 @@
           <a:p>
             <a:fld id="{CC6FB895-B65F-4EA9-9907-69D32227E72B}" type="datetimeFigureOut">
               <a:rPr lang="zh-TW" altLang="en-US" smtClean="0"/>
-              <a:t>2026/3/30</a:t>
+              <a:t>2026/5/20</a:t>
             </a:fld>
             <a:endParaRPr lang="zh-TW" altLang="en-US"/>
           </a:p>
@@ -1777,7 +1777,7 @@
     </p:spTree>
     <p:extLst>
       <p:ext uri="{BB962C8B-B14F-4D97-AF65-F5344CB8AC3E}">
-        <p14:creationId xmlns:p14="http://schemas.microsoft.com/office/powerpoint/2010/main" val="3675227521"/>
+        <p14:creationId xmlns:p14="http://schemas.microsoft.com/office/powerpoint/2010/main" val="2973709614"/>
       </p:ext>
     </p:extLst>
   </p:cSld>
@@ -1821,7 +1821,7 @@
           <a:p>
             <a:fld id="{CC6FB895-B65F-4EA9-9907-69D32227E72B}" type="datetimeFigureOut">
               <a:rPr lang="zh-TW" altLang="en-US" smtClean="0"/>
-              <a:t>2026/3/30</a:t>
+              <a:t>2026/5/20</a:t>
             </a:fld>
             <a:endParaRPr lang="zh-TW" altLang="en-US"/>
           </a:p>
@@ -1872,7 +1872,7 @@
     </p:spTree>
     <p:extLst>
       <p:ext uri="{BB962C8B-B14F-4D97-AF65-F5344CB8AC3E}">
-        <p14:creationId xmlns:p14="http://schemas.microsoft.com/office/powerpoint/2010/main" val="1384220810"/>
+        <p14:creationId xmlns:p14="http://schemas.microsoft.com/office/powerpoint/2010/main" val="304466721"/>
       </p:ext>
     </p:extLst>
   </p:cSld>
@@ -1911,15 +1911,15 @@
         </p:nvSpPr>
         <p:spPr>
           <a:xfrm>
-            <a:off x="839789" y="256752"/>
-            <a:ext cx="3932237" cy="898631"/>
+            <a:off x="682328" y="214842"/>
+            <a:ext cx="3194943" cy="751946"/>
           </a:xfrm>
         </p:spPr>
         <p:txBody>
           <a:bodyPr anchor="b"/>
           <a:lstStyle>
             <a:lvl1pPr>
-              <a:defRPr sz="1797"/>
+              <a:defRPr sz="1504"/>
             </a:lvl1pPr>
           </a:lstStyle>
           <a:p>
@@ -1943,39 +1943,39 @@
         </p:nvSpPr>
         <p:spPr>
           <a:xfrm>
-            <a:off x="5183188" y="554513"/>
-            <a:ext cx="6172200" cy="2736901"/>
+            <a:off x="4211340" y="463999"/>
+            <a:ext cx="5014913" cy="2290152"/>
           </a:xfrm>
         </p:spPr>
         <p:txBody>
           <a:bodyPr/>
           <a:lstStyle>
             <a:lvl1pPr>
-              <a:defRPr sz="1797"/>
+              <a:defRPr sz="1504"/>
             </a:lvl1pPr>
             <a:lvl2pPr>
-              <a:defRPr sz="1572"/>
+              <a:defRPr sz="1316"/>
             </a:lvl2pPr>
             <a:lvl3pPr>
-              <a:defRPr sz="1348"/>
+              <a:defRPr sz="1128"/>
             </a:lvl3pPr>
             <a:lvl4pPr>
-              <a:defRPr sz="1123"/>
+              <a:defRPr sz="940"/>
             </a:lvl4pPr>
             <a:lvl5pPr>
-              <a:defRPr sz="1123"/>
+              <a:defRPr sz="940"/>
             </a:lvl5pPr>
             <a:lvl6pPr>
-              <a:defRPr sz="1123"/>
+              <a:defRPr sz="940"/>
             </a:lvl6pPr>
             <a:lvl7pPr>
-              <a:defRPr sz="1123"/>
+              <a:defRPr sz="940"/>
             </a:lvl7pPr>
             <a:lvl8pPr>
-              <a:defRPr sz="1123"/>
+              <a:defRPr sz="940"/>
             </a:lvl8pPr>
             <a:lvl9pPr>
-              <a:defRPr sz="1123"/>
+              <a:defRPr sz="940"/>
             </a:lvl9pPr>
           </a:lstStyle>
           <a:p>
@@ -2028,8 +2028,8 @@
         </p:nvSpPr>
         <p:spPr>
           <a:xfrm>
-            <a:off x="839789" y="1155383"/>
-            <a:ext cx="3932237" cy="2140489"/>
+            <a:off x="682328" y="966788"/>
+            <a:ext cx="3194943" cy="1791093"/>
           </a:xfrm>
         </p:spPr>
         <p:txBody>
@@ -2037,39 +2037,39 @@
           <a:lstStyle>
             <a:lvl1pPr marL="0" indent="0">
               <a:buNone/>
-              <a:defRPr sz="899"/>
+              <a:defRPr sz="752"/>
             </a:lvl1pPr>
-            <a:lvl2pPr marL="256764" indent="0">
-              <a:buNone/>
-              <a:defRPr sz="786"/>
+            <a:lvl2pPr marL="214838" indent="0">
+              <a:buNone/>
+              <a:defRPr sz="658"/>
             </a:lvl2pPr>
-            <a:lvl3pPr marL="513527" indent="0">
-              <a:buNone/>
-              <a:defRPr sz="674"/>
+            <a:lvl3pPr marL="429677" indent="0">
+              <a:buNone/>
+              <a:defRPr sz="564"/>
             </a:lvl3pPr>
-            <a:lvl4pPr marL="770291" indent="0">
-              <a:buNone/>
-              <a:defRPr sz="562"/>
+            <a:lvl4pPr marL="644515" indent="0">
+              <a:buNone/>
+              <a:defRPr sz="470"/>
             </a:lvl4pPr>
-            <a:lvl5pPr marL="1027054" indent="0">
-              <a:buNone/>
-              <a:defRPr sz="562"/>
+            <a:lvl5pPr marL="859353" indent="0">
+              <a:buNone/>
+              <a:defRPr sz="470"/>
             </a:lvl5pPr>
-            <a:lvl6pPr marL="1283818" indent="0">
-              <a:buNone/>
-              <a:defRPr sz="562"/>
+            <a:lvl6pPr marL="1074191" indent="0">
+              <a:buNone/>
+              <a:defRPr sz="470"/>
             </a:lvl6pPr>
-            <a:lvl7pPr marL="1540581" indent="0">
-              <a:buNone/>
-              <a:defRPr sz="562"/>
+            <a:lvl7pPr marL="1289030" indent="0">
+              <a:buNone/>
+              <a:defRPr sz="470"/>
             </a:lvl7pPr>
-            <a:lvl8pPr marL="1797345" indent="0">
-              <a:buNone/>
-              <a:defRPr sz="562"/>
+            <a:lvl8pPr marL="1503868" indent="0">
+              <a:buNone/>
+              <a:defRPr sz="470"/>
             </a:lvl8pPr>
-            <a:lvl9pPr marL="2054108" indent="0">
-              <a:buNone/>
-              <a:defRPr sz="562"/>
+            <a:lvl9pPr marL="1718706" indent="0">
+              <a:buNone/>
+              <a:defRPr sz="470"/>
             </a:lvl9pPr>
           </a:lstStyle>
           <a:p>
@@ -2098,7 +2098,7 @@
           <a:p>
             <a:fld id="{CC6FB895-B65F-4EA9-9907-69D32227E72B}" type="datetimeFigureOut">
               <a:rPr lang="zh-TW" altLang="en-US" smtClean="0"/>
-              <a:t>2026/3/30</a:t>
+              <a:t>2026/5/20</a:t>
             </a:fld>
             <a:endParaRPr lang="zh-TW" altLang="en-US"/>
           </a:p>
@@ -2149,7 +2149,7 @@
     </p:spTree>
     <p:extLst>
       <p:ext uri="{BB962C8B-B14F-4D97-AF65-F5344CB8AC3E}">
-        <p14:creationId xmlns:p14="http://schemas.microsoft.com/office/powerpoint/2010/main" val="1592218446"/>
+        <p14:creationId xmlns:p14="http://schemas.microsoft.com/office/powerpoint/2010/main" val="3101058680"/>
       </p:ext>
     </p:extLst>
   </p:cSld>
@@ -2188,15 +2188,15 @@
         </p:nvSpPr>
         <p:spPr>
           <a:xfrm>
-            <a:off x="839789" y="256752"/>
-            <a:ext cx="3932237" cy="898631"/>
+            <a:off x="682328" y="214842"/>
+            <a:ext cx="3194943" cy="751946"/>
           </a:xfrm>
         </p:spPr>
         <p:txBody>
           <a:bodyPr anchor="b"/>
           <a:lstStyle>
             <a:lvl1pPr>
-              <a:defRPr sz="1797"/>
+              <a:defRPr sz="1504"/>
             </a:lvl1pPr>
           </a:lstStyle>
           <a:p>
@@ -2220,8 +2220,8 @@
         </p:nvSpPr>
         <p:spPr>
           <a:xfrm>
-            <a:off x="5183188" y="554513"/>
-            <a:ext cx="6172200" cy="2736901"/>
+            <a:off x="4211340" y="463999"/>
+            <a:ext cx="5014913" cy="2290152"/>
           </a:xfrm>
         </p:spPr>
         <p:txBody>
@@ -2229,39 +2229,39 @@
           <a:lstStyle>
             <a:lvl1pPr marL="0" indent="0">
               <a:buNone/>
-              <a:defRPr sz="1797"/>
+              <a:defRPr sz="1504"/>
             </a:lvl1pPr>
-            <a:lvl2pPr marL="256764" indent="0">
-              <a:buNone/>
-              <a:defRPr sz="1572"/>
+            <a:lvl2pPr marL="214838" indent="0">
+              <a:buNone/>
+              <a:defRPr sz="1316"/>
             </a:lvl2pPr>
-            <a:lvl3pPr marL="513527" indent="0">
-              <a:buNone/>
-              <a:defRPr sz="1348"/>
+            <a:lvl3pPr marL="429677" indent="0">
+              <a:buNone/>
+              <a:defRPr sz="1128"/>
             </a:lvl3pPr>
-            <a:lvl4pPr marL="770291" indent="0">
-              <a:buNone/>
-              <a:defRPr sz="1123"/>
+            <a:lvl4pPr marL="644515" indent="0">
+              <a:buNone/>
+              <a:defRPr sz="940"/>
             </a:lvl4pPr>
-            <a:lvl5pPr marL="1027054" indent="0">
-              <a:buNone/>
-              <a:defRPr sz="1123"/>
+            <a:lvl5pPr marL="859353" indent="0">
+              <a:buNone/>
+              <a:defRPr sz="940"/>
             </a:lvl5pPr>
-            <a:lvl6pPr marL="1283818" indent="0">
-              <a:buNone/>
-              <a:defRPr sz="1123"/>
+            <a:lvl6pPr marL="1074191" indent="0">
+              <a:buNone/>
+              <a:defRPr sz="940"/>
             </a:lvl6pPr>
-            <a:lvl7pPr marL="1540581" indent="0">
-              <a:buNone/>
-              <a:defRPr sz="1123"/>
+            <a:lvl7pPr marL="1289030" indent="0">
+              <a:buNone/>
+              <a:defRPr sz="940"/>
             </a:lvl7pPr>
-            <a:lvl8pPr marL="1797345" indent="0">
-              <a:buNone/>
-              <a:defRPr sz="1123"/>
+            <a:lvl8pPr marL="1503868" indent="0">
+              <a:buNone/>
+              <a:defRPr sz="940"/>
             </a:lvl8pPr>
-            <a:lvl9pPr marL="2054108" indent="0">
-              <a:buNone/>
-              <a:defRPr sz="1123"/>
+            <a:lvl9pPr marL="1718706" indent="0">
+              <a:buNone/>
+              <a:defRPr sz="940"/>
             </a:lvl9pPr>
           </a:lstStyle>
           <a:p>
@@ -2285,8 +2285,8 @@
         </p:nvSpPr>
         <p:spPr>
           <a:xfrm>
-            <a:off x="839789" y="1155383"/>
-            <a:ext cx="3932237" cy="2140489"/>
+            <a:off x="682328" y="966788"/>
+            <a:ext cx="3194943" cy="1791093"/>
           </a:xfrm>
         </p:spPr>
         <p:txBody>
@@ -2294,39 +2294,39 @@
           <a:lstStyle>
             <a:lvl1pPr marL="0" indent="0">
               <a:buNone/>
-              <a:defRPr sz="899"/>
+              <a:defRPr sz="752"/>
             </a:lvl1pPr>
-            <a:lvl2pPr marL="256764" indent="0">
-              <a:buNone/>
-              <a:defRPr sz="786"/>
+            <a:lvl2pPr marL="214838" indent="0">
+              <a:buNone/>
+              <a:defRPr sz="658"/>
             </a:lvl2pPr>
-            <a:lvl3pPr marL="513527" indent="0">
-              <a:buNone/>
-              <a:defRPr sz="674"/>
+            <a:lvl3pPr marL="429677" indent="0">
+              <a:buNone/>
+              <a:defRPr sz="564"/>
             </a:lvl3pPr>
-            <a:lvl4pPr marL="770291" indent="0">
-              <a:buNone/>
-              <a:defRPr sz="562"/>
+            <a:lvl4pPr marL="644515" indent="0">
+              <a:buNone/>
+              <a:defRPr sz="470"/>
             </a:lvl4pPr>
-            <a:lvl5pPr marL="1027054" indent="0">
-              <a:buNone/>
-              <a:defRPr sz="562"/>
+            <a:lvl5pPr marL="859353" indent="0">
+              <a:buNone/>
+              <a:defRPr sz="470"/>
             </a:lvl5pPr>
-            <a:lvl6pPr marL="1283818" indent="0">
-              <a:buNone/>
-              <a:defRPr sz="562"/>
+            <a:lvl6pPr marL="1074191" indent="0">
+              <a:buNone/>
+              <a:defRPr sz="470"/>
             </a:lvl6pPr>
-            <a:lvl7pPr marL="1540581" indent="0">
-              <a:buNone/>
-              <a:defRPr sz="562"/>
+            <a:lvl7pPr marL="1289030" indent="0">
+              <a:buNone/>
+              <a:defRPr sz="470"/>
             </a:lvl7pPr>
-            <a:lvl8pPr marL="1797345" indent="0">
-              <a:buNone/>
-              <a:defRPr sz="562"/>
+            <a:lvl8pPr marL="1503868" indent="0">
+              <a:buNone/>
+              <a:defRPr sz="470"/>
             </a:lvl8pPr>
-            <a:lvl9pPr marL="2054108" indent="0">
-              <a:buNone/>
-              <a:defRPr sz="562"/>
+            <a:lvl9pPr marL="1718706" indent="0">
+              <a:buNone/>
+              <a:defRPr sz="470"/>
             </a:lvl9pPr>
           </a:lstStyle>
           <a:p>
@@ -2355,7 +2355,7 @@
           <a:p>
             <a:fld id="{CC6FB895-B65F-4EA9-9907-69D32227E72B}" type="datetimeFigureOut">
               <a:rPr lang="zh-TW" altLang="en-US" smtClean="0"/>
-              <a:t>2026/3/30</a:t>
+              <a:t>2026/5/20</a:t>
             </a:fld>
             <a:endParaRPr lang="zh-TW" altLang="en-US"/>
           </a:p>
@@ -2406,7 +2406,7 @@
     </p:spTree>
     <p:extLst>
       <p:ext uri="{BB962C8B-B14F-4D97-AF65-F5344CB8AC3E}">
-        <p14:creationId xmlns:p14="http://schemas.microsoft.com/office/powerpoint/2010/main" val="2354566754"/>
+        <p14:creationId xmlns:p14="http://schemas.microsoft.com/office/powerpoint/2010/main" val="818023584"/>
       </p:ext>
     </p:extLst>
   </p:cSld>
@@ -2450,8 +2450,8 @@
         </p:nvSpPr>
         <p:spPr>
           <a:xfrm>
-            <a:off x="838200" y="205045"/>
-            <a:ext cx="10515600" cy="744402"/>
+            <a:off x="681038" y="171575"/>
+            <a:ext cx="8543925" cy="622892"/>
           </a:xfrm>
           <a:prstGeom prst="rect">
             <a:avLst/>
@@ -2483,8 +2483,8 @@
         </p:nvSpPr>
         <p:spPr>
           <a:xfrm>
-            <a:off x="838200" y="1025223"/>
-            <a:ext cx="10515600" cy="2443599"/>
+            <a:off x="681038" y="857875"/>
+            <a:ext cx="8543925" cy="2044726"/>
           </a:xfrm>
           <a:prstGeom prst="rect">
             <a:avLst/>
@@ -2545,8 +2545,8 @@
         </p:nvSpPr>
         <p:spPr>
           <a:xfrm>
-            <a:off x="838200" y="3569562"/>
-            <a:ext cx="2743200" cy="205045"/>
+            <a:off x="681038" y="2986896"/>
+            <a:ext cx="2228850" cy="171575"/>
           </a:xfrm>
           <a:prstGeom prst="rect">
             <a:avLst/>
@@ -2556,7 +2556,7 @@
           <a:bodyPr vert="horz" lIns="91440" tIns="45720" rIns="91440" bIns="45720" rtlCol="0" anchor="ctr"/>
           <a:lstStyle>
             <a:lvl1pPr algn="l">
-              <a:defRPr sz="674">
+              <a:defRPr sz="564">
                 <a:solidFill>
                   <a:schemeClr val="tx1">
                     <a:tint val="75000"/>
@@ -2568,7 +2568,7 @@
           <a:p>
             <a:fld id="{CC6FB895-B65F-4EA9-9907-69D32227E72B}" type="datetimeFigureOut">
               <a:rPr lang="zh-TW" altLang="en-US" smtClean="0"/>
-              <a:t>2026/3/30</a:t>
+              <a:t>2026/5/20</a:t>
             </a:fld>
             <a:endParaRPr lang="zh-TW" altLang="en-US"/>
           </a:p>
@@ -2586,8 +2586,8 @@
         </p:nvSpPr>
         <p:spPr>
           <a:xfrm>
-            <a:off x="4038600" y="3569562"/>
-            <a:ext cx="4114800" cy="205045"/>
+            <a:off x="3281363" y="2986896"/>
+            <a:ext cx="3343275" cy="171575"/>
           </a:xfrm>
           <a:prstGeom prst="rect">
             <a:avLst/>
@@ -2597,7 +2597,7 @@
           <a:bodyPr vert="horz" lIns="91440" tIns="45720" rIns="91440" bIns="45720" rtlCol="0" anchor="ctr"/>
           <a:lstStyle>
             <a:lvl1pPr algn="ctr">
-              <a:defRPr sz="674">
+              <a:defRPr sz="564">
                 <a:solidFill>
                   <a:schemeClr val="tx1">
                     <a:tint val="75000"/>
@@ -2623,8 +2623,8 @@
         </p:nvSpPr>
         <p:spPr>
           <a:xfrm>
-            <a:off x="8610600" y="3569562"/>
-            <a:ext cx="2743200" cy="205045"/>
+            <a:off x="6996113" y="2986896"/>
+            <a:ext cx="2228850" cy="171575"/>
           </a:xfrm>
           <a:prstGeom prst="rect">
             <a:avLst/>
@@ -2634,7 +2634,7 @@
           <a:bodyPr vert="horz" lIns="91440" tIns="45720" rIns="91440" bIns="45720" rtlCol="0" anchor="ctr"/>
           <a:lstStyle>
             <a:lvl1pPr algn="r">
-              <a:defRPr sz="674">
+              <a:defRPr sz="564">
                 <a:solidFill>
                   <a:schemeClr val="tx1">
                     <a:tint val="75000"/>
@@ -2655,27 +2655,27 @@
     </p:spTree>
     <p:extLst>
       <p:ext uri="{BB962C8B-B14F-4D97-AF65-F5344CB8AC3E}">
-        <p14:creationId xmlns:p14="http://schemas.microsoft.com/office/powerpoint/2010/main" val="313376025"/>
+        <p14:creationId xmlns:p14="http://schemas.microsoft.com/office/powerpoint/2010/main" val="1855574243"/>
       </p:ext>
     </p:extLst>
   </p:cSld>
   <p:clrMap bg1="lt1" tx1="dk1" bg2="lt2" tx2="dk2" accent1="accent1" accent2="accent2" accent3="accent3" accent4="accent4" accent5="accent5" accent6="accent6" hlink="hlink" folHlink="folHlink"/>
   <p:sldLayoutIdLst>
-    <p:sldLayoutId id="2147483697" r:id="rId1"/>
-    <p:sldLayoutId id="2147483698" r:id="rId2"/>
-    <p:sldLayoutId id="2147483699" r:id="rId3"/>
-    <p:sldLayoutId id="2147483700" r:id="rId4"/>
-    <p:sldLayoutId id="2147483701" r:id="rId5"/>
-    <p:sldLayoutId id="2147483702" r:id="rId6"/>
-    <p:sldLayoutId id="2147483703" r:id="rId7"/>
-    <p:sldLayoutId id="2147483704" r:id="rId8"/>
-    <p:sldLayoutId id="2147483705" r:id="rId9"/>
-    <p:sldLayoutId id="2147483706" r:id="rId10"/>
-    <p:sldLayoutId id="2147483707" r:id="rId11"/>
+    <p:sldLayoutId id="2147483733" r:id="rId1"/>
+    <p:sldLayoutId id="2147483734" r:id="rId2"/>
+    <p:sldLayoutId id="2147483735" r:id="rId3"/>
+    <p:sldLayoutId id="2147483736" r:id="rId4"/>
+    <p:sldLayoutId id="2147483737" r:id="rId5"/>
+    <p:sldLayoutId id="2147483738" r:id="rId6"/>
+    <p:sldLayoutId id="2147483739" r:id="rId7"/>
+    <p:sldLayoutId id="2147483740" r:id="rId8"/>
+    <p:sldLayoutId id="2147483741" r:id="rId9"/>
+    <p:sldLayoutId id="2147483742" r:id="rId10"/>
+    <p:sldLayoutId id="2147483743" r:id="rId11"/>
   </p:sldLayoutIdLst>
   <p:txStyles>
     <p:titleStyle>
-      <a:lvl1pPr algn="l" defTabSz="513527" rtl="0" eaLnBrk="1" latinLnBrk="0" hangingPunct="1">
+      <a:lvl1pPr algn="l" defTabSz="429677" rtl="0" eaLnBrk="1" latinLnBrk="0" hangingPunct="1">
         <a:lnSpc>
           <a:spcPct val="90000"/>
         </a:lnSpc>
@@ -2683,7 +2683,7 @@
           <a:spcPct val="0"/>
         </a:spcBef>
         <a:buNone/>
-        <a:defRPr sz="2471" kern="1200">
+        <a:defRPr sz="2068" kern="1200">
           <a:solidFill>
             <a:schemeClr val="tx1"/>
           </a:solidFill>
@@ -2694,16 +2694,16 @@
       </a:lvl1pPr>
     </p:titleStyle>
     <p:bodyStyle>
-      <a:lvl1pPr marL="128382" indent="-128382" algn="l" defTabSz="513527" rtl="0" eaLnBrk="1" latinLnBrk="0" hangingPunct="1">
+      <a:lvl1pPr marL="107419" indent="-107419" algn="l" defTabSz="429677" rtl="0" eaLnBrk="1" latinLnBrk="0" hangingPunct="1">
         <a:lnSpc>
           <a:spcPct val="90000"/>
         </a:lnSpc>
         <a:spcBef>
-          <a:spcPts val="562"/>
+          <a:spcPts val="470"/>
         </a:spcBef>
         <a:buFont typeface="Arial" panose="020B0604020202020204" pitchFamily="34" charset="0"/>
         <a:buChar char="•"/>
-        <a:defRPr sz="1572" kern="1200">
+        <a:defRPr sz="1316" kern="1200">
           <a:solidFill>
             <a:schemeClr val="tx1"/>
           </a:solidFill>
@@ -2712,16 +2712,16 @@
           <a:cs typeface="+mn-cs"/>
         </a:defRPr>
       </a:lvl1pPr>
-      <a:lvl2pPr marL="385145" indent="-128382" algn="l" defTabSz="513527" rtl="0" eaLnBrk="1" latinLnBrk="0" hangingPunct="1">
+      <a:lvl2pPr marL="322257" indent="-107419" algn="l" defTabSz="429677" rtl="0" eaLnBrk="1" latinLnBrk="0" hangingPunct="1">
         <a:lnSpc>
           <a:spcPct val="90000"/>
         </a:lnSpc>
         <a:spcBef>
-          <a:spcPts val="281"/>
+          <a:spcPts val="235"/>
         </a:spcBef>
         <a:buFont typeface="Arial" panose="020B0604020202020204" pitchFamily="34" charset="0"/>
         <a:buChar char="•"/>
-        <a:defRPr sz="1348" kern="1200">
+        <a:defRPr sz="1128" kern="1200">
           <a:solidFill>
             <a:schemeClr val="tx1"/>
           </a:solidFill>
@@ -2730,16 +2730,16 @@
           <a:cs typeface="+mn-cs"/>
         </a:defRPr>
       </a:lvl2pPr>
-      <a:lvl3pPr marL="641909" indent="-128382" algn="l" defTabSz="513527" rtl="0" eaLnBrk="1" latinLnBrk="0" hangingPunct="1">
+      <a:lvl3pPr marL="537096" indent="-107419" algn="l" defTabSz="429677" rtl="0" eaLnBrk="1" latinLnBrk="0" hangingPunct="1">
         <a:lnSpc>
           <a:spcPct val="90000"/>
         </a:lnSpc>
         <a:spcBef>
-          <a:spcPts val="281"/>
+          <a:spcPts val="235"/>
         </a:spcBef>
         <a:buFont typeface="Arial" panose="020B0604020202020204" pitchFamily="34" charset="0"/>
         <a:buChar char="•"/>
-        <a:defRPr sz="1123" kern="1200">
+        <a:defRPr sz="940" kern="1200">
           <a:solidFill>
             <a:schemeClr val="tx1"/>
           </a:solidFill>
@@ -2748,16 +2748,16 @@
           <a:cs typeface="+mn-cs"/>
         </a:defRPr>
       </a:lvl3pPr>
-      <a:lvl4pPr marL="898672" indent="-128382" algn="l" defTabSz="513527" rtl="0" eaLnBrk="1" latinLnBrk="0" hangingPunct="1">
+      <a:lvl4pPr marL="751934" indent="-107419" algn="l" defTabSz="429677" rtl="0" eaLnBrk="1" latinLnBrk="0" hangingPunct="1">
         <a:lnSpc>
           <a:spcPct val="90000"/>
         </a:lnSpc>
         <a:spcBef>
-          <a:spcPts val="281"/>
+          <a:spcPts val="235"/>
         </a:spcBef>
         <a:buFont typeface="Arial" panose="020B0604020202020204" pitchFamily="34" charset="0"/>
         <a:buChar char="•"/>
-        <a:defRPr sz="1011" kern="1200">
+        <a:defRPr sz="846" kern="1200">
           <a:solidFill>
             <a:schemeClr val="tx1"/>
           </a:solidFill>
@@ -2766,16 +2766,16 @@
           <a:cs typeface="+mn-cs"/>
         </a:defRPr>
       </a:lvl4pPr>
-      <a:lvl5pPr marL="1155436" indent="-128382" algn="l" defTabSz="513527" rtl="0" eaLnBrk="1" latinLnBrk="0" hangingPunct="1">
+      <a:lvl5pPr marL="966772" indent="-107419" algn="l" defTabSz="429677" rtl="0" eaLnBrk="1" latinLnBrk="0" hangingPunct="1">
         <a:lnSpc>
           <a:spcPct val="90000"/>
         </a:lnSpc>
         <a:spcBef>
-          <a:spcPts val="281"/>
+          <a:spcPts val="235"/>
         </a:spcBef>
         <a:buFont typeface="Arial" panose="020B0604020202020204" pitchFamily="34" charset="0"/>
         <a:buChar char="•"/>
-        <a:defRPr sz="1011" kern="1200">
+        <a:defRPr sz="846" kern="1200">
           <a:solidFill>
             <a:schemeClr val="tx1"/>
           </a:solidFill>
@@ -2784,16 +2784,16 @@
           <a:cs typeface="+mn-cs"/>
         </a:defRPr>
       </a:lvl5pPr>
-      <a:lvl6pPr marL="1412199" indent="-128382" algn="l" defTabSz="513527" rtl="0" eaLnBrk="1" latinLnBrk="0" hangingPunct="1">
+      <a:lvl6pPr marL="1181611" indent="-107419" algn="l" defTabSz="429677" rtl="0" eaLnBrk="1" latinLnBrk="0" hangingPunct="1">
         <a:lnSpc>
           <a:spcPct val="90000"/>
         </a:lnSpc>
         <a:spcBef>
-          <a:spcPts val="281"/>
+          <a:spcPts val="235"/>
         </a:spcBef>
         <a:buFont typeface="Arial" panose="020B0604020202020204" pitchFamily="34" charset="0"/>
         <a:buChar char="•"/>
-        <a:defRPr sz="1011" kern="1200">
+        <a:defRPr sz="846" kern="1200">
           <a:solidFill>
             <a:schemeClr val="tx1"/>
           </a:solidFill>
@@ -2802,16 +2802,16 @@
           <a:cs typeface="+mn-cs"/>
         </a:defRPr>
       </a:lvl6pPr>
-      <a:lvl7pPr marL="1668963" indent="-128382" algn="l" defTabSz="513527" rtl="0" eaLnBrk="1" latinLnBrk="0" hangingPunct="1">
+      <a:lvl7pPr marL="1396449" indent="-107419" algn="l" defTabSz="429677" rtl="0" eaLnBrk="1" latinLnBrk="0" hangingPunct="1">
         <a:lnSpc>
           <a:spcPct val="90000"/>
         </a:lnSpc>
         <a:spcBef>
-          <a:spcPts val="281"/>
+          <a:spcPts val="235"/>
         </a:spcBef>
         <a:buFont typeface="Arial" panose="020B0604020202020204" pitchFamily="34" charset="0"/>
         <a:buChar char="•"/>
-        <a:defRPr sz="1011" kern="1200">
+        <a:defRPr sz="846" kern="1200">
           <a:solidFill>
             <a:schemeClr val="tx1"/>
           </a:solidFill>
@@ -2820,16 +2820,16 @@
           <a:cs typeface="+mn-cs"/>
         </a:defRPr>
       </a:lvl7pPr>
-      <a:lvl8pPr marL="1925726" indent="-128382" algn="l" defTabSz="513527" rtl="0" eaLnBrk="1" latinLnBrk="0" hangingPunct="1">
+      <a:lvl8pPr marL="1611287" indent="-107419" algn="l" defTabSz="429677" rtl="0" eaLnBrk="1" latinLnBrk="0" hangingPunct="1">
         <a:lnSpc>
           <a:spcPct val="90000"/>
         </a:lnSpc>
         <a:spcBef>
-          <a:spcPts val="281"/>
+          <a:spcPts val="235"/>
         </a:spcBef>
         <a:buFont typeface="Arial" panose="020B0604020202020204" pitchFamily="34" charset="0"/>
         <a:buChar char="•"/>
-        <a:defRPr sz="1011" kern="1200">
+        <a:defRPr sz="846" kern="1200">
           <a:solidFill>
             <a:schemeClr val="tx1"/>
           </a:solidFill>
@@ -2838,16 +2838,16 @@
           <a:cs typeface="+mn-cs"/>
         </a:defRPr>
       </a:lvl8pPr>
-      <a:lvl9pPr marL="2182490" indent="-128382" algn="l" defTabSz="513527" rtl="0" eaLnBrk="1" latinLnBrk="0" hangingPunct="1">
+      <a:lvl9pPr marL="1826125" indent="-107419" algn="l" defTabSz="429677" rtl="0" eaLnBrk="1" latinLnBrk="0" hangingPunct="1">
         <a:lnSpc>
           <a:spcPct val="90000"/>
         </a:lnSpc>
         <a:spcBef>
-          <a:spcPts val="281"/>
+          <a:spcPts val="235"/>
         </a:spcBef>
         <a:buFont typeface="Arial" panose="020B0604020202020204" pitchFamily="34" charset="0"/>
         <a:buChar char="•"/>
-        <a:defRPr sz="1011" kern="1200">
+        <a:defRPr sz="846" kern="1200">
           <a:solidFill>
             <a:schemeClr val="tx1"/>
           </a:solidFill>
@@ -2861,8 +2861,8 @@
       <a:defPPr>
         <a:defRPr lang="en-US"/>
       </a:defPPr>
-      <a:lvl1pPr marL="0" algn="l" defTabSz="513527" rtl="0" eaLnBrk="1" latinLnBrk="0" hangingPunct="1">
-        <a:defRPr sz="1011" kern="1200">
+      <a:lvl1pPr marL="0" algn="l" defTabSz="429677" rtl="0" eaLnBrk="1" latinLnBrk="0" hangingPunct="1">
+        <a:defRPr sz="846" kern="1200">
           <a:solidFill>
             <a:schemeClr val="tx1"/>
           </a:solidFill>
@@ -2871,8 +2871,8 @@
           <a:cs typeface="+mn-cs"/>
         </a:defRPr>
       </a:lvl1pPr>
-      <a:lvl2pPr marL="256764" algn="l" defTabSz="513527" rtl="0" eaLnBrk="1" latinLnBrk="0" hangingPunct="1">
-        <a:defRPr sz="1011" kern="1200">
+      <a:lvl2pPr marL="214838" algn="l" defTabSz="429677" rtl="0" eaLnBrk="1" latinLnBrk="0" hangingPunct="1">
+        <a:defRPr sz="846" kern="1200">
           <a:solidFill>
             <a:schemeClr val="tx1"/>
           </a:solidFill>
@@ -2881,8 +2881,8 @@
           <a:cs typeface="+mn-cs"/>
         </a:defRPr>
       </a:lvl2pPr>
-      <a:lvl3pPr marL="513527" algn="l" defTabSz="513527" rtl="0" eaLnBrk="1" latinLnBrk="0" hangingPunct="1">
-        <a:defRPr sz="1011" kern="1200">
+      <a:lvl3pPr marL="429677" algn="l" defTabSz="429677" rtl="0" eaLnBrk="1" latinLnBrk="0" hangingPunct="1">
+        <a:defRPr sz="846" kern="1200">
           <a:solidFill>
             <a:schemeClr val="tx1"/>
           </a:solidFill>
@@ -2891,8 +2891,8 @@
           <a:cs typeface="+mn-cs"/>
         </a:defRPr>
       </a:lvl3pPr>
-      <a:lvl4pPr marL="770291" algn="l" defTabSz="513527" rtl="0" eaLnBrk="1" latinLnBrk="0" hangingPunct="1">
-        <a:defRPr sz="1011" kern="1200">
+      <a:lvl4pPr marL="644515" algn="l" defTabSz="429677" rtl="0" eaLnBrk="1" latinLnBrk="0" hangingPunct="1">
+        <a:defRPr sz="846" kern="1200">
           <a:solidFill>
             <a:schemeClr val="tx1"/>
           </a:solidFill>
@@ -2901,8 +2901,8 @@
           <a:cs typeface="+mn-cs"/>
         </a:defRPr>
       </a:lvl4pPr>
-      <a:lvl5pPr marL="1027054" algn="l" defTabSz="513527" rtl="0" eaLnBrk="1" latinLnBrk="0" hangingPunct="1">
-        <a:defRPr sz="1011" kern="1200">
+      <a:lvl5pPr marL="859353" algn="l" defTabSz="429677" rtl="0" eaLnBrk="1" latinLnBrk="0" hangingPunct="1">
+        <a:defRPr sz="846" kern="1200">
           <a:solidFill>
             <a:schemeClr val="tx1"/>
           </a:solidFill>
@@ -2911,8 +2911,8 @@
           <a:cs typeface="+mn-cs"/>
         </a:defRPr>
       </a:lvl5pPr>
-      <a:lvl6pPr marL="1283818" algn="l" defTabSz="513527" rtl="0" eaLnBrk="1" latinLnBrk="0" hangingPunct="1">
-        <a:defRPr sz="1011" kern="1200">
+      <a:lvl6pPr marL="1074191" algn="l" defTabSz="429677" rtl="0" eaLnBrk="1" latinLnBrk="0" hangingPunct="1">
+        <a:defRPr sz="846" kern="1200">
           <a:solidFill>
             <a:schemeClr val="tx1"/>
           </a:solidFill>
@@ -2921,8 +2921,8 @@
           <a:cs typeface="+mn-cs"/>
         </a:defRPr>
       </a:lvl6pPr>
-      <a:lvl7pPr marL="1540581" algn="l" defTabSz="513527" rtl="0" eaLnBrk="1" latinLnBrk="0" hangingPunct="1">
-        <a:defRPr sz="1011" kern="1200">
+      <a:lvl7pPr marL="1289030" algn="l" defTabSz="429677" rtl="0" eaLnBrk="1" latinLnBrk="0" hangingPunct="1">
+        <a:defRPr sz="846" kern="1200">
           <a:solidFill>
             <a:schemeClr val="tx1"/>
           </a:solidFill>
@@ -2931,8 +2931,8 @@
           <a:cs typeface="+mn-cs"/>
         </a:defRPr>
       </a:lvl7pPr>
-      <a:lvl8pPr marL="1797345" algn="l" defTabSz="513527" rtl="0" eaLnBrk="1" latinLnBrk="0" hangingPunct="1">
-        <a:defRPr sz="1011" kern="1200">
+      <a:lvl8pPr marL="1503868" algn="l" defTabSz="429677" rtl="0" eaLnBrk="1" latinLnBrk="0" hangingPunct="1">
+        <a:defRPr sz="846" kern="1200">
           <a:solidFill>
             <a:schemeClr val="tx1"/>
           </a:solidFill>
@@ -2941,8 +2941,8 @@
           <a:cs typeface="+mn-cs"/>
         </a:defRPr>
       </a:lvl8pPr>
-      <a:lvl9pPr marL="2054108" algn="l" defTabSz="513527" rtl="0" eaLnBrk="1" latinLnBrk="0" hangingPunct="1">
-        <a:defRPr sz="1011" kern="1200">
+      <a:lvl9pPr marL="1718706" algn="l" defTabSz="429677" rtl="0" eaLnBrk="1" latinLnBrk="0" hangingPunct="1">
+        <a:defRPr sz="846" kern="1200">
           <a:solidFill>
             <a:schemeClr val="tx1"/>
           </a:solidFill>
@@ -2973,2328 +2973,163 @@
           <a:chExt cx="0" cy="0"/>
         </a:xfrm>
       </p:grpSpPr>
-      <p:grpSp>
-        <p:nvGrpSpPr>
-          <p:cNvPr id="50" name="群組 49">
+      <p:sp>
+        <p:nvSpPr>
+          <p:cNvPr id="48" name="矩形 47">
             <a:extLst>
               <a:ext uri="{FF2B5EF4-FFF2-40B4-BE49-F238E27FC236}">
-                <a16:creationId xmlns:a16="http://schemas.microsoft.com/office/drawing/2014/main" id="{6E84E713-FA9E-4259-AD12-4AA74C79672E}"/>
+                <a16:creationId xmlns:a16="http://schemas.microsoft.com/office/drawing/2014/main" id="{FD558900-7134-43B7-B0FD-EC6791A99399}"/>
               </a:ext>
             </a:extLst>
           </p:cNvPr>
-          <p:cNvGrpSpPr/>
+          <p:cNvSpPr/>
           <p:nvPr/>
-        </p:nvGrpSpPr>
-        <p:grpSpPr>
+        </p:nvSpPr>
+        <p:spPr>
           <a:xfrm>
-            <a:off x="-105805" y="-90510"/>
-            <a:ext cx="12463885" cy="4043352"/>
-            <a:chOff x="2171700" y="-2952099"/>
-            <a:chExt cx="12001499" cy="3893351"/>
+            <a:off x="97371" y="-2501"/>
+            <a:ext cx="9778521" cy="3187192"/>
           </a:xfrm>
-        </p:grpSpPr>
-        <p:sp>
-          <p:nvSpPr>
-            <p:cNvPr id="48" name="矩形 47">
-              <a:extLst>
-                <a:ext uri="{FF2B5EF4-FFF2-40B4-BE49-F238E27FC236}">
-                  <a16:creationId xmlns:a16="http://schemas.microsoft.com/office/drawing/2014/main" id="{FD558900-7134-43B7-B0FD-EC6791A99399}"/>
-                </a:ext>
-              </a:extLst>
-            </p:cNvPr>
-            <p:cNvSpPr/>
-            <p:nvPr/>
-          </p:nvSpPr>
-          <p:spPr>
-            <a:xfrm>
-              <a:off x="2171700" y="-2952099"/>
-              <a:ext cx="12001499" cy="3829050"/>
-            </a:xfrm>
-            <a:prstGeom prst="rect">
-              <a:avLst/>
-            </a:prstGeom>
+          <a:prstGeom prst="rect">
+            <a:avLst/>
+          </a:prstGeom>
+          <a:solidFill>
+            <a:schemeClr val="bg1"/>
+          </a:solidFill>
+          <a:ln>
             <a:solidFill>
               <a:schemeClr val="bg1"/>
             </a:solidFill>
-            <a:ln>
-              <a:solidFill>
-                <a:schemeClr val="bg1"/>
-              </a:solidFill>
-            </a:ln>
-          </p:spPr>
-          <p:style>
-            <a:lnRef idx="2">
-              <a:schemeClr val="accent1">
-                <a:shade val="50000"/>
-              </a:schemeClr>
-            </a:lnRef>
-            <a:fillRef idx="1">
-              <a:schemeClr val="accent1"/>
-            </a:fillRef>
-            <a:effectRef idx="0">
-              <a:schemeClr val="accent1"/>
-            </a:effectRef>
-            <a:fontRef idx="minor">
-              <a:schemeClr val="lt1"/>
-            </a:fontRef>
-          </p:style>
-          <p:txBody>
-            <a:bodyPr rot="0" spcFirstLastPara="0" vertOverflow="overflow" horzOverflow="overflow" vert="horz" wrap="square" lIns="94963" tIns="47481" rIns="94963" bIns="47481" numCol="1" spcCol="0" rtlCol="0" fromWordArt="0" anchor="ctr" anchorCtr="0" forceAA="0" compatLnSpc="1">
-              <a:prstTxWarp prst="textNoShape">
-                <a:avLst/>
-              </a:prstTxWarp>
-              <a:noAutofit/>
-            </a:bodyPr>
-            <a:lstStyle/>
-            <a:p>
-              <a:pPr algn="ctr"/>
-              <a:endParaRPr lang="zh-TW" altLang="en-US" sz="1869" dirty="0"/>
-            </a:p>
-          </p:txBody>
-        </p:sp>
-        <p:grpSp>
-          <p:nvGrpSpPr>
-            <p:cNvPr id="31" name="群組 30">
-              <a:extLst>
-                <a:ext uri="{FF2B5EF4-FFF2-40B4-BE49-F238E27FC236}">
-                  <a16:creationId xmlns:a16="http://schemas.microsoft.com/office/drawing/2014/main" id="{5A2F2C06-C740-41E5-8289-E463C5A2E3DE}"/>
-                </a:ext>
-              </a:extLst>
-            </p:cNvPr>
-            <p:cNvGrpSpPr/>
-            <p:nvPr/>
-          </p:nvGrpSpPr>
-          <p:grpSpPr>
-            <a:xfrm>
-              <a:off x="2286217" y="-2928938"/>
-              <a:ext cx="11871438" cy="3870190"/>
-              <a:chOff x="152617" y="942974"/>
-              <a:chExt cx="11871438" cy="3870190"/>
-            </a:xfrm>
-          </p:grpSpPr>
-          <p:pic>
-            <p:nvPicPr>
-              <p:cNvPr id="3" name="圖片 2">
+          </a:ln>
+        </p:spPr>
+        <p:style>
+          <a:lnRef idx="2">
+            <a:schemeClr val="accent1">
+              <a:shade val="50000"/>
+            </a:schemeClr>
+          </a:lnRef>
+          <a:fillRef idx="1">
+            <a:schemeClr val="accent1"/>
+          </a:fillRef>
+          <a:effectRef idx="0">
+            <a:schemeClr val="accent1"/>
+          </a:effectRef>
+          <a:fontRef idx="minor">
+            <a:schemeClr val="lt1"/>
+          </a:fontRef>
+        </p:style>
+        <p:txBody>
+          <a:bodyPr rot="0" spcFirstLastPara="0" vertOverflow="overflow" horzOverflow="overflow" vert="horz" wrap="square" lIns="77157" tIns="38577" rIns="77157" bIns="38577" numCol="1" spcCol="0" rtlCol="0" fromWordArt="0" anchor="ctr" anchorCtr="0" forceAA="0" compatLnSpc="1">
+            <a:prstTxWarp prst="textNoShape">
+              <a:avLst/>
+            </a:prstTxWarp>
+            <a:noAutofit/>
+          </a:bodyPr>
+          <a:lstStyle/>
+          <a:p>
+            <a:pPr algn="ctr"/>
+            <a:endParaRPr lang="zh-TW" altLang="en-US" sz="1625" dirty="0"/>
+          </a:p>
+        </p:txBody>
+      </p:sp>
+      <p:pic>
+        <p:nvPicPr>
+          <p:cNvPr id="3" name="圖片 2">
+            <a:extLst>
+              <a:ext uri="{FF2B5EF4-FFF2-40B4-BE49-F238E27FC236}">
+                <a16:creationId xmlns:a16="http://schemas.microsoft.com/office/drawing/2014/main" id="{6D9EDACF-7245-4366-8C98-B86E8812BF01}"/>
+              </a:ext>
+            </a:extLst>
+          </p:cNvPr>
+          <p:cNvPicPr>
+            <a:picLocks noChangeAspect="1"/>
+          </p:cNvPicPr>
+          <p:nvPr/>
+        </p:nvPicPr>
+        <p:blipFill rotWithShape="1">
+          <a:blip r:embed="rId2">
+            <a:clrChange>
+              <a:clrFrom>
+                <a:srgbClr val="FFFFFF"/>
+              </a:clrFrom>
+              <a:clrTo>
+                <a:srgbClr val="FFFFFF">
+                  <a:alpha val="0"/>
+                </a:srgbClr>
+              </a:clrTo>
+            </a:clrChange>
+            <a:extLst>
+              <a:ext uri="{28A0092B-C50C-407E-A947-70E740481C1C}">
+                <a14:useLocalDpi xmlns:a14="http://schemas.microsoft.com/office/drawing/2010/main" val="0"/>
+              </a:ext>
+            </a:extLst>
+          </a:blip>
+          <a:srcRect t="4369" r="9532"/>
+          <a:stretch/>
+        </p:blipFill>
+        <p:spPr>
+          <a:xfrm>
+            <a:off x="1437128" y="58994"/>
+            <a:ext cx="8250795" cy="1491676"/>
+          </a:xfrm>
+          <a:prstGeom prst="rect">
+            <a:avLst/>
+          </a:prstGeom>
+        </p:spPr>
+      </p:pic>
+      <p:pic>
+        <p:nvPicPr>
+          <p:cNvPr id="28" name="圖片 27">
+            <a:extLst>
+              <a:ext uri="{FF2B5EF4-FFF2-40B4-BE49-F238E27FC236}">
+                <a16:creationId xmlns:a16="http://schemas.microsoft.com/office/drawing/2014/main" id="{F6612A0F-E864-4261-902D-76A4FFDFD7CA}"/>
+              </a:ext>
+            </a:extLst>
+          </p:cNvPr>
+          <p:cNvPicPr>
+            <a:picLocks noChangeAspect="1"/>
+          </p:cNvPicPr>
+          <p:nvPr/>
+        </p:nvPicPr>
+        <p:blipFill rotWithShape="1">
+          <a:blip r:embed="rId3">
+            <a:clrChange>
+              <a:clrFrom>
+                <a:srgbClr val="FFFFFF"/>
+              </a:clrFrom>
+              <a:clrTo>
+                <a:srgbClr val="FFFFFF">
+                  <a:alpha val="0"/>
+                </a:srgbClr>
+              </a:clrTo>
+            </a:clrChange>
+            <a:extLst>
+              <a:ext uri="{28A0092B-C50C-407E-A947-70E740481C1C}">
+                <a14:useLocalDpi xmlns:a14="http://schemas.microsoft.com/office/drawing/2010/main" val="0"/>
+              </a:ext>
+            </a:extLst>
+          </a:blip>
+          <a:srcRect r="15054"/>
+          <a:stretch/>
+        </p:blipFill>
+        <p:spPr>
+          <a:xfrm>
+            <a:off x="1408186" y="1594858"/>
+            <a:ext cx="7747153" cy="1559824"/>
+          </a:xfrm>
+          <a:prstGeom prst="rect">
+            <a:avLst/>
+          </a:prstGeom>
+        </p:spPr>
+      </p:pic>
+      <mc:AlternateContent xmlns:mc="http://schemas.openxmlformats.org/markup-compatibility/2006">
+        <mc:Choice xmlns:a14="http://schemas.microsoft.com/office/drawing/2010/main" Requires="a14">
+          <p:sp>
+            <p:nvSpPr>
+              <p:cNvPr id="5" name="矩形 4">
                 <a:extLst>
                   <a:ext uri="{FF2B5EF4-FFF2-40B4-BE49-F238E27FC236}">
-                    <a16:creationId xmlns:a16="http://schemas.microsoft.com/office/drawing/2014/main" id="{6D9EDACF-7245-4366-8C98-B86E8812BF01}"/>
-                  </a:ext>
-                </a:extLst>
-              </p:cNvPr>
-              <p:cNvPicPr>
-                <a:picLocks noChangeAspect="1"/>
-              </p:cNvPicPr>
-              <p:nvPr/>
-            </p:nvPicPr>
-            <p:blipFill rotWithShape="1">
-              <a:blip r:embed="rId2">
-                <a:clrChange>
-                  <a:clrFrom>
-                    <a:srgbClr val="FFFFFF"/>
-                  </a:clrFrom>
-                  <a:clrTo>
-                    <a:srgbClr val="FFFFFF">
-                      <a:alpha val="0"/>
-                    </a:srgbClr>
-                  </a:clrTo>
-                </a:clrChange>
-                <a:extLst>
-                  <a:ext uri="{28A0092B-C50C-407E-A947-70E740481C1C}">
-                    <a14:useLocalDpi xmlns:a14="http://schemas.microsoft.com/office/drawing/2010/main" val="0"/>
-                  </a:ext>
-                </a:extLst>
-              </a:blip>
-              <a:srcRect t="4369" r="9532"/>
-              <a:stretch/>
-            </p:blipFill>
-            <p:spPr>
-              <a:xfrm>
-                <a:off x="1200150" y="942974"/>
-                <a:ext cx="10610850" cy="1869395"/>
-              </a:xfrm>
-              <a:prstGeom prst="rect">
-                <a:avLst/>
-              </a:prstGeom>
-            </p:spPr>
-          </p:pic>
-          <p:pic>
-            <p:nvPicPr>
-              <p:cNvPr id="28" name="圖片 27">
-                <a:extLst>
-                  <a:ext uri="{FF2B5EF4-FFF2-40B4-BE49-F238E27FC236}">
-                    <a16:creationId xmlns:a16="http://schemas.microsoft.com/office/drawing/2014/main" id="{F6612A0F-E864-4261-902D-76A4FFDFD7CA}"/>
-                  </a:ext>
-                </a:extLst>
-              </p:cNvPr>
-              <p:cNvPicPr>
-                <a:picLocks noChangeAspect="1"/>
-              </p:cNvPicPr>
-              <p:nvPr/>
-            </p:nvPicPr>
-            <p:blipFill rotWithShape="1">
-              <a:blip r:embed="rId3">
-                <a:clrChange>
-                  <a:clrFrom>
-                    <a:srgbClr val="FFFFFF"/>
-                  </a:clrFrom>
-                  <a:clrTo>
-                    <a:srgbClr val="FFFFFF">
-                      <a:alpha val="0"/>
-                    </a:srgbClr>
-                  </a:clrTo>
-                </a:clrChange>
-                <a:extLst>
-                  <a:ext uri="{28A0092B-C50C-407E-A947-70E740481C1C}">
-                    <a14:useLocalDpi xmlns:a14="http://schemas.microsoft.com/office/drawing/2010/main" val="0"/>
-                  </a:ext>
-                </a:extLst>
-              </a:blip>
-              <a:srcRect r="15054"/>
-              <a:stretch/>
-            </p:blipFill>
-            <p:spPr>
-              <a:xfrm>
-                <a:off x="1200150" y="2758500"/>
-                <a:ext cx="9963150" cy="1954800"/>
-              </a:xfrm>
-              <a:prstGeom prst="rect">
-                <a:avLst/>
-              </a:prstGeom>
-            </p:spPr>
-          </p:pic>
-          <mc:AlternateContent xmlns:mc="http://schemas.openxmlformats.org/markup-compatibility/2006" xmlns:a14="http://schemas.microsoft.com/office/drawing/2010/main">
-            <mc:Choice Requires="a14">
-              <p:sp>
-                <p:nvSpPr>
-                  <p:cNvPr id="5" name="矩形 4">
-                    <a:extLst>
-                      <a:ext uri="{FF2B5EF4-FFF2-40B4-BE49-F238E27FC236}">
-                        <a16:creationId xmlns:a16="http://schemas.microsoft.com/office/drawing/2014/main" id="{5F2B5097-B455-4243-9F4D-7F89C6F0E6A4}"/>
-                      </a:ext>
-                    </a:extLst>
-                  </p:cNvPr>
-                  <p:cNvSpPr/>
-                  <p:nvPr/>
-                </p:nvSpPr>
-                <p:spPr>
-                  <a:xfrm>
-                    <a:off x="1559007" y="2149435"/>
-                    <a:ext cx="787388" cy="365880"/>
-                  </a:xfrm>
-                  <a:prstGeom prst="rect">
-                    <a:avLst/>
-                  </a:prstGeom>
-                </p:spPr>
-                <p:txBody>
-                  <a:bodyPr wrap="none">
-                    <a:spAutoFit/>
-                  </a:bodyPr>
-                  <a:lstStyle/>
-                  <a:p>
-                    <a:pPr/>
-                    <a14:m>
-                      <m:oMathPara xmlns:m="http://schemas.openxmlformats.org/officeDocument/2006/math">
-                        <m:oMathParaPr>
-                          <m:jc m:val="centerGroup"/>
-                        </m:oMathParaPr>
-                        <m:oMath xmlns:m="http://schemas.openxmlformats.org/officeDocument/2006/math">
-                          <m:sSub>
-                            <m:sSubPr>
-                              <m:ctrlPr>
-                                <a:rPr lang="en-US" altLang="zh-TW" sz="1869" i="1" smtClean="0">
-                                  <a:latin typeface="Cambria Math" panose="02040503050406030204" pitchFamily="18" charset="0"/>
-                                </a:rPr>
-                              </m:ctrlPr>
-                            </m:sSubPr>
-                            <m:e>
-                              <m:r>
-                                <a:rPr lang="en-US" altLang="zh-TW" sz="1869" b="0" i="1" smtClean="0">
-                                  <a:latin typeface="Cambria Math" panose="02040503050406030204" pitchFamily="18" charset="0"/>
-                                </a:rPr>
-                                <m:t>0.1</m:t>
-                              </m:r>
-                              <m:r>
-                                <a:rPr lang="en-US" altLang="zh-TW" sz="1869" i="1">
-                                  <a:latin typeface="Cambria Math" panose="02040503050406030204" pitchFamily="18" charset="0"/>
-                                </a:rPr>
-                                <m:t>𝑄</m:t>
-                              </m:r>
-                            </m:e>
-                            <m:sub>
-                              <m:r>
-                                <a:rPr lang="en-US" altLang="zh-TW" sz="1869" i="1">
-                                  <a:latin typeface="Cambria Math" panose="02040503050406030204" pitchFamily="18" charset="0"/>
-                                </a:rPr>
-                                <m:t>𝑐</m:t>
-                              </m:r>
-                            </m:sub>
-                          </m:sSub>
-                        </m:oMath>
-                      </m:oMathPara>
-                    </a14:m>
-                    <a:endParaRPr lang="zh-TW" altLang="en-US" sz="1869" dirty="0">
-                      <a:latin typeface="Times New Roman" panose="02020603050405020304" pitchFamily="18" charset="0"/>
-                      <a:cs typeface="Times New Roman" panose="02020603050405020304" pitchFamily="18" charset="0"/>
-                    </a:endParaRPr>
-                  </a:p>
-                </p:txBody>
-              </p:sp>
-            </mc:Choice>
-            <mc:Fallback xmlns="">
-              <p:sp>
-                <p:nvSpPr>
-                  <p:cNvPr id="5" name="矩形 4">
-                    <a:extLst>
-                      <a:ext uri="{FF2B5EF4-FFF2-40B4-BE49-F238E27FC236}">
-                        <a16:creationId xmlns:a16="http://schemas.microsoft.com/office/drawing/2014/main" id="{5F2B5097-B455-4243-9F4D-7F89C6F0E6A4}"/>
-                      </a:ext>
-                    </a:extLst>
-                  </p:cNvPr>
-                  <p:cNvSpPr>
-                    <a:spLocks noRot="1" noChangeAspect="1" noMove="1" noResize="1" noEditPoints="1" noAdjustHandles="1" noChangeArrowheads="1" noChangeShapeType="1" noTextEdit="1"/>
-                  </p:cNvSpPr>
-                  <p:nvPr/>
-                </p:nvSpPr>
-                <p:spPr>
-                  <a:xfrm>
-                    <a:off x="1559007" y="2149435"/>
-                    <a:ext cx="787388" cy="365880"/>
-                  </a:xfrm>
-                  <a:prstGeom prst="rect">
-                    <a:avLst/>
-                  </a:prstGeom>
-                  <a:blipFill>
-                    <a:blip r:embed="rId4"/>
-                    <a:stretch>
-                      <a:fillRect b="-11290"/>
-                    </a:stretch>
-                  </a:blipFill>
-                </p:spPr>
-                <p:txBody>
-                  <a:bodyPr/>
-                  <a:lstStyle/>
-                  <a:p>
-                    <a:r>
-                      <a:rPr lang="zh-TW" altLang="en-US">
-                        <a:noFill/>
-                      </a:rPr>
-                      <a:t> </a:t>
-                    </a:r>
-                  </a:p>
-                </p:txBody>
-              </p:sp>
-            </mc:Fallback>
-          </mc:AlternateContent>
-          <mc:AlternateContent xmlns:mc="http://schemas.openxmlformats.org/markup-compatibility/2006" xmlns:a14="http://schemas.microsoft.com/office/drawing/2010/main">
-            <mc:Choice Requires="a14">
-              <p:sp>
-                <p:nvSpPr>
-                  <p:cNvPr id="7" name="矩形 6">
-                    <a:extLst>
-                      <a:ext uri="{FF2B5EF4-FFF2-40B4-BE49-F238E27FC236}">
-                        <a16:creationId xmlns:a16="http://schemas.microsoft.com/office/drawing/2014/main" id="{95DBBAD4-C131-4ACA-90FC-C0E0DB29EE2C}"/>
-                      </a:ext>
-                    </a:extLst>
-                  </p:cNvPr>
-                  <p:cNvSpPr/>
-                  <p:nvPr/>
-                </p:nvSpPr>
-                <p:spPr>
-                  <a:xfrm>
-                    <a:off x="1641739" y="2539327"/>
-                    <a:ext cx="813235" cy="379976"/>
-                  </a:xfrm>
-                  <a:prstGeom prst="rect">
-                    <a:avLst/>
-                  </a:prstGeom>
-                </p:spPr>
-                <p:txBody>
-                  <a:bodyPr wrap="none">
-                    <a:spAutoFit/>
-                  </a:bodyPr>
-                  <a:lstStyle/>
-                  <a:p>
-                    <a:pPr/>
-                    <a14:m>
-                      <m:oMathPara xmlns:m="http://schemas.openxmlformats.org/officeDocument/2006/math">
-                        <m:oMathParaPr>
-                          <m:jc m:val="centerGroup"/>
-                        </m:oMathParaPr>
-                        <m:oMath xmlns:m="http://schemas.openxmlformats.org/officeDocument/2006/math">
-                          <m:r>
-                            <a:rPr lang="en-US" altLang="zh-TW" sz="1869" i="1">
-                              <a:latin typeface="Cambria Math" panose="02040503050406030204" pitchFamily="18" charset="0"/>
-                            </a:rPr>
-                            <m:t>ℓ=0</m:t>
-                          </m:r>
-                        </m:oMath>
-                      </m:oMathPara>
-                    </a14:m>
-                    <a:endParaRPr lang="zh-TW" altLang="en-US" sz="1869" dirty="0">
-                      <a:latin typeface="Times New Roman" panose="02020603050405020304" pitchFamily="18" charset="0"/>
-                      <a:cs typeface="Times New Roman" panose="02020603050405020304" pitchFamily="18" charset="0"/>
-                    </a:endParaRPr>
-                  </a:p>
-                </p:txBody>
-              </p:sp>
-            </mc:Choice>
-            <mc:Fallback xmlns="">
-              <p:sp>
-                <p:nvSpPr>
-                  <p:cNvPr id="7" name="矩形 6">
-                    <a:extLst>
-                      <a:ext uri="{FF2B5EF4-FFF2-40B4-BE49-F238E27FC236}">
-                        <a16:creationId xmlns:a16="http://schemas.microsoft.com/office/drawing/2014/main" id="{95DBBAD4-C131-4ACA-90FC-C0E0DB29EE2C}"/>
-                      </a:ext>
-                    </a:extLst>
-                  </p:cNvPr>
-                  <p:cNvSpPr>
-                    <a:spLocks noRot="1" noChangeAspect="1" noMove="1" noResize="1" noEditPoints="1" noAdjustHandles="1" noChangeArrowheads="1" noChangeShapeType="1" noTextEdit="1"/>
-                  </p:cNvSpPr>
-                  <p:nvPr/>
-                </p:nvSpPr>
-                <p:spPr>
-                  <a:xfrm>
-                    <a:off x="1641739" y="2539327"/>
-                    <a:ext cx="813235" cy="379976"/>
-                  </a:xfrm>
-                  <a:prstGeom prst="rect">
-                    <a:avLst/>
-                  </a:prstGeom>
-                  <a:blipFill>
-                    <a:blip r:embed="rId6"/>
-                    <a:stretch>
-                      <a:fillRect/>
-                    </a:stretch>
-                  </a:blipFill>
-                </p:spPr>
-                <p:txBody>
-                  <a:bodyPr/>
-                  <a:lstStyle/>
-                  <a:p>
-                    <a:r>
-                      <a:rPr lang="zh-TW" altLang="en-US">
-                        <a:noFill/>
-                      </a:rPr>
-                      <a:t> </a:t>
-                    </a:r>
-                  </a:p>
-                </p:txBody>
-              </p:sp>
-            </mc:Fallback>
-          </mc:AlternateContent>
-          <mc:AlternateContent xmlns:mc="http://schemas.openxmlformats.org/markup-compatibility/2006" xmlns:a14="http://schemas.microsoft.com/office/drawing/2010/main">
-            <mc:Choice Requires="a14">
-              <p:sp>
-                <p:nvSpPr>
-                  <p:cNvPr id="8" name="矩形 7">
-                    <a:extLst>
-                      <a:ext uri="{FF2B5EF4-FFF2-40B4-BE49-F238E27FC236}">
-                        <a16:creationId xmlns:a16="http://schemas.microsoft.com/office/drawing/2014/main" id="{616D4D42-573F-41D7-817B-D2C9850F5244}"/>
-                      </a:ext>
-                    </a:extLst>
-                  </p:cNvPr>
-                  <p:cNvSpPr/>
-                  <p:nvPr/>
-                </p:nvSpPr>
-                <p:spPr>
-                  <a:xfrm>
-                    <a:off x="3336258" y="2539327"/>
-                    <a:ext cx="813235" cy="379976"/>
-                  </a:xfrm>
-                  <a:prstGeom prst="rect">
-                    <a:avLst/>
-                  </a:prstGeom>
-                </p:spPr>
-                <p:txBody>
-                  <a:bodyPr wrap="none">
-                    <a:spAutoFit/>
-                  </a:bodyPr>
-                  <a:lstStyle/>
-                  <a:p>
-                    <a:pPr/>
-                    <a14:m>
-                      <m:oMathPara xmlns:m="http://schemas.openxmlformats.org/officeDocument/2006/math">
-                        <m:oMathParaPr>
-                          <m:jc m:val="centerGroup"/>
-                        </m:oMathParaPr>
-                        <m:oMath xmlns:m="http://schemas.openxmlformats.org/officeDocument/2006/math">
-                          <m:r>
-                            <a:rPr lang="en-US" altLang="zh-TW" sz="1869" i="1">
-                              <a:latin typeface="Cambria Math" panose="02040503050406030204" pitchFamily="18" charset="0"/>
-                            </a:rPr>
-                            <m:t>ℓ=1</m:t>
-                          </m:r>
-                        </m:oMath>
-                      </m:oMathPara>
-                    </a14:m>
-                    <a:endParaRPr lang="zh-TW" altLang="en-US" sz="1869" dirty="0">
-                      <a:latin typeface="Times New Roman" panose="02020603050405020304" pitchFamily="18" charset="0"/>
-                      <a:cs typeface="Times New Roman" panose="02020603050405020304" pitchFamily="18" charset="0"/>
-                    </a:endParaRPr>
-                  </a:p>
-                </p:txBody>
-              </p:sp>
-            </mc:Choice>
-            <mc:Fallback xmlns="">
-              <p:sp>
-                <p:nvSpPr>
-                  <p:cNvPr id="8" name="矩形 7">
-                    <a:extLst>
-                      <a:ext uri="{FF2B5EF4-FFF2-40B4-BE49-F238E27FC236}">
-                        <a16:creationId xmlns:a16="http://schemas.microsoft.com/office/drawing/2014/main" id="{616D4D42-573F-41D7-817B-D2C9850F5244}"/>
-                      </a:ext>
-                    </a:extLst>
-                  </p:cNvPr>
-                  <p:cNvSpPr>
-                    <a:spLocks noRot="1" noChangeAspect="1" noMove="1" noResize="1" noEditPoints="1" noAdjustHandles="1" noChangeArrowheads="1" noChangeShapeType="1" noTextEdit="1"/>
-                  </p:cNvSpPr>
-                  <p:nvPr/>
-                </p:nvSpPr>
-                <p:spPr>
-                  <a:xfrm>
-                    <a:off x="3336258" y="2539327"/>
-                    <a:ext cx="813235" cy="379976"/>
-                  </a:xfrm>
-                  <a:prstGeom prst="rect">
-                    <a:avLst/>
-                  </a:prstGeom>
-                  <a:blipFill>
-                    <a:blip r:embed="rId7"/>
-                    <a:stretch>
-                      <a:fillRect/>
-                    </a:stretch>
-                  </a:blipFill>
-                </p:spPr>
-                <p:txBody>
-                  <a:bodyPr/>
-                  <a:lstStyle/>
-                  <a:p>
-                    <a:r>
-                      <a:rPr lang="zh-TW" altLang="en-US">
-                        <a:noFill/>
-                      </a:rPr>
-                      <a:t> </a:t>
-                    </a:r>
-                  </a:p>
-                </p:txBody>
-              </p:sp>
-            </mc:Fallback>
-          </mc:AlternateContent>
-          <mc:AlternateContent xmlns:mc="http://schemas.openxmlformats.org/markup-compatibility/2006" xmlns:a14="http://schemas.microsoft.com/office/drawing/2010/main">
-            <mc:Choice Requires="a14">
-              <p:sp>
-                <p:nvSpPr>
-                  <p:cNvPr id="9" name="矩形 8">
-                    <a:extLst>
-                      <a:ext uri="{FF2B5EF4-FFF2-40B4-BE49-F238E27FC236}">
-                        <a16:creationId xmlns:a16="http://schemas.microsoft.com/office/drawing/2014/main" id="{AAFD892F-F7A7-40D0-81F1-3F88F68F50FD}"/>
-                      </a:ext>
-                    </a:extLst>
-                  </p:cNvPr>
-                  <p:cNvSpPr/>
-                  <p:nvPr/>
-                </p:nvSpPr>
-                <p:spPr>
-                  <a:xfrm>
-                    <a:off x="5030777" y="2539327"/>
-                    <a:ext cx="813235" cy="379976"/>
-                  </a:xfrm>
-                  <a:prstGeom prst="rect">
-                    <a:avLst/>
-                  </a:prstGeom>
-                </p:spPr>
-                <p:txBody>
-                  <a:bodyPr wrap="none">
-                    <a:spAutoFit/>
-                  </a:bodyPr>
-                  <a:lstStyle/>
-                  <a:p>
-                    <a:pPr/>
-                    <a14:m>
-                      <m:oMathPara xmlns:m="http://schemas.openxmlformats.org/officeDocument/2006/math">
-                        <m:oMathParaPr>
-                          <m:jc m:val="centerGroup"/>
-                        </m:oMathParaPr>
-                        <m:oMath xmlns:m="http://schemas.openxmlformats.org/officeDocument/2006/math">
-                          <m:r>
-                            <a:rPr lang="en-US" altLang="zh-TW" sz="1869" i="1">
-                              <a:latin typeface="Cambria Math" panose="02040503050406030204" pitchFamily="18" charset="0"/>
-                            </a:rPr>
-                            <m:t>ℓ=2</m:t>
-                          </m:r>
-                        </m:oMath>
-                      </m:oMathPara>
-                    </a14:m>
-                    <a:endParaRPr lang="zh-TW" altLang="en-US" sz="1869" dirty="0">
-                      <a:latin typeface="Times New Roman" panose="02020603050405020304" pitchFamily="18" charset="0"/>
-                      <a:cs typeface="Times New Roman" panose="02020603050405020304" pitchFamily="18" charset="0"/>
-                    </a:endParaRPr>
-                  </a:p>
-                </p:txBody>
-              </p:sp>
-            </mc:Choice>
-            <mc:Fallback xmlns="">
-              <p:sp>
-                <p:nvSpPr>
-                  <p:cNvPr id="9" name="矩形 8">
-                    <a:extLst>
-                      <a:ext uri="{FF2B5EF4-FFF2-40B4-BE49-F238E27FC236}">
-                        <a16:creationId xmlns:a16="http://schemas.microsoft.com/office/drawing/2014/main" id="{AAFD892F-F7A7-40D0-81F1-3F88F68F50FD}"/>
-                      </a:ext>
-                    </a:extLst>
-                  </p:cNvPr>
-                  <p:cNvSpPr>
-                    <a:spLocks noRot="1" noChangeAspect="1" noMove="1" noResize="1" noEditPoints="1" noAdjustHandles="1" noChangeArrowheads="1" noChangeShapeType="1" noTextEdit="1"/>
-                  </p:cNvSpPr>
-                  <p:nvPr/>
-                </p:nvSpPr>
-                <p:spPr>
-                  <a:xfrm>
-                    <a:off x="5030777" y="2539327"/>
-                    <a:ext cx="813235" cy="379976"/>
-                  </a:xfrm>
-                  <a:prstGeom prst="rect">
-                    <a:avLst/>
-                  </a:prstGeom>
-                  <a:blipFill>
-                    <a:blip r:embed="rId8"/>
-                    <a:stretch>
-                      <a:fillRect/>
-                    </a:stretch>
-                  </a:blipFill>
-                </p:spPr>
-                <p:txBody>
-                  <a:bodyPr/>
-                  <a:lstStyle/>
-                  <a:p>
-                    <a:r>
-                      <a:rPr lang="zh-TW" altLang="en-US">
-                        <a:noFill/>
-                      </a:rPr>
-                      <a:t> </a:t>
-                    </a:r>
-                  </a:p>
-                </p:txBody>
-              </p:sp>
-            </mc:Fallback>
-          </mc:AlternateContent>
-          <mc:AlternateContent xmlns:mc="http://schemas.openxmlformats.org/markup-compatibility/2006" xmlns:a14="http://schemas.microsoft.com/office/drawing/2010/main">
-            <mc:Choice Requires="a14">
-              <p:sp>
-                <p:nvSpPr>
-                  <p:cNvPr id="10" name="矩形 9">
-                    <a:extLst>
-                      <a:ext uri="{FF2B5EF4-FFF2-40B4-BE49-F238E27FC236}">
-                        <a16:creationId xmlns:a16="http://schemas.microsoft.com/office/drawing/2014/main" id="{F881D687-EBB4-479A-ACED-8B11403DD29C}"/>
-                      </a:ext>
-                    </a:extLst>
-                  </p:cNvPr>
-                  <p:cNvSpPr/>
-                  <p:nvPr/>
-                </p:nvSpPr>
-                <p:spPr>
-                  <a:xfrm>
-                    <a:off x="6725296" y="2539327"/>
-                    <a:ext cx="813235" cy="379976"/>
-                  </a:xfrm>
-                  <a:prstGeom prst="rect">
-                    <a:avLst/>
-                  </a:prstGeom>
-                </p:spPr>
-                <p:txBody>
-                  <a:bodyPr wrap="none">
-                    <a:spAutoFit/>
-                  </a:bodyPr>
-                  <a:lstStyle/>
-                  <a:p>
-                    <a:pPr/>
-                    <a14:m>
-                      <m:oMathPara xmlns:m="http://schemas.openxmlformats.org/officeDocument/2006/math">
-                        <m:oMathParaPr>
-                          <m:jc m:val="centerGroup"/>
-                        </m:oMathParaPr>
-                        <m:oMath xmlns:m="http://schemas.openxmlformats.org/officeDocument/2006/math">
-                          <m:r>
-                            <a:rPr lang="en-US" altLang="zh-TW" sz="1869" i="1">
-                              <a:latin typeface="Cambria Math" panose="02040503050406030204" pitchFamily="18" charset="0"/>
-                            </a:rPr>
-                            <m:t>ℓ=3</m:t>
-                          </m:r>
-                        </m:oMath>
-                      </m:oMathPara>
-                    </a14:m>
-                    <a:endParaRPr lang="zh-TW" altLang="en-US" sz="1869" dirty="0">
-                      <a:latin typeface="Times New Roman" panose="02020603050405020304" pitchFamily="18" charset="0"/>
-                      <a:cs typeface="Times New Roman" panose="02020603050405020304" pitchFamily="18" charset="0"/>
-                    </a:endParaRPr>
-                  </a:p>
-                </p:txBody>
-              </p:sp>
-            </mc:Choice>
-            <mc:Fallback xmlns="">
-              <p:sp>
-                <p:nvSpPr>
-                  <p:cNvPr id="10" name="矩形 9">
-                    <a:extLst>
-                      <a:ext uri="{FF2B5EF4-FFF2-40B4-BE49-F238E27FC236}">
-                        <a16:creationId xmlns:a16="http://schemas.microsoft.com/office/drawing/2014/main" id="{F881D687-EBB4-479A-ACED-8B11403DD29C}"/>
-                      </a:ext>
-                    </a:extLst>
-                  </p:cNvPr>
-                  <p:cNvSpPr>
-                    <a:spLocks noRot="1" noChangeAspect="1" noMove="1" noResize="1" noEditPoints="1" noAdjustHandles="1" noChangeArrowheads="1" noChangeShapeType="1" noTextEdit="1"/>
-                  </p:cNvSpPr>
-                  <p:nvPr/>
-                </p:nvSpPr>
-                <p:spPr>
-                  <a:xfrm>
-                    <a:off x="6725296" y="2539327"/>
-                    <a:ext cx="813235" cy="379976"/>
-                  </a:xfrm>
-                  <a:prstGeom prst="rect">
-                    <a:avLst/>
-                  </a:prstGeom>
-                  <a:blipFill>
-                    <a:blip r:embed="rId9"/>
-                    <a:stretch>
-                      <a:fillRect/>
-                    </a:stretch>
-                  </a:blipFill>
-                </p:spPr>
-                <p:txBody>
-                  <a:bodyPr/>
-                  <a:lstStyle/>
-                  <a:p>
-                    <a:r>
-                      <a:rPr lang="zh-TW" altLang="en-US">
-                        <a:noFill/>
-                      </a:rPr>
-                      <a:t> </a:t>
-                    </a:r>
-                  </a:p>
-                </p:txBody>
-              </p:sp>
-            </mc:Fallback>
-          </mc:AlternateContent>
-          <mc:AlternateContent xmlns:mc="http://schemas.openxmlformats.org/markup-compatibility/2006" xmlns:a14="http://schemas.microsoft.com/office/drawing/2010/main">
-            <mc:Choice Requires="a14">
-              <p:sp>
-                <p:nvSpPr>
-                  <p:cNvPr id="11" name="矩形 10">
-                    <a:extLst>
-                      <a:ext uri="{FF2B5EF4-FFF2-40B4-BE49-F238E27FC236}">
-                        <a16:creationId xmlns:a16="http://schemas.microsoft.com/office/drawing/2014/main" id="{6327670E-C918-49BB-AF44-D80342753882}"/>
-                      </a:ext>
-                    </a:extLst>
-                  </p:cNvPr>
-                  <p:cNvSpPr/>
-                  <p:nvPr/>
-                </p:nvSpPr>
-                <p:spPr>
-                  <a:xfrm>
-                    <a:off x="8419815" y="2539327"/>
-                    <a:ext cx="813235" cy="379976"/>
-                  </a:xfrm>
-                  <a:prstGeom prst="rect">
-                    <a:avLst/>
-                  </a:prstGeom>
-                </p:spPr>
-                <p:txBody>
-                  <a:bodyPr wrap="none">
-                    <a:spAutoFit/>
-                  </a:bodyPr>
-                  <a:lstStyle/>
-                  <a:p>
-                    <a:pPr/>
-                    <a14:m>
-                      <m:oMathPara xmlns:m="http://schemas.openxmlformats.org/officeDocument/2006/math">
-                        <m:oMathParaPr>
-                          <m:jc m:val="centerGroup"/>
-                        </m:oMathParaPr>
-                        <m:oMath xmlns:m="http://schemas.openxmlformats.org/officeDocument/2006/math">
-                          <m:r>
-                            <a:rPr lang="en-US" altLang="zh-TW" sz="1869" i="1">
-                              <a:latin typeface="Cambria Math" panose="02040503050406030204" pitchFamily="18" charset="0"/>
-                            </a:rPr>
-                            <m:t>ℓ=4</m:t>
-                          </m:r>
-                        </m:oMath>
-                      </m:oMathPara>
-                    </a14:m>
-                    <a:endParaRPr lang="zh-TW" altLang="en-US" sz="1869" dirty="0">
-                      <a:latin typeface="Times New Roman" panose="02020603050405020304" pitchFamily="18" charset="0"/>
-                      <a:cs typeface="Times New Roman" panose="02020603050405020304" pitchFamily="18" charset="0"/>
-                    </a:endParaRPr>
-                  </a:p>
-                </p:txBody>
-              </p:sp>
-            </mc:Choice>
-            <mc:Fallback xmlns="">
-              <p:sp>
-                <p:nvSpPr>
-                  <p:cNvPr id="11" name="矩形 10">
-                    <a:extLst>
-                      <a:ext uri="{FF2B5EF4-FFF2-40B4-BE49-F238E27FC236}">
-                        <a16:creationId xmlns:a16="http://schemas.microsoft.com/office/drawing/2014/main" id="{6327670E-C918-49BB-AF44-D80342753882}"/>
-                      </a:ext>
-                    </a:extLst>
-                  </p:cNvPr>
-                  <p:cNvSpPr>
-                    <a:spLocks noRot="1" noChangeAspect="1" noMove="1" noResize="1" noEditPoints="1" noAdjustHandles="1" noChangeArrowheads="1" noChangeShapeType="1" noTextEdit="1"/>
-                  </p:cNvSpPr>
-                  <p:nvPr/>
-                </p:nvSpPr>
-                <p:spPr>
-                  <a:xfrm>
-                    <a:off x="8419815" y="2539327"/>
-                    <a:ext cx="813235" cy="379976"/>
-                  </a:xfrm>
-                  <a:prstGeom prst="rect">
-                    <a:avLst/>
-                  </a:prstGeom>
-                  <a:blipFill>
-                    <a:blip r:embed="rId10"/>
-                    <a:stretch>
-                      <a:fillRect/>
-                    </a:stretch>
-                  </a:blipFill>
-                </p:spPr>
-                <p:txBody>
-                  <a:bodyPr/>
-                  <a:lstStyle/>
-                  <a:p>
-                    <a:r>
-                      <a:rPr lang="zh-TW" altLang="en-US">
-                        <a:noFill/>
-                      </a:rPr>
-                      <a:t> </a:t>
-                    </a:r>
-                  </a:p>
-                </p:txBody>
-              </p:sp>
-            </mc:Fallback>
-          </mc:AlternateContent>
-          <mc:AlternateContent xmlns:mc="http://schemas.openxmlformats.org/markup-compatibility/2006" xmlns:a14="http://schemas.microsoft.com/office/drawing/2010/main">
-            <mc:Choice Requires="a14">
-              <p:sp>
-                <p:nvSpPr>
-                  <p:cNvPr id="12" name="矩形 11">
-                    <a:extLst>
-                      <a:ext uri="{FF2B5EF4-FFF2-40B4-BE49-F238E27FC236}">
-                        <a16:creationId xmlns:a16="http://schemas.microsoft.com/office/drawing/2014/main" id="{457DBC5B-32AA-48F2-92AC-D6F076A05411}"/>
-                      </a:ext>
-                    </a:extLst>
-                  </p:cNvPr>
-                  <p:cNvSpPr/>
-                  <p:nvPr/>
-                </p:nvSpPr>
-                <p:spPr>
-                  <a:xfrm>
-                    <a:off x="10114335" y="2539327"/>
-                    <a:ext cx="813235" cy="379976"/>
-                  </a:xfrm>
-                  <a:prstGeom prst="rect">
-                    <a:avLst/>
-                  </a:prstGeom>
-                </p:spPr>
-                <p:txBody>
-                  <a:bodyPr wrap="none">
-                    <a:spAutoFit/>
-                  </a:bodyPr>
-                  <a:lstStyle/>
-                  <a:p>
-                    <a:pPr/>
-                    <a14:m>
-                      <m:oMathPara xmlns:m="http://schemas.openxmlformats.org/officeDocument/2006/math">
-                        <m:oMathParaPr>
-                          <m:jc m:val="centerGroup"/>
-                        </m:oMathParaPr>
-                        <m:oMath xmlns:m="http://schemas.openxmlformats.org/officeDocument/2006/math">
-                          <m:r>
-                            <a:rPr lang="en-US" altLang="zh-TW" sz="1869" i="1">
-                              <a:latin typeface="Cambria Math" panose="02040503050406030204" pitchFamily="18" charset="0"/>
-                            </a:rPr>
-                            <m:t>ℓ=5</m:t>
-                          </m:r>
-                        </m:oMath>
-                      </m:oMathPara>
-                    </a14:m>
-                    <a:endParaRPr lang="zh-TW" altLang="en-US" sz="1869" dirty="0">
-                      <a:latin typeface="Times New Roman" panose="02020603050405020304" pitchFamily="18" charset="0"/>
-                      <a:cs typeface="Times New Roman" panose="02020603050405020304" pitchFamily="18" charset="0"/>
-                    </a:endParaRPr>
-                  </a:p>
-                </p:txBody>
-              </p:sp>
-            </mc:Choice>
-            <mc:Fallback xmlns="">
-              <p:sp>
-                <p:nvSpPr>
-                  <p:cNvPr id="12" name="矩形 11">
-                    <a:extLst>
-                      <a:ext uri="{FF2B5EF4-FFF2-40B4-BE49-F238E27FC236}">
-                        <a16:creationId xmlns:a16="http://schemas.microsoft.com/office/drawing/2014/main" id="{457DBC5B-32AA-48F2-92AC-D6F076A05411}"/>
-                      </a:ext>
-                    </a:extLst>
-                  </p:cNvPr>
-                  <p:cNvSpPr>
-                    <a:spLocks noRot="1" noChangeAspect="1" noMove="1" noResize="1" noEditPoints="1" noAdjustHandles="1" noChangeArrowheads="1" noChangeShapeType="1" noTextEdit="1"/>
-                  </p:cNvSpPr>
-                  <p:nvPr/>
-                </p:nvSpPr>
-                <p:spPr>
-                  <a:xfrm>
-                    <a:off x="10114335" y="2539327"/>
-                    <a:ext cx="813235" cy="379976"/>
-                  </a:xfrm>
-                  <a:prstGeom prst="rect">
-                    <a:avLst/>
-                  </a:prstGeom>
-                  <a:blipFill>
-                    <a:blip r:embed="rId11"/>
-                    <a:stretch>
-                      <a:fillRect/>
-                    </a:stretch>
-                  </a:blipFill>
-                </p:spPr>
-                <p:txBody>
-                  <a:bodyPr/>
-                  <a:lstStyle/>
-                  <a:p>
-                    <a:r>
-                      <a:rPr lang="zh-TW" altLang="en-US">
-                        <a:noFill/>
-                      </a:rPr>
-                      <a:t> </a:t>
-                    </a:r>
-                  </a:p>
-                </p:txBody>
-              </p:sp>
-            </mc:Fallback>
-          </mc:AlternateContent>
-          <mc:AlternateContent xmlns:mc="http://schemas.openxmlformats.org/markup-compatibility/2006" xmlns:a14="http://schemas.microsoft.com/office/drawing/2010/main">
-            <mc:Choice Requires="a14">
-              <p:sp>
-                <p:nvSpPr>
-                  <p:cNvPr id="13" name="矩形 12">
-                    <a:extLst>
-                      <a:ext uri="{FF2B5EF4-FFF2-40B4-BE49-F238E27FC236}">
-                        <a16:creationId xmlns:a16="http://schemas.microsoft.com/office/drawing/2014/main" id="{A7CED566-B647-47DC-B4B0-5FF05A8DA76B}"/>
-                      </a:ext>
-                    </a:extLst>
-                  </p:cNvPr>
-                  <p:cNvSpPr/>
-                  <p:nvPr/>
-                </p:nvSpPr>
-                <p:spPr>
-                  <a:xfrm>
-                    <a:off x="1257750" y="2400895"/>
-                    <a:ext cx="486352" cy="379976"/>
-                  </a:xfrm>
-                  <a:prstGeom prst="rect">
-                    <a:avLst/>
-                  </a:prstGeom>
-                </p:spPr>
-                <p:txBody>
-                  <a:bodyPr wrap="none">
-                    <a:spAutoFit/>
-                  </a:bodyPr>
-                  <a:lstStyle/>
-                  <a:p>
-                    <a:pPr/>
-                    <a14:m>
-                      <m:oMathPara xmlns:m="http://schemas.openxmlformats.org/officeDocument/2006/math">
-                        <m:oMathParaPr>
-                          <m:jc m:val="centerGroup"/>
-                        </m:oMathParaPr>
-                        <m:oMath xmlns:m="http://schemas.openxmlformats.org/officeDocument/2006/math">
-                          <m:sSub>
-                            <m:sSubPr>
-                              <m:ctrlPr>
-                                <a:rPr lang="en-US" altLang="zh-TW" sz="1869" i="1">
-                                  <a:latin typeface="Cambria Math" panose="02040503050406030204" pitchFamily="18" charset="0"/>
-                                </a:rPr>
-                              </m:ctrlPr>
-                            </m:sSubPr>
-                            <m:e>
-                              <m:acc>
-                                <m:accPr>
-                                  <m:chr m:val="̂"/>
-                                  <m:ctrlPr>
-                                    <a:rPr lang="zh-TW" altLang="en-US" sz="1869" i="1">
-                                      <a:latin typeface="Cambria Math" panose="02040503050406030204" pitchFamily="18" charset="0"/>
-                                    </a:rPr>
-                                  </m:ctrlPr>
-                                </m:accPr>
-                                <m:e>
-                                  <m:r>
-                                    <a:rPr lang="en-US" altLang="zh-TW" sz="1869" i="1">
-                                      <a:latin typeface="Cambria Math" panose="02040503050406030204" pitchFamily="18" charset="0"/>
-                                    </a:rPr>
-                                    <m:t>𝑞</m:t>
-                                  </m:r>
-                                </m:e>
-                              </m:acc>
-                            </m:e>
-                            <m:sub>
-                              <m:r>
-                                <a:rPr lang="en-US" altLang="zh-TW" sz="1869" i="1">
-                                  <a:latin typeface="Cambria Math" panose="02040503050406030204" pitchFamily="18" charset="0"/>
-                                </a:rPr>
-                                <m:t>𝑥</m:t>
-                              </m:r>
-                            </m:sub>
-                          </m:sSub>
-                        </m:oMath>
-                      </m:oMathPara>
-                    </a14:m>
-                    <a:endParaRPr lang="zh-TW" altLang="en-US" sz="1869" dirty="0">
-                      <a:latin typeface="Times New Roman" panose="02020603050405020304" pitchFamily="18" charset="0"/>
-                      <a:cs typeface="Times New Roman" panose="02020603050405020304" pitchFamily="18" charset="0"/>
-                    </a:endParaRPr>
-                  </a:p>
-                </p:txBody>
-              </p:sp>
-            </mc:Choice>
-            <mc:Fallback xmlns="">
-              <p:sp>
-                <p:nvSpPr>
-                  <p:cNvPr id="13" name="矩形 12">
-                    <a:extLst>
-                      <a:ext uri="{FF2B5EF4-FFF2-40B4-BE49-F238E27FC236}">
-                        <a16:creationId xmlns:a16="http://schemas.microsoft.com/office/drawing/2014/main" id="{A7CED566-B647-47DC-B4B0-5FF05A8DA76B}"/>
-                      </a:ext>
-                    </a:extLst>
-                  </p:cNvPr>
-                  <p:cNvSpPr>
-                    <a:spLocks noRot="1" noChangeAspect="1" noMove="1" noResize="1" noEditPoints="1" noAdjustHandles="1" noChangeArrowheads="1" noChangeShapeType="1" noTextEdit="1"/>
-                  </p:cNvSpPr>
-                  <p:nvPr/>
-                </p:nvSpPr>
-                <p:spPr>
-                  <a:xfrm>
-                    <a:off x="1257750" y="2400895"/>
-                    <a:ext cx="486352" cy="379976"/>
-                  </a:xfrm>
-                  <a:prstGeom prst="rect">
-                    <a:avLst/>
-                  </a:prstGeom>
-                  <a:blipFill>
-                    <a:blip r:embed="rId12"/>
-                    <a:stretch>
-                      <a:fillRect r="-13253" b="-4615"/>
-                    </a:stretch>
-                  </a:blipFill>
-                </p:spPr>
-                <p:txBody>
-                  <a:bodyPr/>
-                  <a:lstStyle/>
-                  <a:p>
-                    <a:r>
-                      <a:rPr lang="zh-TW" altLang="en-US">
-                        <a:noFill/>
-                      </a:rPr>
-                      <a:t> </a:t>
-                    </a:r>
-                  </a:p>
-                </p:txBody>
-              </p:sp>
-            </mc:Fallback>
-          </mc:AlternateContent>
-          <mc:AlternateContent xmlns:mc="http://schemas.openxmlformats.org/markup-compatibility/2006" xmlns:a14="http://schemas.microsoft.com/office/drawing/2010/main">
-            <mc:Choice Requires="a14">
-              <p:sp>
-                <p:nvSpPr>
-                  <p:cNvPr id="14" name="矩形 13">
-                    <a:extLst>
-                      <a:ext uri="{FF2B5EF4-FFF2-40B4-BE49-F238E27FC236}">
-                        <a16:creationId xmlns:a16="http://schemas.microsoft.com/office/drawing/2014/main" id="{A9FF783D-A2D3-4366-BFA1-7E2749E58E34}"/>
-                      </a:ext>
-                    </a:extLst>
-                  </p:cNvPr>
-                  <p:cNvSpPr/>
-                  <p:nvPr/>
-                </p:nvSpPr>
-                <p:spPr>
-                  <a:xfrm>
-                    <a:off x="946008" y="2088664"/>
-                    <a:ext cx="493981" cy="402803"/>
-                  </a:xfrm>
-                  <a:prstGeom prst="rect">
-                    <a:avLst/>
-                  </a:prstGeom>
-                </p:spPr>
-                <p:txBody>
-                  <a:bodyPr wrap="none">
-                    <a:spAutoFit/>
-                  </a:bodyPr>
-                  <a:lstStyle/>
-                  <a:p>
-                    <a:pPr/>
-                    <a14:m>
-                      <m:oMathPara xmlns:m="http://schemas.openxmlformats.org/officeDocument/2006/math">
-                        <m:oMathParaPr>
-                          <m:jc m:val="centerGroup"/>
-                        </m:oMathParaPr>
-                        <m:oMath xmlns:m="http://schemas.openxmlformats.org/officeDocument/2006/math">
-                          <m:sSub>
-                            <m:sSubPr>
-                              <m:ctrlPr>
-                                <a:rPr lang="en-US" altLang="zh-TW" sz="1869" i="1">
-                                  <a:latin typeface="Cambria Math" panose="02040503050406030204" pitchFamily="18" charset="0"/>
-                                </a:rPr>
-                              </m:ctrlPr>
-                            </m:sSubPr>
-                            <m:e>
-                              <m:acc>
-                                <m:accPr>
-                                  <m:chr m:val="̂"/>
-                                  <m:ctrlPr>
-                                    <a:rPr lang="zh-TW" altLang="en-US" sz="1869" i="1">
-                                      <a:latin typeface="Cambria Math" panose="02040503050406030204" pitchFamily="18" charset="0"/>
-                                    </a:rPr>
-                                  </m:ctrlPr>
-                                </m:accPr>
-                                <m:e>
-                                  <m:r>
-                                    <a:rPr lang="en-US" altLang="zh-TW" sz="1869" i="1">
-                                      <a:latin typeface="Cambria Math" panose="02040503050406030204" pitchFamily="18" charset="0"/>
-                                    </a:rPr>
-                                    <m:t>𝑞</m:t>
-                                  </m:r>
-                                </m:e>
-                              </m:acc>
-                            </m:e>
-                            <m:sub>
-                              <m:r>
-                                <a:rPr lang="en-US" altLang="zh-TW" sz="1869" i="1">
-                                  <a:latin typeface="Cambria Math" panose="02040503050406030204" pitchFamily="18" charset="0"/>
-                                </a:rPr>
-                                <m:t>𝑦</m:t>
-                              </m:r>
-                            </m:sub>
-                          </m:sSub>
-                        </m:oMath>
-                      </m:oMathPara>
-                    </a14:m>
-                    <a:endParaRPr lang="zh-TW" altLang="en-US" sz="1869" dirty="0">
-                      <a:latin typeface="Times New Roman" panose="02020603050405020304" pitchFamily="18" charset="0"/>
-                      <a:cs typeface="Times New Roman" panose="02020603050405020304" pitchFamily="18" charset="0"/>
-                    </a:endParaRPr>
-                  </a:p>
-                </p:txBody>
-              </p:sp>
-            </mc:Choice>
-            <mc:Fallback xmlns="">
-              <p:sp>
-                <p:nvSpPr>
-                  <p:cNvPr id="14" name="矩形 13">
-                    <a:extLst>
-                      <a:ext uri="{FF2B5EF4-FFF2-40B4-BE49-F238E27FC236}">
-                        <a16:creationId xmlns:a16="http://schemas.microsoft.com/office/drawing/2014/main" id="{A9FF783D-A2D3-4366-BFA1-7E2749E58E34}"/>
-                      </a:ext>
-                    </a:extLst>
-                  </p:cNvPr>
-                  <p:cNvSpPr>
-                    <a:spLocks noRot="1" noChangeAspect="1" noMove="1" noResize="1" noEditPoints="1" noAdjustHandles="1" noChangeArrowheads="1" noChangeShapeType="1" noTextEdit="1"/>
-                  </p:cNvSpPr>
-                  <p:nvPr/>
-                </p:nvSpPr>
-                <p:spPr>
-                  <a:xfrm>
-                    <a:off x="946008" y="2088664"/>
-                    <a:ext cx="493981" cy="402803"/>
-                  </a:xfrm>
-                  <a:prstGeom prst="rect">
-                    <a:avLst/>
-                  </a:prstGeom>
-                  <a:blipFill>
-                    <a:blip r:embed="rId13"/>
-                    <a:stretch>
-                      <a:fillRect t="-1449" r="-13095"/>
-                    </a:stretch>
-                  </a:blipFill>
-                </p:spPr>
-                <p:txBody>
-                  <a:bodyPr/>
-                  <a:lstStyle/>
-                  <a:p>
-                    <a:r>
-                      <a:rPr lang="zh-TW" altLang="en-US">
-                        <a:noFill/>
-                      </a:rPr>
-                      <a:t> </a:t>
-                    </a:r>
-                  </a:p>
-                </p:txBody>
-              </p:sp>
-            </mc:Fallback>
-          </mc:AlternateContent>
-          <mc:AlternateContent xmlns:mc="http://schemas.openxmlformats.org/markup-compatibility/2006" xmlns:a14="http://schemas.microsoft.com/office/drawing/2010/main">
-            <mc:Choice Requires="a14">
-              <p:sp>
-                <p:nvSpPr>
-                  <p:cNvPr id="16" name="矩形 15">
-                    <a:extLst>
-                      <a:ext uri="{FF2B5EF4-FFF2-40B4-BE49-F238E27FC236}">
-                        <a16:creationId xmlns:a16="http://schemas.microsoft.com/office/drawing/2014/main" id="{2F198B12-D53B-4B17-BA1D-89FF19683B02}"/>
-                      </a:ext>
-                    </a:extLst>
-                  </p:cNvPr>
-                  <p:cNvSpPr/>
-                  <p:nvPr/>
-                </p:nvSpPr>
-                <p:spPr>
-                  <a:xfrm>
-                    <a:off x="1559007" y="4043296"/>
-                    <a:ext cx="787388" cy="365880"/>
-                  </a:xfrm>
-                  <a:prstGeom prst="rect">
-                    <a:avLst/>
-                  </a:prstGeom>
-                </p:spPr>
-                <p:txBody>
-                  <a:bodyPr wrap="none">
-                    <a:spAutoFit/>
-                  </a:bodyPr>
-                  <a:lstStyle/>
-                  <a:p>
-                    <a:pPr/>
-                    <a14:m>
-                      <m:oMathPara xmlns:m="http://schemas.openxmlformats.org/officeDocument/2006/math">
-                        <m:oMathParaPr>
-                          <m:jc m:val="centerGroup"/>
-                        </m:oMathParaPr>
-                        <m:oMath xmlns:m="http://schemas.openxmlformats.org/officeDocument/2006/math">
-                          <m:r>
-                            <a:rPr lang="en-US" altLang="zh-TW" sz="1869" i="1">
-                              <a:latin typeface="Cambria Math" panose="02040503050406030204" pitchFamily="18" charset="0"/>
-                            </a:rPr>
-                            <m:t>0.1</m:t>
-                          </m:r>
-                          <m:sSub>
-                            <m:sSubPr>
-                              <m:ctrlPr>
-                                <a:rPr lang="en-US" altLang="zh-TW" sz="1869" i="1">
-                                  <a:latin typeface="Cambria Math" panose="02040503050406030204" pitchFamily="18" charset="0"/>
-                                </a:rPr>
-                              </m:ctrlPr>
-                            </m:sSubPr>
-                            <m:e>
-                              <m:r>
-                                <a:rPr lang="en-US" altLang="zh-TW" sz="1869" i="1">
-                                  <a:latin typeface="Cambria Math" panose="02040503050406030204" pitchFamily="18" charset="0"/>
-                                </a:rPr>
-                                <m:t>𝑄</m:t>
-                              </m:r>
-                            </m:e>
-                            <m:sub>
-                              <m:r>
-                                <a:rPr lang="en-US" altLang="zh-TW" sz="1869" i="1">
-                                  <a:latin typeface="Cambria Math" panose="02040503050406030204" pitchFamily="18" charset="0"/>
-                                </a:rPr>
-                                <m:t>𝑐</m:t>
-                              </m:r>
-                            </m:sub>
-                          </m:sSub>
-                        </m:oMath>
-                      </m:oMathPara>
-                    </a14:m>
-                    <a:endParaRPr lang="zh-TW" altLang="en-US" sz="1869" dirty="0">
-                      <a:latin typeface="Times New Roman" panose="02020603050405020304" pitchFamily="18" charset="0"/>
-                      <a:cs typeface="Times New Roman" panose="02020603050405020304" pitchFamily="18" charset="0"/>
-                    </a:endParaRPr>
-                  </a:p>
-                </p:txBody>
-              </p:sp>
-            </mc:Choice>
-            <mc:Fallback xmlns="">
-              <p:sp>
-                <p:nvSpPr>
-                  <p:cNvPr id="16" name="矩形 15">
-                    <a:extLst>
-                      <a:ext uri="{FF2B5EF4-FFF2-40B4-BE49-F238E27FC236}">
-                        <a16:creationId xmlns:a16="http://schemas.microsoft.com/office/drawing/2014/main" id="{2F198B12-D53B-4B17-BA1D-89FF19683B02}"/>
-                      </a:ext>
-                    </a:extLst>
-                  </p:cNvPr>
-                  <p:cNvSpPr>
-                    <a:spLocks noRot="1" noChangeAspect="1" noMove="1" noResize="1" noEditPoints="1" noAdjustHandles="1" noChangeArrowheads="1" noChangeShapeType="1" noTextEdit="1"/>
-                  </p:cNvSpPr>
-                  <p:nvPr/>
-                </p:nvSpPr>
-                <p:spPr>
-                  <a:xfrm>
-                    <a:off x="1559007" y="4043296"/>
-                    <a:ext cx="787388" cy="365880"/>
-                  </a:xfrm>
-                  <a:prstGeom prst="rect">
-                    <a:avLst/>
-                  </a:prstGeom>
-                  <a:blipFill>
-                    <a:blip r:embed="rId14"/>
-                    <a:stretch>
-                      <a:fillRect b="-11111"/>
-                    </a:stretch>
-                  </a:blipFill>
-                </p:spPr>
-                <p:txBody>
-                  <a:bodyPr/>
-                  <a:lstStyle/>
-                  <a:p>
-                    <a:r>
-                      <a:rPr lang="zh-TW" altLang="en-US">
-                        <a:noFill/>
-                      </a:rPr>
-                      <a:t> </a:t>
-                    </a:r>
-                  </a:p>
-                </p:txBody>
-              </p:sp>
-            </mc:Fallback>
-          </mc:AlternateContent>
-          <mc:AlternateContent xmlns:mc="http://schemas.openxmlformats.org/markup-compatibility/2006" xmlns:a14="http://schemas.microsoft.com/office/drawing/2010/main">
-            <mc:Choice Requires="a14">
-              <p:sp>
-                <p:nvSpPr>
-                  <p:cNvPr id="17" name="矩形 16">
-                    <a:extLst>
-                      <a:ext uri="{FF2B5EF4-FFF2-40B4-BE49-F238E27FC236}">
-                        <a16:creationId xmlns:a16="http://schemas.microsoft.com/office/drawing/2014/main" id="{8295B3F8-393E-4F5A-B11B-EE2AD0609793}"/>
-                      </a:ext>
-                    </a:extLst>
-                  </p:cNvPr>
-                  <p:cNvSpPr/>
-                  <p:nvPr/>
-                </p:nvSpPr>
-                <p:spPr>
-                  <a:xfrm>
-                    <a:off x="1641739" y="4433188"/>
-                    <a:ext cx="813235" cy="379976"/>
-                  </a:xfrm>
-                  <a:prstGeom prst="rect">
-                    <a:avLst/>
-                  </a:prstGeom>
-                </p:spPr>
-                <p:txBody>
-                  <a:bodyPr wrap="none">
-                    <a:spAutoFit/>
-                  </a:bodyPr>
-                  <a:lstStyle/>
-                  <a:p>
-                    <a:pPr/>
-                    <a14:m>
-                      <m:oMathPara xmlns:m="http://schemas.openxmlformats.org/officeDocument/2006/math">
-                        <m:oMathParaPr>
-                          <m:jc m:val="centerGroup"/>
-                        </m:oMathParaPr>
-                        <m:oMath xmlns:m="http://schemas.openxmlformats.org/officeDocument/2006/math">
-                          <m:r>
-                            <a:rPr lang="en-US" altLang="zh-TW" sz="1869" i="1">
-                              <a:latin typeface="Cambria Math" panose="02040503050406030204" pitchFamily="18" charset="0"/>
-                            </a:rPr>
-                            <m:t>ℓ=0</m:t>
-                          </m:r>
-                        </m:oMath>
-                      </m:oMathPara>
-                    </a14:m>
-                    <a:endParaRPr lang="zh-TW" altLang="en-US" sz="1869" dirty="0">
-                      <a:latin typeface="Times New Roman" panose="02020603050405020304" pitchFamily="18" charset="0"/>
-                      <a:cs typeface="Times New Roman" panose="02020603050405020304" pitchFamily="18" charset="0"/>
-                    </a:endParaRPr>
-                  </a:p>
-                </p:txBody>
-              </p:sp>
-            </mc:Choice>
-            <mc:Fallback xmlns="">
-              <p:sp>
-                <p:nvSpPr>
-                  <p:cNvPr id="17" name="矩形 16">
-                    <a:extLst>
-                      <a:ext uri="{FF2B5EF4-FFF2-40B4-BE49-F238E27FC236}">
-                        <a16:creationId xmlns:a16="http://schemas.microsoft.com/office/drawing/2014/main" id="{8295B3F8-393E-4F5A-B11B-EE2AD0609793}"/>
-                      </a:ext>
-                    </a:extLst>
-                  </p:cNvPr>
-                  <p:cNvSpPr>
-                    <a:spLocks noRot="1" noChangeAspect="1" noMove="1" noResize="1" noEditPoints="1" noAdjustHandles="1" noChangeArrowheads="1" noChangeShapeType="1" noTextEdit="1"/>
-                  </p:cNvSpPr>
-                  <p:nvPr/>
-                </p:nvSpPr>
-                <p:spPr>
-                  <a:xfrm>
-                    <a:off x="1641739" y="4433188"/>
-                    <a:ext cx="813235" cy="379976"/>
-                  </a:xfrm>
-                  <a:prstGeom prst="rect">
-                    <a:avLst/>
-                  </a:prstGeom>
-                  <a:blipFill>
-                    <a:blip r:embed="rId15"/>
-                    <a:stretch>
-                      <a:fillRect/>
-                    </a:stretch>
-                  </a:blipFill>
-                </p:spPr>
-                <p:txBody>
-                  <a:bodyPr/>
-                  <a:lstStyle/>
-                  <a:p>
-                    <a:r>
-                      <a:rPr lang="zh-TW" altLang="en-US">
-                        <a:noFill/>
-                      </a:rPr>
-                      <a:t> </a:t>
-                    </a:r>
-                  </a:p>
-                </p:txBody>
-              </p:sp>
-            </mc:Fallback>
-          </mc:AlternateContent>
-          <mc:AlternateContent xmlns:mc="http://schemas.openxmlformats.org/markup-compatibility/2006" xmlns:a14="http://schemas.microsoft.com/office/drawing/2010/main">
-            <mc:Choice Requires="a14">
-              <p:sp>
-                <p:nvSpPr>
-                  <p:cNvPr id="18" name="矩形 17">
-                    <a:extLst>
-                      <a:ext uri="{FF2B5EF4-FFF2-40B4-BE49-F238E27FC236}">
-                        <a16:creationId xmlns:a16="http://schemas.microsoft.com/office/drawing/2014/main" id="{302227E5-4E0E-4A9C-BBEE-ED438C4C9462}"/>
-                      </a:ext>
-                    </a:extLst>
-                  </p:cNvPr>
-                  <p:cNvSpPr/>
-                  <p:nvPr/>
-                </p:nvSpPr>
-                <p:spPr>
-                  <a:xfrm>
-                    <a:off x="3336258" y="4433188"/>
-                    <a:ext cx="813235" cy="379976"/>
-                  </a:xfrm>
-                  <a:prstGeom prst="rect">
-                    <a:avLst/>
-                  </a:prstGeom>
-                </p:spPr>
-                <p:txBody>
-                  <a:bodyPr wrap="none">
-                    <a:spAutoFit/>
-                  </a:bodyPr>
-                  <a:lstStyle/>
-                  <a:p>
-                    <a:pPr/>
-                    <a14:m>
-                      <m:oMathPara xmlns:m="http://schemas.openxmlformats.org/officeDocument/2006/math">
-                        <m:oMathParaPr>
-                          <m:jc m:val="centerGroup"/>
-                        </m:oMathParaPr>
-                        <m:oMath xmlns:m="http://schemas.openxmlformats.org/officeDocument/2006/math">
-                          <m:r>
-                            <a:rPr lang="en-US" altLang="zh-TW" sz="1869" i="1">
-                              <a:latin typeface="Cambria Math" panose="02040503050406030204" pitchFamily="18" charset="0"/>
-                            </a:rPr>
-                            <m:t>ℓ=1</m:t>
-                          </m:r>
-                        </m:oMath>
-                      </m:oMathPara>
-                    </a14:m>
-                    <a:endParaRPr lang="zh-TW" altLang="en-US" sz="1869" dirty="0">
-                      <a:latin typeface="Times New Roman" panose="02020603050405020304" pitchFamily="18" charset="0"/>
-                      <a:cs typeface="Times New Roman" panose="02020603050405020304" pitchFamily="18" charset="0"/>
-                    </a:endParaRPr>
-                  </a:p>
-                </p:txBody>
-              </p:sp>
-            </mc:Choice>
-            <mc:Fallback xmlns="">
-              <p:sp>
-                <p:nvSpPr>
-                  <p:cNvPr id="18" name="矩形 17">
-                    <a:extLst>
-                      <a:ext uri="{FF2B5EF4-FFF2-40B4-BE49-F238E27FC236}">
-                        <a16:creationId xmlns:a16="http://schemas.microsoft.com/office/drawing/2014/main" id="{302227E5-4E0E-4A9C-BBEE-ED438C4C9462}"/>
-                      </a:ext>
-                    </a:extLst>
-                  </p:cNvPr>
-                  <p:cNvSpPr>
-                    <a:spLocks noRot="1" noChangeAspect="1" noMove="1" noResize="1" noEditPoints="1" noAdjustHandles="1" noChangeArrowheads="1" noChangeShapeType="1" noTextEdit="1"/>
-                  </p:cNvSpPr>
-                  <p:nvPr/>
-                </p:nvSpPr>
-                <p:spPr>
-                  <a:xfrm>
-                    <a:off x="3336258" y="4433188"/>
-                    <a:ext cx="813235" cy="379976"/>
-                  </a:xfrm>
-                  <a:prstGeom prst="rect">
-                    <a:avLst/>
-                  </a:prstGeom>
-                  <a:blipFill>
-                    <a:blip r:embed="rId16"/>
-                    <a:stretch>
-                      <a:fillRect/>
-                    </a:stretch>
-                  </a:blipFill>
-                </p:spPr>
-                <p:txBody>
-                  <a:bodyPr/>
-                  <a:lstStyle/>
-                  <a:p>
-                    <a:r>
-                      <a:rPr lang="zh-TW" altLang="en-US">
-                        <a:noFill/>
-                      </a:rPr>
-                      <a:t> </a:t>
-                    </a:r>
-                  </a:p>
-                </p:txBody>
-              </p:sp>
-            </mc:Fallback>
-          </mc:AlternateContent>
-          <mc:AlternateContent xmlns:mc="http://schemas.openxmlformats.org/markup-compatibility/2006" xmlns:a14="http://schemas.microsoft.com/office/drawing/2010/main">
-            <mc:Choice Requires="a14">
-              <p:sp>
-                <p:nvSpPr>
-                  <p:cNvPr id="19" name="矩形 18">
-                    <a:extLst>
-                      <a:ext uri="{FF2B5EF4-FFF2-40B4-BE49-F238E27FC236}">
-                        <a16:creationId xmlns:a16="http://schemas.microsoft.com/office/drawing/2014/main" id="{0DD27638-A940-4BEF-A988-4B25C776137A}"/>
-                      </a:ext>
-                    </a:extLst>
-                  </p:cNvPr>
-                  <p:cNvSpPr/>
-                  <p:nvPr/>
-                </p:nvSpPr>
-                <p:spPr>
-                  <a:xfrm>
-                    <a:off x="5030777" y="4433188"/>
-                    <a:ext cx="813235" cy="379976"/>
-                  </a:xfrm>
-                  <a:prstGeom prst="rect">
-                    <a:avLst/>
-                  </a:prstGeom>
-                </p:spPr>
-                <p:txBody>
-                  <a:bodyPr wrap="none">
-                    <a:spAutoFit/>
-                  </a:bodyPr>
-                  <a:lstStyle/>
-                  <a:p>
-                    <a:pPr/>
-                    <a14:m>
-                      <m:oMathPara xmlns:m="http://schemas.openxmlformats.org/officeDocument/2006/math">
-                        <m:oMathParaPr>
-                          <m:jc m:val="centerGroup"/>
-                        </m:oMathParaPr>
-                        <m:oMath xmlns:m="http://schemas.openxmlformats.org/officeDocument/2006/math">
-                          <m:r>
-                            <a:rPr lang="en-US" altLang="zh-TW" sz="1869" i="1">
-                              <a:latin typeface="Cambria Math" panose="02040503050406030204" pitchFamily="18" charset="0"/>
-                            </a:rPr>
-                            <m:t>ℓ=2</m:t>
-                          </m:r>
-                        </m:oMath>
-                      </m:oMathPara>
-                    </a14:m>
-                    <a:endParaRPr lang="zh-TW" altLang="en-US" sz="1869" dirty="0">
-                      <a:latin typeface="Times New Roman" panose="02020603050405020304" pitchFamily="18" charset="0"/>
-                      <a:cs typeface="Times New Roman" panose="02020603050405020304" pitchFamily="18" charset="0"/>
-                    </a:endParaRPr>
-                  </a:p>
-                </p:txBody>
-              </p:sp>
-            </mc:Choice>
-            <mc:Fallback xmlns="">
-              <p:sp>
-                <p:nvSpPr>
-                  <p:cNvPr id="19" name="矩形 18">
-                    <a:extLst>
-                      <a:ext uri="{FF2B5EF4-FFF2-40B4-BE49-F238E27FC236}">
-                        <a16:creationId xmlns:a16="http://schemas.microsoft.com/office/drawing/2014/main" id="{0DD27638-A940-4BEF-A988-4B25C776137A}"/>
-                      </a:ext>
-                    </a:extLst>
-                  </p:cNvPr>
-                  <p:cNvSpPr>
-                    <a:spLocks noRot="1" noChangeAspect="1" noMove="1" noResize="1" noEditPoints="1" noAdjustHandles="1" noChangeArrowheads="1" noChangeShapeType="1" noTextEdit="1"/>
-                  </p:cNvSpPr>
-                  <p:nvPr/>
-                </p:nvSpPr>
-                <p:spPr>
-                  <a:xfrm>
-                    <a:off x="5030777" y="4433188"/>
-                    <a:ext cx="813235" cy="379976"/>
-                  </a:xfrm>
-                  <a:prstGeom prst="rect">
-                    <a:avLst/>
-                  </a:prstGeom>
-                  <a:blipFill>
-                    <a:blip r:embed="rId17"/>
-                    <a:stretch>
-                      <a:fillRect/>
-                    </a:stretch>
-                  </a:blipFill>
-                </p:spPr>
-                <p:txBody>
-                  <a:bodyPr/>
-                  <a:lstStyle/>
-                  <a:p>
-                    <a:r>
-                      <a:rPr lang="zh-TW" altLang="en-US">
-                        <a:noFill/>
-                      </a:rPr>
-                      <a:t> </a:t>
-                    </a:r>
-                  </a:p>
-                </p:txBody>
-              </p:sp>
-            </mc:Fallback>
-          </mc:AlternateContent>
-          <mc:AlternateContent xmlns:mc="http://schemas.openxmlformats.org/markup-compatibility/2006" xmlns:a14="http://schemas.microsoft.com/office/drawing/2010/main">
-            <mc:Choice Requires="a14">
-              <p:sp>
-                <p:nvSpPr>
-                  <p:cNvPr id="20" name="矩形 19">
-                    <a:extLst>
-                      <a:ext uri="{FF2B5EF4-FFF2-40B4-BE49-F238E27FC236}">
-                        <a16:creationId xmlns:a16="http://schemas.microsoft.com/office/drawing/2014/main" id="{EC1A91CC-4752-490B-8E0C-37A410477DB8}"/>
-                      </a:ext>
-                    </a:extLst>
-                  </p:cNvPr>
-                  <p:cNvSpPr/>
-                  <p:nvPr/>
-                </p:nvSpPr>
-                <p:spPr>
-                  <a:xfrm>
-                    <a:off x="6725296" y="4433188"/>
-                    <a:ext cx="813235" cy="379976"/>
-                  </a:xfrm>
-                  <a:prstGeom prst="rect">
-                    <a:avLst/>
-                  </a:prstGeom>
-                </p:spPr>
-                <p:txBody>
-                  <a:bodyPr wrap="none">
-                    <a:spAutoFit/>
-                  </a:bodyPr>
-                  <a:lstStyle/>
-                  <a:p>
-                    <a:pPr/>
-                    <a14:m>
-                      <m:oMathPara xmlns:m="http://schemas.openxmlformats.org/officeDocument/2006/math">
-                        <m:oMathParaPr>
-                          <m:jc m:val="centerGroup"/>
-                        </m:oMathParaPr>
-                        <m:oMath xmlns:m="http://schemas.openxmlformats.org/officeDocument/2006/math">
-                          <m:r>
-                            <a:rPr lang="en-US" altLang="zh-TW" sz="1869" i="1">
-                              <a:latin typeface="Cambria Math" panose="02040503050406030204" pitchFamily="18" charset="0"/>
-                            </a:rPr>
-                            <m:t>ℓ=3</m:t>
-                          </m:r>
-                        </m:oMath>
-                      </m:oMathPara>
-                    </a14:m>
-                    <a:endParaRPr lang="zh-TW" altLang="en-US" sz="1869" dirty="0">
-                      <a:latin typeface="Times New Roman" panose="02020603050405020304" pitchFamily="18" charset="0"/>
-                      <a:cs typeface="Times New Roman" panose="02020603050405020304" pitchFamily="18" charset="0"/>
-                    </a:endParaRPr>
-                  </a:p>
-                </p:txBody>
-              </p:sp>
-            </mc:Choice>
-            <mc:Fallback xmlns="">
-              <p:sp>
-                <p:nvSpPr>
-                  <p:cNvPr id="20" name="矩形 19">
-                    <a:extLst>
-                      <a:ext uri="{FF2B5EF4-FFF2-40B4-BE49-F238E27FC236}">
-                        <a16:creationId xmlns:a16="http://schemas.microsoft.com/office/drawing/2014/main" id="{EC1A91CC-4752-490B-8E0C-37A410477DB8}"/>
-                      </a:ext>
-                    </a:extLst>
-                  </p:cNvPr>
-                  <p:cNvSpPr>
-                    <a:spLocks noRot="1" noChangeAspect="1" noMove="1" noResize="1" noEditPoints="1" noAdjustHandles="1" noChangeArrowheads="1" noChangeShapeType="1" noTextEdit="1"/>
-                  </p:cNvSpPr>
-                  <p:nvPr/>
-                </p:nvSpPr>
-                <p:spPr>
-                  <a:xfrm>
-                    <a:off x="6725296" y="4433188"/>
-                    <a:ext cx="813235" cy="379976"/>
-                  </a:xfrm>
-                  <a:prstGeom prst="rect">
-                    <a:avLst/>
-                  </a:prstGeom>
-                  <a:blipFill>
-                    <a:blip r:embed="rId18"/>
-                    <a:stretch>
-                      <a:fillRect/>
-                    </a:stretch>
-                  </a:blipFill>
-                </p:spPr>
-                <p:txBody>
-                  <a:bodyPr/>
-                  <a:lstStyle/>
-                  <a:p>
-                    <a:r>
-                      <a:rPr lang="zh-TW" altLang="en-US">
-                        <a:noFill/>
-                      </a:rPr>
-                      <a:t> </a:t>
-                    </a:r>
-                  </a:p>
-                </p:txBody>
-              </p:sp>
-            </mc:Fallback>
-          </mc:AlternateContent>
-          <mc:AlternateContent xmlns:mc="http://schemas.openxmlformats.org/markup-compatibility/2006" xmlns:a14="http://schemas.microsoft.com/office/drawing/2010/main">
-            <mc:Choice Requires="a14">
-              <p:sp>
-                <p:nvSpPr>
-                  <p:cNvPr id="21" name="矩形 20">
-                    <a:extLst>
-                      <a:ext uri="{FF2B5EF4-FFF2-40B4-BE49-F238E27FC236}">
-                        <a16:creationId xmlns:a16="http://schemas.microsoft.com/office/drawing/2014/main" id="{E397C0F0-BBFA-4816-84BF-51900169D37C}"/>
-                      </a:ext>
-                    </a:extLst>
-                  </p:cNvPr>
-                  <p:cNvSpPr/>
-                  <p:nvPr/>
-                </p:nvSpPr>
-                <p:spPr>
-                  <a:xfrm>
-                    <a:off x="8419815" y="4433188"/>
-                    <a:ext cx="813235" cy="379976"/>
-                  </a:xfrm>
-                  <a:prstGeom prst="rect">
-                    <a:avLst/>
-                  </a:prstGeom>
-                </p:spPr>
-                <p:txBody>
-                  <a:bodyPr wrap="none">
-                    <a:spAutoFit/>
-                  </a:bodyPr>
-                  <a:lstStyle/>
-                  <a:p>
-                    <a:pPr/>
-                    <a14:m>
-                      <m:oMathPara xmlns:m="http://schemas.openxmlformats.org/officeDocument/2006/math">
-                        <m:oMathParaPr>
-                          <m:jc m:val="centerGroup"/>
-                        </m:oMathParaPr>
-                        <m:oMath xmlns:m="http://schemas.openxmlformats.org/officeDocument/2006/math">
-                          <m:r>
-                            <a:rPr lang="en-US" altLang="zh-TW" sz="1869" i="1">
-                              <a:latin typeface="Cambria Math" panose="02040503050406030204" pitchFamily="18" charset="0"/>
-                            </a:rPr>
-                            <m:t>ℓ=4</m:t>
-                          </m:r>
-                        </m:oMath>
-                      </m:oMathPara>
-                    </a14:m>
-                    <a:endParaRPr lang="zh-TW" altLang="en-US" sz="1869" dirty="0">
-                      <a:latin typeface="Times New Roman" panose="02020603050405020304" pitchFamily="18" charset="0"/>
-                      <a:cs typeface="Times New Roman" panose="02020603050405020304" pitchFamily="18" charset="0"/>
-                    </a:endParaRPr>
-                  </a:p>
-                </p:txBody>
-              </p:sp>
-            </mc:Choice>
-            <mc:Fallback xmlns="">
-              <p:sp>
-                <p:nvSpPr>
-                  <p:cNvPr id="21" name="矩形 20">
-                    <a:extLst>
-                      <a:ext uri="{FF2B5EF4-FFF2-40B4-BE49-F238E27FC236}">
-                        <a16:creationId xmlns:a16="http://schemas.microsoft.com/office/drawing/2014/main" id="{E397C0F0-BBFA-4816-84BF-51900169D37C}"/>
-                      </a:ext>
-                    </a:extLst>
-                  </p:cNvPr>
-                  <p:cNvSpPr>
-                    <a:spLocks noRot="1" noChangeAspect="1" noMove="1" noResize="1" noEditPoints="1" noAdjustHandles="1" noChangeArrowheads="1" noChangeShapeType="1" noTextEdit="1"/>
-                  </p:cNvSpPr>
-                  <p:nvPr/>
-                </p:nvSpPr>
-                <p:spPr>
-                  <a:xfrm>
-                    <a:off x="8419815" y="4433188"/>
-                    <a:ext cx="813235" cy="379976"/>
-                  </a:xfrm>
-                  <a:prstGeom prst="rect">
-                    <a:avLst/>
-                  </a:prstGeom>
-                  <a:blipFill>
-                    <a:blip r:embed="rId19"/>
-                    <a:stretch>
-                      <a:fillRect/>
-                    </a:stretch>
-                  </a:blipFill>
-                </p:spPr>
-                <p:txBody>
-                  <a:bodyPr/>
-                  <a:lstStyle/>
-                  <a:p>
-                    <a:r>
-                      <a:rPr lang="zh-TW" altLang="en-US">
-                        <a:noFill/>
-                      </a:rPr>
-                      <a:t> </a:t>
-                    </a:r>
-                  </a:p>
-                </p:txBody>
-              </p:sp>
-            </mc:Fallback>
-          </mc:AlternateContent>
-          <mc:AlternateContent xmlns:mc="http://schemas.openxmlformats.org/markup-compatibility/2006" xmlns:a14="http://schemas.microsoft.com/office/drawing/2010/main">
-            <mc:Choice Requires="a14">
-              <p:sp>
-                <p:nvSpPr>
-                  <p:cNvPr id="22" name="矩形 21">
-                    <a:extLst>
-                      <a:ext uri="{FF2B5EF4-FFF2-40B4-BE49-F238E27FC236}">
-                        <a16:creationId xmlns:a16="http://schemas.microsoft.com/office/drawing/2014/main" id="{E1A9238A-5FF4-4DCD-8EAA-753E08958678}"/>
-                      </a:ext>
-                    </a:extLst>
-                  </p:cNvPr>
-                  <p:cNvSpPr/>
-                  <p:nvPr/>
-                </p:nvSpPr>
-                <p:spPr>
-                  <a:xfrm>
-                    <a:off x="10114335" y="4433188"/>
-                    <a:ext cx="813235" cy="379976"/>
-                  </a:xfrm>
-                  <a:prstGeom prst="rect">
-                    <a:avLst/>
-                  </a:prstGeom>
-                </p:spPr>
-                <p:txBody>
-                  <a:bodyPr wrap="none">
-                    <a:spAutoFit/>
-                  </a:bodyPr>
-                  <a:lstStyle/>
-                  <a:p>
-                    <a:pPr/>
-                    <a14:m>
-                      <m:oMathPara xmlns:m="http://schemas.openxmlformats.org/officeDocument/2006/math">
-                        <m:oMathParaPr>
-                          <m:jc m:val="centerGroup"/>
-                        </m:oMathParaPr>
-                        <m:oMath xmlns:m="http://schemas.openxmlformats.org/officeDocument/2006/math">
-                          <m:r>
-                            <a:rPr lang="en-US" altLang="zh-TW" sz="1869" i="1">
-                              <a:latin typeface="Cambria Math" panose="02040503050406030204" pitchFamily="18" charset="0"/>
-                            </a:rPr>
-                            <m:t>ℓ=5</m:t>
-                          </m:r>
-                        </m:oMath>
-                      </m:oMathPara>
-                    </a14:m>
-                    <a:endParaRPr lang="zh-TW" altLang="en-US" sz="1869" dirty="0">
-                      <a:latin typeface="Times New Roman" panose="02020603050405020304" pitchFamily="18" charset="0"/>
-                      <a:cs typeface="Times New Roman" panose="02020603050405020304" pitchFamily="18" charset="0"/>
-                    </a:endParaRPr>
-                  </a:p>
-                </p:txBody>
-              </p:sp>
-            </mc:Choice>
-            <mc:Fallback xmlns="">
-              <p:sp>
-                <p:nvSpPr>
-                  <p:cNvPr id="22" name="矩形 21">
-                    <a:extLst>
-                      <a:ext uri="{FF2B5EF4-FFF2-40B4-BE49-F238E27FC236}">
-                        <a16:creationId xmlns:a16="http://schemas.microsoft.com/office/drawing/2014/main" id="{E1A9238A-5FF4-4DCD-8EAA-753E08958678}"/>
-                      </a:ext>
-                    </a:extLst>
-                  </p:cNvPr>
-                  <p:cNvSpPr>
-                    <a:spLocks noRot="1" noChangeAspect="1" noMove="1" noResize="1" noEditPoints="1" noAdjustHandles="1" noChangeArrowheads="1" noChangeShapeType="1" noTextEdit="1"/>
-                  </p:cNvSpPr>
-                  <p:nvPr/>
-                </p:nvSpPr>
-                <p:spPr>
-                  <a:xfrm>
-                    <a:off x="10114335" y="4433188"/>
-                    <a:ext cx="813235" cy="379976"/>
-                  </a:xfrm>
-                  <a:prstGeom prst="rect">
-                    <a:avLst/>
-                  </a:prstGeom>
-                  <a:blipFill>
-                    <a:blip r:embed="rId20"/>
-                    <a:stretch>
-                      <a:fillRect/>
-                    </a:stretch>
-                  </a:blipFill>
-                </p:spPr>
-                <p:txBody>
-                  <a:bodyPr/>
-                  <a:lstStyle/>
-                  <a:p>
-                    <a:r>
-                      <a:rPr lang="zh-TW" altLang="en-US">
-                        <a:noFill/>
-                      </a:rPr>
-                      <a:t> </a:t>
-                    </a:r>
-                  </a:p>
-                </p:txBody>
-              </p:sp>
-            </mc:Fallback>
-          </mc:AlternateContent>
-          <mc:AlternateContent xmlns:mc="http://schemas.openxmlformats.org/markup-compatibility/2006" xmlns:a14="http://schemas.microsoft.com/office/drawing/2010/main">
-            <mc:Choice Requires="a14">
-              <p:sp>
-                <p:nvSpPr>
-                  <p:cNvPr id="23" name="矩形 22">
-                    <a:extLst>
-                      <a:ext uri="{FF2B5EF4-FFF2-40B4-BE49-F238E27FC236}">
-                        <a16:creationId xmlns:a16="http://schemas.microsoft.com/office/drawing/2014/main" id="{49E6EAE7-86E5-4188-B5B9-01D52A94BD34}"/>
-                      </a:ext>
-                    </a:extLst>
-                  </p:cNvPr>
-                  <p:cNvSpPr/>
-                  <p:nvPr/>
-                </p:nvSpPr>
-                <p:spPr>
-                  <a:xfrm>
-                    <a:off x="1257750" y="4294756"/>
-                    <a:ext cx="486352" cy="379976"/>
-                  </a:xfrm>
-                  <a:prstGeom prst="rect">
-                    <a:avLst/>
-                  </a:prstGeom>
-                </p:spPr>
-                <p:txBody>
-                  <a:bodyPr wrap="none">
-                    <a:spAutoFit/>
-                  </a:bodyPr>
-                  <a:lstStyle/>
-                  <a:p>
-                    <a:pPr/>
-                    <a14:m>
-                      <m:oMathPara xmlns:m="http://schemas.openxmlformats.org/officeDocument/2006/math">
-                        <m:oMathParaPr>
-                          <m:jc m:val="centerGroup"/>
-                        </m:oMathParaPr>
-                        <m:oMath xmlns:m="http://schemas.openxmlformats.org/officeDocument/2006/math">
-                          <m:sSub>
-                            <m:sSubPr>
-                              <m:ctrlPr>
-                                <a:rPr lang="en-US" altLang="zh-TW" sz="1869" i="1">
-                                  <a:latin typeface="Cambria Math" panose="02040503050406030204" pitchFamily="18" charset="0"/>
-                                </a:rPr>
-                              </m:ctrlPr>
-                            </m:sSubPr>
-                            <m:e>
-                              <m:acc>
-                                <m:accPr>
-                                  <m:chr m:val="̂"/>
-                                  <m:ctrlPr>
-                                    <a:rPr lang="zh-TW" altLang="en-US" sz="1869" i="1">
-                                      <a:latin typeface="Cambria Math" panose="02040503050406030204" pitchFamily="18" charset="0"/>
-                                    </a:rPr>
-                                  </m:ctrlPr>
-                                </m:accPr>
-                                <m:e>
-                                  <m:r>
-                                    <a:rPr lang="en-US" altLang="zh-TW" sz="1869" i="1">
-                                      <a:latin typeface="Cambria Math" panose="02040503050406030204" pitchFamily="18" charset="0"/>
-                                    </a:rPr>
-                                    <m:t>𝑞</m:t>
-                                  </m:r>
-                                </m:e>
-                              </m:acc>
-                            </m:e>
-                            <m:sub>
-                              <m:r>
-                                <a:rPr lang="en-US" altLang="zh-TW" sz="1869" i="1">
-                                  <a:latin typeface="Cambria Math" panose="02040503050406030204" pitchFamily="18" charset="0"/>
-                                </a:rPr>
-                                <m:t>𝑥</m:t>
-                              </m:r>
-                            </m:sub>
-                          </m:sSub>
-                        </m:oMath>
-                      </m:oMathPara>
-                    </a14:m>
-                    <a:endParaRPr lang="zh-TW" altLang="en-US" sz="1869" dirty="0">
-                      <a:latin typeface="Times New Roman" panose="02020603050405020304" pitchFamily="18" charset="0"/>
-                      <a:cs typeface="Times New Roman" panose="02020603050405020304" pitchFamily="18" charset="0"/>
-                    </a:endParaRPr>
-                  </a:p>
-                </p:txBody>
-              </p:sp>
-            </mc:Choice>
-            <mc:Fallback xmlns="">
-              <p:sp>
-                <p:nvSpPr>
-                  <p:cNvPr id="23" name="矩形 22">
-                    <a:extLst>
-                      <a:ext uri="{FF2B5EF4-FFF2-40B4-BE49-F238E27FC236}">
-                        <a16:creationId xmlns:a16="http://schemas.microsoft.com/office/drawing/2014/main" id="{49E6EAE7-86E5-4188-B5B9-01D52A94BD34}"/>
-                      </a:ext>
-                    </a:extLst>
-                  </p:cNvPr>
-                  <p:cNvSpPr>
-                    <a:spLocks noRot="1" noChangeAspect="1" noMove="1" noResize="1" noEditPoints="1" noAdjustHandles="1" noChangeArrowheads="1" noChangeShapeType="1" noTextEdit="1"/>
-                  </p:cNvSpPr>
-                  <p:nvPr/>
-                </p:nvSpPr>
-                <p:spPr>
-                  <a:xfrm>
-                    <a:off x="1257750" y="4294756"/>
-                    <a:ext cx="486352" cy="379976"/>
-                  </a:xfrm>
-                  <a:prstGeom prst="rect">
-                    <a:avLst/>
-                  </a:prstGeom>
-                  <a:blipFill>
-                    <a:blip r:embed="rId21"/>
-                    <a:stretch>
-                      <a:fillRect r="-13253" b="-4615"/>
-                    </a:stretch>
-                  </a:blipFill>
-                </p:spPr>
-                <p:txBody>
-                  <a:bodyPr/>
-                  <a:lstStyle/>
-                  <a:p>
-                    <a:r>
-                      <a:rPr lang="zh-TW" altLang="en-US">
-                        <a:noFill/>
-                      </a:rPr>
-                      <a:t> </a:t>
-                    </a:r>
-                  </a:p>
-                </p:txBody>
-              </p:sp>
-            </mc:Fallback>
-          </mc:AlternateContent>
-          <mc:AlternateContent xmlns:mc="http://schemas.openxmlformats.org/markup-compatibility/2006" xmlns:a14="http://schemas.microsoft.com/office/drawing/2010/main">
-            <mc:Choice Requires="a14">
-              <p:sp>
-                <p:nvSpPr>
-                  <p:cNvPr id="24" name="矩形 23">
-                    <a:extLst>
-                      <a:ext uri="{FF2B5EF4-FFF2-40B4-BE49-F238E27FC236}">
-                        <a16:creationId xmlns:a16="http://schemas.microsoft.com/office/drawing/2014/main" id="{2103AF37-6CA3-464E-9A8E-A0241C6EAB2F}"/>
-                      </a:ext>
-                    </a:extLst>
-                  </p:cNvPr>
-                  <p:cNvSpPr/>
-                  <p:nvPr/>
-                </p:nvSpPr>
-                <p:spPr>
-                  <a:xfrm>
-                    <a:off x="946008" y="3982525"/>
-                    <a:ext cx="493981" cy="402803"/>
-                  </a:xfrm>
-                  <a:prstGeom prst="rect">
-                    <a:avLst/>
-                  </a:prstGeom>
-                </p:spPr>
-                <p:txBody>
-                  <a:bodyPr wrap="none">
-                    <a:spAutoFit/>
-                  </a:bodyPr>
-                  <a:lstStyle/>
-                  <a:p>
-                    <a:pPr/>
-                    <a14:m>
-                      <m:oMathPara xmlns:m="http://schemas.openxmlformats.org/officeDocument/2006/math">
-                        <m:oMathParaPr>
-                          <m:jc m:val="centerGroup"/>
-                        </m:oMathParaPr>
-                        <m:oMath xmlns:m="http://schemas.openxmlformats.org/officeDocument/2006/math">
-                          <m:sSub>
-                            <m:sSubPr>
-                              <m:ctrlPr>
-                                <a:rPr lang="en-US" altLang="zh-TW" sz="1869" i="1">
-                                  <a:latin typeface="Cambria Math" panose="02040503050406030204" pitchFamily="18" charset="0"/>
-                                </a:rPr>
-                              </m:ctrlPr>
-                            </m:sSubPr>
-                            <m:e>
-                              <m:acc>
-                                <m:accPr>
-                                  <m:chr m:val="̂"/>
-                                  <m:ctrlPr>
-                                    <a:rPr lang="zh-TW" altLang="en-US" sz="1869" i="1">
-                                      <a:latin typeface="Cambria Math" panose="02040503050406030204" pitchFamily="18" charset="0"/>
-                                    </a:rPr>
-                                  </m:ctrlPr>
-                                </m:accPr>
-                                <m:e>
-                                  <m:r>
-                                    <a:rPr lang="en-US" altLang="zh-TW" sz="1869" i="1">
-                                      <a:latin typeface="Cambria Math" panose="02040503050406030204" pitchFamily="18" charset="0"/>
-                                    </a:rPr>
-                                    <m:t>𝑞</m:t>
-                                  </m:r>
-                                </m:e>
-                              </m:acc>
-                            </m:e>
-                            <m:sub>
-                              <m:r>
-                                <a:rPr lang="en-US" altLang="zh-TW" sz="1869" i="1">
-                                  <a:latin typeface="Cambria Math" panose="02040503050406030204" pitchFamily="18" charset="0"/>
-                                </a:rPr>
-                                <m:t>𝑦</m:t>
-                              </m:r>
-                            </m:sub>
-                          </m:sSub>
-                        </m:oMath>
-                      </m:oMathPara>
-                    </a14:m>
-                    <a:endParaRPr lang="zh-TW" altLang="en-US" sz="1869" dirty="0">
-                      <a:latin typeface="Times New Roman" panose="02020603050405020304" pitchFamily="18" charset="0"/>
-                      <a:cs typeface="Times New Roman" panose="02020603050405020304" pitchFamily="18" charset="0"/>
-                    </a:endParaRPr>
-                  </a:p>
-                </p:txBody>
-              </p:sp>
-            </mc:Choice>
-            <mc:Fallback xmlns="">
-              <p:sp>
-                <p:nvSpPr>
-                  <p:cNvPr id="24" name="矩形 23">
-                    <a:extLst>
-                      <a:ext uri="{FF2B5EF4-FFF2-40B4-BE49-F238E27FC236}">
-                        <a16:creationId xmlns:a16="http://schemas.microsoft.com/office/drawing/2014/main" id="{2103AF37-6CA3-464E-9A8E-A0241C6EAB2F}"/>
-                      </a:ext>
-                    </a:extLst>
-                  </p:cNvPr>
-                  <p:cNvSpPr>
-                    <a:spLocks noRot="1" noChangeAspect="1" noMove="1" noResize="1" noEditPoints="1" noAdjustHandles="1" noChangeArrowheads="1" noChangeShapeType="1" noTextEdit="1"/>
-                  </p:cNvSpPr>
-                  <p:nvPr/>
-                </p:nvSpPr>
-                <p:spPr>
-                  <a:xfrm>
-                    <a:off x="946008" y="3982525"/>
-                    <a:ext cx="493981" cy="402803"/>
-                  </a:xfrm>
-                  <a:prstGeom prst="rect">
-                    <a:avLst/>
-                  </a:prstGeom>
-                  <a:blipFill>
-                    <a:blip r:embed="rId22"/>
-                    <a:stretch>
-                      <a:fillRect t="-1449" r="-13095"/>
-                    </a:stretch>
-                  </a:blipFill>
-                </p:spPr>
-                <p:txBody>
-                  <a:bodyPr/>
-                  <a:lstStyle/>
-                  <a:p>
-                    <a:r>
-                      <a:rPr lang="zh-TW" altLang="en-US">
-                        <a:noFill/>
-                      </a:rPr>
-                      <a:t> </a:t>
-                    </a:r>
-                  </a:p>
-                </p:txBody>
-              </p:sp>
-            </mc:Fallback>
-          </mc:AlternateContent>
-          <mc:AlternateContent xmlns:mc="http://schemas.openxmlformats.org/markup-compatibility/2006" xmlns:a14="http://schemas.microsoft.com/office/drawing/2010/main">
-            <mc:Choice Requires="a14">
-              <p:sp>
-                <p:nvSpPr>
-                  <p:cNvPr id="25" name="矩形 24">
-                    <a:extLst>
-                      <a:ext uri="{FF2B5EF4-FFF2-40B4-BE49-F238E27FC236}">
-                        <a16:creationId xmlns:a16="http://schemas.microsoft.com/office/drawing/2014/main" id="{5DD30E1E-3254-4C6F-8DF1-6F6AA824DBC6}"/>
-                      </a:ext>
-                    </a:extLst>
-                  </p:cNvPr>
-                  <p:cNvSpPr/>
-                  <p:nvPr/>
-                </p:nvSpPr>
-                <p:spPr>
-                  <a:xfrm>
-                    <a:off x="152617" y="3538154"/>
-                    <a:ext cx="1150187" cy="407419"/>
-                  </a:xfrm>
-                  <a:prstGeom prst="rect">
-                    <a:avLst/>
-                  </a:prstGeom>
-                </p:spPr>
-                <p:txBody>
-                  <a:bodyPr wrap="none">
-                    <a:spAutoFit/>
-                  </a:bodyPr>
-                  <a:lstStyle/>
-                  <a:p>
-                    <a:pPr/>
-                    <a14:m>
-                      <m:oMathPara xmlns:m="http://schemas.openxmlformats.org/officeDocument/2006/math">
-                        <m:oMathParaPr>
-                          <m:jc m:val="centerGroup"/>
-                        </m:oMathParaPr>
-                        <m:oMath xmlns:m="http://schemas.openxmlformats.org/officeDocument/2006/math">
-                          <m:r>
-                            <m:rPr>
-                              <m:sty m:val="p"/>
-                            </m:rPr>
-                            <a:rPr lang="en-US" altLang="zh-TW" sz="1662">
-                              <a:latin typeface="Cambria Math" panose="02040503050406030204" pitchFamily="18" charset="0"/>
-                            </a:rPr>
-                            <m:t>Re</m:t>
-                          </m:r>
-                          <m:d>
-                            <m:dPr>
-                              <m:begChr m:val="["/>
-                              <m:endChr m:val="]"/>
-                              <m:ctrlPr>
-                                <a:rPr lang="en-US" altLang="zh-TW" sz="1662" i="1">
-                                  <a:latin typeface="Cambria Math" panose="02040503050406030204" pitchFamily="18" charset="0"/>
-                                </a:rPr>
-                              </m:ctrlPr>
-                            </m:dPr>
-                            <m:e>
-                              <m:sSup>
-                                <m:sSupPr>
-                                  <m:ctrlPr>
-                                    <a:rPr lang="en-US" altLang="zh-TW" sz="1662" i="1">
-                                      <a:latin typeface="Cambria Math" panose="02040503050406030204" pitchFamily="18" charset="0"/>
-                                    </a:rPr>
-                                  </m:ctrlPr>
-                                </m:sSupPr>
-                                <m:e>
-                                  <m:r>
-                                    <a:rPr lang="en-US" altLang="zh-TW" sz="1662" i="1">
-                                      <a:latin typeface="Cambria Math" panose="02040503050406030204" pitchFamily="18" charset="0"/>
-                                    </a:rPr>
-                                    <m:t>𝑒</m:t>
-                                  </m:r>
-                                </m:e>
-                                <m:sup>
-                                  <m:r>
-                                    <a:rPr lang="en-US" altLang="zh-TW" sz="1662" i="1">
-                                      <a:latin typeface="Cambria Math" panose="02040503050406030204" pitchFamily="18" charset="0"/>
-                                    </a:rPr>
-                                    <m:t>𝑖</m:t>
-                                  </m:r>
-                                  <m:r>
-                                    <a:rPr lang="en-US" altLang="zh-TW" sz="1662" i="1" dirty="0">
-                                      <a:latin typeface="Cambria Math" panose="02040503050406030204" pitchFamily="18" charset="0"/>
-                                    </a:rPr>
-                                    <m:t>ℓ</m:t>
-                                  </m:r>
-                                  <m:sSub>
-                                    <m:sSubPr>
-                                      <m:ctrlPr>
-                                        <a:rPr lang="en-US" altLang="zh-TW" sz="1662" i="1">
-                                          <a:latin typeface="Cambria Math" panose="02040503050406030204" pitchFamily="18" charset="0"/>
-                                        </a:rPr>
-                                      </m:ctrlPr>
-                                    </m:sSubPr>
-                                    <m:e>
-                                      <m:r>
-                                        <a:rPr lang="en-US" altLang="zh-TW" sz="1662" i="1">
-                                          <a:latin typeface="Cambria Math" panose="02040503050406030204" pitchFamily="18" charset="0"/>
-                                        </a:rPr>
-                                        <m:t>𝜙</m:t>
-                                      </m:r>
-                                    </m:e>
-                                    <m:sub>
-                                      <m:sSub>
-                                        <m:sSubPr>
-                                          <m:ctrlPr>
-                                            <a:rPr lang="en-US" altLang="zh-TW" sz="1662" i="1" dirty="0">
-                                              <a:latin typeface="Cambria Math" panose="02040503050406030204" pitchFamily="18" charset="0"/>
-                                            </a:rPr>
-                                          </m:ctrlPr>
-                                        </m:sSubPr>
-                                        <m:e>
-                                          <m:r>
-                                            <a:rPr lang="en-US" altLang="zh-TW" sz="1662" b="1" i="1" dirty="0">
-                                              <a:latin typeface="Cambria Math" panose="02040503050406030204" pitchFamily="18" charset="0"/>
-                                            </a:rPr>
-                                            <m:t>𝒒</m:t>
-                                          </m:r>
-                                        </m:e>
-                                        <m:sub>
-                                          <m:r>
-                                            <a:rPr lang="en-US" altLang="zh-TW" sz="1662" i="1" dirty="0">
-                                              <a:latin typeface="Cambria Math" panose="02040503050406030204" pitchFamily="18" charset="0"/>
-                                            </a:rPr>
-                                            <m:t>∥</m:t>
-                                          </m:r>
-                                        </m:sub>
-                                      </m:sSub>
-                                    </m:sub>
-                                  </m:sSub>
-                                </m:sup>
-                              </m:sSup>
-                            </m:e>
-                          </m:d>
-                        </m:oMath>
-                      </m:oMathPara>
-                    </a14:m>
-                    <a:endParaRPr lang="zh-TW" altLang="en-US" sz="1662" dirty="0">
-                      <a:latin typeface="Times New Roman" panose="02020603050405020304" pitchFamily="18" charset="0"/>
-                      <a:cs typeface="Times New Roman" panose="02020603050405020304" pitchFamily="18" charset="0"/>
-                    </a:endParaRPr>
-                  </a:p>
-                </p:txBody>
-              </p:sp>
-            </mc:Choice>
-            <mc:Fallback xmlns="">
-              <p:sp>
-                <p:nvSpPr>
-                  <p:cNvPr id="25" name="矩形 24">
-                    <a:extLst>
-                      <a:ext uri="{FF2B5EF4-FFF2-40B4-BE49-F238E27FC236}">
-                        <a16:creationId xmlns:a16="http://schemas.microsoft.com/office/drawing/2014/main" id="{5DD30E1E-3254-4C6F-8DF1-6F6AA824DBC6}"/>
-                      </a:ext>
-                    </a:extLst>
-                  </p:cNvPr>
-                  <p:cNvSpPr>
-                    <a:spLocks noRot="1" noChangeAspect="1" noMove="1" noResize="1" noEditPoints="1" noAdjustHandles="1" noChangeArrowheads="1" noChangeShapeType="1" noTextEdit="1"/>
-                  </p:cNvSpPr>
-                  <p:nvPr/>
-                </p:nvSpPr>
-                <p:spPr>
-                  <a:xfrm>
-                    <a:off x="152617" y="3538154"/>
-                    <a:ext cx="1150187" cy="407419"/>
-                  </a:xfrm>
-                  <a:prstGeom prst="rect">
-                    <a:avLst/>
-                  </a:prstGeom>
-                  <a:blipFill>
-                    <a:blip r:embed="rId23"/>
-                    <a:stretch>
-                      <a:fillRect/>
-                    </a:stretch>
-                  </a:blipFill>
-                </p:spPr>
-                <p:txBody>
-                  <a:bodyPr/>
-                  <a:lstStyle/>
-                  <a:p>
-                    <a:r>
-                      <a:rPr lang="zh-TW" altLang="en-US">
-                        <a:noFill/>
-                      </a:rPr>
-                      <a:t> </a:t>
-                    </a:r>
-                  </a:p>
-                </p:txBody>
-              </p:sp>
-            </mc:Fallback>
-          </mc:AlternateContent>
-          <p:sp>
-            <p:nvSpPr>
-              <p:cNvPr id="45" name="矩形 44">
-                <a:extLst>
-                  <a:ext uri="{FF2B5EF4-FFF2-40B4-BE49-F238E27FC236}">
-                    <a16:creationId xmlns:a16="http://schemas.microsoft.com/office/drawing/2014/main" id="{2667D122-1621-490B-9CDD-F3F9D5F3FF97}"/>
+                    <a16:creationId xmlns:a16="http://schemas.microsoft.com/office/drawing/2014/main" id="{5F2B5097-B455-4243-9F4D-7F89C6F0E6A4}"/>
                   </a:ext>
                 </a:extLst>
               </p:cNvPr>
@@ -5302,9 +3137,9 @@
               <p:nvPr/>
             </p:nvSpPr>
             <p:spPr>
-              <a:xfrm rot="5400000">
-                <a:off x="11158946" y="1665480"/>
-                <a:ext cx="1382110" cy="348109"/>
+              <a:xfrm>
+                <a:off x="1659408" y="946131"/>
+                <a:ext cx="736547" cy="342401"/>
               </a:xfrm>
               <a:prstGeom prst="rect">
                 <a:avLst/>
@@ -5316,26 +3151,108 @@
               </a:bodyPr>
               <a:lstStyle/>
               <a:p>
-                <a:r>
-                  <a:rPr lang="en-US" altLang="zh-TW" sz="1662" dirty="0">
-                    <a:latin typeface="Times New Roman" panose="02020603050405020304" pitchFamily="18" charset="0"/>
-                    <a:cs typeface="Times New Roman" panose="02020603050405020304" pitchFamily="18" charset="0"/>
-                  </a:rPr>
-                  <a:t>arbitrary units</a:t>
-                </a:r>
-                <a:endParaRPr lang="zh-TW" altLang="en-US" sz="1662" dirty="0">
+                <a:pPr/>
+                <a14:m>
+                  <m:oMathPara xmlns:m="http://schemas.openxmlformats.org/officeDocument/2006/math">
+                    <m:oMathParaPr>
+                      <m:jc m:val="centerGroup"/>
+                    </m:oMathParaPr>
+                    <m:oMath xmlns:m="http://schemas.openxmlformats.org/officeDocument/2006/math">
+                      <m:sSub>
+                        <m:sSubPr>
+                          <m:ctrlPr>
+                            <a:rPr lang="en-US" altLang="zh-TW" sz="1625" i="1">
+                              <a:latin typeface="Cambria Math" panose="02040503050406030204" pitchFamily="18" charset="0"/>
+                            </a:rPr>
+                          </m:ctrlPr>
+                        </m:sSubPr>
+                        <m:e>
+                          <m:r>
+                            <a:rPr lang="en-US" altLang="zh-TW" sz="1625" i="1">
+                              <a:latin typeface="Cambria Math" panose="02040503050406030204" pitchFamily="18" charset="0"/>
+                            </a:rPr>
+                            <m:t>0.1</m:t>
+                          </m:r>
+                          <m:r>
+                            <a:rPr lang="en-US" altLang="zh-TW" sz="1625" i="1">
+                              <a:latin typeface="Cambria Math" panose="02040503050406030204" pitchFamily="18" charset="0"/>
+                            </a:rPr>
+                            <m:t>𝑄</m:t>
+                          </m:r>
+                        </m:e>
+                        <m:sub>
+                          <m:r>
+                            <a:rPr lang="en-US" altLang="zh-TW" sz="1625" i="1">
+                              <a:latin typeface="Cambria Math" panose="02040503050406030204" pitchFamily="18" charset="0"/>
+                            </a:rPr>
+                            <m:t>𝑐</m:t>
+                          </m:r>
+                        </m:sub>
+                      </m:sSub>
+                    </m:oMath>
+                  </m:oMathPara>
+                </a14:m>
+                <a:endParaRPr lang="zh-TW" altLang="en-US" sz="1625" dirty="0">
                   <a:latin typeface="Times New Roman" panose="02020603050405020304" pitchFamily="18" charset="0"/>
                   <a:cs typeface="Times New Roman" panose="02020603050405020304" pitchFamily="18" charset="0"/>
                 </a:endParaRPr>
               </a:p>
             </p:txBody>
           </p:sp>
+        </mc:Choice>
+        <mc:Fallback>
           <p:sp>
             <p:nvSpPr>
-              <p:cNvPr id="46" name="矩形 45">
+              <p:cNvPr id="5" name="矩形 4">
                 <a:extLst>
                   <a:ext uri="{FF2B5EF4-FFF2-40B4-BE49-F238E27FC236}">
-                    <a16:creationId xmlns:a16="http://schemas.microsoft.com/office/drawing/2014/main" id="{F0FD9A8B-297D-4E45-AB13-1BDB407EEF7E}"/>
+                    <a16:creationId xmlns:a16="http://schemas.microsoft.com/office/drawing/2014/main" id="{5F2B5097-B455-4243-9F4D-7F89C6F0E6A4}"/>
+                  </a:ext>
+                </a:extLst>
+              </p:cNvPr>
+              <p:cNvSpPr>
+                <a:spLocks noRot="1" noChangeAspect="1" noMove="1" noResize="1" noEditPoints="1" noAdjustHandles="1" noChangeArrowheads="1" noChangeShapeType="1" noTextEdit="1"/>
+              </p:cNvSpPr>
+              <p:nvPr/>
+            </p:nvSpPr>
+            <p:spPr>
+              <a:xfrm>
+                <a:off x="1659408" y="946131"/>
+                <a:ext cx="736547" cy="342401"/>
+              </a:xfrm>
+              <a:prstGeom prst="rect">
+                <a:avLst/>
+              </a:prstGeom>
+              <a:blipFill>
+                <a:blip r:embed="rId4"/>
+                <a:stretch>
+                  <a:fillRect b="-10714"/>
+                </a:stretch>
+              </a:blipFill>
+            </p:spPr>
+            <p:txBody>
+              <a:bodyPr/>
+              <a:lstStyle/>
+              <a:p>
+                <a:r>
+                  <a:rPr lang="zh-TW" altLang="en-US">
+                    <a:noFill/>
+                  </a:rPr>
+                  <a:t> </a:t>
+                </a:r>
+              </a:p>
+            </p:txBody>
+          </p:sp>
+        </mc:Fallback>
+      </mc:AlternateContent>
+      <mc:AlternateContent xmlns:mc="http://schemas.openxmlformats.org/markup-compatibility/2006">
+        <mc:Choice xmlns:a14="http://schemas.microsoft.com/office/drawing/2010/main" Requires="a14">
+          <p:sp>
+            <p:nvSpPr>
+              <p:cNvPr id="7" name="矩形 6">
+                <a:extLst>
+                  <a:ext uri="{FF2B5EF4-FFF2-40B4-BE49-F238E27FC236}">
+                    <a16:creationId xmlns:a16="http://schemas.microsoft.com/office/drawing/2014/main" id="{95DBBAD4-C131-4ACA-90FC-C0E0DB29EE2C}"/>
                   </a:ext>
                 </a:extLst>
               </p:cNvPr>
@@ -5343,9 +3260,9 @@
               <p:nvPr/>
             </p:nvSpPr>
             <p:spPr>
-              <a:xfrm rot="5400000">
-                <a:off x="11158946" y="3512683"/>
-                <a:ext cx="1382110" cy="348109"/>
+              <a:xfrm>
+                <a:off x="1326058" y="1320276"/>
+                <a:ext cx="731674" cy="342401"/>
               </a:xfrm>
               <a:prstGeom prst="rect">
                 <a:avLst/>
@@ -5357,67 +3274,1607 @@
               </a:bodyPr>
               <a:lstStyle/>
               <a:p>
-                <a:r>
-                  <a:rPr lang="en-US" altLang="zh-TW" sz="1662" dirty="0">
-                    <a:latin typeface="Times New Roman" panose="02020603050405020304" pitchFamily="18" charset="0"/>
-                    <a:cs typeface="Times New Roman" panose="02020603050405020304" pitchFamily="18" charset="0"/>
-                  </a:rPr>
-                  <a:t>arbitrary units</a:t>
-                </a:r>
-                <a:endParaRPr lang="zh-TW" altLang="en-US" sz="1662" dirty="0">
+                <a:pPr/>
+                <a14:m>
+                  <m:oMathPara xmlns:m="http://schemas.openxmlformats.org/officeDocument/2006/math">
+                    <m:oMathParaPr>
+                      <m:jc m:val="centerGroup"/>
+                    </m:oMathParaPr>
+                    <m:oMath xmlns:m="http://schemas.openxmlformats.org/officeDocument/2006/math">
+                      <m:r>
+                        <a:rPr lang="en-US" altLang="zh-TW" sz="1625" i="1">
+                          <a:latin typeface="Cambria Math" panose="02040503050406030204" pitchFamily="18" charset="0"/>
+                        </a:rPr>
+                        <m:t>ℓ=0</m:t>
+                      </m:r>
+                    </m:oMath>
+                  </m:oMathPara>
+                </a14:m>
+                <a:endParaRPr lang="zh-TW" altLang="en-US" sz="1625" dirty="0">
                   <a:latin typeface="Times New Roman" panose="02020603050405020304" pitchFamily="18" charset="0"/>
                   <a:cs typeface="Times New Roman" panose="02020603050405020304" pitchFamily="18" charset="0"/>
                 </a:endParaRPr>
               </a:p>
             </p:txBody>
           </p:sp>
-          <p:pic>
-            <p:nvPicPr>
-              <p:cNvPr id="30" name="圖片 29">
+        </mc:Choice>
+        <mc:Fallback>
+          <p:sp>
+            <p:nvSpPr>
+              <p:cNvPr id="7" name="矩形 6">
                 <a:extLst>
                   <a:ext uri="{FF2B5EF4-FFF2-40B4-BE49-F238E27FC236}">
-                    <a16:creationId xmlns:a16="http://schemas.microsoft.com/office/drawing/2014/main" id="{2D04DA75-0189-46D1-8CA0-0BAE4AAE5968}"/>
+                    <a16:creationId xmlns:a16="http://schemas.microsoft.com/office/drawing/2014/main" id="{95DBBAD4-C131-4ACA-90FC-C0E0DB29EE2C}"/>
                   </a:ext>
                 </a:extLst>
               </p:cNvPr>
-              <p:cNvPicPr>
-                <a:picLocks noChangeAspect="1"/>
-              </p:cNvPicPr>
+              <p:cNvSpPr>
+                <a:spLocks noRot="1" noChangeAspect="1" noMove="1" noResize="1" noEditPoints="1" noAdjustHandles="1" noChangeArrowheads="1" noChangeShapeType="1" noTextEdit="1"/>
+              </p:cNvSpPr>
               <p:nvPr/>
-            </p:nvPicPr>
-            <p:blipFill rotWithShape="1">
-              <a:blip r:embed="rId24">
-                <a:clrChange>
-                  <a:clrFrom>
-                    <a:srgbClr val="FFFFFF"/>
-                  </a:clrFrom>
-                  <a:clrTo>
-                    <a:srgbClr val="FFFFFF">
-                      <a:alpha val="0"/>
-                    </a:srgbClr>
-                  </a:clrTo>
-                </a:clrChange>
+            </p:nvSpPr>
+            <p:spPr>
+              <a:xfrm>
+                <a:off x="1326058" y="1320276"/>
+                <a:ext cx="731674" cy="342401"/>
+              </a:xfrm>
+              <a:prstGeom prst="rect">
+                <a:avLst/>
+              </a:prstGeom>
+              <a:blipFill>
+                <a:blip r:embed="rId5"/>
+                <a:stretch>
+                  <a:fillRect/>
+                </a:stretch>
+              </a:blipFill>
+            </p:spPr>
+            <p:txBody>
+              <a:bodyPr/>
+              <a:lstStyle/>
+              <a:p>
+                <a:r>
+                  <a:rPr lang="zh-TW" altLang="en-US">
+                    <a:noFill/>
+                  </a:rPr>
+                  <a:t> </a:t>
+                </a:r>
+              </a:p>
+            </p:txBody>
+          </p:sp>
+        </mc:Fallback>
+      </mc:AlternateContent>
+      <mc:AlternateContent xmlns:mc="http://schemas.openxmlformats.org/markup-compatibility/2006">
+        <mc:Choice xmlns:a14="http://schemas.microsoft.com/office/drawing/2010/main" Requires="a14">
+          <p:sp>
+            <p:nvSpPr>
+              <p:cNvPr id="8" name="矩形 7">
                 <a:extLst>
-                  <a:ext uri="{28A0092B-C50C-407E-A947-70E740481C1C}">
-                    <a14:useLocalDpi xmlns:a14="http://schemas.microsoft.com/office/drawing/2010/main" val="0"/>
+                  <a:ext uri="{FF2B5EF4-FFF2-40B4-BE49-F238E27FC236}">
+                    <a16:creationId xmlns:a16="http://schemas.microsoft.com/office/drawing/2014/main" id="{616D4D42-573F-41D7-817B-D2C9850F5244}"/>
                   </a:ext>
                 </a:extLst>
-              </a:blip>
-              <a:srcRect l="85265" r="8888"/>
-              <a:stretch/>
-            </p:blipFill>
+              </p:cNvPr>
+              <p:cNvSpPr/>
+              <p:nvPr/>
+            </p:nvSpPr>
             <p:spPr>
               <a:xfrm>
-                <a:off x="11096724" y="2758500"/>
-                <a:ext cx="685701" cy="1954800"/>
+                <a:off x="2719407" y="1320276"/>
+                <a:ext cx="731674" cy="342401"/>
               </a:xfrm>
               <a:prstGeom prst="rect">
                 <a:avLst/>
               </a:prstGeom>
             </p:spPr>
-          </p:pic>
-        </p:grpSp>
-      </p:grpSp>
+            <p:txBody>
+              <a:bodyPr wrap="none">
+                <a:spAutoFit/>
+              </a:bodyPr>
+              <a:lstStyle/>
+              <a:p>
+                <a:pPr/>
+                <a14:m>
+                  <m:oMathPara xmlns:m="http://schemas.openxmlformats.org/officeDocument/2006/math">
+                    <m:oMathParaPr>
+                      <m:jc m:val="centerGroup"/>
+                    </m:oMathParaPr>
+                    <m:oMath xmlns:m="http://schemas.openxmlformats.org/officeDocument/2006/math">
+                      <m:r>
+                        <a:rPr lang="en-US" altLang="zh-TW" sz="1625" i="1">
+                          <a:latin typeface="Cambria Math" panose="02040503050406030204" pitchFamily="18" charset="0"/>
+                        </a:rPr>
+                        <m:t>ℓ=1</m:t>
+                      </m:r>
+                    </m:oMath>
+                  </m:oMathPara>
+                </a14:m>
+                <a:endParaRPr lang="zh-TW" altLang="en-US" sz="1625" dirty="0">
+                  <a:latin typeface="Times New Roman" panose="02020603050405020304" pitchFamily="18" charset="0"/>
+                  <a:cs typeface="Times New Roman" panose="02020603050405020304" pitchFamily="18" charset="0"/>
+                </a:endParaRPr>
+              </a:p>
+            </p:txBody>
+          </p:sp>
+        </mc:Choice>
+        <mc:Fallback>
+          <p:sp>
+            <p:nvSpPr>
+              <p:cNvPr id="8" name="矩形 7">
+                <a:extLst>
+                  <a:ext uri="{FF2B5EF4-FFF2-40B4-BE49-F238E27FC236}">
+                    <a16:creationId xmlns:a16="http://schemas.microsoft.com/office/drawing/2014/main" id="{616D4D42-573F-41D7-817B-D2C9850F5244}"/>
+                  </a:ext>
+                </a:extLst>
+              </p:cNvPr>
+              <p:cNvSpPr>
+                <a:spLocks noRot="1" noChangeAspect="1" noMove="1" noResize="1" noEditPoints="1" noAdjustHandles="1" noChangeArrowheads="1" noChangeShapeType="1" noTextEdit="1"/>
+              </p:cNvSpPr>
+              <p:nvPr/>
+            </p:nvSpPr>
+            <p:spPr>
+              <a:xfrm>
+                <a:off x="2719407" y="1320276"/>
+                <a:ext cx="731674" cy="342401"/>
+              </a:xfrm>
+              <a:prstGeom prst="rect">
+                <a:avLst/>
+              </a:prstGeom>
+              <a:blipFill>
+                <a:blip r:embed="rId6"/>
+                <a:stretch>
+                  <a:fillRect/>
+                </a:stretch>
+              </a:blipFill>
+            </p:spPr>
+            <p:txBody>
+              <a:bodyPr/>
+              <a:lstStyle/>
+              <a:p>
+                <a:r>
+                  <a:rPr lang="zh-TW" altLang="en-US">
+                    <a:noFill/>
+                  </a:rPr>
+                  <a:t> </a:t>
+                </a:r>
+              </a:p>
+            </p:txBody>
+          </p:sp>
+        </mc:Fallback>
+      </mc:AlternateContent>
+      <mc:AlternateContent xmlns:mc="http://schemas.openxmlformats.org/markup-compatibility/2006">
+        <mc:Choice xmlns:a14="http://schemas.microsoft.com/office/drawing/2010/main" Requires="a14">
+          <p:sp>
+            <p:nvSpPr>
+              <p:cNvPr id="9" name="矩形 8">
+                <a:extLst>
+                  <a:ext uri="{FF2B5EF4-FFF2-40B4-BE49-F238E27FC236}">
+                    <a16:creationId xmlns:a16="http://schemas.microsoft.com/office/drawing/2014/main" id="{AAFD892F-F7A7-40D0-81F1-3F88F68F50FD}"/>
+                  </a:ext>
+                </a:extLst>
+              </p:cNvPr>
+              <p:cNvSpPr/>
+              <p:nvPr/>
+            </p:nvSpPr>
+            <p:spPr>
+              <a:xfrm>
+                <a:off x="4112758" y="1320276"/>
+                <a:ext cx="731674" cy="342401"/>
+              </a:xfrm>
+              <a:prstGeom prst="rect">
+                <a:avLst/>
+              </a:prstGeom>
+            </p:spPr>
+            <p:txBody>
+              <a:bodyPr wrap="none">
+                <a:spAutoFit/>
+              </a:bodyPr>
+              <a:lstStyle/>
+              <a:p>
+                <a:pPr/>
+                <a14:m>
+                  <m:oMathPara xmlns:m="http://schemas.openxmlformats.org/officeDocument/2006/math">
+                    <m:oMathParaPr>
+                      <m:jc m:val="centerGroup"/>
+                    </m:oMathParaPr>
+                    <m:oMath xmlns:m="http://schemas.openxmlformats.org/officeDocument/2006/math">
+                      <m:r>
+                        <a:rPr lang="en-US" altLang="zh-TW" sz="1625" i="1">
+                          <a:latin typeface="Cambria Math" panose="02040503050406030204" pitchFamily="18" charset="0"/>
+                        </a:rPr>
+                        <m:t>ℓ=2</m:t>
+                      </m:r>
+                    </m:oMath>
+                  </m:oMathPara>
+                </a14:m>
+                <a:endParaRPr lang="zh-TW" altLang="en-US" sz="1625" dirty="0">
+                  <a:latin typeface="Times New Roman" panose="02020603050405020304" pitchFamily="18" charset="0"/>
+                  <a:cs typeface="Times New Roman" panose="02020603050405020304" pitchFamily="18" charset="0"/>
+                </a:endParaRPr>
+              </a:p>
+            </p:txBody>
+          </p:sp>
+        </mc:Choice>
+        <mc:Fallback>
+          <p:sp>
+            <p:nvSpPr>
+              <p:cNvPr id="9" name="矩形 8">
+                <a:extLst>
+                  <a:ext uri="{FF2B5EF4-FFF2-40B4-BE49-F238E27FC236}">
+                    <a16:creationId xmlns:a16="http://schemas.microsoft.com/office/drawing/2014/main" id="{AAFD892F-F7A7-40D0-81F1-3F88F68F50FD}"/>
+                  </a:ext>
+                </a:extLst>
+              </p:cNvPr>
+              <p:cNvSpPr>
+                <a:spLocks noRot="1" noChangeAspect="1" noMove="1" noResize="1" noEditPoints="1" noAdjustHandles="1" noChangeArrowheads="1" noChangeShapeType="1" noTextEdit="1"/>
+              </p:cNvSpPr>
+              <p:nvPr/>
+            </p:nvSpPr>
+            <p:spPr>
+              <a:xfrm>
+                <a:off x="4112758" y="1320276"/>
+                <a:ext cx="731674" cy="342401"/>
+              </a:xfrm>
+              <a:prstGeom prst="rect">
+                <a:avLst/>
+              </a:prstGeom>
+              <a:blipFill>
+                <a:blip r:embed="rId7"/>
+                <a:stretch>
+                  <a:fillRect/>
+                </a:stretch>
+              </a:blipFill>
+            </p:spPr>
+            <p:txBody>
+              <a:bodyPr/>
+              <a:lstStyle/>
+              <a:p>
+                <a:r>
+                  <a:rPr lang="zh-TW" altLang="en-US">
+                    <a:noFill/>
+                  </a:rPr>
+                  <a:t> </a:t>
+                </a:r>
+              </a:p>
+            </p:txBody>
+          </p:sp>
+        </mc:Fallback>
+      </mc:AlternateContent>
+      <mc:AlternateContent xmlns:mc="http://schemas.openxmlformats.org/markup-compatibility/2006">
+        <mc:Choice xmlns:a14="http://schemas.microsoft.com/office/drawing/2010/main" Requires="a14">
+          <p:sp>
+            <p:nvSpPr>
+              <p:cNvPr id="10" name="矩形 9">
+                <a:extLst>
+                  <a:ext uri="{FF2B5EF4-FFF2-40B4-BE49-F238E27FC236}">
+                    <a16:creationId xmlns:a16="http://schemas.microsoft.com/office/drawing/2014/main" id="{F881D687-EBB4-479A-ACED-8B11403DD29C}"/>
+                  </a:ext>
+                </a:extLst>
+              </p:cNvPr>
+              <p:cNvSpPr/>
+              <p:nvPr/>
+            </p:nvSpPr>
+            <p:spPr>
+              <a:xfrm>
+                <a:off x="5506107" y="1320276"/>
+                <a:ext cx="731674" cy="342401"/>
+              </a:xfrm>
+              <a:prstGeom prst="rect">
+                <a:avLst/>
+              </a:prstGeom>
+            </p:spPr>
+            <p:txBody>
+              <a:bodyPr wrap="none">
+                <a:spAutoFit/>
+              </a:bodyPr>
+              <a:lstStyle/>
+              <a:p>
+                <a:pPr/>
+                <a14:m>
+                  <m:oMathPara xmlns:m="http://schemas.openxmlformats.org/officeDocument/2006/math">
+                    <m:oMathParaPr>
+                      <m:jc m:val="centerGroup"/>
+                    </m:oMathParaPr>
+                    <m:oMath xmlns:m="http://schemas.openxmlformats.org/officeDocument/2006/math">
+                      <m:r>
+                        <a:rPr lang="en-US" altLang="zh-TW" sz="1625" i="1">
+                          <a:latin typeface="Cambria Math" panose="02040503050406030204" pitchFamily="18" charset="0"/>
+                        </a:rPr>
+                        <m:t>ℓ=3</m:t>
+                      </m:r>
+                    </m:oMath>
+                  </m:oMathPara>
+                </a14:m>
+                <a:endParaRPr lang="zh-TW" altLang="en-US" sz="1625" dirty="0">
+                  <a:latin typeface="Times New Roman" panose="02020603050405020304" pitchFamily="18" charset="0"/>
+                  <a:cs typeface="Times New Roman" panose="02020603050405020304" pitchFamily="18" charset="0"/>
+                </a:endParaRPr>
+              </a:p>
+            </p:txBody>
+          </p:sp>
+        </mc:Choice>
+        <mc:Fallback>
+          <p:sp>
+            <p:nvSpPr>
+              <p:cNvPr id="10" name="矩形 9">
+                <a:extLst>
+                  <a:ext uri="{FF2B5EF4-FFF2-40B4-BE49-F238E27FC236}">
+                    <a16:creationId xmlns:a16="http://schemas.microsoft.com/office/drawing/2014/main" id="{F881D687-EBB4-479A-ACED-8B11403DD29C}"/>
+                  </a:ext>
+                </a:extLst>
+              </p:cNvPr>
+              <p:cNvSpPr>
+                <a:spLocks noRot="1" noChangeAspect="1" noMove="1" noResize="1" noEditPoints="1" noAdjustHandles="1" noChangeArrowheads="1" noChangeShapeType="1" noTextEdit="1"/>
+              </p:cNvSpPr>
+              <p:nvPr/>
+            </p:nvSpPr>
+            <p:spPr>
+              <a:xfrm>
+                <a:off x="5506107" y="1320276"/>
+                <a:ext cx="731674" cy="342401"/>
+              </a:xfrm>
+              <a:prstGeom prst="rect">
+                <a:avLst/>
+              </a:prstGeom>
+              <a:blipFill>
+                <a:blip r:embed="rId8"/>
+                <a:stretch>
+                  <a:fillRect/>
+                </a:stretch>
+              </a:blipFill>
+            </p:spPr>
+            <p:txBody>
+              <a:bodyPr/>
+              <a:lstStyle/>
+              <a:p>
+                <a:r>
+                  <a:rPr lang="zh-TW" altLang="en-US">
+                    <a:noFill/>
+                  </a:rPr>
+                  <a:t> </a:t>
+                </a:r>
+              </a:p>
+            </p:txBody>
+          </p:sp>
+        </mc:Fallback>
+      </mc:AlternateContent>
+      <mc:AlternateContent xmlns:mc="http://schemas.openxmlformats.org/markup-compatibility/2006">
+        <mc:Choice xmlns:a14="http://schemas.microsoft.com/office/drawing/2010/main" Requires="a14">
+          <p:sp>
+            <p:nvSpPr>
+              <p:cNvPr id="11" name="矩形 10">
+                <a:extLst>
+                  <a:ext uri="{FF2B5EF4-FFF2-40B4-BE49-F238E27FC236}">
+                    <a16:creationId xmlns:a16="http://schemas.microsoft.com/office/drawing/2014/main" id="{6327670E-C918-49BB-AF44-D80342753882}"/>
+                  </a:ext>
+                </a:extLst>
+              </p:cNvPr>
+              <p:cNvSpPr/>
+              <p:nvPr/>
+            </p:nvSpPr>
+            <p:spPr>
+              <a:xfrm>
+                <a:off x="6899458" y="1320276"/>
+                <a:ext cx="731674" cy="342401"/>
+              </a:xfrm>
+              <a:prstGeom prst="rect">
+                <a:avLst/>
+              </a:prstGeom>
+            </p:spPr>
+            <p:txBody>
+              <a:bodyPr wrap="none">
+                <a:spAutoFit/>
+              </a:bodyPr>
+              <a:lstStyle/>
+              <a:p>
+                <a:pPr/>
+                <a14:m>
+                  <m:oMathPara xmlns:m="http://schemas.openxmlformats.org/officeDocument/2006/math">
+                    <m:oMathParaPr>
+                      <m:jc m:val="centerGroup"/>
+                    </m:oMathParaPr>
+                    <m:oMath xmlns:m="http://schemas.openxmlformats.org/officeDocument/2006/math">
+                      <m:r>
+                        <a:rPr lang="en-US" altLang="zh-TW" sz="1625" i="1">
+                          <a:latin typeface="Cambria Math" panose="02040503050406030204" pitchFamily="18" charset="0"/>
+                        </a:rPr>
+                        <m:t>ℓ=4</m:t>
+                      </m:r>
+                    </m:oMath>
+                  </m:oMathPara>
+                </a14:m>
+                <a:endParaRPr lang="zh-TW" altLang="en-US" sz="1625" dirty="0">
+                  <a:latin typeface="Times New Roman" panose="02020603050405020304" pitchFamily="18" charset="0"/>
+                  <a:cs typeface="Times New Roman" panose="02020603050405020304" pitchFamily="18" charset="0"/>
+                </a:endParaRPr>
+              </a:p>
+            </p:txBody>
+          </p:sp>
+        </mc:Choice>
+        <mc:Fallback>
+          <p:sp>
+            <p:nvSpPr>
+              <p:cNvPr id="11" name="矩形 10">
+                <a:extLst>
+                  <a:ext uri="{FF2B5EF4-FFF2-40B4-BE49-F238E27FC236}">
+                    <a16:creationId xmlns:a16="http://schemas.microsoft.com/office/drawing/2014/main" id="{6327670E-C918-49BB-AF44-D80342753882}"/>
+                  </a:ext>
+                </a:extLst>
+              </p:cNvPr>
+              <p:cNvSpPr>
+                <a:spLocks noRot="1" noChangeAspect="1" noMove="1" noResize="1" noEditPoints="1" noAdjustHandles="1" noChangeArrowheads="1" noChangeShapeType="1" noTextEdit="1"/>
+              </p:cNvSpPr>
+              <p:nvPr/>
+            </p:nvSpPr>
+            <p:spPr>
+              <a:xfrm>
+                <a:off x="6899458" y="1320276"/>
+                <a:ext cx="731674" cy="342401"/>
+              </a:xfrm>
+              <a:prstGeom prst="rect">
+                <a:avLst/>
+              </a:prstGeom>
+              <a:blipFill>
+                <a:blip r:embed="rId9"/>
+                <a:stretch>
+                  <a:fillRect/>
+                </a:stretch>
+              </a:blipFill>
+            </p:spPr>
+            <p:txBody>
+              <a:bodyPr/>
+              <a:lstStyle/>
+              <a:p>
+                <a:r>
+                  <a:rPr lang="zh-TW" altLang="en-US">
+                    <a:noFill/>
+                  </a:rPr>
+                  <a:t> </a:t>
+                </a:r>
+              </a:p>
+            </p:txBody>
+          </p:sp>
+        </mc:Fallback>
+      </mc:AlternateContent>
+      <mc:AlternateContent xmlns:mc="http://schemas.openxmlformats.org/markup-compatibility/2006">
+        <mc:Choice xmlns:a14="http://schemas.microsoft.com/office/drawing/2010/main" Requires="a14">
+          <p:sp>
+            <p:nvSpPr>
+              <p:cNvPr id="12" name="矩形 11">
+                <a:extLst>
+                  <a:ext uri="{FF2B5EF4-FFF2-40B4-BE49-F238E27FC236}">
+                    <a16:creationId xmlns:a16="http://schemas.microsoft.com/office/drawing/2014/main" id="{457DBC5B-32AA-48F2-92AC-D6F076A05411}"/>
+                  </a:ext>
+                </a:extLst>
+              </p:cNvPr>
+              <p:cNvSpPr/>
+              <p:nvPr/>
+            </p:nvSpPr>
+            <p:spPr>
+              <a:xfrm>
+                <a:off x="8292809" y="1320276"/>
+                <a:ext cx="731674" cy="342401"/>
+              </a:xfrm>
+              <a:prstGeom prst="rect">
+                <a:avLst/>
+              </a:prstGeom>
+            </p:spPr>
+            <p:txBody>
+              <a:bodyPr wrap="none">
+                <a:spAutoFit/>
+              </a:bodyPr>
+              <a:lstStyle/>
+              <a:p>
+                <a:pPr/>
+                <a14:m>
+                  <m:oMathPara xmlns:m="http://schemas.openxmlformats.org/officeDocument/2006/math">
+                    <m:oMathParaPr>
+                      <m:jc m:val="centerGroup"/>
+                    </m:oMathParaPr>
+                    <m:oMath xmlns:m="http://schemas.openxmlformats.org/officeDocument/2006/math">
+                      <m:r>
+                        <a:rPr lang="en-US" altLang="zh-TW" sz="1625" i="1">
+                          <a:latin typeface="Cambria Math" panose="02040503050406030204" pitchFamily="18" charset="0"/>
+                        </a:rPr>
+                        <m:t>ℓ=5</m:t>
+                      </m:r>
+                    </m:oMath>
+                  </m:oMathPara>
+                </a14:m>
+                <a:endParaRPr lang="zh-TW" altLang="en-US" sz="1625" dirty="0">
+                  <a:latin typeface="Times New Roman" panose="02020603050405020304" pitchFamily="18" charset="0"/>
+                  <a:cs typeface="Times New Roman" panose="02020603050405020304" pitchFamily="18" charset="0"/>
+                </a:endParaRPr>
+              </a:p>
+            </p:txBody>
+          </p:sp>
+        </mc:Choice>
+        <mc:Fallback>
+          <p:sp>
+            <p:nvSpPr>
+              <p:cNvPr id="12" name="矩形 11">
+                <a:extLst>
+                  <a:ext uri="{FF2B5EF4-FFF2-40B4-BE49-F238E27FC236}">
+                    <a16:creationId xmlns:a16="http://schemas.microsoft.com/office/drawing/2014/main" id="{457DBC5B-32AA-48F2-92AC-D6F076A05411}"/>
+                  </a:ext>
+                </a:extLst>
+              </p:cNvPr>
+              <p:cNvSpPr>
+                <a:spLocks noRot="1" noChangeAspect="1" noMove="1" noResize="1" noEditPoints="1" noAdjustHandles="1" noChangeArrowheads="1" noChangeShapeType="1" noTextEdit="1"/>
+              </p:cNvSpPr>
+              <p:nvPr/>
+            </p:nvSpPr>
+            <p:spPr>
+              <a:xfrm>
+                <a:off x="8292809" y="1320276"/>
+                <a:ext cx="731674" cy="342401"/>
+              </a:xfrm>
+              <a:prstGeom prst="rect">
+                <a:avLst/>
+              </a:prstGeom>
+              <a:blipFill>
+                <a:blip r:embed="rId10"/>
+                <a:stretch>
+                  <a:fillRect/>
+                </a:stretch>
+              </a:blipFill>
+            </p:spPr>
+            <p:txBody>
+              <a:bodyPr/>
+              <a:lstStyle/>
+              <a:p>
+                <a:r>
+                  <a:rPr lang="zh-TW" altLang="en-US">
+                    <a:noFill/>
+                  </a:rPr>
+                  <a:t> </a:t>
+                </a:r>
+              </a:p>
+            </p:txBody>
+          </p:sp>
+        </mc:Fallback>
+      </mc:AlternateContent>
+      <mc:AlternateContent xmlns:mc="http://schemas.openxmlformats.org/markup-compatibility/2006">
+        <mc:Choice xmlns:a14="http://schemas.microsoft.com/office/drawing/2010/main" Requires="a14">
+          <p:sp>
+            <p:nvSpPr>
+              <p:cNvPr id="16" name="矩形 15">
+                <a:extLst>
+                  <a:ext uri="{FF2B5EF4-FFF2-40B4-BE49-F238E27FC236}">
+                    <a16:creationId xmlns:a16="http://schemas.microsoft.com/office/drawing/2014/main" id="{2F198B12-D53B-4B17-BA1D-89FF19683B02}"/>
+                  </a:ext>
+                </a:extLst>
+              </p:cNvPr>
+              <p:cNvSpPr/>
+              <p:nvPr/>
+            </p:nvSpPr>
+            <p:spPr>
+              <a:xfrm>
+                <a:off x="1659408" y="2573853"/>
+                <a:ext cx="736547" cy="342401"/>
+              </a:xfrm>
+              <a:prstGeom prst="rect">
+                <a:avLst/>
+              </a:prstGeom>
+            </p:spPr>
+            <p:txBody>
+              <a:bodyPr wrap="none">
+                <a:spAutoFit/>
+              </a:bodyPr>
+              <a:lstStyle/>
+              <a:p>
+                <a:pPr/>
+                <a14:m>
+                  <m:oMathPara xmlns:m="http://schemas.openxmlformats.org/officeDocument/2006/math">
+                    <m:oMathParaPr>
+                      <m:jc m:val="centerGroup"/>
+                    </m:oMathParaPr>
+                    <m:oMath xmlns:m="http://schemas.openxmlformats.org/officeDocument/2006/math">
+                      <m:r>
+                        <a:rPr lang="en-US" altLang="zh-TW" sz="1625" i="1">
+                          <a:solidFill>
+                            <a:schemeClr val="bg1"/>
+                          </a:solidFill>
+                          <a:latin typeface="Cambria Math" panose="02040503050406030204" pitchFamily="18" charset="0"/>
+                        </a:rPr>
+                        <m:t>0.1</m:t>
+                      </m:r>
+                      <m:sSub>
+                        <m:sSubPr>
+                          <m:ctrlPr>
+                            <a:rPr lang="en-US" altLang="zh-TW" sz="1625" i="1">
+                              <a:solidFill>
+                                <a:schemeClr val="bg1"/>
+                              </a:solidFill>
+                              <a:latin typeface="Cambria Math" panose="02040503050406030204" pitchFamily="18" charset="0"/>
+                            </a:rPr>
+                          </m:ctrlPr>
+                        </m:sSubPr>
+                        <m:e>
+                          <m:r>
+                            <a:rPr lang="en-US" altLang="zh-TW" sz="1625" i="1">
+                              <a:solidFill>
+                                <a:schemeClr val="bg1"/>
+                              </a:solidFill>
+                              <a:latin typeface="Cambria Math" panose="02040503050406030204" pitchFamily="18" charset="0"/>
+                            </a:rPr>
+                            <m:t>𝑄</m:t>
+                          </m:r>
+                        </m:e>
+                        <m:sub>
+                          <m:r>
+                            <a:rPr lang="en-US" altLang="zh-TW" sz="1625" i="1">
+                              <a:solidFill>
+                                <a:schemeClr val="bg1"/>
+                              </a:solidFill>
+                              <a:latin typeface="Cambria Math" panose="02040503050406030204" pitchFamily="18" charset="0"/>
+                            </a:rPr>
+                            <m:t>𝑐</m:t>
+                          </m:r>
+                        </m:sub>
+                      </m:sSub>
+                    </m:oMath>
+                  </m:oMathPara>
+                </a14:m>
+                <a:endParaRPr lang="zh-TW" altLang="en-US" sz="1625" dirty="0">
+                  <a:solidFill>
+                    <a:schemeClr val="bg1"/>
+                  </a:solidFill>
+                  <a:latin typeface="Times New Roman" panose="02020603050405020304" pitchFamily="18" charset="0"/>
+                  <a:cs typeface="Times New Roman" panose="02020603050405020304" pitchFamily="18" charset="0"/>
+                </a:endParaRPr>
+              </a:p>
+            </p:txBody>
+          </p:sp>
+        </mc:Choice>
+        <mc:Fallback>
+          <p:sp>
+            <p:nvSpPr>
+              <p:cNvPr id="16" name="矩形 15">
+                <a:extLst>
+                  <a:ext uri="{FF2B5EF4-FFF2-40B4-BE49-F238E27FC236}">
+                    <a16:creationId xmlns:a16="http://schemas.microsoft.com/office/drawing/2014/main" id="{2F198B12-D53B-4B17-BA1D-89FF19683B02}"/>
+                  </a:ext>
+                </a:extLst>
+              </p:cNvPr>
+              <p:cNvSpPr>
+                <a:spLocks noRot="1" noChangeAspect="1" noMove="1" noResize="1" noEditPoints="1" noAdjustHandles="1" noChangeArrowheads="1" noChangeShapeType="1" noTextEdit="1"/>
+              </p:cNvSpPr>
+              <p:nvPr/>
+            </p:nvSpPr>
+            <p:spPr>
+              <a:xfrm>
+                <a:off x="1659408" y="2573853"/>
+                <a:ext cx="736547" cy="342401"/>
+              </a:xfrm>
+              <a:prstGeom prst="rect">
+                <a:avLst/>
+              </a:prstGeom>
+              <a:blipFill>
+                <a:blip r:embed="rId11"/>
+                <a:stretch>
+                  <a:fillRect b="-10714"/>
+                </a:stretch>
+              </a:blipFill>
+            </p:spPr>
+            <p:txBody>
+              <a:bodyPr/>
+              <a:lstStyle/>
+              <a:p>
+                <a:r>
+                  <a:rPr lang="zh-TW" altLang="en-US">
+                    <a:noFill/>
+                  </a:rPr>
+                  <a:t> </a:t>
+                </a:r>
+              </a:p>
+            </p:txBody>
+          </p:sp>
+        </mc:Fallback>
+      </mc:AlternateContent>
+      <mc:AlternateContent xmlns:mc="http://schemas.openxmlformats.org/markup-compatibility/2006">
+        <mc:Choice xmlns:a14="http://schemas.microsoft.com/office/drawing/2010/main" Requires="a14">
+          <p:sp>
+            <p:nvSpPr>
+              <p:cNvPr id="17" name="矩形 16">
+                <a:extLst>
+                  <a:ext uri="{FF2B5EF4-FFF2-40B4-BE49-F238E27FC236}">
+                    <a16:creationId xmlns:a16="http://schemas.microsoft.com/office/drawing/2014/main" id="{8295B3F8-393E-4F5A-B11B-EE2AD0609793}"/>
+                  </a:ext>
+                </a:extLst>
+              </p:cNvPr>
+              <p:cNvSpPr/>
+              <p:nvPr/>
+            </p:nvSpPr>
+            <p:spPr>
+              <a:xfrm>
+                <a:off x="1326058" y="2918324"/>
+                <a:ext cx="731674" cy="342401"/>
+              </a:xfrm>
+              <a:prstGeom prst="rect">
+                <a:avLst/>
+              </a:prstGeom>
+            </p:spPr>
+            <p:txBody>
+              <a:bodyPr wrap="none">
+                <a:spAutoFit/>
+              </a:bodyPr>
+              <a:lstStyle/>
+              <a:p>
+                <a:pPr/>
+                <a14:m>
+                  <m:oMathPara xmlns:m="http://schemas.openxmlformats.org/officeDocument/2006/math">
+                    <m:oMathParaPr>
+                      <m:jc m:val="centerGroup"/>
+                    </m:oMathParaPr>
+                    <m:oMath xmlns:m="http://schemas.openxmlformats.org/officeDocument/2006/math">
+                      <m:r>
+                        <a:rPr lang="en-US" altLang="zh-TW" sz="1625" i="1">
+                          <a:latin typeface="Cambria Math" panose="02040503050406030204" pitchFamily="18" charset="0"/>
+                        </a:rPr>
+                        <m:t>ℓ=0</m:t>
+                      </m:r>
+                    </m:oMath>
+                  </m:oMathPara>
+                </a14:m>
+                <a:endParaRPr lang="zh-TW" altLang="en-US" sz="1625" dirty="0">
+                  <a:latin typeface="Times New Roman" panose="02020603050405020304" pitchFamily="18" charset="0"/>
+                  <a:cs typeface="Times New Roman" panose="02020603050405020304" pitchFamily="18" charset="0"/>
+                </a:endParaRPr>
+              </a:p>
+            </p:txBody>
+          </p:sp>
+        </mc:Choice>
+        <mc:Fallback>
+          <p:sp>
+            <p:nvSpPr>
+              <p:cNvPr id="17" name="矩形 16">
+                <a:extLst>
+                  <a:ext uri="{FF2B5EF4-FFF2-40B4-BE49-F238E27FC236}">
+                    <a16:creationId xmlns:a16="http://schemas.microsoft.com/office/drawing/2014/main" id="{8295B3F8-393E-4F5A-B11B-EE2AD0609793}"/>
+                  </a:ext>
+                </a:extLst>
+              </p:cNvPr>
+              <p:cNvSpPr>
+                <a:spLocks noRot="1" noChangeAspect="1" noMove="1" noResize="1" noEditPoints="1" noAdjustHandles="1" noChangeArrowheads="1" noChangeShapeType="1" noTextEdit="1"/>
+              </p:cNvSpPr>
+              <p:nvPr/>
+            </p:nvSpPr>
+            <p:spPr>
+              <a:xfrm>
+                <a:off x="1326058" y="2918324"/>
+                <a:ext cx="731674" cy="342401"/>
+              </a:xfrm>
+              <a:prstGeom prst="rect">
+                <a:avLst/>
+              </a:prstGeom>
+              <a:blipFill>
+                <a:blip r:embed="rId12"/>
+                <a:stretch>
+                  <a:fillRect/>
+                </a:stretch>
+              </a:blipFill>
+            </p:spPr>
+            <p:txBody>
+              <a:bodyPr/>
+              <a:lstStyle/>
+              <a:p>
+                <a:r>
+                  <a:rPr lang="zh-TW" altLang="en-US">
+                    <a:noFill/>
+                  </a:rPr>
+                  <a:t> </a:t>
+                </a:r>
+              </a:p>
+            </p:txBody>
+          </p:sp>
+        </mc:Fallback>
+      </mc:AlternateContent>
+      <mc:AlternateContent xmlns:mc="http://schemas.openxmlformats.org/markup-compatibility/2006">
+        <mc:Choice xmlns:a14="http://schemas.microsoft.com/office/drawing/2010/main" Requires="a14">
+          <p:sp>
+            <p:nvSpPr>
+              <p:cNvPr id="18" name="矩形 17">
+                <a:extLst>
+                  <a:ext uri="{FF2B5EF4-FFF2-40B4-BE49-F238E27FC236}">
+                    <a16:creationId xmlns:a16="http://schemas.microsoft.com/office/drawing/2014/main" id="{302227E5-4E0E-4A9C-BBEE-ED438C4C9462}"/>
+                  </a:ext>
+                </a:extLst>
+              </p:cNvPr>
+              <p:cNvSpPr/>
+              <p:nvPr/>
+            </p:nvSpPr>
+            <p:spPr>
+              <a:xfrm>
+                <a:off x="2719407" y="2918323"/>
+                <a:ext cx="731674" cy="342401"/>
+              </a:xfrm>
+              <a:prstGeom prst="rect">
+                <a:avLst/>
+              </a:prstGeom>
+            </p:spPr>
+            <p:txBody>
+              <a:bodyPr wrap="none">
+                <a:spAutoFit/>
+              </a:bodyPr>
+              <a:lstStyle/>
+              <a:p>
+                <a:pPr/>
+                <a14:m>
+                  <m:oMathPara xmlns:m="http://schemas.openxmlformats.org/officeDocument/2006/math">
+                    <m:oMathParaPr>
+                      <m:jc m:val="centerGroup"/>
+                    </m:oMathParaPr>
+                    <m:oMath xmlns:m="http://schemas.openxmlformats.org/officeDocument/2006/math">
+                      <m:r>
+                        <a:rPr lang="en-US" altLang="zh-TW" sz="1625" i="1">
+                          <a:latin typeface="Cambria Math" panose="02040503050406030204" pitchFamily="18" charset="0"/>
+                        </a:rPr>
+                        <m:t>ℓ=1</m:t>
+                      </m:r>
+                    </m:oMath>
+                  </m:oMathPara>
+                </a14:m>
+                <a:endParaRPr lang="zh-TW" altLang="en-US" sz="1625" dirty="0">
+                  <a:latin typeface="Times New Roman" panose="02020603050405020304" pitchFamily="18" charset="0"/>
+                  <a:cs typeface="Times New Roman" panose="02020603050405020304" pitchFamily="18" charset="0"/>
+                </a:endParaRPr>
+              </a:p>
+            </p:txBody>
+          </p:sp>
+        </mc:Choice>
+        <mc:Fallback>
+          <p:sp>
+            <p:nvSpPr>
+              <p:cNvPr id="18" name="矩形 17">
+                <a:extLst>
+                  <a:ext uri="{FF2B5EF4-FFF2-40B4-BE49-F238E27FC236}">
+                    <a16:creationId xmlns:a16="http://schemas.microsoft.com/office/drawing/2014/main" id="{302227E5-4E0E-4A9C-BBEE-ED438C4C9462}"/>
+                  </a:ext>
+                </a:extLst>
+              </p:cNvPr>
+              <p:cNvSpPr>
+                <a:spLocks noRot="1" noChangeAspect="1" noMove="1" noResize="1" noEditPoints="1" noAdjustHandles="1" noChangeArrowheads="1" noChangeShapeType="1" noTextEdit="1"/>
+              </p:cNvSpPr>
+              <p:nvPr/>
+            </p:nvSpPr>
+            <p:spPr>
+              <a:xfrm>
+                <a:off x="2719407" y="2918323"/>
+                <a:ext cx="731674" cy="342401"/>
+              </a:xfrm>
+              <a:prstGeom prst="rect">
+                <a:avLst/>
+              </a:prstGeom>
+              <a:blipFill>
+                <a:blip r:embed="rId13"/>
+                <a:stretch>
+                  <a:fillRect/>
+                </a:stretch>
+              </a:blipFill>
+            </p:spPr>
+            <p:txBody>
+              <a:bodyPr/>
+              <a:lstStyle/>
+              <a:p>
+                <a:r>
+                  <a:rPr lang="zh-TW" altLang="en-US">
+                    <a:noFill/>
+                  </a:rPr>
+                  <a:t> </a:t>
+                </a:r>
+              </a:p>
+            </p:txBody>
+          </p:sp>
+        </mc:Fallback>
+      </mc:AlternateContent>
+      <mc:AlternateContent xmlns:mc="http://schemas.openxmlformats.org/markup-compatibility/2006">
+        <mc:Choice xmlns:a14="http://schemas.microsoft.com/office/drawing/2010/main" Requires="a14">
+          <p:sp>
+            <p:nvSpPr>
+              <p:cNvPr id="19" name="矩形 18">
+                <a:extLst>
+                  <a:ext uri="{FF2B5EF4-FFF2-40B4-BE49-F238E27FC236}">
+                    <a16:creationId xmlns:a16="http://schemas.microsoft.com/office/drawing/2014/main" id="{0DD27638-A940-4BEF-A988-4B25C776137A}"/>
+                  </a:ext>
+                </a:extLst>
+              </p:cNvPr>
+              <p:cNvSpPr/>
+              <p:nvPr/>
+            </p:nvSpPr>
+            <p:spPr>
+              <a:xfrm>
+                <a:off x="4112758" y="2918323"/>
+                <a:ext cx="731674" cy="342401"/>
+              </a:xfrm>
+              <a:prstGeom prst="rect">
+                <a:avLst/>
+              </a:prstGeom>
+            </p:spPr>
+            <p:txBody>
+              <a:bodyPr wrap="none">
+                <a:spAutoFit/>
+              </a:bodyPr>
+              <a:lstStyle/>
+              <a:p>
+                <a:pPr/>
+                <a14:m>
+                  <m:oMathPara xmlns:m="http://schemas.openxmlformats.org/officeDocument/2006/math">
+                    <m:oMathParaPr>
+                      <m:jc m:val="centerGroup"/>
+                    </m:oMathParaPr>
+                    <m:oMath xmlns:m="http://schemas.openxmlformats.org/officeDocument/2006/math">
+                      <m:r>
+                        <a:rPr lang="en-US" altLang="zh-TW" sz="1625" i="1">
+                          <a:latin typeface="Cambria Math" panose="02040503050406030204" pitchFamily="18" charset="0"/>
+                        </a:rPr>
+                        <m:t>ℓ=2</m:t>
+                      </m:r>
+                    </m:oMath>
+                  </m:oMathPara>
+                </a14:m>
+                <a:endParaRPr lang="zh-TW" altLang="en-US" sz="1625" dirty="0">
+                  <a:latin typeface="Times New Roman" panose="02020603050405020304" pitchFamily="18" charset="0"/>
+                  <a:cs typeface="Times New Roman" panose="02020603050405020304" pitchFamily="18" charset="0"/>
+                </a:endParaRPr>
+              </a:p>
+            </p:txBody>
+          </p:sp>
+        </mc:Choice>
+        <mc:Fallback>
+          <p:sp>
+            <p:nvSpPr>
+              <p:cNvPr id="19" name="矩形 18">
+                <a:extLst>
+                  <a:ext uri="{FF2B5EF4-FFF2-40B4-BE49-F238E27FC236}">
+                    <a16:creationId xmlns:a16="http://schemas.microsoft.com/office/drawing/2014/main" id="{0DD27638-A940-4BEF-A988-4B25C776137A}"/>
+                  </a:ext>
+                </a:extLst>
+              </p:cNvPr>
+              <p:cNvSpPr>
+                <a:spLocks noRot="1" noChangeAspect="1" noMove="1" noResize="1" noEditPoints="1" noAdjustHandles="1" noChangeArrowheads="1" noChangeShapeType="1" noTextEdit="1"/>
+              </p:cNvSpPr>
+              <p:nvPr/>
+            </p:nvSpPr>
+            <p:spPr>
+              <a:xfrm>
+                <a:off x="4112758" y="2918323"/>
+                <a:ext cx="731674" cy="342401"/>
+              </a:xfrm>
+              <a:prstGeom prst="rect">
+                <a:avLst/>
+              </a:prstGeom>
+              <a:blipFill>
+                <a:blip r:embed="rId14"/>
+                <a:stretch>
+                  <a:fillRect/>
+                </a:stretch>
+              </a:blipFill>
+            </p:spPr>
+            <p:txBody>
+              <a:bodyPr/>
+              <a:lstStyle/>
+              <a:p>
+                <a:r>
+                  <a:rPr lang="zh-TW" altLang="en-US">
+                    <a:noFill/>
+                  </a:rPr>
+                  <a:t> </a:t>
+                </a:r>
+              </a:p>
+            </p:txBody>
+          </p:sp>
+        </mc:Fallback>
+      </mc:AlternateContent>
+      <mc:AlternateContent xmlns:mc="http://schemas.openxmlformats.org/markup-compatibility/2006">
+        <mc:Choice xmlns:a14="http://schemas.microsoft.com/office/drawing/2010/main" Requires="a14">
+          <p:sp>
+            <p:nvSpPr>
+              <p:cNvPr id="20" name="矩形 19">
+                <a:extLst>
+                  <a:ext uri="{FF2B5EF4-FFF2-40B4-BE49-F238E27FC236}">
+                    <a16:creationId xmlns:a16="http://schemas.microsoft.com/office/drawing/2014/main" id="{EC1A91CC-4752-490B-8E0C-37A410477DB8}"/>
+                  </a:ext>
+                </a:extLst>
+              </p:cNvPr>
+              <p:cNvSpPr/>
+              <p:nvPr/>
+            </p:nvSpPr>
+            <p:spPr>
+              <a:xfrm>
+                <a:off x="5506107" y="2918323"/>
+                <a:ext cx="731674" cy="342401"/>
+              </a:xfrm>
+              <a:prstGeom prst="rect">
+                <a:avLst/>
+              </a:prstGeom>
+            </p:spPr>
+            <p:txBody>
+              <a:bodyPr wrap="none">
+                <a:spAutoFit/>
+              </a:bodyPr>
+              <a:lstStyle/>
+              <a:p>
+                <a:pPr/>
+                <a14:m>
+                  <m:oMathPara xmlns:m="http://schemas.openxmlformats.org/officeDocument/2006/math">
+                    <m:oMathParaPr>
+                      <m:jc m:val="centerGroup"/>
+                    </m:oMathParaPr>
+                    <m:oMath xmlns:m="http://schemas.openxmlformats.org/officeDocument/2006/math">
+                      <m:r>
+                        <a:rPr lang="en-US" altLang="zh-TW" sz="1625" i="1">
+                          <a:latin typeface="Cambria Math" panose="02040503050406030204" pitchFamily="18" charset="0"/>
+                        </a:rPr>
+                        <m:t>ℓ=3</m:t>
+                      </m:r>
+                    </m:oMath>
+                  </m:oMathPara>
+                </a14:m>
+                <a:endParaRPr lang="zh-TW" altLang="en-US" sz="1625" dirty="0">
+                  <a:latin typeface="Times New Roman" panose="02020603050405020304" pitchFamily="18" charset="0"/>
+                  <a:cs typeface="Times New Roman" panose="02020603050405020304" pitchFamily="18" charset="0"/>
+                </a:endParaRPr>
+              </a:p>
+            </p:txBody>
+          </p:sp>
+        </mc:Choice>
+        <mc:Fallback>
+          <p:sp>
+            <p:nvSpPr>
+              <p:cNvPr id="20" name="矩形 19">
+                <a:extLst>
+                  <a:ext uri="{FF2B5EF4-FFF2-40B4-BE49-F238E27FC236}">
+                    <a16:creationId xmlns:a16="http://schemas.microsoft.com/office/drawing/2014/main" id="{EC1A91CC-4752-490B-8E0C-37A410477DB8}"/>
+                  </a:ext>
+                </a:extLst>
+              </p:cNvPr>
+              <p:cNvSpPr>
+                <a:spLocks noRot="1" noChangeAspect="1" noMove="1" noResize="1" noEditPoints="1" noAdjustHandles="1" noChangeArrowheads="1" noChangeShapeType="1" noTextEdit="1"/>
+              </p:cNvSpPr>
+              <p:nvPr/>
+            </p:nvSpPr>
+            <p:spPr>
+              <a:xfrm>
+                <a:off x="5506107" y="2918323"/>
+                <a:ext cx="731674" cy="342401"/>
+              </a:xfrm>
+              <a:prstGeom prst="rect">
+                <a:avLst/>
+              </a:prstGeom>
+              <a:blipFill>
+                <a:blip r:embed="rId15"/>
+                <a:stretch>
+                  <a:fillRect/>
+                </a:stretch>
+              </a:blipFill>
+            </p:spPr>
+            <p:txBody>
+              <a:bodyPr/>
+              <a:lstStyle/>
+              <a:p>
+                <a:r>
+                  <a:rPr lang="zh-TW" altLang="en-US">
+                    <a:noFill/>
+                  </a:rPr>
+                  <a:t> </a:t>
+                </a:r>
+              </a:p>
+            </p:txBody>
+          </p:sp>
+        </mc:Fallback>
+      </mc:AlternateContent>
+      <mc:AlternateContent xmlns:mc="http://schemas.openxmlformats.org/markup-compatibility/2006">
+        <mc:Choice xmlns:a14="http://schemas.microsoft.com/office/drawing/2010/main" Requires="a14">
+          <p:sp>
+            <p:nvSpPr>
+              <p:cNvPr id="21" name="矩形 20">
+                <a:extLst>
+                  <a:ext uri="{FF2B5EF4-FFF2-40B4-BE49-F238E27FC236}">
+                    <a16:creationId xmlns:a16="http://schemas.microsoft.com/office/drawing/2014/main" id="{E397C0F0-BBFA-4816-84BF-51900169D37C}"/>
+                  </a:ext>
+                </a:extLst>
+              </p:cNvPr>
+              <p:cNvSpPr/>
+              <p:nvPr/>
+            </p:nvSpPr>
+            <p:spPr>
+              <a:xfrm>
+                <a:off x="6899458" y="2918323"/>
+                <a:ext cx="731674" cy="342401"/>
+              </a:xfrm>
+              <a:prstGeom prst="rect">
+                <a:avLst/>
+              </a:prstGeom>
+            </p:spPr>
+            <p:txBody>
+              <a:bodyPr wrap="none">
+                <a:spAutoFit/>
+              </a:bodyPr>
+              <a:lstStyle/>
+              <a:p>
+                <a:pPr/>
+                <a14:m>
+                  <m:oMathPara xmlns:m="http://schemas.openxmlformats.org/officeDocument/2006/math">
+                    <m:oMathParaPr>
+                      <m:jc m:val="centerGroup"/>
+                    </m:oMathParaPr>
+                    <m:oMath xmlns:m="http://schemas.openxmlformats.org/officeDocument/2006/math">
+                      <m:r>
+                        <a:rPr lang="en-US" altLang="zh-TW" sz="1625" i="1">
+                          <a:latin typeface="Cambria Math" panose="02040503050406030204" pitchFamily="18" charset="0"/>
+                        </a:rPr>
+                        <m:t>ℓ=4</m:t>
+                      </m:r>
+                    </m:oMath>
+                  </m:oMathPara>
+                </a14:m>
+                <a:endParaRPr lang="zh-TW" altLang="en-US" sz="1625" dirty="0">
+                  <a:latin typeface="Times New Roman" panose="02020603050405020304" pitchFamily="18" charset="0"/>
+                  <a:cs typeface="Times New Roman" panose="02020603050405020304" pitchFamily="18" charset="0"/>
+                </a:endParaRPr>
+              </a:p>
+            </p:txBody>
+          </p:sp>
+        </mc:Choice>
+        <mc:Fallback>
+          <p:sp>
+            <p:nvSpPr>
+              <p:cNvPr id="21" name="矩形 20">
+                <a:extLst>
+                  <a:ext uri="{FF2B5EF4-FFF2-40B4-BE49-F238E27FC236}">
+                    <a16:creationId xmlns:a16="http://schemas.microsoft.com/office/drawing/2014/main" id="{E397C0F0-BBFA-4816-84BF-51900169D37C}"/>
+                  </a:ext>
+                </a:extLst>
+              </p:cNvPr>
+              <p:cNvSpPr>
+                <a:spLocks noRot="1" noChangeAspect="1" noMove="1" noResize="1" noEditPoints="1" noAdjustHandles="1" noChangeArrowheads="1" noChangeShapeType="1" noTextEdit="1"/>
+              </p:cNvSpPr>
+              <p:nvPr/>
+            </p:nvSpPr>
+            <p:spPr>
+              <a:xfrm>
+                <a:off x="6899458" y="2918323"/>
+                <a:ext cx="731674" cy="342401"/>
+              </a:xfrm>
+              <a:prstGeom prst="rect">
+                <a:avLst/>
+              </a:prstGeom>
+              <a:blipFill>
+                <a:blip r:embed="rId16"/>
+                <a:stretch>
+                  <a:fillRect/>
+                </a:stretch>
+              </a:blipFill>
+            </p:spPr>
+            <p:txBody>
+              <a:bodyPr/>
+              <a:lstStyle/>
+              <a:p>
+                <a:r>
+                  <a:rPr lang="zh-TW" altLang="en-US">
+                    <a:noFill/>
+                  </a:rPr>
+                  <a:t> </a:t>
+                </a:r>
+              </a:p>
+            </p:txBody>
+          </p:sp>
+        </mc:Fallback>
+      </mc:AlternateContent>
+      <mc:AlternateContent xmlns:mc="http://schemas.openxmlformats.org/markup-compatibility/2006">
+        <mc:Choice xmlns:a14="http://schemas.microsoft.com/office/drawing/2010/main" Requires="a14">
+          <p:sp>
+            <p:nvSpPr>
+              <p:cNvPr id="22" name="矩形 21">
+                <a:extLst>
+                  <a:ext uri="{FF2B5EF4-FFF2-40B4-BE49-F238E27FC236}">
+                    <a16:creationId xmlns:a16="http://schemas.microsoft.com/office/drawing/2014/main" id="{E1A9238A-5FF4-4DCD-8EAA-753E08958678}"/>
+                  </a:ext>
+                </a:extLst>
+              </p:cNvPr>
+              <p:cNvSpPr/>
+              <p:nvPr/>
+            </p:nvSpPr>
+            <p:spPr>
+              <a:xfrm>
+                <a:off x="8292809" y="2918323"/>
+                <a:ext cx="731674" cy="342401"/>
+              </a:xfrm>
+              <a:prstGeom prst="rect">
+                <a:avLst/>
+              </a:prstGeom>
+            </p:spPr>
+            <p:txBody>
+              <a:bodyPr wrap="none">
+                <a:spAutoFit/>
+              </a:bodyPr>
+              <a:lstStyle/>
+              <a:p>
+                <a:pPr/>
+                <a14:m>
+                  <m:oMathPara xmlns:m="http://schemas.openxmlformats.org/officeDocument/2006/math">
+                    <m:oMathParaPr>
+                      <m:jc m:val="centerGroup"/>
+                    </m:oMathParaPr>
+                    <m:oMath xmlns:m="http://schemas.openxmlformats.org/officeDocument/2006/math">
+                      <m:r>
+                        <a:rPr lang="en-US" altLang="zh-TW" sz="1625" i="1">
+                          <a:latin typeface="Cambria Math" panose="02040503050406030204" pitchFamily="18" charset="0"/>
+                        </a:rPr>
+                        <m:t>ℓ=5</m:t>
+                      </m:r>
+                    </m:oMath>
+                  </m:oMathPara>
+                </a14:m>
+                <a:endParaRPr lang="zh-TW" altLang="en-US" sz="1625" dirty="0">
+                  <a:latin typeface="Times New Roman" panose="02020603050405020304" pitchFamily="18" charset="0"/>
+                  <a:cs typeface="Times New Roman" panose="02020603050405020304" pitchFamily="18" charset="0"/>
+                </a:endParaRPr>
+              </a:p>
+            </p:txBody>
+          </p:sp>
+        </mc:Choice>
+        <mc:Fallback>
+          <p:sp>
+            <p:nvSpPr>
+              <p:cNvPr id="22" name="矩形 21">
+                <a:extLst>
+                  <a:ext uri="{FF2B5EF4-FFF2-40B4-BE49-F238E27FC236}">
+                    <a16:creationId xmlns:a16="http://schemas.microsoft.com/office/drawing/2014/main" id="{E1A9238A-5FF4-4DCD-8EAA-753E08958678}"/>
+                  </a:ext>
+                </a:extLst>
+              </p:cNvPr>
+              <p:cNvSpPr>
+                <a:spLocks noRot="1" noChangeAspect="1" noMove="1" noResize="1" noEditPoints="1" noAdjustHandles="1" noChangeArrowheads="1" noChangeShapeType="1" noTextEdit="1"/>
+              </p:cNvSpPr>
+              <p:nvPr/>
+            </p:nvSpPr>
+            <p:spPr>
+              <a:xfrm>
+                <a:off x="8292809" y="2918323"/>
+                <a:ext cx="731674" cy="342401"/>
+              </a:xfrm>
+              <a:prstGeom prst="rect">
+                <a:avLst/>
+              </a:prstGeom>
+              <a:blipFill>
+                <a:blip r:embed="rId17"/>
+                <a:stretch>
+                  <a:fillRect/>
+                </a:stretch>
+              </a:blipFill>
+            </p:spPr>
+            <p:txBody>
+              <a:bodyPr/>
+              <a:lstStyle/>
+              <a:p>
+                <a:r>
+                  <a:rPr lang="zh-TW" altLang="en-US">
+                    <a:noFill/>
+                  </a:rPr>
+                  <a:t> </a:t>
+                </a:r>
+              </a:p>
+            </p:txBody>
+          </p:sp>
+        </mc:Fallback>
+      </mc:AlternateContent>
+      <mc:AlternateContent xmlns:mc="http://schemas.openxmlformats.org/markup-compatibility/2006">
+        <mc:Choice xmlns:a14="http://schemas.microsoft.com/office/drawing/2010/main" Requires="a14">
+          <p:sp>
+            <p:nvSpPr>
+              <p:cNvPr id="25" name="矩形 24">
+                <a:extLst>
+                  <a:ext uri="{FF2B5EF4-FFF2-40B4-BE49-F238E27FC236}">
+                    <a16:creationId xmlns:a16="http://schemas.microsoft.com/office/drawing/2014/main" id="{5DD30E1E-3254-4C6F-8DF1-6F6AA824DBC6}"/>
+                  </a:ext>
+                </a:extLst>
+              </p:cNvPr>
+              <p:cNvSpPr/>
+              <p:nvPr/>
+            </p:nvSpPr>
+            <p:spPr>
+              <a:xfrm>
+                <a:off x="107016" y="2123760"/>
+                <a:ext cx="1347292" cy="471347"/>
+              </a:xfrm>
+              <a:prstGeom prst="rect">
+                <a:avLst/>
+              </a:prstGeom>
+            </p:spPr>
+            <p:txBody>
+              <a:bodyPr wrap="none">
+                <a:spAutoFit/>
+              </a:bodyPr>
+              <a:lstStyle/>
+              <a:p>
+                <a:pPr/>
+                <a14:m>
+                  <m:oMathPara xmlns:m="http://schemas.openxmlformats.org/officeDocument/2006/math">
+                    <m:oMathParaPr>
+                      <m:jc m:val="centerGroup"/>
+                    </m:oMathParaPr>
+                    <m:oMath xmlns:m="http://schemas.openxmlformats.org/officeDocument/2006/math">
+                      <m:r>
+                        <m:rPr>
+                          <m:sty m:val="p"/>
+                        </m:rPr>
+                        <a:rPr lang="en-US" altLang="zh-TW" sz="2000">
+                          <a:latin typeface="Cambria Math" panose="02040503050406030204" pitchFamily="18" charset="0"/>
+                        </a:rPr>
+                        <m:t>Re</m:t>
+                      </m:r>
+                      <m:d>
+                        <m:dPr>
+                          <m:begChr m:val="["/>
+                          <m:endChr m:val="]"/>
+                          <m:ctrlPr>
+                            <a:rPr lang="en-US" altLang="zh-TW" sz="2000" i="1">
+                              <a:latin typeface="Cambria Math" panose="02040503050406030204" pitchFamily="18" charset="0"/>
+                            </a:rPr>
+                          </m:ctrlPr>
+                        </m:dPr>
+                        <m:e>
+                          <m:sSup>
+                            <m:sSupPr>
+                              <m:ctrlPr>
+                                <a:rPr lang="en-US" altLang="zh-TW" sz="2000" i="1">
+                                  <a:latin typeface="Cambria Math" panose="02040503050406030204" pitchFamily="18" charset="0"/>
+                                </a:rPr>
+                              </m:ctrlPr>
+                            </m:sSupPr>
+                            <m:e>
+                              <m:r>
+                                <a:rPr lang="en-US" altLang="zh-TW" sz="2000" i="1">
+                                  <a:latin typeface="Cambria Math" panose="02040503050406030204" pitchFamily="18" charset="0"/>
+                                </a:rPr>
+                                <m:t>𝑒</m:t>
+                              </m:r>
+                            </m:e>
+                            <m:sup>
+                              <m:r>
+                                <a:rPr lang="en-US" altLang="zh-TW" sz="2000" i="1">
+                                  <a:latin typeface="Cambria Math" panose="02040503050406030204" pitchFamily="18" charset="0"/>
+                                </a:rPr>
+                                <m:t>𝑖</m:t>
+                              </m:r>
+                              <m:r>
+                                <a:rPr lang="en-US" altLang="zh-TW" sz="2000" i="1" dirty="0">
+                                  <a:latin typeface="Cambria Math" panose="02040503050406030204" pitchFamily="18" charset="0"/>
+                                </a:rPr>
+                                <m:t>ℓ</m:t>
+                              </m:r>
+                              <m:sSub>
+                                <m:sSubPr>
+                                  <m:ctrlPr>
+                                    <a:rPr lang="en-US" altLang="zh-TW" sz="2000" i="1">
+                                      <a:latin typeface="Cambria Math" panose="02040503050406030204" pitchFamily="18" charset="0"/>
+                                    </a:rPr>
+                                  </m:ctrlPr>
+                                </m:sSubPr>
+                                <m:e>
+                                  <m:r>
+                                    <a:rPr lang="en-US" altLang="zh-TW" sz="2000" i="1">
+                                      <a:latin typeface="Cambria Math" panose="02040503050406030204" pitchFamily="18" charset="0"/>
+                                    </a:rPr>
+                                    <m:t>𝜙</m:t>
+                                  </m:r>
+                                </m:e>
+                                <m:sub>
+                                  <m:sSub>
+                                    <m:sSubPr>
+                                      <m:ctrlPr>
+                                        <a:rPr lang="en-US" altLang="zh-TW" sz="2000" i="1" dirty="0">
+                                          <a:latin typeface="Cambria Math" panose="02040503050406030204" pitchFamily="18" charset="0"/>
+                                        </a:rPr>
+                                      </m:ctrlPr>
+                                    </m:sSubPr>
+                                    <m:e>
+                                      <m:r>
+                                        <a:rPr lang="en-US" altLang="zh-TW" sz="2000" b="1" i="1" dirty="0">
+                                          <a:latin typeface="Cambria Math" panose="02040503050406030204" pitchFamily="18" charset="0"/>
+                                        </a:rPr>
+                                        <m:t>𝒒</m:t>
+                                      </m:r>
+                                    </m:e>
+                                    <m:sub>
+                                      <m:r>
+                                        <a:rPr lang="en-US" altLang="zh-TW" sz="2000" i="1" dirty="0">
+                                          <a:latin typeface="Cambria Math" panose="02040503050406030204" pitchFamily="18" charset="0"/>
+                                        </a:rPr>
+                                        <m:t>∥</m:t>
+                                      </m:r>
+                                    </m:sub>
+                                  </m:sSub>
+                                </m:sub>
+                              </m:sSub>
+                            </m:sup>
+                          </m:sSup>
+                        </m:e>
+                      </m:d>
+                    </m:oMath>
+                  </m:oMathPara>
+                </a14:m>
+                <a:endParaRPr lang="zh-TW" altLang="en-US" sz="2000" dirty="0">
+                  <a:latin typeface="Times New Roman" panose="02020603050405020304" pitchFamily="18" charset="0"/>
+                  <a:cs typeface="Times New Roman" panose="02020603050405020304" pitchFamily="18" charset="0"/>
+                </a:endParaRPr>
+              </a:p>
+            </p:txBody>
+          </p:sp>
+        </mc:Choice>
+        <mc:Fallback>
+          <p:sp>
+            <p:nvSpPr>
+              <p:cNvPr id="25" name="矩形 24">
+                <a:extLst>
+                  <a:ext uri="{FF2B5EF4-FFF2-40B4-BE49-F238E27FC236}">
+                    <a16:creationId xmlns:a16="http://schemas.microsoft.com/office/drawing/2014/main" id="{5DD30E1E-3254-4C6F-8DF1-6F6AA824DBC6}"/>
+                  </a:ext>
+                </a:extLst>
+              </p:cNvPr>
+              <p:cNvSpPr>
+                <a:spLocks noRot="1" noChangeAspect="1" noMove="1" noResize="1" noEditPoints="1" noAdjustHandles="1" noChangeArrowheads="1" noChangeShapeType="1" noTextEdit="1"/>
+              </p:cNvSpPr>
+              <p:nvPr/>
+            </p:nvSpPr>
+            <p:spPr>
+              <a:xfrm>
+                <a:off x="107016" y="2123760"/>
+                <a:ext cx="1347292" cy="471347"/>
+              </a:xfrm>
+              <a:prstGeom prst="rect">
+                <a:avLst/>
+              </a:prstGeom>
+              <a:blipFill>
+                <a:blip r:embed="rId18"/>
+                <a:stretch>
+                  <a:fillRect/>
+                </a:stretch>
+              </a:blipFill>
+            </p:spPr>
+            <p:txBody>
+              <a:bodyPr/>
+              <a:lstStyle/>
+              <a:p>
+                <a:r>
+                  <a:rPr lang="zh-TW" altLang="en-US">
+                    <a:noFill/>
+                  </a:rPr>
+                  <a:t> </a:t>
+                </a:r>
+              </a:p>
+            </p:txBody>
+          </p:sp>
+        </mc:Fallback>
+      </mc:AlternateContent>
+      <p:sp>
+        <p:nvSpPr>
+          <p:cNvPr id="45" name="矩形 44">
+            <a:extLst>
+              <a:ext uri="{FF2B5EF4-FFF2-40B4-BE49-F238E27FC236}">
+                <a16:creationId xmlns:a16="http://schemas.microsoft.com/office/drawing/2014/main" id="{2667D122-1621-490B-9CDD-F3F9D5F3FF97}"/>
+              </a:ext>
+            </a:extLst>
+          </p:cNvPr>
+          <p:cNvSpPr/>
+          <p:nvPr/>
+        </p:nvSpPr>
+        <p:spPr>
+          <a:xfrm rot="5400000">
+            <a:off x="9040158" y="558587"/>
+            <a:ext cx="1359668" cy="342401"/>
+          </a:xfrm>
+          <a:prstGeom prst="rect">
+            <a:avLst/>
+          </a:prstGeom>
+        </p:spPr>
+        <p:txBody>
+          <a:bodyPr wrap="none">
+            <a:spAutoFit/>
+          </a:bodyPr>
+          <a:lstStyle/>
+          <a:p>
+            <a:r>
+              <a:rPr lang="en-US" altLang="zh-TW" sz="1625" dirty="0">
+                <a:latin typeface="Times New Roman" panose="02020603050405020304" pitchFamily="18" charset="0"/>
+                <a:cs typeface="Times New Roman" panose="02020603050405020304" pitchFamily="18" charset="0"/>
+              </a:rPr>
+              <a:t>arbitrary units</a:t>
+            </a:r>
+            <a:endParaRPr lang="zh-TW" altLang="en-US" sz="1625" dirty="0">
+              <a:latin typeface="Times New Roman" panose="02020603050405020304" pitchFamily="18" charset="0"/>
+              <a:cs typeface="Times New Roman" panose="02020603050405020304" pitchFamily="18" charset="0"/>
+            </a:endParaRPr>
+          </a:p>
+        </p:txBody>
+      </p:sp>
+      <p:sp>
+        <p:nvSpPr>
+          <p:cNvPr id="46" name="矩形 45">
+            <a:extLst>
+              <a:ext uri="{FF2B5EF4-FFF2-40B4-BE49-F238E27FC236}">
+                <a16:creationId xmlns:a16="http://schemas.microsoft.com/office/drawing/2014/main" id="{F0FD9A8B-297D-4E45-AB13-1BDB407EEF7E}"/>
+              </a:ext>
+            </a:extLst>
+          </p:cNvPr>
+          <p:cNvSpPr/>
+          <p:nvPr/>
+        </p:nvSpPr>
+        <p:spPr>
+          <a:xfrm rot="5400000">
+            <a:off x="9040159" y="2117266"/>
+            <a:ext cx="1359668" cy="342401"/>
+          </a:xfrm>
+          <a:prstGeom prst="rect">
+            <a:avLst/>
+          </a:prstGeom>
+        </p:spPr>
+        <p:txBody>
+          <a:bodyPr wrap="none">
+            <a:spAutoFit/>
+          </a:bodyPr>
+          <a:lstStyle/>
+          <a:p>
+            <a:r>
+              <a:rPr lang="en-US" altLang="zh-TW" sz="1625" dirty="0">
+                <a:latin typeface="Times New Roman" panose="02020603050405020304" pitchFamily="18" charset="0"/>
+                <a:cs typeface="Times New Roman" panose="02020603050405020304" pitchFamily="18" charset="0"/>
+              </a:rPr>
+              <a:t>arbitrary units</a:t>
+            </a:r>
+            <a:endParaRPr lang="zh-TW" altLang="en-US" sz="1625" dirty="0">
+              <a:latin typeface="Times New Roman" panose="02020603050405020304" pitchFamily="18" charset="0"/>
+              <a:cs typeface="Times New Roman" panose="02020603050405020304" pitchFamily="18" charset="0"/>
+            </a:endParaRPr>
+          </a:p>
+        </p:txBody>
+      </p:sp>
+      <p:pic>
+        <p:nvPicPr>
+          <p:cNvPr id="30" name="圖片 29">
+            <a:extLst>
+              <a:ext uri="{FF2B5EF4-FFF2-40B4-BE49-F238E27FC236}">
+                <a16:creationId xmlns:a16="http://schemas.microsoft.com/office/drawing/2014/main" id="{2D04DA75-0189-46D1-8CA0-0BAE4AAE5968}"/>
+              </a:ext>
+            </a:extLst>
+          </p:cNvPr>
+          <p:cNvPicPr>
+            <a:picLocks noChangeAspect="1"/>
+          </p:cNvPicPr>
+          <p:nvPr/>
+        </p:nvPicPr>
+        <p:blipFill rotWithShape="1">
+          <a:blip r:embed="rId19">
+            <a:clrChange>
+              <a:clrFrom>
+                <a:srgbClr val="FFFFFF"/>
+              </a:clrFrom>
+              <a:clrTo>
+                <a:srgbClr val="FFFFFF">
+                  <a:alpha val="0"/>
+                </a:srgbClr>
+              </a:clrTo>
+            </a:clrChange>
+            <a:extLst>
+              <a:ext uri="{28A0092B-C50C-407E-A947-70E740481C1C}">
+                <a14:useLocalDpi xmlns:a14="http://schemas.microsoft.com/office/drawing/2010/main" val="0"/>
+              </a:ext>
+            </a:extLst>
+          </a:blip>
+          <a:srcRect l="85265" r="8888"/>
+          <a:stretch/>
+        </p:blipFill>
+        <p:spPr>
+          <a:xfrm>
+            <a:off x="9100596" y="1505214"/>
+            <a:ext cx="563830" cy="1649468"/>
+          </a:xfrm>
+          <a:prstGeom prst="rect">
+            <a:avLst/>
+          </a:prstGeom>
+        </p:spPr>
+      </p:pic>
       <p:pic>
         <p:nvPicPr>
           <p:cNvPr id="2" name="圖片 1">
@@ -5433,21 +4890,823 @@
           <p:nvPr/>
         </p:nvPicPr>
         <p:blipFill>
-          <a:blip r:embed="rId25"/>
+          <a:blip r:embed="rId20"/>
           <a:stretch>
             <a:fillRect/>
           </a:stretch>
         </p:blipFill>
         <p:spPr>
           <a:xfrm>
-            <a:off x="47625" y="696915"/>
-            <a:ext cx="1150520" cy="324447"/>
+            <a:off x="47209" y="589936"/>
+            <a:ext cx="1466906" cy="424501"/>
           </a:xfrm>
           <a:prstGeom prst="rect">
             <a:avLst/>
           </a:prstGeom>
         </p:spPr>
       </p:pic>
+      <p:sp>
+        <p:nvSpPr>
+          <p:cNvPr id="32" name="箭號: 向右 31">
+            <a:extLst>
+              <a:ext uri="{FF2B5EF4-FFF2-40B4-BE49-F238E27FC236}">
+                <a16:creationId xmlns:a16="http://schemas.microsoft.com/office/drawing/2014/main" id="{88052F3C-30BD-4C6E-99EB-38E3B37FA55A}"/>
+              </a:ext>
+            </a:extLst>
+          </p:cNvPr>
+          <p:cNvSpPr/>
+          <p:nvPr/>
+        </p:nvSpPr>
+        <p:spPr>
+          <a:xfrm>
+            <a:off x="2069620" y="2345703"/>
+            <a:ext cx="92654" cy="27541"/>
+          </a:xfrm>
+          <a:prstGeom prst="rightArrow">
+            <a:avLst>
+              <a:gd name="adj1" fmla="val 50000"/>
+              <a:gd name="adj2" fmla="val 99023"/>
+            </a:avLst>
+          </a:prstGeom>
+          <a:solidFill>
+            <a:schemeClr val="bg1"/>
+          </a:solidFill>
+          <a:ln>
+            <a:solidFill>
+              <a:schemeClr val="bg1"/>
+            </a:solidFill>
+          </a:ln>
+        </p:spPr>
+        <p:style>
+          <a:lnRef idx="2">
+            <a:schemeClr val="dk1">
+              <a:shade val="50000"/>
+            </a:schemeClr>
+          </a:lnRef>
+          <a:fillRef idx="1">
+            <a:schemeClr val="dk1"/>
+          </a:fillRef>
+          <a:effectRef idx="0">
+            <a:schemeClr val="dk1"/>
+          </a:effectRef>
+          <a:fontRef idx="minor">
+            <a:schemeClr val="lt1"/>
+          </a:fontRef>
+        </p:style>
+        <p:txBody>
+          <a:bodyPr rtlCol="0" anchor="ctr"/>
+          <a:lstStyle/>
+          <a:p>
+            <a:pPr algn="ctr"/>
+            <a:endParaRPr lang="zh-TW" altLang="en-US" sz="1625">
+              <a:solidFill>
+                <a:schemeClr val="bg1"/>
+              </a:solidFill>
+              <a:latin typeface="Times New Roman" panose="02020603050405020304" pitchFamily="18" charset="0"/>
+              <a:cs typeface="Times New Roman" panose="02020603050405020304" pitchFamily="18" charset="0"/>
+            </a:endParaRPr>
+          </a:p>
+        </p:txBody>
+      </p:sp>
+      <p:sp>
+        <p:nvSpPr>
+          <p:cNvPr id="33" name="箭號: 向右 32">
+            <a:extLst>
+              <a:ext uri="{FF2B5EF4-FFF2-40B4-BE49-F238E27FC236}">
+                <a16:creationId xmlns:a16="http://schemas.microsoft.com/office/drawing/2014/main" id="{577614CA-5278-4D74-8B7C-95C4FCBA66D8}"/>
+              </a:ext>
+            </a:extLst>
+          </p:cNvPr>
+          <p:cNvSpPr/>
+          <p:nvPr/>
+        </p:nvSpPr>
+        <p:spPr>
+          <a:xfrm rot="16200000">
+            <a:off x="2029700" y="2306192"/>
+            <a:ext cx="91764" cy="27808"/>
+          </a:xfrm>
+          <a:prstGeom prst="rightArrow">
+            <a:avLst>
+              <a:gd name="adj1" fmla="val 50000"/>
+              <a:gd name="adj2" fmla="val 99023"/>
+            </a:avLst>
+          </a:prstGeom>
+          <a:solidFill>
+            <a:schemeClr val="bg1"/>
+          </a:solidFill>
+          <a:ln>
+            <a:solidFill>
+              <a:schemeClr val="bg1"/>
+            </a:solidFill>
+          </a:ln>
+        </p:spPr>
+        <p:style>
+          <a:lnRef idx="2">
+            <a:schemeClr val="dk1">
+              <a:shade val="50000"/>
+            </a:schemeClr>
+          </a:lnRef>
+          <a:fillRef idx="1">
+            <a:schemeClr val="dk1"/>
+          </a:fillRef>
+          <a:effectRef idx="0">
+            <a:schemeClr val="dk1"/>
+          </a:effectRef>
+          <a:fontRef idx="minor">
+            <a:schemeClr val="lt1"/>
+          </a:fontRef>
+        </p:style>
+        <p:txBody>
+          <a:bodyPr rtlCol="0" anchor="ctr"/>
+          <a:lstStyle/>
+          <a:p>
+            <a:pPr algn="ctr"/>
+            <a:endParaRPr lang="zh-TW" altLang="en-US" sz="1625" dirty="0">
+              <a:solidFill>
+                <a:schemeClr val="bg1"/>
+              </a:solidFill>
+              <a:latin typeface="Times New Roman" panose="02020603050405020304" pitchFamily="18" charset="0"/>
+              <a:cs typeface="Times New Roman" panose="02020603050405020304" pitchFamily="18" charset="0"/>
+            </a:endParaRPr>
+          </a:p>
+        </p:txBody>
+      </p:sp>
+      <mc:AlternateContent xmlns:mc="http://schemas.openxmlformats.org/markup-compatibility/2006">
+        <mc:Choice xmlns:a14="http://schemas.microsoft.com/office/drawing/2010/main" Requires="a14">
+          <p:sp>
+            <p:nvSpPr>
+              <p:cNvPr id="34" name="文字方塊 33">
+                <a:extLst>
+                  <a:ext uri="{FF2B5EF4-FFF2-40B4-BE49-F238E27FC236}">
+                    <a16:creationId xmlns:a16="http://schemas.microsoft.com/office/drawing/2014/main" id="{3C51C04E-D705-431C-BF37-4C434E459464}"/>
+                  </a:ext>
+                </a:extLst>
+              </p:cNvPr>
+              <p:cNvSpPr txBox="1"/>
+              <p:nvPr/>
+            </p:nvSpPr>
+            <p:spPr>
+              <a:xfrm>
+                <a:off x="1950374" y="1973149"/>
+                <a:ext cx="323386" cy="362150"/>
+              </a:xfrm>
+              <a:prstGeom prst="rect">
+                <a:avLst/>
+              </a:prstGeom>
+              <a:noFill/>
+            </p:spPr>
+            <p:txBody>
+              <a:bodyPr wrap="square" rtlCol="0">
+                <a:spAutoFit/>
+              </a:bodyPr>
+              <a:lstStyle/>
+              <a:p>
+                <a:pPr/>
+                <a14:m>
+                  <m:oMathPara xmlns:m="http://schemas.openxmlformats.org/officeDocument/2006/math">
+                    <m:oMathParaPr>
+                      <m:jc m:val="centerGroup"/>
+                    </m:oMathParaPr>
+                    <m:oMath xmlns:m="http://schemas.openxmlformats.org/officeDocument/2006/math">
+                      <m:sSub>
+                        <m:sSubPr>
+                          <m:ctrlPr>
+                            <a:rPr lang="en-US" altLang="zh-TW" sz="1625" i="1">
+                              <a:solidFill>
+                                <a:schemeClr val="bg1"/>
+                              </a:solidFill>
+                              <a:latin typeface="Cambria Math" panose="02040503050406030204" pitchFamily="18" charset="0"/>
+                            </a:rPr>
+                          </m:ctrlPr>
+                        </m:sSubPr>
+                        <m:e>
+                          <m:acc>
+                            <m:accPr>
+                              <m:chr m:val="̂"/>
+                              <m:ctrlPr>
+                                <a:rPr lang="zh-TW" altLang="en-US" sz="1625" i="1">
+                                  <a:solidFill>
+                                    <a:schemeClr val="bg1"/>
+                                  </a:solidFill>
+                                  <a:latin typeface="Cambria Math" panose="02040503050406030204" pitchFamily="18" charset="0"/>
+                                </a:rPr>
+                              </m:ctrlPr>
+                            </m:accPr>
+                            <m:e>
+                              <m:r>
+                                <a:rPr lang="en-US" altLang="zh-TW" sz="1625" i="1">
+                                  <a:solidFill>
+                                    <a:schemeClr val="bg1"/>
+                                  </a:solidFill>
+                                  <a:latin typeface="Cambria Math" panose="02040503050406030204" pitchFamily="18" charset="0"/>
+                                </a:rPr>
+                                <m:t>𝑞</m:t>
+                              </m:r>
+                            </m:e>
+                          </m:acc>
+                        </m:e>
+                        <m:sub>
+                          <m:r>
+                            <a:rPr lang="en-US" altLang="zh-TW" sz="1625" i="1">
+                              <a:solidFill>
+                                <a:schemeClr val="bg1"/>
+                              </a:solidFill>
+                              <a:latin typeface="Cambria Math" panose="02040503050406030204" pitchFamily="18" charset="0"/>
+                            </a:rPr>
+                            <m:t>𝑦</m:t>
+                          </m:r>
+                        </m:sub>
+                      </m:sSub>
+                    </m:oMath>
+                  </m:oMathPara>
+                </a14:m>
+                <a:endParaRPr lang="en-US" altLang="zh-TW" sz="1625" dirty="0">
+                  <a:solidFill>
+                    <a:schemeClr val="bg1"/>
+                  </a:solidFill>
+                  <a:latin typeface="Times New Roman" panose="02020603050405020304" pitchFamily="18" charset="0"/>
+                  <a:cs typeface="Times New Roman" panose="02020603050405020304" pitchFamily="18" charset="0"/>
+                </a:endParaRPr>
+              </a:p>
+            </p:txBody>
+          </p:sp>
+        </mc:Choice>
+        <mc:Fallback>
+          <p:sp>
+            <p:nvSpPr>
+              <p:cNvPr id="34" name="文字方塊 33">
+                <a:extLst>
+                  <a:ext uri="{FF2B5EF4-FFF2-40B4-BE49-F238E27FC236}">
+                    <a16:creationId xmlns:a16="http://schemas.microsoft.com/office/drawing/2014/main" id="{3C51C04E-D705-431C-BF37-4C434E459464}"/>
+                  </a:ext>
+                </a:extLst>
+              </p:cNvPr>
+              <p:cNvSpPr txBox="1">
+                <a:spLocks noRot="1" noChangeAspect="1" noMove="1" noResize="1" noEditPoints="1" noAdjustHandles="1" noChangeArrowheads="1" noChangeShapeType="1" noTextEdit="1"/>
+              </p:cNvSpPr>
+              <p:nvPr/>
+            </p:nvSpPr>
+            <p:spPr>
+              <a:xfrm>
+                <a:off x="1950374" y="1973149"/>
+                <a:ext cx="323386" cy="362150"/>
+              </a:xfrm>
+              <a:prstGeom prst="rect">
+                <a:avLst/>
+              </a:prstGeom>
+              <a:blipFill>
+                <a:blip r:embed="rId21"/>
+                <a:stretch>
+                  <a:fillRect r="-7547" b="-1695"/>
+                </a:stretch>
+              </a:blipFill>
+            </p:spPr>
+            <p:txBody>
+              <a:bodyPr/>
+              <a:lstStyle/>
+              <a:p>
+                <a:r>
+                  <a:rPr lang="zh-TW" altLang="en-US">
+                    <a:noFill/>
+                  </a:rPr>
+                  <a:t> </a:t>
+                </a:r>
+              </a:p>
+            </p:txBody>
+          </p:sp>
+        </mc:Fallback>
+      </mc:AlternateContent>
+      <mc:AlternateContent xmlns:mc="http://schemas.openxmlformats.org/markup-compatibility/2006">
+        <mc:Choice xmlns:a14="http://schemas.microsoft.com/office/drawing/2010/main" Requires="a14">
+          <p:sp>
+            <p:nvSpPr>
+              <p:cNvPr id="35" name="文字方塊 34">
+                <a:extLst>
+                  <a:ext uri="{FF2B5EF4-FFF2-40B4-BE49-F238E27FC236}">
+                    <a16:creationId xmlns:a16="http://schemas.microsoft.com/office/drawing/2014/main" id="{A2A4A3A9-9D72-44FC-B8C2-E033178F7EA5}"/>
+                  </a:ext>
+                </a:extLst>
+              </p:cNvPr>
+              <p:cNvSpPr txBox="1"/>
+              <p:nvPr/>
+            </p:nvSpPr>
+            <p:spPr>
+              <a:xfrm>
+                <a:off x="2112514" y="2184490"/>
+                <a:ext cx="406919" cy="342401"/>
+              </a:xfrm>
+              <a:prstGeom prst="rect">
+                <a:avLst/>
+              </a:prstGeom>
+              <a:noFill/>
+            </p:spPr>
+            <p:txBody>
+              <a:bodyPr wrap="square" rtlCol="0">
+                <a:spAutoFit/>
+              </a:bodyPr>
+              <a:lstStyle/>
+              <a:p>
+                <a:pPr/>
+                <a14:m>
+                  <m:oMathPara xmlns:m="http://schemas.openxmlformats.org/officeDocument/2006/math">
+                    <m:oMathParaPr>
+                      <m:jc m:val="centerGroup"/>
+                    </m:oMathParaPr>
+                    <m:oMath xmlns:m="http://schemas.openxmlformats.org/officeDocument/2006/math">
+                      <m:sSub>
+                        <m:sSubPr>
+                          <m:ctrlPr>
+                            <a:rPr lang="en-US" altLang="zh-TW" sz="1625" i="1">
+                              <a:solidFill>
+                                <a:schemeClr val="bg1"/>
+                              </a:solidFill>
+                              <a:latin typeface="Cambria Math" panose="02040503050406030204" pitchFamily="18" charset="0"/>
+                            </a:rPr>
+                          </m:ctrlPr>
+                        </m:sSubPr>
+                        <m:e>
+                          <m:acc>
+                            <m:accPr>
+                              <m:chr m:val="̂"/>
+                              <m:ctrlPr>
+                                <a:rPr lang="zh-TW" altLang="en-US" sz="1625" i="1">
+                                  <a:solidFill>
+                                    <a:schemeClr val="bg1"/>
+                                  </a:solidFill>
+                                  <a:latin typeface="Cambria Math" panose="02040503050406030204" pitchFamily="18" charset="0"/>
+                                </a:rPr>
+                              </m:ctrlPr>
+                            </m:accPr>
+                            <m:e>
+                              <m:r>
+                                <a:rPr lang="en-US" altLang="zh-TW" sz="1625" i="1">
+                                  <a:solidFill>
+                                    <a:schemeClr val="bg1"/>
+                                  </a:solidFill>
+                                  <a:latin typeface="Cambria Math" panose="02040503050406030204" pitchFamily="18" charset="0"/>
+                                </a:rPr>
+                                <m:t>𝑞</m:t>
+                              </m:r>
+                            </m:e>
+                          </m:acc>
+                        </m:e>
+                        <m:sub>
+                          <m:r>
+                            <a:rPr lang="en-US" altLang="zh-TW" sz="1625" i="1">
+                              <a:solidFill>
+                                <a:schemeClr val="bg1"/>
+                              </a:solidFill>
+                              <a:latin typeface="Cambria Math" panose="02040503050406030204" pitchFamily="18" charset="0"/>
+                            </a:rPr>
+                            <m:t>𝑥</m:t>
+                          </m:r>
+                        </m:sub>
+                      </m:sSub>
+                    </m:oMath>
+                  </m:oMathPara>
+                </a14:m>
+                <a:endParaRPr lang="en-US" altLang="zh-TW" sz="1625" dirty="0">
+                  <a:solidFill>
+                    <a:schemeClr val="bg1"/>
+                  </a:solidFill>
+                  <a:latin typeface="Times New Roman" panose="02020603050405020304" pitchFamily="18" charset="0"/>
+                  <a:cs typeface="Times New Roman" panose="02020603050405020304" pitchFamily="18" charset="0"/>
+                </a:endParaRPr>
+              </a:p>
+            </p:txBody>
+          </p:sp>
+        </mc:Choice>
+        <mc:Fallback>
+          <p:sp>
+            <p:nvSpPr>
+              <p:cNvPr id="35" name="文字方塊 34">
+                <a:extLst>
+                  <a:ext uri="{FF2B5EF4-FFF2-40B4-BE49-F238E27FC236}">
+                    <a16:creationId xmlns:a16="http://schemas.microsoft.com/office/drawing/2014/main" id="{A2A4A3A9-9D72-44FC-B8C2-E033178F7EA5}"/>
+                  </a:ext>
+                </a:extLst>
+              </p:cNvPr>
+              <p:cNvSpPr txBox="1">
+                <a:spLocks noRot="1" noChangeAspect="1" noMove="1" noResize="1" noEditPoints="1" noAdjustHandles="1" noChangeArrowheads="1" noChangeShapeType="1" noTextEdit="1"/>
+              </p:cNvSpPr>
+              <p:nvPr/>
+            </p:nvSpPr>
+            <p:spPr>
+              <a:xfrm>
+                <a:off x="2112514" y="2184490"/>
+                <a:ext cx="406919" cy="342401"/>
+              </a:xfrm>
+              <a:prstGeom prst="rect">
+                <a:avLst/>
+              </a:prstGeom>
+              <a:blipFill>
+                <a:blip r:embed="rId22"/>
+                <a:stretch>
+                  <a:fillRect r="-4545" b="-5263"/>
+                </a:stretch>
+              </a:blipFill>
+            </p:spPr>
+            <p:txBody>
+              <a:bodyPr/>
+              <a:lstStyle/>
+              <a:p>
+                <a:r>
+                  <a:rPr lang="zh-TW" altLang="en-US">
+                    <a:noFill/>
+                  </a:rPr>
+                  <a:t> </a:t>
+                </a:r>
+              </a:p>
+            </p:txBody>
+          </p:sp>
+        </mc:Fallback>
+      </mc:AlternateContent>
+      <p:sp>
+        <p:nvSpPr>
+          <p:cNvPr id="36" name="箭號: 向右 35">
+            <a:extLst>
+              <a:ext uri="{FF2B5EF4-FFF2-40B4-BE49-F238E27FC236}">
+                <a16:creationId xmlns:a16="http://schemas.microsoft.com/office/drawing/2014/main" id="{31A2AB68-DF59-45DB-8CF5-CA87140274B6}"/>
+              </a:ext>
+            </a:extLst>
+          </p:cNvPr>
+          <p:cNvSpPr/>
+          <p:nvPr/>
+        </p:nvSpPr>
+        <p:spPr>
+          <a:xfrm>
+            <a:off x="2069620" y="737041"/>
+            <a:ext cx="92654" cy="27541"/>
+          </a:xfrm>
+          <a:prstGeom prst="rightArrow">
+            <a:avLst>
+              <a:gd name="adj1" fmla="val 50000"/>
+              <a:gd name="adj2" fmla="val 99023"/>
+            </a:avLst>
+          </a:prstGeom>
+          <a:solidFill>
+            <a:schemeClr val="tx1"/>
+          </a:solidFill>
+          <a:ln>
+            <a:solidFill>
+              <a:schemeClr val="tx1"/>
+            </a:solidFill>
+          </a:ln>
+        </p:spPr>
+        <p:style>
+          <a:lnRef idx="2">
+            <a:schemeClr val="dk1">
+              <a:shade val="50000"/>
+            </a:schemeClr>
+          </a:lnRef>
+          <a:fillRef idx="1">
+            <a:schemeClr val="dk1"/>
+          </a:fillRef>
+          <a:effectRef idx="0">
+            <a:schemeClr val="dk1"/>
+          </a:effectRef>
+          <a:fontRef idx="minor">
+            <a:schemeClr val="lt1"/>
+          </a:fontRef>
+        </p:style>
+        <p:txBody>
+          <a:bodyPr rtlCol="0" anchor="ctr"/>
+          <a:lstStyle/>
+          <a:p>
+            <a:pPr algn="ctr"/>
+            <a:endParaRPr lang="zh-TW" altLang="en-US" sz="1625">
+              <a:solidFill>
+                <a:schemeClr val="bg1"/>
+              </a:solidFill>
+              <a:latin typeface="Times New Roman" panose="02020603050405020304" pitchFamily="18" charset="0"/>
+              <a:cs typeface="Times New Roman" panose="02020603050405020304" pitchFamily="18" charset="0"/>
+            </a:endParaRPr>
+          </a:p>
+        </p:txBody>
+      </p:sp>
+      <p:sp>
+        <p:nvSpPr>
+          <p:cNvPr id="37" name="箭號: 向右 36">
+            <a:extLst>
+              <a:ext uri="{FF2B5EF4-FFF2-40B4-BE49-F238E27FC236}">
+                <a16:creationId xmlns:a16="http://schemas.microsoft.com/office/drawing/2014/main" id="{629675A1-6365-462C-895C-760A6F13437B}"/>
+              </a:ext>
+            </a:extLst>
+          </p:cNvPr>
+          <p:cNvSpPr/>
+          <p:nvPr/>
+        </p:nvSpPr>
+        <p:spPr>
+          <a:xfrm rot="16200000">
+            <a:off x="2029700" y="697530"/>
+            <a:ext cx="91764" cy="27808"/>
+          </a:xfrm>
+          <a:prstGeom prst="rightArrow">
+            <a:avLst>
+              <a:gd name="adj1" fmla="val 50000"/>
+              <a:gd name="adj2" fmla="val 99023"/>
+            </a:avLst>
+          </a:prstGeom>
+          <a:solidFill>
+            <a:schemeClr val="tx1"/>
+          </a:solidFill>
+          <a:ln>
+            <a:solidFill>
+              <a:schemeClr val="tx1"/>
+            </a:solidFill>
+          </a:ln>
+        </p:spPr>
+        <p:style>
+          <a:lnRef idx="2">
+            <a:schemeClr val="dk1">
+              <a:shade val="50000"/>
+            </a:schemeClr>
+          </a:lnRef>
+          <a:fillRef idx="1">
+            <a:schemeClr val="dk1"/>
+          </a:fillRef>
+          <a:effectRef idx="0">
+            <a:schemeClr val="dk1"/>
+          </a:effectRef>
+          <a:fontRef idx="minor">
+            <a:schemeClr val="lt1"/>
+          </a:fontRef>
+        </p:style>
+        <p:txBody>
+          <a:bodyPr rtlCol="0" anchor="ctr"/>
+          <a:lstStyle/>
+          <a:p>
+            <a:pPr algn="ctr"/>
+            <a:endParaRPr lang="zh-TW" altLang="en-US" sz="1625" dirty="0">
+              <a:solidFill>
+                <a:schemeClr val="bg1"/>
+              </a:solidFill>
+              <a:latin typeface="Times New Roman" panose="02020603050405020304" pitchFamily="18" charset="0"/>
+              <a:cs typeface="Times New Roman" panose="02020603050405020304" pitchFamily="18" charset="0"/>
+            </a:endParaRPr>
+          </a:p>
+        </p:txBody>
+      </p:sp>
+      <mc:AlternateContent xmlns:mc="http://schemas.openxmlformats.org/markup-compatibility/2006">
+        <mc:Choice xmlns:a14="http://schemas.microsoft.com/office/drawing/2010/main" Requires="a14">
+          <p:sp>
+            <p:nvSpPr>
+              <p:cNvPr id="38" name="文字方塊 37">
+                <a:extLst>
+                  <a:ext uri="{FF2B5EF4-FFF2-40B4-BE49-F238E27FC236}">
+                    <a16:creationId xmlns:a16="http://schemas.microsoft.com/office/drawing/2014/main" id="{BC716D3F-4BFE-46A0-8521-4123468810FA}"/>
+                  </a:ext>
+                </a:extLst>
+              </p:cNvPr>
+              <p:cNvSpPr txBox="1"/>
+              <p:nvPr/>
+            </p:nvSpPr>
+            <p:spPr>
+              <a:xfrm>
+                <a:off x="1950374" y="364487"/>
+                <a:ext cx="323386" cy="362150"/>
+              </a:xfrm>
+              <a:prstGeom prst="rect">
+                <a:avLst/>
+              </a:prstGeom>
+              <a:noFill/>
+            </p:spPr>
+            <p:txBody>
+              <a:bodyPr wrap="square" rtlCol="0">
+                <a:spAutoFit/>
+              </a:bodyPr>
+              <a:lstStyle/>
+              <a:p>
+                <a:pPr/>
+                <a14:m>
+                  <m:oMathPara xmlns:m="http://schemas.openxmlformats.org/officeDocument/2006/math">
+                    <m:oMathParaPr>
+                      <m:jc m:val="centerGroup"/>
+                    </m:oMathParaPr>
+                    <m:oMath xmlns:m="http://schemas.openxmlformats.org/officeDocument/2006/math">
+                      <m:sSub>
+                        <m:sSubPr>
+                          <m:ctrlPr>
+                            <a:rPr lang="en-US" altLang="zh-TW" sz="1625" i="1">
+                              <a:latin typeface="Cambria Math" panose="02040503050406030204" pitchFamily="18" charset="0"/>
+                            </a:rPr>
+                          </m:ctrlPr>
+                        </m:sSubPr>
+                        <m:e>
+                          <m:acc>
+                            <m:accPr>
+                              <m:chr m:val="̂"/>
+                              <m:ctrlPr>
+                                <a:rPr lang="zh-TW" altLang="en-US" sz="1625" i="1">
+                                  <a:latin typeface="Cambria Math" panose="02040503050406030204" pitchFamily="18" charset="0"/>
+                                </a:rPr>
+                              </m:ctrlPr>
+                            </m:accPr>
+                            <m:e>
+                              <m:r>
+                                <a:rPr lang="en-US" altLang="zh-TW" sz="1625" i="1">
+                                  <a:latin typeface="Cambria Math" panose="02040503050406030204" pitchFamily="18" charset="0"/>
+                                </a:rPr>
+                                <m:t>𝑞</m:t>
+                              </m:r>
+                            </m:e>
+                          </m:acc>
+                        </m:e>
+                        <m:sub>
+                          <m:r>
+                            <a:rPr lang="en-US" altLang="zh-TW" sz="1625" i="1">
+                              <a:latin typeface="Cambria Math" panose="02040503050406030204" pitchFamily="18" charset="0"/>
+                            </a:rPr>
+                            <m:t>𝑦</m:t>
+                          </m:r>
+                        </m:sub>
+                      </m:sSub>
+                    </m:oMath>
+                  </m:oMathPara>
+                </a14:m>
+                <a:endParaRPr lang="en-US" altLang="zh-TW" sz="1625" dirty="0">
+                  <a:latin typeface="Times New Roman" panose="02020603050405020304" pitchFamily="18" charset="0"/>
+                  <a:cs typeface="Times New Roman" panose="02020603050405020304" pitchFamily="18" charset="0"/>
+                </a:endParaRPr>
+              </a:p>
+            </p:txBody>
+          </p:sp>
+        </mc:Choice>
+        <mc:Fallback>
+          <p:sp>
+            <p:nvSpPr>
+              <p:cNvPr id="38" name="文字方塊 37">
+                <a:extLst>
+                  <a:ext uri="{FF2B5EF4-FFF2-40B4-BE49-F238E27FC236}">
+                    <a16:creationId xmlns:a16="http://schemas.microsoft.com/office/drawing/2014/main" id="{BC716D3F-4BFE-46A0-8521-4123468810FA}"/>
+                  </a:ext>
+                </a:extLst>
+              </p:cNvPr>
+              <p:cNvSpPr txBox="1">
+                <a:spLocks noRot="1" noChangeAspect="1" noMove="1" noResize="1" noEditPoints="1" noAdjustHandles="1" noChangeArrowheads="1" noChangeShapeType="1" noTextEdit="1"/>
+              </p:cNvSpPr>
+              <p:nvPr/>
+            </p:nvSpPr>
+            <p:spPr>
+              <a:xfrm>
+                <a:off x="1950374" y="364487"/>
+                <a:ext cx="323386" cy="362150"/>
+              </a:xfrm>
+              <a:prstGeom prst="rect">
+                <a:avLst/>
+              </a:prstGeom>
+              <a:blipFill>
+                <a:blip r:embed="rId23"/>
+                <a:stretch>
+                  <a:fillRect r="-7547" b="-1695"/>
+                </a:stretch>
+              </a:blipFill>
+            </p:spPr>
+            <p:txBody>
+              <a:bodyPr/>
+              <a:lstStyle/>
+              <a:p>
+                <a:r>
+                  <a:rPr lang="zh-TW" altLang="en-US">
+                    <a:noFill/>
+                  </a:rPr>
+                  <a:t> </a:t>
+                </a:r>
+              </a:p>
+            </p:txBody>
+          </p:sp>
+        </mc:Fallback>
+      </mc:AlternateContent>
+      <mc:AlternateContent xmlns:mc="http://schemas.openxmlformats.org/markup-compatibility/2006">
+        <mc:Choice xmlns:a14="http://schemas.microsoft.com/office/drawing/2010/main" Requires="a14">
+          <p:sp>
+            <p:nvSpPr>
+              <p:cNvPr id="39" name="文字方塊 38">
+                <a:extLst>
+                  <a:ext uri="{FF2B5EF4-FFF2-40B4-BE49-F238E27FC236}">
+                    <a16:creationId xmlns:a16="http://schemas.microsoft.com/office/drawing/2014/main" id="{801AB060-B26A-42ED-8EAD-63152A50699F}"/>
+                  </a:ext>
+                </a:extLst>
+              </p:cNvPr>
+              <p:cNvSpPr txBox="1"/>
+              <p:nvPr/>
+            </p:nvSpPr>
+            <p:spPr>
+              <a:xfrm>
+                <a:off x="2112514" y="575829"/>
+                <a:ext cx="297261" cy="342401"/>
+              </a:xfrm>
+              <a:prstGeom prst="rect">
+                <a:avLst/>
+              </a:prstGeom>
+              <a:noFill/>
+            </p:spPr>
+            <p:txBody>
+              <a:bodyPr wrap="square" rtlCol="0">
+                <a:spAutoFit/>
+              </a:bodyPr>
+              <a:lstStyle/>
+              <a:p>
+                <a:pPr/>
+                <a14:m>
+                  <m:oMathPara xmlns:m="http://schemas.openxmlformats.org/officeDocument/2006/math">
+                    <m:oMathParaPr>
+                      <m:jc m:val="centerGroup"/>
+                    </m:oMathParaPr>
+                    <m:oMath xmlns:m="http://schemas.openxmlformats.org/officeDocument/2006/math">
+                      <m:sSub>
+                        <m:sSubPr>
+                          <m:ctrlPr>
+                            <a:rPr lang="en-US" altLang="zh-TW" sz="1625" i="1">
+                              <a:latin typeface="Cambria Math" panose="02040503050406030204" pitchFamily="18" charset="0"/>
+                            </a:rPr>
+                          </m:ctrlPr>
+                        </m:sSubPr>
+                        <m:e>
+                          <m:acc>
+                            <m:accPr>
+                              <m:chr m:val="̂"/>
+                              <m:ctrlPr>
+                                <a:rPr lang="zh-TW" altLang="en-US" sz="1625" i="1">
+                                  <a:latin typeface="Cambria Math" panose="02040503050406030204" pitchFamily="18" charset="0"/>
+                                </a:rPr>
+                              </m:ctrlPr>
+                            </m:accPr>
+                            <m:e>
+                              <m:r>
+                                <a:rPr lang="en-US" altLang="zh-TW" sz="1625" i="1">
+                                  <a:latin typeface="Cambria Math" panose="02040503050406030204" pitchFamily="18" charset="0"/>
+                                </a:rPr>
+                                <m:t>𝑞</m:t>
+                              </m:r>
+                            </m:e>
+                          </m:acc>
+                        </m:e>
+                        <m:sub>
+                          <m:r>
+                            <a:rPr lang="en-US" altLang="zh-TW" sz="1625" i="1">
+                              <a:latin typeface="Cambria Math" panose="02040503050406030204" pitchFamily="18" charset="0"/>
+                            </a:rPr>
+                            <m:t>𝑥</m:t>
+                          </m:r>
+                        </m:sub>
+                      </m:sSub>
+                    </m:oMath>
+                  </m:oMathPara>
+                </a14:m>
+                <a:endParaRPr lang="en-US" altLang="zh-TW" sz="1625" dirty="0">
+                  <a:latin typeface="Times New Roman" panose="02020603050405020304" pitchFamily="18" charset="0"/>
+                  <a:cs typeface="Times New Roman" panose="02020603050405020304" pitchFamily="18" charset="0"/>
+                </a:endParaRPr>
+              </a:p>
+            </p:txBody>
+          </p:sp>
+        </mc:Choice>
+        <mc:Fallback>
+          <p:sp>
+            <p:nvSpPr>
+              <p:cNvPr id="39" name="文字方塊 38">
+                <a:extLst>
+                  <a:ext uri="{FF2B5EF4-FFF2-40B4-BE49-F238E27FC236}">
+                    <a16:creationId xmlns:a16="http://schemas.microsoft.com/office/drawing/2014/main" id="{801AB060-B26A-42ED-8EAD-63152A50699F}"/>
+                  </a:ext>
+                </a:extLst>
+              </p:cNvPr>
+              <p:cNvSpPr txBox="1">
+                <a:spLocks noRot="1" noChangeAspect="1" noMove="1" noResize="1" noEditPoints="1" noAdjustHandles="1" noChangeArrowheads="1" noChangeShapeType="1" noTextEdit="1"/>
+              </p:cNvSpPr>
+              <p:nvPr/>
+            </p:nvSpPr>
+            <p:spPr>
+              <a:xfrm>
+                <a:off x="2112514" y="575829"/>
+                <a:ext cx="297261" cy="342401"/>
+              </a:xfrm>
+              <a:prstGeom prst="rect">
+                <a:avLst/>
+              </a:prstGeom>
+              <a:blipFill>
+                <a:blip r:embed="rId24"/>
+                <a:stretch>
+                  <a:fillRect r="-10417" b="-5263"/>
+                </a:stretch>
+              </a:blipFill>
+            </p:spPr>
+            <p:txBody>
+              <a:bodyPr/>
+              <a:lstStyle/>
+              <a:p>
+                <a:r>
+                  <a:rPr lang="zh-TW" altLang="en-US">
+                    <a:noFill/>
+                  </a:rPr>
+                  <a:t> </a:t>
+                </a:r>
+              </a:p>
+            </p:txBody>
+          </p:sp>
+        </mc:Fallback>
+      </mc:AlternateContent>
     </p:spTree>
     <p:extLst>
       <p:ext uri="{BB962C8B-B14F-4D97-AF65-F5344CB8AC3E}">

--- a/Final/Figures/ffig.pptx
+++ b/Final/Figures/ffig.pptx
@@ -243,7 +243,7 @@
           <a:p>
             <a:fld id="{CC6FB895-B65F-4EA9-9907-69D32227E72B}" type="datetimeFigureOut">
               <a:rPr lang="zh-TW" altLang="en-US" smtClean="0"/>
-              <a:t>2026/6/18</a:t>
+              <a:t>2026/6/19</a:t>
             </a:fld>
             <a:endParaRPr lang="zh-TW" altLang="en-US"/>
           </a:p>
@@ -413,7 +413,7 @@
           <a:p>
             <a:fld id="{CC6FB895-B65F-4EA9-9907-69D32227E72B}" type="datetimeFigureOut">
               <a:rPr lang="zh-TW" altLang="en-US" smtClean="0"/>
-              <a:t>2026/6/18</a:t>
+              <a:t>2026/6/19</a:t>
             </a:fld>
             <a:endParaRPr lang="zh-TW" altLang="en-US"/>
           </a:p>
@@ -593,7 +593,7 @@
           <a:p>
             <a:fld id="{CC6FB895-B65F-4EA9-9907-69D32227E72B}" type="datetimeFigureOut">
               <a:rPr lang="zh-TW" altLang="en-US" smtClean="0"/>
-              <a:t>2026/6/18</a:t>
+              <a:t>2026/6/19</a:t>
             </a:fld>
             <a:endParaRPr lang="zh-TW" altLang="en-US"/>
           </a:p>
@@ -763,7 +763,7 @@
           <a:p>
             <a:fld id="{CC6FB895-B65F-4EA9-9907-69D32227E72B}" type="datetimeFigureOut">
               <a:rPr lang="zh-TW" altLang="en-US" smtClean="0"/>
-              <a:t>2026/6/18</a:t>
+              <a:t>2026/6/19</a:t>
             </a:fld>
             <a:endParaRPr lang="zh-TW" altLang="en-US"/>
           </a:p>
@@ -1009,7 +1009,7 @@
           <a:p>
             <a:fld id="{CC6FB895-B65F-4EA9-9907-69D32227E72B}" type="datetimeFigureOut">
               <a:rPr lang="zh-TW" altLang="en-US" smtClean="0"/>
-              <a:t>2026/6/18</a:t>
+              <a:t>2026/6/19</a:t>
             </a:fld>
             <a:endParaRPr lang="zh-TW" altLang="en-US"/>
           </a:p>
@@ -1241,7 +1241,7 @@
           <a:p>
             <a:fld id="{CC6FB895-B65F-4EA9-9907-69D32227E72B}" type="datetimeFigureOut">
               <a:rPr lang="zh-TW" altLang="en-US" smtClean="0"/>
-              <a:t>2026/6/18</a:t>
+              <a:t>2026/6/19</a:t>
             </a:fld>
             <a:endParaRPr lang="zh-TW" altLang="en-US"/>
           </a:p>
@@ -1608,7 +1608,7 @@
           <a:p>
             <a:fld id="{CC6FB895-B65F-4EA9-9907-69D32227E72B}" type="datetimeFigureOut">
               <a:rPr lang="zh-TW" altLang="en-US" smtClean="0"/>
-              <a:t>2026/6/18</a:t>
+              <a:t>2026/6/19</a:t>
             </a:fld>
             <a:endParaRPr lang="zh-TW" altLang="en-US"/>
           </a:p>
@@ -1726,7 +1726,7 @@
           <a:p>
             <a:fld id="{CC6FB895-B65F-4EA9-9907-69D32227E72B}" type="datetimeFigureOut">
               <a:rPr lang="zh-TW" altLang="en-US" smtClean="0"/>
-              <a:t>2026/6/18</a:t>
+              <a:t>2026/6/19</a:t>
             </a:fld>
             <a:endParaRPr lang="zh-TW" altLang="en-US"/>
           </a:p>
@@ -1821,7 +1821,7 @@
           <a:p>
             <a:fld id="{CC6FB895-B65F-4EA9-9907-69D32227E72B}" type="datetimeFigureOut">
               <a:rPr lang="zh-TW" altLang="en-US" smtClean="0"/>
-              <a:t>2026/6/18</a:t>
+              <a:t>2026/6/19</a:t>
             </a:fld>
             <a:endParaRPr lang="zh-TW" altLang="en-US"/>
           </a:p>
@@ -2098,7 +2098,7 @@
           <a:p>
             <a:fld id="{CC6FB895-B65F-4EA9-9907-69D32227E72B}" type="datetimeFigureOut">
               <a:rPr lang="zh-TW" altLang="en-US" smtClean="0"/>
-              <a:t>2026/6/18</a:t>
+              <a:t>2026/6/19</a:t>
             </a:fld>
             <a:endParaRPr lang="zh-TW" altLang="en-US"/>
           </a:p>
@@ -2355,7 +2355,7 @@
           <a:p>
             <a:fld id="{CC6FB895-B65F-4EA9-9907-69D32227E72B}" type="datetimeFigureOut">
               <a:rPr lang="zh-TW" altLang="en-US" smtClean="0"/>
-              <a:t>2026/6/18</a:t>
+              <a:t>2026/6/19</a:t>
             </a:fld>
             <a:endParaRPr lang="zh-TW" altLang="en-US"/>
           </a:p>
@@ -2568,7 +2568,7 @@
           <a:p>
             <a:fld id="{CC6FB895-B65F-4EA9-9907-69D32227E72B}" type="datetimeFigureOut">
               <a:rPr lang="zh-TW" altLang="en-US" smtClean="0"/>
-              <a:t>2026/6/18</a:t>
+              <a:t>2026/6/19</a:t>
             </a:fld>
             <a:endParaRPr lang="zh-TW" altLang="en-US"/>
           </a:p>
@@ -3256,8 +3256,8 @@
             </a:p>
           </p:txBody>
         </p:sp>
-        <mc:AlternateContent xmlns:mc="http://schemas.openxmlformats.org/markup-compatibility/2006">
-          <mc:Choice xmlns:a14="http://schemas.microsoft.com/office/drawing/2010/main" Requires="a14">
+        <mc:AlternateContent xmlns:mc="http://schemas.openxmlformats.org/markup-compatibility/2006" xmlns:a14="http://schemas.microsoft.com/office/drawing/2010/main">
+          <mc:Choice Requires="a14">
             <p:sp>
               <p:nvSpPr>
                 <p:cNvPr id="155" name="矩形 154">
@@ -3334,7 +3334,7 @@
               </p:txBody>
             </p:sp>
           </mc:Choice>
-          <mc:Fallback>
+          <mc:Fallback xmlns="">
             <p:sp>
               <p:nvSpPr>
                 <p:cNvPr id="155" name="矩形 154">
@@ -3379,8 +3379,8 @@
             </p:sp>
           </mc:Fallback>
         </mc:AlternateContent>
-        <mc:AlternateContent xmlns:mc="http://schemas.openxmlformats.org/markup-compatibility/2006">
-          <mc:Choice xmlns:a14="http://schemas.microsoft.com/office/drawing/2010/main" Requires="a14">
+        <mc:AlternateContent xmlns:mc="http://schemas.openxmlformats.org/markup-compatibility/2006" xmlns:a14="http://schemas.microsoft.com/office/drawing/2010/main">
+          <mc:Choice Requires="a14">
             <p:sp>
               <p:nvSpPr>
                 <p:cNvPr id="156" name="矩形 155">
@@ -3432,7 +3432,7 @@
               </p:txBody>
             </p:sp>
           </mc:Choice>
-          <mc:Fallback>
+          <mc:Fallback xmlns="">
             <p:sp>
               <p:nvSpPr>
                 <p:cNvPr id="156" name="矩形 155">
@@ -3477,8 +3477,8 @@
             </p:sp>
           </mc:Fallback>
         </mc:AlternateContent>
-        <mc:AlternateContent xmlns:mc="http://schemas.openxmlformats.org/markup-compatibility/2006">
-          <mc:Choice xmlns:a14="http://schemas.microsoft.com/office/drawing/2010/main" Requires="a14">
+        <mc:AlternateContent xmlns:mc="http://schemas.openxmlformats.org/markup-compatibility/2006" xmlns:a14="http://schemas.microsoft.com/office/drawing/2010/main">
+          <mc:Choice Requires="a14">
             <p:sp>
               <p:nvSpPr>
                 <p:cNvPr id="157" name="矩形 156">
@@ -3530,7 +3530,7 @@
               </p:txBody>
             </p:sp>
           </mc:Choice>
-          <mc:Fallback>
+          <mc:Fallback xmlns="">
             <p:sp>
               <p:nvSpPr>
                 <p:cNvPr id="157" name="矩形 156">
@@ -3575,8 +3575,8 @@
             </p:sp>
           </mc:Fallback>
         </mc:AlternateContent>
-        <mc:AlternateContent xmlns:mc="http://schemas.openxmlformats.org/markup-compatibility/2006">
-          <mc:Choice xmlns:a14="http://schemas.microsoft.com/office/drawing/2010/main" Requires="a14">
+        <mc:AlternateContent xmlns:mc="http://schemas.openxmlformats.org/markup-compatibility/2006" xmlns:a14="http://schemas.microsoft.com/office/drawing/2010/main">
+          <mc:Choice Requires="a14">
             <p:sp>
               <p:nvSpPr>
                 <p:cNvPr id="158" name="矩形 157">
@@ -3628,7 +3628,7 @@
               </p:txBody>
             </p:sp>
           </mc:Choice>
-          <mc:Fallback>
+          <mc:Fallback xmlns="">
             <p:sp>
               <p:nvSpPr>
                 <p:cNvPr id="158" name="矩形 157">
@@ -3673,8 +3673,8 @@
             </p:sp>
           </mc:Fallback>
         </mc:AlternateContent>
-        <mc:AlternateContent xmlns:mc="http://schemas.openxmlformats.org/markup-compatibility/2006">
-          <mc:Choice xmlns:a14="http://schemas.microsoft.com/office/drawing/2010/main" Requires="a14">
+        <mc:AlternateContent xmlns:mc="http://schemas.openxmlformats.org/markup-compatibility/2006" xmlns:a14="http://schemas.microsoft.com/office/drawing/2010/main">
+          <mc:Choice Requires="a14">
             <p:sp>
               <p:nvSpPr>
                 <p:cNvPr id="159" name="矩形 158">
@@ -3726,7 +3726,7 @@
               </p:txBody>
             </p:sp>
           </mc:Choice>
-          <mc:Fallback>
+          <mc:Fallback xmlns="">
             <p:sp>
               <p:nvSpPr>
                 <p:cNvPr id="159" name="矩形 158">
@@ -3771,8 +3771,8 @@
             </p:sp>
           </mc:Fallback>
         </mc:AlternateContent>
-        <mc:AlternateContent xmlns:mc="http://schemas.openxmlformats.org/markup-compatibility/2006">
-          <mc:Choice xmlns:a14="http://schemas.microsoft.com/office/drawing/2010/main" Requires="a14">
+        <mc:AlternateContent xmlns:mc="http://schemas.openxmlformats.org/markup-compatibility/2006" xmlns:a14="http://schemas.microsoft.com/office/drawing/2010/main">
+          <mc:Choice Requires="a14">
             <p:sp>
               <p:nvSpPr>
                 <p:cNvPr id="160" name="矩形 159">
@@ -3824,7 +3824,7 @@
               </p:txBody>
             </p:sp>
           </mc:Choice>
-          <mc:Fallback>
+          <mc:Fallback xmlns="">
             <p:sp>
               <p:nvSpPr>
                 <p:cNvPr id="160" name="矩形 159">
@@ -3869,8 +3869,8 @@
             </p:sp>
           </mc:Fallback>
         </mc:AlternateContent>
-        <mc:AlternateContent xmlns:mc="http://schemas.openxmlformats.org/markup-compatibility/2006">
-          <mc:Choice xmlns:a14="http://schemas.microsoft.com/office/drawing/2010/main" Requires="a14">
+        <mc:AlternateContent xmlns:mc="http://schemas.openxmlformats.org/markup-compatibility/2006" xmlns:a14="http://schemas.microsoft.com/office/drawing/2010/main">
+          <mc:Choice Requires="a14">
             <p:sp>
               <p:nvSpPr>
                 <p:cNvPr id="161" name="矩形 160">
@@ -3947,7 +3947,7 @@
               </p:txBody>
             </p:sp>
           </mc:Choice>
-          <mc:Fallback>
+          <mc:Fallback xmlns="">
             <p:sp>
               <p:nvSpPr>
                 <p:cNvPr id="161" name="矩形 160">
@@ -3992,8 +3992,8 @@
             </p:sp>
           </mc:Fallback>
         </mc:AlternateContent>
-        <mc:AlternateContent xmlns:mc="http://schemas.openxmlformats.org/markup-compatibility/2006">
-          <mc:Choice xmlns:a14="http://schemas.microsoft.com/office/drawing/2010/main" Requires="a14">
+        <mc:AlternateContent xmlns:mc="http://schemas.openxmlformats.org/markup-compatibility/2006" xmlns:a14="http://schemas.microsoft.com/office/drawing/2010/main">
+          <mc:Choice Requires="a14">
             <p:sp>
               <p:nvSpPr>
                 <p:cNvPr id="162" name="矩形 161">
@@ -4045,7 +4045,7 @@
               </p:txBody>
             </p:sp>
           </mc:Choice>
-          <mc:Fallback>
+          <mc:Fallback xmlns="">
             <p:sp>
               <p:nvSpPr>
                 <p:cNvPr id="162" name="矩形 161">
@@ -4090,8 +4090,8 @@
             </p:sp>
           </mc:Fallback>
         </mc:AlternateContent>
-        <mc:AlternateContent xmlns:mc="http://schemas.openxmlformats.org/markup-compatibility/2006">
-          <mc:Choice xmlns:a14="http://schemas.microsoft.com/office/drawing/2010/main" Requires="a14">
+        <mc:AlternateContent xmlns:mc="http://schemas.openxmlformats.org/markup-compatibility/2006" xmlns:a14="http://schemas.microsoft.com/office/drawing/2010/main">
+          <mc:Choice Requires="a14">
             <p:sp>
               <p:nvSpPr>
                 <p:cNvPr id="163" name="矩形 162">
@@ -4143,7 +4143,7 @@
               </p:txBody>
             </p:sp>
           </mc:Choice>
-          <mc:Fallback>
+          <mc:Fallback xmlns="">
             <p:sp>
               <p:nvSpPr>
                 <p:cNvPr id="163" name="矩形 162">
@@ -4188,8 +4188,8 @@
             </p:sp>
           </mc:Fallback>
         </mc:AlternateContent>
-        <mc:AlternateContent xmlns:mc="http://schemas.openxmlformats.org/markup-compatibility/2006">
-          <mc:Choice xmlns:a14="http://schemas.microsoft.com/office/drawing/2010/main" Requires="a14">
+        <mc:AlternateContent xmlns:mc="http://schemas.openxmlformats.org/markup-compatibility/2006" xmlns:a14="http://schemas.microsoft.com/office/drawing/2010/main">
+          <mc:Choice Requires="a14">
             <p:sp>
               <p:nvSpPr>
                 <p:cNvPr id="164" name="矩形 163">
@@ -4241,7 +4241,7 @@
               </p:txBody>
             </p:sp>
           </mc:Choice>
-          <mc:Fallback>
+          <mc:Fallback xmlns="">
             <p:sp>
               <p:nvSpPr>
                 <p:cNvPr id="164" name="矩形 163">
@@ -4286,8 +4286,8 @@
             </p:sp>
           </mc:Fallback>
         </mc:AlternateContent>
-        <mc:AlternateContent xmlns:mc="http://schemas.openxmlformats.org/markup-compatibility/2006">
-          <mc:Choice xmlns:a14="http://schemas.microsoft.com/office/drawing/2010/main" Requires="a14">
+        <mc:AlternateContent xmlns:mc="http://schemas.openxmlformats.org/markup-compatibility/2006" xmlns:a14="http://schemas.microsoft.com/office/drawing/2010/main">
+          <mc:Choice Requires="a14">
             <p:sp>
               <p:nvSpPr>
                 <p:cNvPr id="165" name="矩形 164">
@@ -4339,7 +4339,7 @@
               </p:txBody>
             </p:sp>
           </mc:Choice>
-          <mc:Fallback>
+          <mc:Fallback xmlns="">
             <p:sp>
               <p:nvSpPr>
                 <p:cNvPr id="165" name="矩形 164">
@@ -4384,8 +4384,8 @@
             </p:sp>
           </mc:Fallback>
         </mc:AlternateContent>
-        <mc:AlternateContent xmlns:mc="http://schemas.openxmlformats.org/markup-compatibility/2006">
-          <mc:Choice xmlns:a14="http://schemas.microsoft.com/office/drawing/2010/main" Requires="a14">
+        <mc:AlternateContent xmlns:mc="http://schemas.openxmlformats.org/markup-compatibility/2006" xmlns:a14="http://schemas.microsoft.com/office/drawing/2010/main">
+          <mc:Choice Requires="a14">
             <p:sp>
               <p:nvSpPr>
                 <p:cNvPr id="166" name="矩形 165">
@@ -4437,7 +4437,7 @@
               </p:txBody>
             </p:sp>
           </mc:Choice>
-          <mc:Fallback>
+          <mc:Fallback xmlns="">
             <p:sp>
               <p:nvSpPr>
                 <p:cNvPr id="166" name="矩形 165">

--- a/Final/Figures/ffig.pptx
+++ b/Final/Figures/ffig.pptx
@@ -6,6 +6,7 @@
   </p:sldMasterIdLst>
   <p:sldIdLst>
     <p:sldId id="256" r:id="rId2"/>
+    <p:sldId id="257" r:id="rId3"/>
   </p:sldIdLst>
   <p:sldSz cx="9906000" cy="4679950"/>
   <p:notesSz cx="6858000" cy="9144000"/>
@@ -243,7 +244,7 @@
           <a:p>
             <a:fld id="{CC6FB895-B65F-4EA9-9907-69D32227E72B}" type="datetimeFigureOut">
               <a:rPr lang="zh-TW" altLang="en-US" smtClean="0"/>
-              <a:t>2026/6/19</a:t>
+              <a:t>2026/6/30</a:t>
             </a:fld>
             <a:endParaRPr lang="zh-TW" altLang="en-US"/>
           </a:p>
@@ -413,7 +414,7 @@
           <a:p>
             <a:fld id="{CC6FB895-B65F-4EA9-9907-69D32227E72B}" type="datetimeFigureOut">
               <a:rPr lang="zh-TW" altLang="en-US" smtClean="0"/>
-              <a:t>2026/6/19</a:t>
+              <a:t>2026/6/30</a:t>
             </a:fld>
             <a:endParaRPr lang="zh-TW" altLang="en-US"/>
           </a:p>
@@ -593,7 +594,7 @@
           <a:p>
             <a:fld id="{CC6FB895-B65F-4EA9-9907-69D32227E72B}" type="datetimeFigureOut">
               <a:rPr lang="zh-TW" altLang="en-US" smtClean="0"/>
-              <a:t>2026/6/19</a:t>
+              <a:t>2026/6/30</a:t>
             </a:fld>
             <a:endParaRPr lang="zh-TW" altLang="en-US"/>
           </a:p>
@@ -763,7 +764,7 @@
           <a:p>
             <a:fld id="{CC6FB895-B65F-4EA9-9907-69D32227E72B}" type="datetimeFigureOut">
               <a:rPr lang="zh-TW" altLang="en-US" smtClean="0"/>
-              <a:t>2026/6/19</a:t>
+              <a:t>2026/6/30</a:t>
             </a:fld>
             <a:endParaRPr lang="zh-TW" altLang="en-US"/>
           </a:p>
@@ -1009,7 +1010,7 @@
           <a:p>
             <a:fld id="{CC6FB895-B65F-4EA9-9907-69D32227E72B}" type="datetimeFigureOut">
               <a:rPr lang="zh-TW" altLang="en-US" smtClean="0"/>
-              <a:t>2026/6/19</a:t>
+              <a:t>2026/6/30</a:t>
             </a:fld>
             <a:endParaRPr lang="zh-TW" altLang="en-US"/>
           </a:p>
@@ -1241,7 +1242,7 @@
           <a:p>
             <a:fld id="{CC6FB895-B65F-4EA9-9907-69D32227E72B}" type="datetimeFigureOut">
               <a:rPr lang="zh-TW" altLang="en-US" smtClean="0"/>
-              <a:t>2026/6/19</a:t>
+              <a:t>2026/6/30</a:t>
             </a:fld>
             <a:endParaRPr lang="zh-TW" altLang="en-US"/>
           </a:p>
@@ -1608,7 +1609,7 @@
           <a:p>
             <a:fld id="{CC6FB895-B65F-4EA9-9907-69D32227E72B}" type="datetimeFigureOut">
               <a:rPr lang="zh-TW" altLang="en-US" smtClean="0"/>
-              <a:t>2026/6/19</a:t>
+              <a:t>2026/6/30</a:t>
             </a:fld>
             <a:endParaRPr lang="zh-TW" altLang="en-US"/>
           </a:p>
@@ -1726,7 +1727,7 @@
           <a:p>
             <a:fld id="{CC6FB895-B65F-4EA9-9907-69D32227E72B}" type="datetimeFigureOut">
               <a:rPr lang="zh-TW" altLang="en-US" smtClean="0"/>
-              <a:t>2026/6/19</a:t>
+              <a:t>2026/6/30</a:t>
             </a:fld>
             <a:endParaRPr lang="zh-TW" altLang="en-US"/>
           </a:p>
@@ -1821,7 +1822,7 @@
           <a:p>
             <a:fld id="{CC6FB895-B65F-4EA9-9907-69D32227E72B}" type="datetimeFigureOut">
               <a:rPr lang="zh-TW" altLang="en-US" smtClean="0"/>
-              <a:t>2026/6/19</a:t>
+              <a:t>2026/6/30</a:t>
             </a:fld>
             <a:endParaRPr lang="zh-TW" altLang="en-US"/>
           </a:p>
@@ -2098,7 +2099,7 @@
           <a:p>
             <a:fld id="{CC6FB895-B65F-4EA9-9907-69D32227E72B}" type="datetimeFigureOut">
               <a:rPr lang="zh-TW" altLang="en-US" smtClean="0"/>
-              <a:t>2026/6/19</a:t>
+              <a:t>2026/6/30</a:t>
             </a:fld>
             <a:endParaRPr lang="zh-TW" altLang="en-US"/>
           </a:p>
@@ -2355,7 +2356,7 @@
           <a:p>
             <a:fld id="{CC6FB895-B65F-4EA9-9907-69D32227E72B}" type="datetimeFigureOut">
               <a:rPr lang="zh-TW" altLang="en-US" smtClean="0"/>
-              <a:t>2026/6/19</a:t>
+              <a:t>2026/6/30</a:t>
             </a:fld>
             <a:endParaRPr lang="zh-TW" altLang="en-US"/>
           </a:p>
@@ -2568,7 +2569,7 @@
           <a:p>
             <a:fld id="{CC6FB895-B65F-4EA9-9907-69D32227E72B}" type="datetimeFigureOut">
               <a:rPr lang="zh-TW" altLang="en-US" smtClean="0"/>
-              <a:t>2026/6/19</a:t>
+              <a:t>2026/6/30</a:t>
             </a:fld>
             <a:endParaRPr lang="zh-TW" altLang="en-US"/>
           </a:p>
@@ -5469,6 +5470,3078 @@
 </p:sld>
 </file>
 
+<file path=ppt/slides/slide2.xml><?xml version="1.0" encoding="utf-8"?>
+<p:sld xmlns:a="http://schemas.openxmlformats.org/drawingml/2006/main" xmlns:r="http://schemas.openxmlformats.org/officeDocument/2006/relationships" xmlns:p="http://schemas.openxmlformats.org/presentationml/2006/main" show="0">
+  <p:cSld>
+    <p:spTree>
+      <p:nvGrpSpPr>
+        <p:cNvPr id="1" name=""/>
+        <p:cNvGrpSpPr/>
+        <p:nvPr/>
+      </p:nvGrpSpPr>
+      <p:grpSpPr>
+        <a:xfrm>
+          <a:off x="0" y="0"/>
+          <a:ext cx="0" cy="0"/>
+          <a:chOff x="0" y="0"/>
+          <a:chExt cx="0" cy="0"/>
+        </a:xfrm>
+      </p:grpSpPr>
+      <p:pic>
+        <p:nvPicPr>
+          <p:cNvPr id="150" name="圖片 149">
+            <a:extLst>
+              <a:ext uri="{FF2B5EF4-FFF2-40B4-BE49-F238E27FC236}">
+                <a16:creationId xmlns:a16="http://schemas.microsoft.com/office/drawing/2014/main" id="{437F99CF-EE0E-4119-8643-8B0E99DCD7A8}"/>
+              </a:ext>
+            </a:extLst>
+          </p:cNvPr>
+          <p:cNvPicPr>
+            <a:picLocks noChangeAspect="1"/>
+          </p:cNvPicPr>
+          <p:nvPr/>
+        </p:nvPicPr>
+        <p:blipFill rotWithShape="1">
+          <a:blip r:embed="rId2">
+            <a:clrChange>
+              <a:clrFrom>
+                <a:srgbClr val="FFFFFF"/>
+              </a:clrFrom>
+              <a:clrTo>
+                <a:srgbClr val="FFFFFF">
+                  <a:alpha val="0"/>
+                </a:srgbClr>
+              </a:clrTo>
+            </a:clrChange>
+            <a:extLst>
+              <a:ext uri="{28A0092B-C50C-407E-A947-70E740481C1C}">
+                <a14:useLocalDpi xmlns:a14="http://schemas.microsoft.com/office/drawing/2010/main" val="0"/>
+              </a:ext>
+            </a:extLst>
+          </a:blip>
+          <a:srcRect r="84992"/>
+          <a:stretch/>
+        </p:blipFill>
+        <p:spPr>
+          <a:xfrm>
+            <a:off x="1311826" y="541230"/>
+            <a:ext cx="1494436" cy="1659600"/>
+          </a:xfrm>
+          <a:prstGeom prst="rect">
+            <a:avLst/>
+          </a:prstGeom>
+        </p:spPr>
+      </p:pic>
+      <p:pic>
+        <p:nvPicPr>
+          <p:cNvPr id="151" name="圖片 150">
+            <a:extLst>
+              <a:ext uri="{FF2B5EF4-FFF2-40B4-BE49-F238E27FC236}">
+                <a16:creationId xmlns:a16="http://schemas.microsoft.com/office/drawing/2014/main" id="{CDDCB0AA-F2C9-4DA4-BDE0-378878E44E76}"/>
+              </a:ext>
+            </a:extLst>
+          </p:cNvPr>
+          <p:cNvPicPr>
+            <a:picLocks noChangeAspect="1"/>
+          </p:cNvPicPr>
+          <p:nvPr/>
+        </p:nvPicPr>
+        <p:blipFill rotWithShape="1">
+          <a:blip r:embed="rId3">
+            <a:clrChange>
+              <a:clrFrom>
+                <a:srgbClr val="FFFFFF"/>
+              </a:clrFrom>
+              <a:clrTo>
+                <a:srgbClr val="FFFFFF">
+                  <a:alpha val="0"/>
+                </a:srgbClr>
+              </a:clrTo>
+            </a:clrChange>
+            <a:extLst>
+              <a:ext uri="{28A0092B-C50C-407E-A947-70E740481C1C}">
+                <a14:useLocalDpi xmlns:a14="http://schemas.microsoft.com/office/drawing/2010/main" val="0"/>
+              </a:ext>
+            </a:extLst>
+          </a:blip>
+          <a:srcRect r="85316"/>
+          <a:stretch/>
+        </p:blipFill>
+        <p:spPr>
+          <a:xfrm>
+            <a:off x="1351826" y="2768522"/>
+            <a:ext cx="1461006" cy="1658288"/>
+          </a:xfrm>
+          <a:prstGeom prst="rect">
+            <a:avLst/>
+          </a:prstGeom>
+        </p:spPr>
+      </p:pic>
+      <p:pic>
+        <p:nvPicPr>
+          <p:cNvPr id="152" name="圖片 151">
+            <a:extLst>
+              <a:ext uri="{FF2B5EF4-FFF2-40B4-BE49-F238E27FC236}">
+                <a16:creationId xmlns:a16="http://schemas.microsoft.com/office/drawing/2014/main" id="{C594AD88-73A0-42D7-B206-127223FA1ADB}"/>
+              </a:ext>
+            </a:extLst>
+          </p:cNvPr>
+          <p:cNvPicPr>
+            <a:picLocks noChangeAspect="1"/>
+          </p:cNvPicPr>
+          <p:nvPr/>
+        </p:nvPicPr>
+        <p:blipFill rotWithShape="1">
+          <a:blip r:embed="rId4">
+            <a:clrChange>
+              <a:clrFrom>
+                <a:srgbClr val="FFFFFF"/>
+              </a:clrFrom>
+              <a:clrTo>
+                <a:srgbClr val="FFFFFF">
+                  <a:alpha val="0"/>
+                </a:srgbClr>
+              </a:clrTo>
+            </a:clrChange>
+            <a:extLst>
+              <a:ext uri="{28A0092B-C50C-407E-A947-70E740481C1C}">
+                <a14:useLocalDpi xmlns:a14="http://schemas.microsoft.com/office/drawing/2010/main" val="0"/>
+              </a:ext>
+            </a:extLst>
+          </a:blip>
+          <a:srcRect l="84897" r="9472"/>
+          <a:stretch/>
+        </p:blipFill>
+        <p:spPr>
+          <a:xfrm>
+            <a:off x="8109294" y="2884537"/>
+            <a:ext cx="569632" cy="1680954"/>
+          </a:xfrm>
+          <a:prstGeom prst="rect">
+            <a:avLst/>
+          </a:prstGeom>
+        </p:spPr>
+      </p:pic>
+      <p:sp>
+        <p:nvSpPr>
+          <p:cNvPr id="153" name="矩形: 圓角 152">
+            <a:extLst>
+              <a:ext uri="{FF2B5EF4-FFF2-40B4-BE49-F238E27FC236}">
+                <a16:creationId xmlns:a16="http://schemas.microsoft.com/office/drawing/2014/main" id="{12F5DFE2-79A5-4BDB-B18F-972FD6B9518F}"/>
+              </a:ext>
+            </a:extLst>
+          </p:cNvPr>
+          <p:cNvSpPr/>
+          <p:nvPr/>
+        </p:nvSpPr>
+        <p:spPr>
+          <a:xfrm>
+            <a:off x="882637" y="2847389"/>
+            <a:ext cx="7259268" cy="1720252"/>
+          </a:xfrm>
+          <a:prstGeom prst="roundRect">
+            <a:avLst>
+              <a:gd name="adj" fmla="val 6163"/>
+            </a:avLst>
+          </a:prstGeom>
+          <a:noFill/>
+          <a:ln w="9525" cap="flat" cmpd="sng" algn="ctr">
+            <a:solidFill>
+              <a:schemeClr val="accent2"/>
+            </a:solidFill>
+            <a:prstDash val="solid"/>
+            <a:round/>
+            <a:headEnd type="none" w="med" len="med"/>
+            <a:tailEnd type="none" w="med" len="med"/>
+          </a:ln>
+        </p:spPr>
+        <p:style>
+          <a:lnRef idx="0">
+            <a:scrgbClr r="0" g="0" b="0"/>
+          </a:lnRef>
+          <a:fillRef idx="0">
+            <a:scrgbClr r="0" g="0" b="0"/>
+          </a:fillRef>
+          <a:effectRef idx="0">
+            <a:scrgbClr r="0" g="0" b="0"/>
+          </a:effectRef>
+          <a:fontRef idx="minor">
+            <a:schemeClr val="accent2"/>
+          </a:fontRef>
+        </p:style>
+        <p:txBody>
+          <a:bodyPr rot="0" spcFirstLastPara="0" vertOverflow="overflow" horzOverflow="overflow" vert="horz" wrap="square" lIns="91440" tIns="45720" rIns="91440" bIns="45720" numCol="1" spcCol="0" rtlCol="0" fromWordArt="0" anchor="ctr" anchorCtr="0" forceAA="0" compatLnSpc="1">
+            <a:prstTxWarp prst="textNoShape">
+              <a:avLst/>
+            </a:prstTxWarp>
+            <a:noAutofit/>
+          </a:bodyPr>
+          <a:lstStyle/>
+          <a:p>
+            <a:pPr algn="ctr"/>
+            <a:endParaRPr lang="zh-TW" altLang="en-US" sz="1900" dirty="0">
+              <a:latin typeface="Times New Roman" panose="02020603050405020304" pitchFamily="18" charset="0"/>
+              <a:cs typeface="Times New Roman" panose="02020603050405020304" pitchFamily="18" charset="0"/>
+            </a:endParaRPr>
+          </a:p>
+        </p:txBody>
+      </p:sp>
+      <p:sp>
+        <p:nvSpPr>
+          <p:cNvPr id="154" name="矩形: 圓角 153">
+            <a:extLst>
+              <a:ext uri="{FF2B5EF4-FFF2-40B4-BE49-F238E27FC236}">
+                <a16:creationId xmlns:a16="http://schemas.microsoft.com/office/drawing/2014/main" id="{780B5495-D514-40F7-BAF8-40E42BE368D2}"/>
+              </a:ext>
+            </a:extLst>
+          </p:cNvPr>
+          <p:cNvSpPr/>
+          <p:nvPr/>
+        </p:nvSpPr>
+        <p:spPr>
+          <a:xfrm>
+            <a:off x="882650" y="571312"/>
+            <a:ext cx="7259398" cy="1719011"/>
+          </a:xfrm>
+          <a:prstGeom prst="roundRect">
+            <a:avLst>
+              <a:gd name="adj" fmla="val 6163"/>
+            </a:avLst>
+          </a:prstGeom>
+          <a:noFill/>
+          <a:ln w="9525" cap="flat" cmpd="sng" algn="ctr">
+            <a:solidFill>
+              <a:schemeClr val="accent1"/>
+            </a:solidFill>
+            <a:prstDash val="solid"/>
+            <a:round/>
+            <a:headEnd type="none" w="med" len="med"/>
+            <a:tailEnd type="none" w="med" len="med"/>
+          </a:ln>
+        </p:spPr>
+        <p:style>
+          <a:lnRef idx="0">
+            <a:scrgbClr r="0" g="0" b="0"/>
+          </a:lnRef>
+          <a:fillRef idx="0">
+            <a:scrgbClr r="0" g="0" b="0"/>
+          </a:fillRef>
+          <a:effectRef idx="0">
+            <a:scrgbClr r="0" g="0" b="0"/>
+          </a:effectRef>
+          <a:fontRef idx="minor">
+            <a:schemeClr val="accent1"/>
+          </a:fontRef>
+        </p:style>
+        <p:txBody>
+          <a:bodyPr rot="0" spcFirstLastPara="0" vertOverflow="overflow" horzOverflow="overflow" vert="horz" wrap="square" lIns="91440" tIns="45720" rIns="91440" bIns="45720" numCol="1" spcCol="0" rtlCol="0" fromWordArt="0" anchor="ctr" anchorCtr="0" forceAA="0" compatLnSpc="1">
+            <a:prstTxWarp prst="textNoShape">
+              <a:avLst/>
+            </a:prstTxWarp>
+            <a:noAutofit/>
+          </a:bodyPr>
+          <a:lstStyle/>
+          <a:p>
+            <a:pPr algn="ctr"/>
+            <a:endParaRPr lang="zh-TW" altLang="en-US" sz="1900" dirty="0">
+              <a:latin typeface="Times New Roman" panose="02020603050405020304" pitchFamily="18" charset="0"/>
+              <a:cs typeface="Times New Roman" panose="02020603050405020304" pitchFamily="18" charset="0"/>
+            </a:endParaRPr>
+          </a:p>
+        </p:txBody>
+      </p:sp>
+      <mc:AlternateContent xmlns:mc="http://schemas.openxmlformats.org/markup-compatibility/2006">
+        <mc:Choice xmlns:a14="http://schemas.microsoft.com/office/drawing/2010/main" Requires="a14">
+          <p:sp>
+            <p:nvSpPr>
+              <p:cNvPr id="155" name="矩形 154">
+                <a:extLst>
+                  <a:ext uri="{FF2B5EF4-FFF2-40B4-BE49-F238E27FC236}">
+                    <a16:creationId xmlns:a16="http://schemas.microsoft.com/office/drawing/2014/main" id="{26AAC696-0C83-43C2-A7D7-AE30F4AF9AD2}"/>
+                  </a:ext>
+                </a:extLst>
+              </p:cNvPr>
+              <p:cNvSpPr/>
+              <p:nvPr/>
+            </p:nvSpPr>
+            <p:spPr>
+              <a:xfrm>
+                <a:off x="1565699" y="1586114"/>
+                <a:ext cx="783035" cy="343171"/>
+              </a:xfrm>
+              <a:prstGeom prst="rect">
+                <a:avLst/>
+              </a:prstGeom>
+            </p:spPr>
+            <p:txBody>
+              <a:bodyPr wrap="none">
+                <a:spAutoFit/>
+              </a:bodyPr>
+              <a:lstStyle/>
+              <a:p>
+                <a:pPr/>
+                <a14:m>
+                  <m:oMathPara xmlns:m="http://schemas.openxmlformats.org/officeDocument/2006/math">
+                    <m:oMathParaPr>
+                      <m:jc m:val="centerGroup"/>
+                    </m:oMathParaPr>
+                    <m:oMath xmlns:m="http://schemas.openxmlformats.org/officeDocument/2006/math">
+                      <m:r>
+                        <a:rPr lang="en-US" altLang="zh-TW" sz="1630" i="1">
+                          <a:latin typeface="Cambria Math" panose="02040503050406030204" pitchFamily="18" charset="0"/>
+                        </a:rPr>
+                        <m:t>0.1 </m:t>
+                      </m:r>
+                      <m:sSub>
+                        <m:sSubPr>
+                          <m:ctrlPr>
+                            <a:rPr lang="en-US" altLang="zh-TW" sz="1630" i="1">
+                              <a:latin typeface="Cambria Math" panose="02040503050406030204" pitchFamily="18" charset="0"/>
+                            </a:rPr>
+                          </m:ctrlPr>
+                        </m:sSubPr>
+                        <m:e>
+                          <m:r>
+                            <a:rPr lang="en-US" altLang="zh-TW" sz="1630" i="1">
+                              <a:latin typeface="Cambria Math" panose="02040503050406030204" pitchFamily="18" charset="0"/>
+                            </a:rPr>
+                            <m:t>𝑄</m:t>
+                          </m:r>
+                        </m:e>
+                        <m:sub>
+                          <m:r>
+                            <a:rPr lang="en-US" altLang="zh-TW" sz="1630" i="1">
+                              <a:latin typeface="Cambria Math" panose="02040503050406030204" pitchFamily="18" charset="0"/>
+                            </a:rPr>
+                            <m:t>𝑐</m:t>
+                          </m:r>
+                        </m:sub>
+                      </m:sSub>
+                    </m:oMath>
+                  </m:oMathPara>
+                </a14:m>
+                <a:endParaRPr lang="zh-TW" altLang="en-US" sz="1630" dirty="0">
+                  <a:latin typeface="Times New Roman" panose="02020603050405020304" pitchFamily="18" charset="0"/>
+                  <a:cs typeface="Times New Roman" panose="02020603050405020304" pitchFamily="18" charset="0"/>
+                </a:endParaRPr>
+              </a:p>
+            </p:txBody>
+          </p:sp>
+        </mc:Choice>
+        <mc:Fallback>
+          <p:sp>
+            <p:nvSpPr>
+              <p:cNvPr id="155" name="矩形 154">
+                <a:extLst>
+                  <a:ext uri="{FF2B5EF4-FFF2-40B4-BE49-F238E27FC236}">
+                    <a16:creationId xmlns:a16="http://schemas.microsoft.com/office/drawing/2014/main" id="{26AAC696-0C83-43C2-A7D7-AE30F4AF9AD2}"/>
+                  </a:ext>
+                </a:extLst>
+              </p:cNvPr>
+              <p:cNvSpPr>
+                <a:spLocks noRot="1" noChangeAspect="1" noMove="1" noResize="1" noEditPoints="1" noAdjustHandles="1" noChangeArrowheads="1" noChangeShapeType="1" noTextEdit="1"/>
+              </p:cNvSpPr>
+              <p:nvPr/>
+            </p:nvSpPr>
+            <p:spPr>
+              <a:xfrm>
+                <a:off x="1565699" y="1586114"/>
+                <a:ext cx="783035" cy="343171"/>
+              </a:xfrm>
+              <a:prstGeom prst="rect">
+                <a:avLst/>
+              </a:prstGeom>
+              <a:blipFill>
+                <a:blip r:embed="rId5"/>
+                <a:stretch>
+                  <a:fillRect b="-10714"/>
+                </a:stretch>
+              </a:blipFill>
+            </p:spPr>
+            <p:txBody>
+              <a:bodyPr/>
+              <a:lstStyle/>
+              <a:p>
+                <a:r>
+                  <a:rPr lang="zh-TW" altLang="en-US">
+                    <a:noFill/>
+                  </a:rPr>
+                  <a:t> </a:t>
+                </a:r>
+              </a:p>
+            </p:txBody>
+          </p:sp>
+        </mc:Fallback>
+      </mc:AlternateContent>
+      <mc:AlternateContent xmlns:mc="http://schemas.openxmlformats.org/markup-compatibility/2006">
+        <mc:Choice xmlns:a14="http://schemas.microsoft.com/office/drawing/2010/main" Requires="a14">
+          <p:sp>
+            <p:nvSpPr>
+              <p:cNvPr id="156" name="矩形 155">
+                <a:extLst>
+                  <a:ext uri="{FF2B5EF4-FFF2-40B4-BE49-F238E27FC236}">
+                    <a16:creationId xmlns:a16="http://schemas.microsoft.com/office/drawing/2014/main" id="{9A6ABA0C-E06E-4E01-9C48-24D6DD07166A}"/>
+                  </a:ext>
+                </a:extLst>
+              </p:cNvPr>
+              <p:cNvSpPr/>
+              <p:nvPr/>
+            </p:nvSpPr>
+            <p:spPr>
+              <a:xfrm>
+                <a:off x="1623084" y="1955731"/>
+                <a:ext cx="889154" cy="343171"/>
+              </a:xfrm>
+              <a:prstGeom prst="rect">
+                <a:avLst/>
+              </a:prstGeom>
+            </p:spPr>
+            <p:txBody>
+              <a:bodyPr wrap="none">
+                <a:spAutoFit/>
+              </a:bodyPr>
+              <a:lstStyle/>
+              <a:p>
+                <a:pPr/>
+                <a14:m>
+                  <m:oMathPara xmlns:m="http://schemas.openxmlformats.org/officeDocument/2006/math">
+                    <m:oMathParaPr>
+                      <m:jc m:val="centerGroup"/>
+                    </m:oMathParaPr>
+                    <m:oMath xmlns:m="http://schemas.openxmlformats.org/officeDocument/2006/math">
+                      <m:r>
+                        <a:rPr lang="en-US" altLang="zh-TW" sz="1630" i="1">
+                          <a:latin typeface="Cambria Math" panose="02040503050406030204" pitchFamily="18" charset="0"/>
+                        </a:rPr>
+                        <m:t>ℓ=−2</m:t>
+                      </m:r>
+                    </m:oMath>
+                  </m:oMathPara>
+                </a14:m>
+                <a:endParaRPr lang="zh-TW" altLang="en-US" sz="1630" dirty="0">
+                  <a:latin typeface="Times New Roman" panose="02020603050405020304" pitchFamily="18" charset="0"/>
+                  <a:cs typeface="Times New Roman" panose="02020603050405020304" pitchFamily="18" charset="0"/>
+                </a:endParaRPr>
+              </a:p>
+            </p:txBody>
+          </p:sp>
+        </mc:Choice>
+        <mc:Fallback>
+          <p:sp>
+            <p:nvSpPr>
+              <p:cNvPr id="156" name="矩形 155">
+                <a:extLst>
+                  <a:ext uri="{FF2B5EF4-FFF2-40B4-BE49-F238E27FC236}">
+                    <a16:creationId xmlns:a16="http://schemas.microsoft.com/office/drawing/2014/main" id="{9A6ABA0C-E06E-4E01-9C48-24D6DD07166A}"/>
+                  </a:ext>
+                </a:extLst>
+              </p:cNvPr>
+              <p:cNvSpPr>
+                <a:spLocks noRot="1" noChangeAspect="1" noMove="1" noResize="1" noEditPoints="1" noAdjustHandles="1" noChangeArrowheads="1" noChangeShapeType="1" noTextEdit="1"/>
+              </p:cNvSpPr>
+              <p:nvPr/>
+            </p:nvSpPr>
+            <p:spPr>
+              <a:xfrm>
+                <a:off x="1623084" y="1955731"/>
+                <a:ext cx="889154" cy="343171"/>
+              </a:xfrm>
+              <a:prstGeom prst="rect">
+                <a:avLst/>
+              </a:prstGeom>
+              <a:blipFill>
+                <a:blip r:embed="rId6"/>
+                <a:stretch>
+                  <a:fillRect/>
+                </a:stretch>
+              </a:blipFill>
+            </p:spPr>
+            <p:txBody>
+              <a:bodyPr/>
+              <a:lstStyle/>
+              <a:p>
+                <a:r>
+                  <a:rPr lang="zh-TW" altLang="en-US">
+                    <a:noFill/>
+                  </a:rPr>
+                  <a:t> </a:t>
+                </a:r>
+              </a:p>
+            </p:txBody>
+          </p:sp>
+        </mc:Fallback>
+      </mc:AlternateContent>
+      <mc:AlternateContent xmlns:mc="http://schemas.openxmlformats.org/markup-compatibility/2006">
+        <mc:Choice xmlns:a14="http://schemas.microsoft.com/office/drawing/2010/main" Requires="a14">
+          <p:sp>
+            <p:nvSpPr>
+              <p:cNvPr id="157" name="矩形 156">
+                <a:extLst>
+                  <a:ext uri="{FF2B5EF4-FFF2-40B4-BE49-F238E27FC236}">
+                    <a16:creationId xmlns:a16="http://schemas.microsoft.com/office/drawing/2014/main" id="{E4AEA160-3D8E-49BF-AABF-DF9ACA1AF8F6}"/>
+                  </a:ext>
+                </a:extLst>
+              </p:cNvPr>
+              <p:cNvSpPr/>
+              <p:nvPr/>
+            </p:nvSpPr>
+            <p:spPr>
+              <a:xfrm>
+                <a:off x="3052942" y="1955731"/>
+                <a:ext cx="889154" cy="343171"/>
+              </a:xfrm>
+              <a:prstGeom prst="rect">
+                <a:avLst/>
+              </a:prstGeom>
+            </p:spPr>
+            <p:txBody>
+              <a:bodyPr wrap="none">
+                <a:spAutoFit/>
+              </a:bodyPr>
+              <a:lstStyle/>
+              <a:p>
+                <a:pPr/>
+                <a14:m>
+                  <m:oMathPara xmlns:m="http://schemas.openxmlformats.org/officeDocument/2006/math">
+                    <m:oMathParaPr>
+                      <m:jc m:val="centerGroup"/>
+                    </m:oMathParaPr>
+                    <m:oMath xmlns:m="http://schemas.openxmlformats.org/officeDocument/2006/math">
+                      <m:r>
+                        <a:rPr lang="en-US" altLang="zh-TW" sz="1630" i="1">
+                          <a:latin typeface="Cambria Math" panose="02040503050406030204" pitchFamily="18" charset="0"/>
+                        </a:rPr>
+                        <m:t>ℓ=−1</m:t>
+                      </m:r>
+                    </m:oMath>
+                  </m:oMathPara>
+                </a14:m>
+                <a:endParaRPr lang="zh-TW" altLang="en-US" sz="1630" dirty="0">
+                  <a:latin typeface="Times New Roman" panose="02020603050405020304" pitchFamily="18" charset="0"/>
+                  <a:cs typeface="Times New Roman" panose="02020603050405020304" pitchFamily="18" charset="0"/>
+                </a:endParaRPr>
+              </a:p>
+            </p:txBody>
+          </p:sp>
+        </mc:Choice>
+        <mc:Fallback>
+          <p:sp>
+            <p:nvSpPr>
+              <p:cNvPr id="157" name="矩形 156">
+                <a:extLst>
+                  <a:ext uri="{FF2B5EF4-FFF2-40B4-BE49-F238E27FC236}">
+                    <a16:creationId xmlns:a16="http://schemas.microsoft.com/office/drawing/2014/main" id="{E4AEA160-3D8E-49BF-AABF-DF9ACA1AF8F6}"/>
+                  </a:ext>
+                </a:extLst>
+              </p:cNvPr>
+              <p:cNvSpPr>
+                <a:spLocks noRot="1" noChangeAspect="1" noMove="1" noResize="1" noEditPoints="1" noAdjustHandles="1" noChangeArrowheads="1" noChangeShapeType="1" noTextEdit="1"/>
+              </p:cNvSpPr>
+              <p:nvPr/>
+            </p:nvSpPr>
+            <p:spPr>
+              <a:xfrm>
+                <a:off x="3052942" y="1955731"/>
+                <a:ext cx="889154" cy="343171"/>
+              </a:xfrm>
+              <a:prstGeom prst="rect">
+                <a:avLst/>
+              </a:prstGeom>
+              <a:blipFill>
+                <a:blip r:embed="rId7"/>
+                <a:stretch>
+                  <a:fillRect/>
+                </a:stretch>
+              </a:blipFill>
+            </p:spPr>
+            <p:txBody>
+              <a:bodyPr/>
+              <a:lstStyle/>
+              <a:p>
+                <a:r>
+                  <a:rPr lang="zh-TW" altLang="en-US">
+                    <a:noFill/>
+                  </a:rPr>
+                  <a:t> </a:t>
+                </a:r>
+              </a:p>
+            </p:txBody>
+          </p:sp>
+        </mc:Fallback>
+      </mc:AlternateContent>
+      <mc:AlternateContent xmlns:mc="http://schemas.openxmlformats.org/markup-compatibility/2006">
+        <mc:Choice xmlns:a14="http://schemas.microsoft.com/office/drawing/2010/main" Requires="a14">
+          <p:sp>
+            <p:nvSpPr>
+              <p:cNvPr id="158" name="矩形 157">
+                <a:extLst>
+                  <a:ext uri="{FF2B5EF4-FFF2-40B4-BE49-F238E27FC236}">
+                    <a16:creationId xmlns:a16="http://schemas.microsoft.com/office/drawing/2014/main" id="{F35D562F-4D39-426F-959E-9BDB7804C807}"/>
+                  </a:ext>
+                </a:extLst>
+              </p:cNvPr>
+              <p:cNvSpPr/>
+              <p:nvPr/>
+            </p:nvSpPr>
+            <p:spPr>
+              <a:xfrm>
+                <a:off x="4482800" y="1955731"/>
+                <a:ext cx="733662" cy="343171"/>
+              </a:xfrm>
+              <a:prstGeom prst="rect">
+                <a:avLst/>
+              </a:prstGeom>
+            </p:spPr>
+            <p:txBody>
+              <a:bodyPr wrap="none">
+                <a:spAutoFit/>
+              </a:bodyPr>
+              <a:lstStyle/>
+              <a:p>
+                <a:pPr/>
+                <a14:m>
+                  <m:oMathPara xmlns:m="http://schemas.openxmlformats.org/officeDocument/2006/math">
+                    <m:oMathParaPr>
+                      <m:jc m:val="centerGroup"/>
+                    </m:oMathParaPr>
+                    <m:oMath xmlns:m="http://schemas.openxmlformats.org/officeDocument/2006/math">
+                      <m:r>
+                        <a:rPr lang="en-US" altLang="zh-TW" sz="1630" i="1">
+                          <a:latin typeface="Cambria Math" panose="02040503050406030204" pitchFamily="18" charset="0"/>
+                        </a:rPr>
+                        <m:t>ℓ=0</m:t>
+                      </m:r>
+                    </m:oMath>
+                  </m:oMathPara>
+                </a14:m>
+                <a:endParaRPr lang="zh-TW" altLang="en-US" sz="1630" dirty="0">
+                  <a:latin typeface="Times New Roman" panose="02020603050405020304" pitchFamily="18" charset="0"/>
+                  <a:cs typeface="Times New Roman" panose="02020603050405020304" pitchFamily="18" charset="0"/>
+                </a:endParaRPr>
+              </a:p>
+            </p:txBody>
+          </p:sp>
+        </mc:Choice>
+        <mc:Fallback>
+          <p:sp>
+            <p:nvSpPr>
+              <p:cNvPr id="158" name="矩形 157">
+                <a:extLst>
+                  <a:ext uri="{FF2B5EF4-FFF2-40B4-BE49-F238E27FC236}">
+                    <a16:creationId xmlns:a16="http://schemas.microsoft.com/office/drawing/2014/main" id="{F35D562F-4D39-426F-959E-9BDB7804C807}"/>
+                  </a:ext>
+                </a:extLst>
+              </p:cNvPr>
+              <p:cNvSpPr>
+                <a:spLocks noRot="1" noChangeAspect="1" noMove="1" noResize="1" noEditPoints="1" noAdjustHandles="1" noChangeArrowheads="1" noChangeShapeType="1" noTextEdit="1"/>
+              </p:cNvSpPr>
+              <p:nvPr/>
+            </p:nvSpPr>
+            <p:spPr>
+              <a:xfrm>
+                <a:off x="4482800" y="1955731"/>
+                <a:ext cx="733662" cy="343171"/>
+              </a:xfrm>
+              <a:prstGeom prst="rect">
+                <a:avLst/>
+              </a:prstGeom>
+              <a:blipFill>
+                <a:blip r:embed="rId8"/>
+                <a:stretch>
+                  <a:fillRect/>
+                </a:stretch>
+              </a:blipFill>
+            </p:spPr>
+            <p:txBody>
+              <a:bodyPr/>
+              <a:lstStyle/>
+              <a:p>
+                <a:r>
+                  <a:rPr lang="zh-TW" altLang="en-US">
+                    <a:noFill/>
+                  </a:rPr>
+                  <a:t> </a:t>
+                </a:r>
+              </a:p>
+            </p:txBody>
+          </p:sp>
+        </mc:Fallback>
+      </mc:AlternateContent>
+      <mc:AlternateContent xmlns:mc="http://schemas.openxmlformats.org/markup-compatibility/2006">
+        <mc:Choice xmlns:a14="http://schemas.microsoft.com/office/drawing/2010/main" Requires="a14">
+          <p:sp>
+            <p:nvSpPr>
+              <p:cNvPr id="159" name="矩形 158">
+                <a:extLst>
+                  <a:ext uri="{FF2B5EF4-FFF2-40B4-BE49-F238E27FC236}">
+                    <a16:creationId xmlns:a16="http://schemas.microsoft.com/office/drawing/2014/main" id="{5F2474C0-777F-4023-B64D-216298CD9686}"/>
+                  </a:ext>
+                </a:extLst>
+              </p:cNvPr>
+              <p:cNvSpPr/>
+              <p:nvPr/>
+            </p:nvSpPr>
+            <p:spPr>
+              <a:xfrm>
+                <a:off x="5757166" y="1955731"/>
+                <a:ext cx="733662" cy="343171"/>
+              </a:xfrm>
+              <a:prstGeom prst="rect">
+                <a:avLst/>
+              </a:prstGeom>
+            </p:spPr>
+            <p:txBody>
+              <a:bodyPr wrap="none">
+                <a:spAutoFit/>
+              </a:bodyPr>
+              <a:lstStyle/>
+              <a:p>
+                <a:pPr/>
+                <a14:m>
+                  <m:oMathPara xmlns:m="http://schemas.openxmlformats.org/officeDocument/2006/math">
+                    <m:oMathParaPr>
+                      <m:jc m:val="centerGroup"/>
+                    </m:oMathParaPr>
+                    <m:oMath xmlns:m="http://schemas.openxmlformats.org/officeDocument/2006/math">
+                      <m:r>
+                        <a:rPr lang="en-US" altLang="zh-TW" sz="1630" i="1">
+                          <a:latin typeface="Cambria Math" panose="02040503050406030204" pitchFamily="18" charset="0"/>
+                        </a:rPr>
+                        <m:t>ℓ=1</m:t>
+                      </m:r>
+                    </m:oMath>
+                  </m:oMathPara>
+                </a14:m>
+                <a:endParaRPr lang="zh-TW" altLang="en-US" sz="1630" dirty="0">
+                  <a:latin typeface="Times New Roman" panose="02020603050405020304" pitchFamily="18" charset="0"/>
+                  <a:cs typeface="Times New Roman" panose="02020603050405020304" pitchFamily="18" charset="0"/>
+                </a:endParaRPr>
+              </a:p>
+            </p:txBody>
+          </p:sp>
+        </mc:Choice>
+        <mc:Fallback>
+          <p:sp>
+            <p:nvSpPr>
+              <p:cNvPr id="159" name="矩形 158">
+                <a:extLst>
+                  <a:ext uri="{FF2B5EF4-FFF2-40B4-BE49-F238E27FC236}">
+                    <a16:creationId xmlns:a16="http://schemas.microsoft.com/office/drawing/2014/main" id="{5F2474C0-777F-4023-B64D-216298CD9686}"/>
+                  </a:ext>
+                </a:extLst>
+              </p:cNvPr>
+              <p:cNvSpPr>
+                <a:spLocks noRot="1" noChangeAspect="1" noMove="1" noResize="1" noEditPoints="1" noAdjustHandles="1" noChangeArrowheads="1" noChangeShapeType="1" noTextEdit="1"/>
+              </p:cNvSpPr>
+              <p:nvPr/>
+            </p:nvSpPr>
+            <p:spPr>
+              <a:xfrm>
+                <a:off x="5757166" y="1955731"/>
+                <a:ext cx="733662" cy="343171"/>
+              </a:xfrm>
+              <a:prstGeom prst="rect">
+                <a:avLst/>
+              </a:prstGeom>
+              <a:blipFill>
+                <a:blip r:embed="rId9"/>
+                <a:stretch>
+                  <a:fillRect/>
+                </a:stretch>
+              </a:blipFill>
+            </p:spPr>
+            <p:txBody>
+              <a:bodyPr/>
+              <a:lstStyle/>
+              <a:p>
+                <a:r>
+                  <a:rPr lang="zh-TW" altLang="en-US">
+                    <a:noFill/>
+                  </a:rPr>
+                  <a:t> </a:t>
+                </a:r>
+              </a:p>
+            </p:txBody>
+          </p:sp>
+        </mc:Fallback>
+      </mc:AlternateContent>
+      <mc:AlternateContent xmlns:mc="http://schemas.openxmlformats.org/markup-compatibility/2006">
+        <mc:Choice xmlns:a14="http://schemas.microsoft.com/office/drawing/2010/main" Requires="a14">
+          <p:sp>
+            <p:nvSpPr>
+              <p:cNvPr id="160" name="矩形 159">
+                <a:extLst>
+                  <a:ext uri="{FF2B5EF4-FFF2-40B4-BE49-F238E27FC236}">
+                    <a16:creationId xmlns:a16="http://schemas.microsoft.com/office/drawing/2014/main" id="{F6079F0D-AE71-49F9-8960-E30C1BCE64BE}"/>
+                  </a:ext>
+                </a:extLst>
+              </p:cNvPr>
+              <p:cNvSpPr/>
+              <p:nvPr/>
+            </p:nvSpPr>
+            <p:spPr>
+              <a:xfrm>
+                <a:off x="7031532" y="1955731"/>
+                <a:ext cx="733662" cy="343171"/>
+              </a:xfrm>
+              <a:prstGeom prst="rect">
+                <a:avLst/>
+              </a:prstGeom>
+            </p:spPr>
+            <p:txBody>
+              <a:bodyPr wrap="none">
+                <a:spAutoFit/>
+              </a:bodyPr>
+              <a:lstStyle/>
+              <a:p>
+                <a:pPr/>
+                <a14:m>
+                  <m:oMathPara xmlns:m="http://schemas.openxmlformats.org/officeDocument/2006/math">
+                    <m:oMathParaPr>
+                      <m:jc m:val="centerGroup"/>
+                    </m:oMathParaPr>
+                    <m:oMath xmlns:m="http://schemas.openxmlformats.org/officeDocument/2006/math">
+                      <m:r>
+                        <a:rPr lang="en-US" altLang="zh-TW" sz="1630" i="1">
+                          <a:latin typeface="Cambria Math" panose="02040503050406030204" pitchFamily="18" charset="0"/>
+                        </a:rPr>
+                        <m:t>ℓ=2</m:t>
+                      </m:r>
+                    </m:oMath>
+                  </m:oMathPara>
+                </a14:m>
+                <a:endParaRPr lang="zh-TW" altLang="en-US" sz="1630" dirty="0">
+                  <a:latin typeface="Times New Roman" panose="02020603050405020304" pitchFamily="18" charset="0"/>
+                  <a:cs typeface="Times New Roman" panose="02020603050405020304" pitchFamily="18" charset="0"/>
+                </a:endParaRPr>
+              </a:p>
+            </p:txBody>
+          </p:sp>
+        </mc:Choice>
+        <mc:Fallback>
+          <p:sp>
+            <p:nvSpPr>
+              <p:cNvPr id="160" name="矩形 159">
+                <a:extLst>
+                  <a:ext uri="{FF2B5EF4-FFF2-40B4-BE49-F238E27FC236}">
+                    <a16:creationId xmlns:a16="http://schemas.microsoft.com/office/drawing/2014/main" id="{F6079F0D-AE71-49F9-8960-E30C1BCE64BE}"/>
+                  </a:ext>
+                </a:extLst>
+              </p:cNvPr>
+              <p:cNvSpPr>
+                <a:spLocks noRot="1" noChangeAspect="1" noMove="1" noResize="1" noEditPoints="1" noAdjustHandles="1" noChangeArrowheads="1" noChangeShapeType="1" noTextEdit="1"/>
+              </p:cNvSpPr>
+              <p:nvPr/>
+            </p:nvSpPr>
+            <p:spPr>
+              <a:xfrm>
+                <a:off x="7031532" y="1955731"/>
+                <a:ext cx="733662" cy="343171"/>
+              </a:xfrm>
+              <a:prstGeom prst="rect">
+                <a:avLst/>
+              </a:prstGeom>
+              <a:blipFill>
+                <a:blip r:embed="rId10"/>
+                <a:stretch>
+                  <a:fillRect/>
+                </a:stretch>
+              </a:blipFill>
+            </p:spPr>
+            <p:txBody>
+              <a:bodyPr/>
+              <a:lstStyle/>
+              <a:p>
+                <a:r>
+                  <a:rPr lang="zh-TW" altLang="en-US">
+                    <a:noFill/>
+                  </a:rPr>
+                  <a:t> </a:t>
+                </a:r>
+              </a:p>
+            </p:txBody>
+          </p:sp>
+        </mc:Fallback>
+      </mc:AlternateContent>
+      <mc:AlternateContent xmlns:mc="http://schemas.openxmlformats.org/markup-compatibility/2006">
+        <mc:Choice xmlns:a14="http://schemas.microsoft.com/office/drawing/2010/main" Requires="a14">
+          <p:sp>
+            <p:nvSpPr>
+              <p:cNvPr id="161" name="矩形 160">
+                <a:extLst>
+                  <a:ext uri="{FF2B5EF4-FFF2-40B4-BE49-F238E27FC236}">
+                    <a16:creationId xmlns:a16="http://schemas.microsoft.com/office/drawing/2014/main" id="{FBD4CD20-BAE0-4BCD-AEC0-C2E3F9C8E678}"/>
+                  </a:ext>
+                </a:extLst>
+              </p:cNvPr>
+              <p:cNvSpPr/>
+              <p:nvPr/>
+            </p:nvSpPr>
+            <p:spPr>
+              <a:xfrm>
+                <a:off x="1588559" y="3897301"/>
+                <a:ext cx="783035" cy="343171"/>
+              </a:xfrm>
+              <a:prstGeom prst="rect">
+                <a:avLst/>
+              </a:prstGeom>
+            </p:spPr>
+            <p:txBody>
+              <a:bodyPr wrap="none">
+                <a:spAutoFit/>
+              </a:bodyPr>
+              <a:lstStyle/>
+              <a:p>
+                <a:pPr/>
+                <a14:m>
+                  <m:oMathPara xmlns:m="http://schemas.openxmlformats.org/officeDocument/2006/math">
+                    <m:oMathParaPr>
+                      <m:jc m:val="centerGroup"/>
+                    </m:oMathParaPr>
+                    <m:oMath xmlns:m="http://schemas.openxmlformats.org/officeDocument/2006/math">
+                      <m:r>
+                        <a:rPr lang="en-US" altLang="zh-TW" sz="1630" i="1">
+                          <a:latin typeface="Cambria Math" panose="02040503050406030204" pitchFamily="18" charset="0"/>
+                        </a:rPr>
+                        <m:t>0.1 </m:t>
+                      </m:r>
+                      <m:sSub>
+                        <m:sSubPr>
+                          <m:ctrlPr>
+                            <a:rPr lang="en-US" altLang="zh-TW" sz="1630" i="1">
+                              <a:latin typeface="Cambria Math" panose="02040503050406030204" pitchFamily="18" charset="0"/>
+                            </a:rPr>
+                          </m:ctrlPr>
+                        </m:sSubPr>
+                        <m:e>
+                          <m:r>
+                            <a:rPr lang="en-US" altLang="zh-TW" sz="1630" i="1">
+                              <a:latin typeface="Cambria Math" panose="02040503050406030204" pitchFamily="18" charset="0"/>
+                            </a:rPr>
+                            <m:t>𝑄</m:t>
+                          </m:r>
+                        </m:e>
+                        <m:sub>
+                          <m:r>
+                            <a:rPr lang="en-US" altLang="zh-TW" sz="1630" i="1">
+                              <a:latin typeface="Cambria Math" panose="02040503050406030204" pitchFamily="18" charset="0"/>
+                            </a:rPr>
+                            <m:t>𝑐</m:t>
+                          </m:r>
+                        </m:sub>
+                      </m:sSub>
+                    </m:oMath>
+                  </m:oMathPara>
+                </a14:m>
+                <a:endParaRPr lang="zh-TW" altLang="en-US" sz="1630" dirty="0">
+                  <a:latin typeface="Times New Roman" panose="02020603050405020304" pitchFamily="18" charset="0"/>
+                  <a:cs typeface="Times New Roman" panose="02020603050405020304" pitchFamily="18" charset="0"/>
+                </a:endParaRPr>
+              </a:p>
+            </p:txBody>
+          </p:sp>
+        </mc:Choice>
+        <mc:Fallback>
+          <p:sp>
+            <p:nvSpPr>
+              <p:cNvPr id="161" name="矩形 160">
+                <a:extLst>
+                  <a:ext uri="{FF2B5EF4-FFF2-40B4-BE49-F238E27FC236}">
+                    <a16:creationId xmlns:a16="http://schemas.microsoft.com/office/drawing/2014/main" id="{FBD4CD20-BAE0-4BCD-AEC0-C2E3F9C8E678}"/>
+                  </a:ext>
+                </a:extLst>
+              </p:cNvPr>
+              <p:cNvSpPr>
+                <a:spLocks noRot="1" noChangeAspect="1" noMove="1" noResize="1" noEditPoints="1" noAdjustHandles="1" noChangeArrowheads="1" noChangeShapeType="1" noTextEdit="1"/>
+              </p:cNvSpPr>
+              <p:nvPr/>
+            </p:nvSpPr>
+            <p:spPr>
+              <a:xfrm>
+                <a:off x="1588559" y="3897301"/>
+                <a:ext cx="783035" cy="343171"/>
+              </a:xfrm>
+              <a:prstGeom prst="rect">
+                <a:avLst/>
+              </a:prstGeom>
+              <a:blipFill>
+                <a:blip r:embed="rId11"/>
+                <a:stretch>
+                  <a:fillRect b="-8772"/>
+                </a:stretch>
+              </a:blipFill>
+            </p:spPr>
+            <p:txBody>
+              <a:bodyPr/>
+              <a:lstStyle/>
+              <a:p>
+                <a:r>
+                  <a:rPr lang="zh-TW" altLang="en-US">
+                    <a:noFill/>
+                  </a:rPr>
+                  <a:t> </a:t>
+                </a:r>
+              </a:p>
+            </p:txBody>
+          </p:sp>
+        </mc:Fallback>
+      </mc:AlternateContent>
+      <mc:AlternateContent xmlns:mc="http://schemas.openxmlformats.org/markup-compatibility/2006">
+        <mc:Choice xmlns:a14="http://schemas.microsoft.com/office/drawing/2010/main" Requires="a14">
+          <p:sp>
+            <p:nvSpPr>
+              <p:cNvPr id="162" name="矩形 161">
+                <a:extLst>
+                  <a:ext uri="{FF2B5EF4-FFF2-40B4-BE49-F238E27FC236}">
+                    <a16:creationId xmlns:a16="http://schemas.microsoft.com/office/drawing/2014/main" id="{6341AF83-F103-4236-9A0E-9C1F8A426ACD}"/>
+                  </a:ext>
+                </a:extLst>
+              </p:cNvPr>
+              <p:cNvSpPr/>
+              <p:nvPr/>
+            </p:nvSpPr>
+            <p:spPr>
+              <a:xfrm>
+                <a:off x="1623084" y="4219292"/>
+                <a:ext cx="889154" cy="343171"/>
+              </a:xfrm>
+              <a:prstGeom prst="rect">
+                <a:avLst/>
+              </a:prstGeom>
+            </p:spPr>
+            <p:txBody>
+              <a:bodyPr wrap="none">
+                <a:spAutoFit/>
+              </a:bodyPr>
+              <a:lstStyle/>
+              <a:p>
+                <a:pPr/>
+                <a14:m>
+                  <m:oMathPara xmlns:m="http://schemas.openxmlformats.org/officeDocument/2006/math">
+                    <m:oMathParaPr>
+                      <m:jc m:val="centerGroup"/>
+                    </m:oMathParaPr>
+                    <m:oMath xmlns:m="http://schemas.openxmlformats.org/officeDocument/2006/math">
+                      <m:r>
+                        <a:rPr lang="en-US" altLang="zh-TW" sz="1630" i="1">
+                          <a:latin typeface="Cambria Math" panose="02040503050406030204" pitchFamily="18" charset="0"/>
+                        </a:rPr>
+                        <m:t>ℓ=−2</m:t>
+                      </m:r>
+                    </m:oMath>
+                  </m:oMathPara>
+                </a14:m>
+                <a:endParaRPr lang="zh-TW" altLang="en-US" sz="1630" dirty="0">
+                  <a:latin typeface="Times New Roman" panose="02020603050405020304" pitchFamily="18" charset="0"/>
+                  <a:cs typeface="Times New Roman" panose="02020603050405020304" pitchFamily="18" charset="0"/>
+                </a:endParaRPr>
+              </a:p>
+            </p:txBody>
+          </p:sp>
+        </mc:Choice>
+        <mc:Fallback>
+          <p:sp>
+            <p:nvSpPr>
+              <p:cNvPr id="162" name="矩形 161">
+                <a:extLst>
+                  <a:ext uri="{FF2B5EF4-FFF2-40B4-BE49-F238E27FC236}">
+                    <a16:creationId xmlns:a16="http://schemas.microsoft.com/office/drawing/2014/main" id="{6341AF83-F103-4236-9A0E-9C1F8A426ACD}"/>
+                  </a:ext>
+                </a:extLst>
+              </p:cNvPr>
+              <p:cNvSpPr>
+                <a:spLocks noRot="1" noChangeAspect="1" noMove="1" noResize="1" noEditPoints="1" noAdjustHandles="1" noChangeArrowheads="1" noChangeShapeType="1" noTextEdit="1"/>
+              </p:cNvSpPr>
+              <p:nvPr/>
+            </p:nvSpPr>
+            <p:spPr>
+              <a:xfrm>
+                <a:off x="1623084" y="4219292"/>
+                <a:ext cx="889154" cy="343171"/>
+              </a:xfrm>
+              <a:prstGeom prst="rect">
+                <a:avLst/>
+              </a:prstGeom>
+              <a:blipFill>
+                <a:blip r:embed="rId12"/>
+                <a:stretch>
+                  <a:fillRect/>
+                </a:stretch>
+              </a:blipFill>
+            </p:spPr>
+            <p:txBody>
+              <a:bodyPr/>
+              <a:lstStyle/>
+              <a:p>
+                <a:r>
+                  <a:rPr lang="zh-TW" altLang="en-US">
+                    <a:noFill/>
+                  </a:rPr>
+                  <a:t> </a:t>
+                </a:r>
+              </a:p>
+            </p:txBody>
+          </p:sp>
+        </mc:Fallback>
+      </mc:AlternateContent>
+      <mc:AlternateContent xmlns:mc="http://schemas.openxmlformats.org/markup-compatibility/2006">
+        <mc:Choice xmlns:a14="http://schemas.microsoft.com/office/drawing/2010/main" Requires="a14">
+          <p:sp>
+            <p:nvSpPr>
+              <p:cNvPr id="163" name="矩形 162">
+                <a:extLst>
+                  <a:ext uri="{FF2B5EF4-FFF2-40B4-BE49-F238E27FC236}">
+                    <a16:creationId xmlns:a16="http://schemas.microsoft.com/office/drawing/2014/main" id="{03A4DAB4-3182-44BE-AFC1-87879D499685}"/>
+                  </a:ext>
+                </a:extLst>
+              </p:cNvPr>
+              <p:cNvSpPr/>
+              <p:nvPr/>
+            </p:nvSpPr>
+            <p:spPr>
+              <a:xfrm>
+                <a:off x="3052942" y="4219293"/>
+                <a:ext cx="889154" cy="343171"/>
+              </a:xfrm>
+              <a:prstGeom prst="rect">
+                <a:avLst/>
+              </a:prstGeom>
+            </p:spPr>
+            <p:txBody>
+              <a:bodyPr wrap="none">
+                <a:spAutoFit/>
+              </a:bodyPr>
+              <a:lstStyle/>
+              <a:p>
+                <a:pPr/>
+                <a14:m>
+                  <m:oMathPara xmlns:m="http://schemas.openxmlformats.org/officeDocument/2006/math">
+                    <m:oMathParaPr>
+                      <m:jc m:val="centerGroup"/>
+                    </m:oMathParaPr>
+                    <m:oMath xmlns:m="http://schemas.openxmlformats.org/officeDocument/2006/math">
+                      <m:r>
+                        <a:rPr lang="en-US" altLang="zh-TW" sz="1630" i="1">
+                          <a:latin typeface="Cambria Math" panose="02040503050406030204" pitchFamily="18" charset="0"/>
+                        </a:rPr>
+                        <m:t>ℓ=−1</m:t>
+                      </m:r>
+                    </m:oMath>
+                  </m:oMathPara>
+                </a14:m>
+                <a:endParaRPr lang="zh-TW" altLang="en-US" sz="1630" dirty="0">
+                  <a:latin typeface="Times New Roman" panose="02020603050405020304" pitchFamily="18" charset="0"/>
+                  <a:cs typeface="Times New Roman" panose="02020603050405020304" pitchFamily="18" charset="0"/>
+                </a:endParaRPr>
+              </a:p>
+            </p:txBody>
+          </p:sp>
+        </mc:Choice>
+        <mc:Fallback>
+          <p:sp>
+            <p:nvSpPr>
+              <p:cNvPr id="163" name="矩形 162">
+                <a:extLst>
+                  <a:ext uri="{FF2B5EF4-FFF2-40B4-BE49-F238E27FC236}">
+                    <a16:creationId xmlns:a16="http://schemas.microsoft.com/office/drawing/2014/main" id="{03A4DAB4-3182-44BE-AFC1-87879D499685}"/>
+                  </a:ext>
+                </a:extLst>
+              </p:cNvPr>
+              <p:cNvSpPr>
+                <a:spLocks noRot="1" noChangeAspect="1" noMove="1" noResize="1" noEditPoints="1" noAdjustHandles="1" noChangeArrowheads="1" noChangeShapeType="1" noTextEdit="1"/>
+              </p:cNvSpPr>
+              <p:nvPr/>
+            </p:nvSpPr>
+            <p:spPr>
+              <a:xfrm>
+                <a:off x="3052942" y="4219293"/>
+                <a:ext cx="889154" cy="343171"/>
+              </a:xfrm>
+              <a:prstGeom prst="rect">
+                <a:avLst/>
+              </a:prstGeom>
+              <a:blipFill>
+                <a:blip r:embed="rId13"/>
+                <a:stretch>
+                  <a:fillRect/>
+                </a:stretch>
+              </a:blipFill>
+            </p:spPr>
+            <p:txBody>
+              <a:bodyPr/>
+              <a:lstStyle/>
+              <a:p>
+                <a:r>
+                  <a:rPr lang="zh-TW" altLang="en-US">
+                    <a:noFill/>
+                  </a:rPr>
+                  <a:t> </a:t>
+                </a:r>
+              </a:p>
+            </p:txBody>
+          </p:sp>
+        </mc:Fallback>
+      </mc:AlternateContent>
+      <mc:AlternateContent xmlns:mc="http://schemas.openxmlformats.org/markup-compatibility/2006">
+        <mc:Choice xmlns:a14="http://schemas.microsoft.com/office/drawing/2010/main" Requires="a14">
+          <p:sp>
+            <p:nvSpPr>
+              <p:cNvPr id="164" name="矩形 163">
+                <a:extLst>
+                  <a:ext uri="{FF2B5EF4-FFF2-40B4-BE49-F238E27FC236}">
+                    <a16:creationId xmlns:a16="http://schemas.microsoft.com/office/drawing/2014/main" id="{2CF1161E-12B2-4CEC-8C7B-486AB3AA7034}"/>
+                  </a:ext>
+                </a:extLst>
+              </p:cNvPr>
+              <p:cNvSpPr/>
+              <p:nvPr/>
+            </p:nvSpPr>
+            <p:spPr>
+              <a:xfrm>
+                <a:off x="4482800" y="4219293"/>
+                <a:ext cx="733662" cy="343171"/>
+              </a:xfrm>
+              <a:prstGeom prst="rect">
+                <a:avLst/>
+              </a:prstGeom>
+            </p:spPr>
+            <p:txBody>
+              <a:bodyPr wrap="none">
+                <a:spAutoFit/>
+              </a:bodyPr>
+              <a:lstStyle/>
+              <a:p>
+                <a:pPr/>
+                <a14:m>
+                  <m:oMathPara xmlns:m="http://schemas.openxmlformats.org/officeDocument/2006/math">
+                    <m:oMathParaPr>
+                      <m:jc m:val="centerGroup"/>
+                    </m:oMathParaPr>
+                    <m:oMath xmlns:m="http://schemas.openxmlformats.org/officeDocument/2006/math">
+                      <m:r>
+                        <a:rPr lang="en-US" altLang="zh-TW" sz="1630" i="1">
+                          <a:latin typeface="Cambria Math" panose="02040503050406030204" pitchFamily="18" charset="0"/>
+                        </a:rPr>
+                        <m:t>ℓ=0</m:t>
+                      </m:r>
+                    </m:oMath>
+                  </m:oMathPara>
+                </a14:m>
+                <a:endParaRPr lang="zh-TW" altLang="en-US" sz="1630" dirty="0">
+                  <a:latin typeface="Times New Roman" panose="02020603050405020304" pitchFamily="18" charset="0"/>
+                  <a:cs typeface="Times New Roman" panose="02020603050405020304" pitchFamily="18" charset="0"/>
+                </a:endParaRPr>
+              </a:p>
+            </p:txBody>
+          </p:sp>
+        </mc:Choice>
+        <mc:Fallback>
+          <p:sp>
+            <p:nvSpPr>
+              <p:cNvPr id="164" name="矩形 163">
+                <a:extLst>
+                  <a:ext uri="{FF2B5EF4-FFF2-40B4-BE49-F238E27FC236}">
+                    <a16:creationId xmlns:a16="http://schemas.microsoft.com/office/drawing/2014/main" id="{2CF1161E-12B2-4CEC-8C7B-486AB3AA7034}"/>
+                  </a:ext>
+                </a:extLst>
+              </p:cNvPr>
+              <p:cNvSpPr>
+                <a:spLocks noRot="1" noChangeAspect="1" noMove="1" noResize="1" noEditPoints="1" noAdjustHandles="1" noChangeArrowheads="1" noChangeShapeType="1" noTextEdit="1"/>
+              </p:cNvSpPr>
+              <p:nvPr/>
+            </p:nvSpPr>
+            <p:spPr>
+              <a:xfrm>
+                <a:off x="4482800" y="4219293"/>
+                <a:ext cx="733662" cy="343171"/>
+              </a:xfrm>
+              <a:prstGeom prst="rect">
+                <a:avLst/>
+              </a:prstGeom>
+              <a:blipFill>
+                <a:blip r:embed="rId14"/>
+                <a:stretch>
+                  <a:fillRect/>
+                </a:stretch>
+              </a:blipFill>
+            </p:spPr>
+            <p:txBody>
+              <a:bodyPr/>
+              <a:lstStyle/>
+              <a:p>
+                <a:r>
+                  <a:rPr lang="zh-TW" altLang="en-US">
+                    <a:noFill/>
+                  </a:rPr>
+                  <a:t> </a:t>
+                </a:r>
+              </a:p>
+            </p:txBody>
+          </p:sp>
+        </mc:Fallback>
+      </mc:AlternateContent>
+      <mc:AlternateContent xmlns:mc="http://schemas.openxmlformats.org/markup-compatibility/2006">
+        <mc:Choice xmlns:a14="http://schemas.microsoft.com/office/drawing/2010/main" Requires="a14">
+          <p:sp>
+            <p:nvSpPr>
+              <p:cNvPr id="165" name="矩形 164">
+                <a:extLst>
+                  <a:ext uri="{FF2B5EF4-FFF2-40B4-BE49-F238E27FC236}">
+                    <a16:creationId xmlns:a16="http://schemas.microsoft.com/office/drawing/2014/main" id="{971359BB-E89B-454C-B515-8239716E3FA3}"/>
+                  </a:ext>
+                </a:extLst>
+              </p:cNvPr>
+              <p:cNvSpPr/>
+              <p:nvPr/>
+            </p:nvSpPr>
+            <p:spPr>
+              <a:xfrm>
+                <a:off x="5757166" y="4219293"/>
+                <a:ext cx="733662" cy="343171"/>
+              </a:xfrm>
+              <a:prstGeom prst="rect">
+                <a:avLst/>
+              </a:prstGeom>
+            </p:spPr>
+            <p:txBody>
+              <a:bodyPr wrap="none">
+                <a:spAutoFit/>
+              </a:bodyPr>
+              <a:lstStyle/>
+              <a:p>
+                <a:pPr/>
+                <a14:m>
+                  <m:oMathPara xmlns:m="http://schemas.openxmlformats.org/officeDocument/2006/math">
+                    <m:oMathParaPr>
+                      <m:jc m:val="centerGroup"/>
+                    </m:oMathParaPr>
+                    <m:oMath xmlns:m="http://schemas.openxmlformats.org/officeDocument/2006/math">
+                      <m:r>
+                        <a:rPr lang="en-US" altLang="zh-TW" sz="1630" i="1">
+                          <a:latin typeface="Cambria Math" panose="02040503050406030204" pitchFamily="18" charset="0"/>
+                        </a:rPr>
+                        <m:t>ℓ=1</m:t>
+                      </m:r>
+                    </m:oMath>
+                  </m:oMathPara>
+                </a14:m>
+                <a:endParaRPr lang="zh-TW" altLang="en-US" sz="1630" dirty="0">
+                  <a:latin typeface="Times New Roman" panose="02020603050405020304" pitchFamily="18" charset="0"/>
+                  <a:cs typeface="Times New Roman" panose="02020603050405020304" pitchFamily="18" charset="0"/>
+                </a:endParaRPr>
+              </a:p>
+            </p:txBody>
+          </p:sp>
+        </mc:Choice>
+        <mc:Fallback>
+          <p:sp>
+            <p:nvSpPr>
+              <p:cNvPr id="165" name="矩形 164">
+                <a:extLst>
+                  <a:ext uri="{FF2B5EF4-FFF2-40B4-BE49-F238E27FC236}">
+                    <a16:creationId xmlns:a16="http://schemas.microsoft.com/office/drawing/2014/main" id="{971359BB-E89B-454C-B515-8239716E3FA3}"/>
+                  </a:ext>
+                </a:extLst>
+              </p:cNvPr>
+              <p:cNvSpPr>
+                <a:spLocks noRot="1" noChangeAspect="1" noMove="1" noResize="1" noEditPoints="1" noAdjustHandles="1" noChangeArrowheads="1" noChangeShapeType="1" noTextEdit="1"/>
+              </p:cNvSpPr>
+              <p:nvPr/>
+            </p:nvSpPr>
+            <p:spPr>
+              <a:xfrm>
+                <a:off x="5757166" y="4219293"/>
+                <a:ext cx="733662" cy="343171"/>
+              </a:xfrm>
+              <a:prstGeom prst="rect">
+                <a:avLst/>
+              </a:prstGeom>
+              <a:blipFill>
+                <a:blip r:embed="rId15"/>
+                <a:stretch>
+                  <a:fillRect/>
+                </a:stretch>
+              </a:blipFill>
+            </p:spPr>
+            <p:txBody>
+              <a:bodyPr/>
+              <a:lstStyle/>
+              <a:p>
+                <a:r>
+                  <a:rPr lang="zh-TW" altLang="en-US">
+                    <a:noFill/>
+                  </a:rPr>
+                  <a:t> </a:t>
+                </a:r>
+              </a:p>
+            </p:txBody>
+          </p:sp>
+        </mc:Fallback>
+      </mc:AlternateContent>
+      <mc:AlternateContent xmlns:mc="http://schemas.openxmlformats.org/markup-compatibility/2006">
+        <mc:Choice xmlns:a14="http://schemas.microsoft.com/office/drawing/2010/main" Requires="a14">
+          <p:sp>
+            <p:nvSpPr>
+              <p:cNvPr id="166" name="矩形 165">
+                <a:extLst>
+                  <a:ext uri="{FF2B5EF4-FFF2-40B4-BE49-F238E27FC236}">
+                    <a16:creationId xmlns:a16="http://schemas.microsoft.com/office/drawing/2014/main" id="{8F2EF964-F807-4324-AE87-A67C87F4357E}"/>
+                  </a:ext>
+                </a:extLst>
+              </p:cNvPr>
+              <p:cNvSpPr/>
+              <p:nvPr/>
+            </p:nvSpPr>
+            <p:spPr>
+              <a:xfrm>
+                <a:off x="7031532" y="4219293"/>
+                <a:ext cx="733662" cy="343171"/>
+              </a:xfrm>
+              <a:prstGeom prst="rect">
+                <a:avLst/>
+              </a:prstGeom>
+            </p:spPr>
+            <p:txBody>
+              <a:bodyPr wrap="none">
+                <a:spAutoFit/>
+              </a:bodyPr>
+              <a:lstStyle/>
+              <a:p>
+                <a:pPr/>
+                <a14:m>
+                  <m:oMathPara xmlns:m="http://schemas.openxmlformats.org/officeDocument/2006/math">
+                    <m:oMathParaPr>
+                      <m:jc m:val="centerGroup"/>
+                    </m:oMathParaPr>
+                    <m:oMath xmlns:m="http://schemas.openxmlformats.org/officeDocument/2006/math">
+                      <m:r>
+                        <a:rPr lang="en-US" altLang="zh-TW" sz="1630" i="1">
+                          <a:latin typeface="Cambria Math" panose="02040503050406030204" pitchFamily="18" charset="0"/>
+                        </a:rPr>
+                        <m:t>ℓ=2</m:t>
+                      </m:r>
+                    </m:oMath>
+                  </m:oMathPara>
+                </a14:m>
+                <a:endParaRPr lang="zh-TW" altLang="en-US" sz="1630" dirty="0">
+                  <a:latin typeface="Times New Roman" panose="02020603050405020304" pitchFamily="18" charset="0"/>
+                  <a:cs typeface="Times New Roman" panose="02020603050405020304" pitchFamily="18" charset="0"/>
+                </a:endParaRPr>
+              </a:p>
+            </p:txBody>
+          </p:sp>
+        </mc:Choice>
+        <mc:Fallback>
+          <p:sp>
+            <p:nvSpPr>
+              <p:cNvPr id="166" name="矩形 165">
+                <a:extLst>
+                  <a:ext uri="{FF2B5EF4-FFF2-40B4-BE49-F238E27FC236}">
+                    <a16:creationId xmlns:a16="http://schemas.microsoft.com/office/drawing/2014/main" id="{8F2EF964-F807-4324-AE87-A67C87F4357E}"/>
+                  </a:ext>
+                </a:extLst>
+              </p:cNvPr>
+              <p:cNvSpPr>
+                <a:spLocks noRot="1" noChangeAspect="1" noMove="1" noResize="1" noEditPoints="1" noAdjustHandles="1" noChangeArrowheads="1" noChangeShapeType="1" noTextEdit="1"/>
+              </p:cNvSpPr>
+              <p:nvPr/>
+            </p:nvSpPr>
+            <p:spPr>
+              <a:xfrm>
+                <a:off x="7031532" y="4219293"/>
+                <a:ext cx="733662" cy="343171"/>
+              </a:xfrm>
+              <a:prstGeom prst="rect">
+                <a:avLst/>
+              </a:prstGeom>
+              <a:blipFill>
+                <a:blip r:embed="rId16"/>
+                <a:stretch>
+                  <a:fillRect/>
+                </a:stretch>
+              </a:blipFill>
+            </p:spPr>
+            <p:txBody>
+              <a:bodyPr/>
+              <a:lstStyle/>
+              <a:p>
+                <a:r>
+                  <a:rPr lang="zh-TW" altLang="en-US">
+                    <a:noFill/>
+                  </a:rPr>
+                  <a:t> </a:t>
+                </a:r>
+              </a:p>
+            </p:txBody>
+          </p:sp>
+        </mc:Fallback>
+      </mc:AlternateContent>
+      <p:sp>
+        <p:nvSpPr>
+          <p:cNvPr id="167" name="矩形 166">
+            <a:extLst>
+              <a:ext uri="{FF2B5EF4-FFF2-40B4-BE49-F238E27FC236}">
+                <a16:creationId xmlns:a16="http://schemas.microsoft.com/office/drawing/2014/main" id="{FD935054-9BC7-414F-889D-6ED5E09AD8B1}"/>
+              </a:ext>
+            </a:extLst>
+          </p:cNvPr>
+          <p:cNvSpPr/>
+          <p:nvPr/>
+        </p:nvSpPr>
+        <p:spPr>
+          <a:xfrm rot="5400000">
+            <a:off x="8114342" y="1344256"/>
+            <a:ext cx="1359668" cy="343171"/>
+          </a:xfrm>
+          <a:prstGeom prst="rect">
+            <a:avLst/>
+          </a:prstGeom>
+        </p:spPr>
+        <p:txBody>
+          <a:bodyPr wrap="none">
+            <a:spAutoFit/>
+          </a:bodyPr>
+          <a:lstStyle/>
+          <a:p>
+            <a:r>
+              <a:rPr lang="en-US" altLang="zh-TW" sz="1630" dirty="0">
+                <a:latin typeface="Times New Roman" panose="02020603050405020304" pitchFamily="18" charset="0"/>
+                <a:cs typeface="Times New Roman" panose="02020603050405020304" pitchFamily="18" charset="0"/>
+              </a:rPr>
+              <a:t>arbitrary units</a:t>
+            </a:r>
+            <a:endParaRPr lang="zh-TW" altLang="en-US" sz="1630" dirty="0">
+              <a:latin typeface="Times New Roman" panose="02020603050405020304" pitchFamily="18" charset="0"/>
+              <a:cs typeface="Times New Roman" panose="02020603050405020304" pitchFamily="18" charset="0"/>
+            </a:endParaRPr>
+          </a:p>
+        </p:txBody>
+      </p:sp>
+      <p:sp>
+        <p:nvSpPr>
+          <p:cNvPr id="168" name="矩形 167">
+            <a:extLst>
+              <a:ext uri="{FF2B5EF4-FFF2-40B4-BE49-F238E27FC236}">
+                <a16:creationId xmlns:a16="http://schemas.microsoft.com/office/drawing/2014/main" id="{17F6D338-64FC-411F-8551-7B4F1B199F22}"/>
+              </a:ext>
+            </a:extLst>
+          </p:cNvPr>
+          <p:cNvSpPr/>
+          <p:nvPr/>
+        </p:nvSpPr>
+        <p:spPr>
+          <a:xfrm rot="5400000">
+            <a:off x="8114342" y="3566116"/>
+            <a:ext cx="1359668" cy="343171"/>
+          </a:xfrm>
+          <a:prstGeom prst="rect">
+            <a:avLst/>
+          </a:prstGeom>
+        </p:spPr>
+        <p:txBody>
+          <a:bodyPr wrap="none">
+            <a:spAutoFit/>
+          </a:bodyPr>
+          <a:lstStyle/>
+          <a:p>
+            <a:r>
+              <a:rPr lang="en-US" altLang="zh-TW" sz="1630" dirty="0">
+                <a:latin typeface="Times New Roman" panose="02020603050405020304" pitchFamily="18" charset="0"/>
+                <a:cs typeface="Times New Roman" panose="02020603050405020304" pitchFamily="18" charset="0"/>
+              </a:rPr>
+              <a:t>arbitrary units</a:t>
+            </a:r>
+            <a:endParaRPr lang="zh-TW" altLang="en-US" sz="1630" dirty="0">
+              <a:latin typeface="Times New Roman" panose="02020603050405020304" pitchFamily="18" charset="0"/>
+              <a:cs typeface="Times New Roman" panose="02020603050405020304" pitchFamily="18" charset="0"/>
+            </a:endParaRPr>
+          </a:p>
+        </p:txBody>
+      </p:sp>
+      <p:grpSp>
+        <p:nvGrpSpPr>
+          <p:cNvPr id="169" name="群組 168">
+            <a:extLst>
+              <a:ext uri="{FF2B5EF4-FFF2-40B4-BE49-F238E27FC236}">
+                <a16:creationId xmlns:a16="http://schemas.microsoft.com/office/drawing/2014/main" id="{64D0A34D-253B-4A9C-98CE-AB61E23D6615}"/>
+              </a:ext>
+            </a:extLst>
+          </p:cNvPr>
+          <p:cNvGrpSpPr/>
+          <p:nvPr/>
+        </p:nvGrpSpPr>
+        <p:grpSpPr>
+          <a:xfrm>
+            <a:off x="1872502" y="870547"/>
+            <a:ext cx="703953" cy="629156"/>
+            <a:chOff x="-1051588" y="926660"/>
+            <a:chExt cx="645259" cy="576699"/>
+          </a:xfrm>
+        </p:grpSpPr>
+        <mc:AlternateContent xmlns:mc="http://schemas.openxmlformats.org/markup-compatibility/2006" xmlns:a14="http://schemas.microsoft.com/office/drawing/2010/main">
+          <mc:Choice Requires="a14">
+            <p:sp>
+              <p:nvSpPr>
+                <p:cNvPr id="170" name="文字方塊 169">
+                  <a:extLst>
+                    <a:ext uri="{FF2B5EF4-FFF2-40B4-BE49-F238E27FC236}">
+                      <a16:creationId xmlns:a16="http://schemas.microsoft.com/office/drawing/2014/main" id="{0C1F89D7-61E2-4508-9AE9-282DD4977A7C}"/>
+                    </a:ext>
+                  </a:extLst>
+                </p:cNvPr>
+                <p:cNvSpPr txBox="1"/>
+                <p:nvPr/>
+              </p:nvSpPr>
+              <p:spPr>
+                <a:xfrm>
+                  <a:off x="-1051588" y="926660"/>
+                  <a:ext cx="323387" cy="335658"/>
+                </a:xfrm>
+                <a:prstGeom prst="rect">
+                  <a:avLst/>
+                </a:prstGeom>
+                <a:noFill/>
+              </p:spPr>
+              <p:txBody>
+                <a:bodyPr wrap="square" rtlCol="0">
+                  <a:spAutoFit/>
+                </a:bodyPr>
+                <a:lstStyle/>
+                <a:p>
+                  <a:pPr/>
+                  <a14:m>
+                    <m:oMathPara xmlns:m="http://schemas.openxmlformats.org/officeDocument/2006/math">
+                      <m:oMathParaPr>
+                        <m:jc m:val="centerGroup"/>
+                      </m:oMathParaPr>
+                      <m:oMath xmlns:m="http://schemas.openxmlformats.org/officeDocument/2006/math">
+                        <m:sSub>
+                          <m:sSubPr>
+                            <m:ctrlPr>
+                              <a:rPr lang="en-US" altLang="zh-TW" sz="1630" b="1" i="1">
+                                <a:latin typeface="Cambria Math" panose="02040503050406030204" pitchFamily="18" charset="0"/>
+                              </a:rPr>
+                            </m:ctrlPr>
+                          </m:sSubPr>
+                          <m:e>
+                            <m:r>
+                              <a:rPr lang="en-US" altLang="zh-TW" sz="1630" b="1" i="1">
+                                <a:latin typeface="Cambria Math" panose="02040503050406030204" pitchFamily="18" charset="0"/>
+                              </a:rPr>
+                              <m:t>𝒒</m:t>
+                            </m:r>
+                          </m:e>
+                          <m:sub>
+                            <m:r>
+                              <a:rPr lang="en-US" altLang="zh-TW" sz="1630" b="1" i="1">
+                                <a:latin typeface="Cambria Math" panose="02040503050406030204" pitchFamily="18" charset="0"/>
+                              </a:rPr>
+                              <m:t>𝒚</m:t>
+                            </m:r>
+                          </m:sub>
+                        </m:sSub>
+                      </m:oMath>
+                    </m:oMathPara>
+                  </a14:m>
+                  <a:endParaRPr lang="en-US" altLang="zh-TW" sz="1630" dirty="0">
+                    <a:latin typeface="Times New Roman" panose="02020603050405020304" pitchFamily="18" charset="0"/>
+                    <a:cs typeface="Times New Roman" panose="02020603050405020304" pitchFamily="18" charset="0"/>
+                  </a:endParaRPr>
+                </a:p>
+              </p:txBody>
+            </p:sp>
+          </mc:Choice>
+          <mc:Fallback xmlns="">
+            <p:sp>
+              <p:nvSpPr>
+                <p:cNvPr id="80" name="文字方塊 79">
+                  <a:extLst>
+                    <a:ext uri="{FF2B5EF4-FFF2-40B4-BE49-F238E27FC236}">
+                      <a16:creationId xmlns:a16="http://schemas.microsoft.com/office/drawing/2014/main" id="{0A2654E9-3006-4B11-B911-23ACB1C2DDC4}"/>
+                    </a:ext>
+                  </a:extLst>
+                </p:cNvPr>
+                <p:cNvSpPr txBox="1">
+                  <a:spLocks noRot="1" noChangeAspect="1" noMove="1" noResize="1" noEditPoints="1" noAdjustHandles="1" noChangeArrowheads="1" noChangeShapeType="1" noTextEdit="1"/>
+                </p:cNvSpPr>
+                <p:nvPr/>
+              </p:nvSpPr>
+              <p:spPr>
+                <a:xfrm>
+                  <a:off x="-1051588" y="926660"/>
+                  <a:ext cx="323387" cy="335658"/>
+                </a:xfrm>
+                <a:prstGeom prst="rect">
+                  <a:avLst/>
+                </a:prstGeom>
+                <a:blipFill>
+                  <a:blip r:embed="rId19"/>
+                  <a:stretch>
+                    <a:fillRect r="-3448" b="-1667"/>
+                  </a:stretch>
+                </a:blipFill>
+              </p:spPr>
+              <p:txBody>
+                <a:bodyPr/>
+                <a:lstStyle/>
+                <a:p>
+                  <a:r>
+                    <a:rPr lang="zh-TW" altLang="en-US">
+                      <a:noFill/>
+                    </a:rPr>
+                    <a:t> </a:t>
+                  </a:r>
+                </a:p>
+              </p:txBody>
+            </p:sp>
+          </mc:Fallback>
+        </mc:AlternateContent>
+        <mc:AlternateContent xmlns:mc="http://schemas.openxmlformats.org/markup-compatibility/2006" xmlns:a14="http://schemas.microsoft.com/office/drawing/2010/main">
+          <mc:Choice Requires="a14">
+            <p:sp>
+              <p:nvSpPr>
+                <p:cNvPr id="171" name="文字方塊 170">
+                  <a:extLst>
+                    <a:ext uri="{FF2B5EF4-FFF2-40B4-BE49-F238E27FC236}">
+                      <a16:creationId xmlns:a16="http://schemas.microsoft.com/office/drawing/2014/main" id="{18D72727-38CD-47C1-B52D-662A4B2FEBF9}"/>
+                    </a:ext>
+                  </a:extLst>
+                </p:cNvPr>
+                <p:cNvSpPr txBox="1"/>
+                <p:nvPr/>
+              </p:nvSpPr>
+              <p:spPr>
+                <a:xfrm>
+                  <a:off x="-813248" y="1188801"/>
+                  <a:ext cx="406919" cy="314558"/>
+                </a:xfrm>
+                <a:prstGeom prst="rect">
+                  <a:avLst/>
+                </a:prstGeom>
+                <a:noFill/>
+              </p:spPr>
+              <p:txBody>
+                <a:bodyPr wrap="square" rtlCol="0">
+                  <a:spAutoFit/>
+                </a:bodyPr>
+                <a:lstStyle/>
+                <a:p>
+                  <a:pPr/>
+                  <a14:m>
+                    <m:oMathPara xmlns:m="http://schemas.openxmlformats.org/officeDocument/2006/math">
+                      <m:oMathParaPr>
+                        <m:jc m:val="centerGroup"/>
+                      </m:oMathParaPr>
+                      <m:oMath xmlns:m="http://schemas.openxmlformats.org/officeDocument/2006/math">
+                        <m:sSub>
+                          <m:sSubPr>
+                            <m:ctrlPr>
+                              <a:rPr lang="en-US" altLang="zh-TW" sz="1630" b="1" i="1">
+                                <a:latin typeface="Cambria Math" panose="02040503050406030204" pitchFamily="18" charset="0"/>
+                              </a:rPr>
+                            </m:ctrlPr>
+                          </m:sSubPr>
+                          <m:e>
+                            <m:r>
+                              <a:rPr lang="en-US" altLang="zh-TW" sz="1630" b="1" i="1">
+                                <a:latin typeface="Cambria Math" panose="02040503050406030204" pitchFamily="18" charset="0"/>
+                              </a:rPr>
+                              <m:t>𝒒</m:t>
+                            </m:r>
+                          </m:e>
+                          <m:sub>
+                            <m:r>
+                              <a:rPr lang="en-US" altLang="zh-TW" sz="1630" b="1" i="1">
+                                <a:latin typeface="Cambria Math" panose="02040503050406030204" pitchFamily="18" charset="0"/>
+                              </a:rPr>
+                              <m:t>𝒙</m:t>
+                            </m:r>
+                          </m:sub>
+                        </m:sSub>
+                      </m:oMath>
+                    </m:oMathPara>
+                  </a14:m>
+                  <a:endParaRPr lang="en-US" altLang="zh-TW" sz="1630" dirty="0">
+                    <a:latin typeface="Times New Roman" panose="02020603050405020304" pitchFamily="18" charset="0"/>
+                    <a:cs typeface="Times New Roman" panose="02020603050405020304" pitchFamily="18" charset="0"/>
+                  </a:endParaRPr>
+                </a:p>
+              </p:txBody>
+            </p:sp>
+          </mc:Choice>
+          <mc:Fallback xmlns="">
+            <p:sp>
+              <p:nvSpPr>
+                <p:cNvPr id="81" name="文字方塊 80">
+                  <a:extLst>
+                    <a:ext uri="{FF2B5EF4-FFF2-40B4-BE49-F238E27FC236}">
+                      <a16:creationId xmlns:a16="http://schemas.microsoft.com/office/drawing/2014/main" id="{47E81467-D25E-4BB7-94DE-E307D45DD949}"/>
+                    </a:ext>
+                  </a:extLst>
+                </p:cNvPr>
+                <p:cNvSpPr txBox="1">
+                  <a:spLocks noRot="1" noChangeAspect="1" noMove="1" noResize="1" noEditPoints="1" noAdjustHandles="1" noChangeArrowheads="1" noChangeShapeType="1" noTextEdit="1"/>
+                </p:cNvSpPr>
+                <p:nvPr/>
+              </p:nvSpPr>
+              <p:spPr>
+                <a:xfrm>
+                  <a:off x="-813248" y="1188801"/>
+                  <a:ext cx="406919" cy="314558"/>
+                </a:xfrm>
+                <a:prstGeom prst="rect">
+                  <a:avLst/>
+                </a:prstGeom>
+                <a:blipFill>
+                  <a:blip r:embed="rId20"/>
+                  <a:stretch>
+                    <a:fillRect b="-5263"/>
+                  </a:stretch>
+                </a:blipFill>
+              </p:spPr>
+              <p:txBody>
+                <a:bodyPr/>
+                <a:lstStyle/>
+                <a:p>
+                  <a:r>
+                    <a:rPr lang="zh-TW" altLang="en-US">
+                      <a:noFill/>
+                    </a:rPr>
+                    <a:t> </a:t>
+                  </a:r>
+                </a:p>
+              </p:txBody>
+            </p:sp>
+          </mc:Fallback>
+        </mc:AlternateContent>
+        <p:sp>
+          <p:nvSpPr>
+            <p:cNvPr id="172" name="箭號: 向右 171">
+              <a:extLst>
+                <a:ext uri="{FF2B5EF4-FFF2-40B4-BE49-F238E27FC236}">
+                  <a16:creationId xmlns:a16="http://schemas.microsoft.com/office/drawing/2014/main" id="{49CE44A5-47F8-4FE1-B483-1DC755D3C588}"/>
+                </a:ext>
+              </a:extLst>
+            </p:cNvPr>
+            <p:cNvSpPr/>
+            <p:nvPr/>
+          </p:nvSpPr>
+          <p:spPr>
+            <a:xfrm>
+              <a:off x="-837092" y="1356364"/>
+              <a:ext cx="92654" cy="27541"/>
+            </a:xfrm>
+            <a:prstGeom prst="rightArrow">
+              <a:avLst>
+                <a:gd name="adj1" fmla="val 50000"/>
+                <a:gd name="adj2" fmla="val 99023"/>
+              </a:avLst>
+            </a:prstGeom>
+            <a:solidFill>
+              <a:schemeClr val="tx1"/>
+            </a:solidFill>
+            <a:ln>
+              <a:solidFill>
+                <a:schemeClr val="tx1"/>
+              </a:solidFill>
+            </a:ln>
+          </p:spPr>
+          <p:style>
+            <a:lnRef idx="2">
+              <a:schemeClr val="dk1">
+                <a:shade val="50000"/>
+              </a:schemeClr>
+            </a:lnRef>
+            <a:fillRef idx="1">
+              <a:schemeClr val="dk1"/>
+            </a:fillRef>
+            <a:effectRef idx="0">
+              <a:schemeClr val="dk1"/>
+            </a:effectRef>
+            <a:fontRef idx="minor">
+              <a:schemeClr val="lt1"/>
+            </a:fontRef>
+          </p:style>
+          <p:txBody>
+            <a:bodyPr rtlCol="0" anchor="ctr"/>
+            <a:lstStyle/>
+            <a:p>
+              <a:pPr algn="ctr"/>
+              <a:endParaRPr lang="zh-TW" altLang="en-US" sz="1630">
+                <a:solidFill>
+                  <a:schemeClr val="tx1"/>
+                </a:solidFill>
+                <a:latin typeface="Times New Roman" panose="02020603050405020304" pitchFamily="18" charset="0"/>
+                <a:cs typeface="Times New Roman" panose="02020603050405020304" pitchFamily="18" charset="0"/>
+              </a:endParaRPr>
+            </a:p>
+          </p:txBody>
+        </p:sp>
+        <p:sp>
+          <p:nvSpPr>
+            <p:cNvPr id="173" name="箭號: 向右 172">
+              <a:extLst>
+                <a:ext uri="{FF2B5EF4-FFF2-40B4-BE49-F238E27FC236}">
+                  <a16:creationId xmlns:a16="http://schemas.microsoft.com/office/drawing/2014/main" id="{8E1ED404-686A-4B30-8BF5-7A5FA882C890}"/>
+                </a:ext>
+              </a:extLst>
+            </p:cNvPr>
+            <p:cNvSpPr/>
+            <p:nvPr/>
+          </p:nvSpPr>
+          <p:spPr>
+            <a:xfrm rot="16200000">
+              <a:off x="-877012" y="1316853"/>
+              <a:ext cx="91764" cy="27808"/>
+            </a:xfrm>
+            <a:prstGeom prst="rightArrow">
+              <a:avLst>
+                <a:gd name="adj1" fmla="val 50000"/>
+                <a:gd name="adj2" fmla="val 99023"/>
+              </a:avLst>
+            </a:prstGeom>
+            <a:solidFill>
+              <a:schemeClr val="tx1"/>
+            </a:solidFill>
+            <a:ln>
+              <a:solidFill>
+                <a:schemeClr val="tx1"/>
+              </a:solidFill>
+            </a:ln>
+          </p:spPr>
+          <p:style>
+            <a:lnRef idx="2">
+              <a:schemeClr val="dk1">
+                <a:shade val="50000"/>
+              </a:schemeClr>
+            </a:lnRef>
+            <a:fillRef idx="1">
+              <a:schemeClr val="dk1"/>
+            </a:fillRef>
+            <a:effectRef idx="0">
+              <a:schemeClr val="dk1"/>
+            </a:effectRef>
+            <a:fontRef idx="minor">
+              <a:schemeClr val="lt1"/>
+            </a:fontRef>
+          </p:style>
+          <p:txBody>
+            <a:bodyPr rtlCol="0" anchor="ctr"/>
+            <a:lstStyle/>
+            <a:p>
+              <a:pPr algn="ctr"/>
+              <a:endParaRPr lang="zh-TW" altLang="en-US" sz="1630" dirty="0">
+                <a:solidFill>
+                  <a:schemeClr val="tx1"/>
+                </a:solidFill>
+                <a:latin typeface="Times New Roman" panose="02020603050405020304" pitchFamily="18" charset="0"/>
+                <a:cs typeface="Times New Roman" panose="02020603050405020304" pitchFamily="18" charset="0"/>
+              </a:endParaRPr>
+            </a:p>
+          </p:txBody>
+        </p:sp>
+      </p:grpSp>
+      <p:grpSp>
+        <p:nvGrpSpPr>
+          <p:cNvPr id="174" name="群組 173">
+            <a:extLst>
+              <a:ext uri="{FF2B5EF4-FFF2-40B4-BE49-F238E27FC236}">
+                <a16:creationId xmlns:a16="http://schemas.microsoft.com/office/drawing/2014/main" id="{84810C9E-44C0-4E0E-99E1-37B7522CCBDE}"/>
+              </a:ext>
+            </a:extLst>
+          </p:cNvPr>
+          <p:cNvGrpSpPr/>
+          <p:nvPr/>
+        </p:nvGrpSpPr>
+        <p:grpSpPr>
+          <a:xfrm>
+            <a:off x="1897672" y="3117080"/>
+            <a:ext cx="688366" cy="625691"/>
+            <a:chOff x="-1026188" y="931423"/>
+            <a:chExt cx="630972" cy="573523"/>
+          </a:xfrm>
+        </p:grpSpPr>
+        <mc:AlternateContent xmlns:mc="http://schemas.openxmlformats.org/markup-compatibility/2006" xmlns:a14="http://schemas.microsoft.com/office/drawing/2010/main">
+          <mc:Choice Requires="a14">
+            <p:sp>
+              <p:nvSpPr>
+                <p:cNvPr id="175" name="文字方塊 174">
+                  <a:extLst>
+                    <a:ext uri="{FF2B5EF4-FFF2-40B4-BE49-F238E27FC236}">
+                      <a16:creationId xmlns:a16="http://schemas.microsoft.com/office/drawing/2014/main" id="{1A2DDC95-5BE7-4916-B4B1-E505B5E95F8F}"/>
+                    </a:ext>
+                  </a:extLst>
+                </p:cNvPr>
+                <p:cNvSpPr txBox="1"/>
+                <p:nvPr/>
+              </p:nvSpPr>
+              <p:spPr>
+                <a:xfrm>
+                  <a:off x="-1026188" y="931423"/>
+                  <a:ext cx="323387" cy="335658"/>
+                </a:xfrm>
+                <a:prstGeom prst="rect">
+                  <a:avLst/>
+                </a:prstGeom>
+                <a:noFill/>
+              </p:spPr>
+              <p:txBody>
+                <a:bodyPr wrap="square" rtlCol="0">
+                  <a:spAutoFit/>
+                </a:bodyPr>
+                <a:lstStyle/>
+                <a:p>
+                  <a:pPr/>
+                  <a14:m>
+                    <m:oMathPara xmlns:m="http://schemas.openxmlformats.org/officeDocument/2006/math">
+                      <m:oMathParaPr>
+                        <m:jc m:val="centerGroup"/>
+                      </m:oMathParaPr>
+                      <m:oMath xmlns:m="http://schemas.openxmlformats.org/officeDocument/2006/math">
+                        <m:sSub>
+                          <m:sSubPr>
+                            <m:ctrlPr>
+                              <a:rPr lang="en-US" altLang="zh-TW" sz="1630" b="1" i="1">
+                                <a:latin typeface="Cambria Math" panose="02040503050406030204" pitchFamily="18" charset="0"/>
+                              </a:rPr>
+                            </m:ctrlPr>
+                          </m:sSubPr>
+                          <m:e>
+                            <m:r>
+                              <a:rPr lang="en-US" altLang="zh-TW" sz="1630" b="1" i="1">
+                                <a:latin typeface="Cambria Math" panose="02040503050406030204" pitchFamily="18" charset="0"/>
+                              </a:rPr>
+                              <m:t>𝒒</m:t>
+                            </m:r>
+                          </m:e>
+                          <m:sub>
+                            <m:r>
+                              <a:rPr lang="en-US" altLang="zh-TW" sz="1630" b="1" i="1">
+                                <a:latin typeface="Cambria Math" panose="02040503050406030204" pitchFamily="18" charset="0"/>
+                              </a:rPr>
+                              <m:t>𝒚</m:t>
+                            </m:r>
+                          </m:sub>
+                        </m:sSub>
+                      </m:oMath>
+                    </m:oMathPara>
+                  </a14:m>
+                  <a:endParaRPr lang="en-US" altLang="zh-TW" sz="1630" dirty="0">
+                    <a:latin typeface="Times New Roman" panose="02020603050405020304" pitchFamily="18" charset="0"/>
+                    <a:cs typeface="Times New Roman" panose="02020603050405020304" pitchFamily="18" charset="0"/>
+                  </a:endParaRPr>
+                </a:p>
+              </p:txBody>
+            </p:sp>
+          </mc:Choice>
+          <mc:Fallback xmlns="">
+            <p:sp>
+              <p:nvSpPr>
+                <p:cNvPr id="91" name="文字方塊 90">
+                  <a:extLst>
+                    <a:ext uri="{FF2B5EF4-FFF2-40B4-BE49-F238E27FC236}">
+                      <a16:creationId xmlns:a16="http://schemas.microsoft.com/office/drawing/2014/main" id="{48683BE6-7C91-45D6-99F7-2C602C34D8E5}"/>
+                    </a:ext>
+                  </a:extLst>
+                </p:cNvPr>
+                <p:cNvSpPr txBox="1">
+                  <a:spLocks noRot="1" noChangeAspect="1" noMove="1" noResize="1" noEditPoints="1" noAdjustHandles="1" noChangeArrowheads="1" noChangeShapeType="1" noTextEdit="1"/>
+                </p:cNvSpPr>
+                <p:nvPr/>
+              </p:nvSpPr>
+              <p:spPr>
+                <a:xfrm>
+                  <a:off x="-1026188" y="931423"/>
+                  <a:ext cx="323387" cy="335658"/>
+                </a:xfrm>
+                <a:prstGeom prst="rect">
+                  <a:avLst/>
+                </a:prstGeom>
+                <a:blipFill>
+                  <a:blip r:embed="rId21"/>
+                  <a:stretch>
+                    <a:fillRect r="-3448"/>
+                  </a:stretch>
+                </a:blipFill>
+              </p:spPr>
+              <p:txBody>
+                <a:bodyPr/>
+                <a:lstStyle/>
+                <a:p>
+                  <a:r>
+                    <a:rPr lang="zh-TW" altLang="en-US">
+                      <a:noFill/>
+                    </a:rPr>
+                    <a:t> </a:t>
+                  </a:r>
+                </a:p>
+              </p:txBody>
+            </p:sp>
+          </mc:Fallback>
+        </mc:AlternateContent>
+        <mc:AlternateContent xmlns:mc="http://schemas.openxmlformats.org/markup-compatibility/2006" xmlns:a14="http://schemas.microsoft.com/office/drawing/2010/main">
+          <mc:Choice Requires="a14">
+            <p:sp>
+              <p:nvSpPr>
+                <p:cNvPr id="176" name="文字方塊 175">
+                  <a:extLst>
+                    <a:ext uri="{FF2B5EF4-FFF2-40B4-BE49-F238E27FC236}">
+                      <a16:creationId xmlns:a16="http://schemas.microsoft.com/office/drawing/2014/main" id="{E6EA0AC7-EEA0-4B1E-8CA2-0525AE7DB02F}"/>
+                    </a:ext>
+                  </a:extLst>
+                </p:cNvPr>
+                <p:cNvSpPr txBox="1"/>
+                <p:nvPr/>
+              </p:nvSpPr>
+              <p:spPr>
+                <a:xfrm>
+                  <a:off x="-802135" y="1190388"/>
+                  <a:ext cx="406919" cy="314558"/>
+                </a:xfrm>
+                <a:prstGeom prst="rect">
+                  <a:avLst/>
+                </a:prstGeom>
+                <a:noFill/>
+              </p:spPr>
+              <p:txBody>
+                <a:bodyPr wrap="square" rtlCol="0">
+                  <a:spAutoFit/>
+                </a:bodyPr>
+                <a:lstStyle/>
+                <a:p>
+                  <a:pPr/>
+                  <a14:m>
+                    <m:oMathPara xmlns:m="http://schemas.openxmlformats.org/officeDocument/2006/math">
+                      <m:oMathParaPr>
+                        <m:jc m:val="centerGroup"/>
+                      </m:oMathParaPr>
+                      <m:oMath xmlns:m="http://schemas.openxmlformats.org/officeDocument/2006/math">
+                        <m:sSub>
+                          <m:sSubPr>
+                            <m:ctrlPr>
+                              <a:rPr lang="en-US" altLang="zh-TW" sz="1630" b="1" i="1">
+                                <a:latin typeface="Cambria Math" panose="02040503050406030204" pitchFamily="18" charset="0"/>
+                              </a:rPr>
+                            </m:ctrlPr>
+                          </m:sSubPr>
+                          <m:e>
+                            <m:r>
+                              <a:rPr lang="en-US" altLang="zh-TW" sz="1630" b="1" i="1">
+                                <a:latin typeface="Cambria Math" panose="02040503050406030204" pitchFamily="18" charset="0"/>
+                              </a:rPr>
+                              <m:t>𝒒</m:t>
+                            </m:r>
+                          </m:e>
+                          <m:sub>
+                            <m:r>
+                              <a:rPr lang="en-US" altLang="zh-TW" sz="1630" b="1" i="1">
+                                <a:latin typeface="Cambria Math" panose="02040503050406030204" pitchFamily="18" charset="0"/>
+                              </a:rPr>
+                              <m:t>𝒙</m:t>
+                            </m:r>
+                          </m:sub>
+                        </m:sSub>
+                      </m:oMath>
+                    </m:oMathPara>
+                  </a14:m>
+                  <a:endParaRPr lang="en-US" altLang="zh-TW" sz="1630" dirty="0">
+                    <a:latin typeface="Times New Roman" panose="02020603050405020304" pitchFamily="18" charset="0"/>
+                    <a:cs typeface="Times New Roman" panose="02020603050405020304" pitchFamily="18" charset="0"/>
+                  </a:endParaRPr>
+                </a:p>
+              </p:txBody>
+            </p:sp>
+          </mc:Choice>
+          <mc:Fallback xmlns="">
+            <p:sp>
+              <p:nvSpPr>
+                <p:cNvPr id="92" name="文字方塊 91">
+                  <a:extLst>
+                    <a:ext uri="{FF2B5EF4-FFF2-40B4-BE49-F238E27FC236}">
+                      <a16:creationId xmlns:a16="http://schemas.microsoft.com/office/drawing/2014/main" id="{9E8963A5-F392-4029-B309-DD9A00CE0887}"/>
+                    </a:ext>
+                  </a:extLst>
+                </p:cNvPr>
+                <p:cNvSpPr txBox="1">
+                  <a:spLocks noRot="1" noChangeAspect="1" noMove="1" noResize="1" noEditPoints="1" noAdjustHandles="1" noChangeArrowheads="1" noChangeShapeType="1" noTextEdit="1"/>
+                </p:cNvSpPr>
+                <p:nvPr/>
+              </p:nvSpPr>
+              <p:spPr>
+                <a:xfrm>
+                  <a:off x="-802135" y="1190388"/>
+                  <a:ext cx="406919" cy="314558"/>
+                </a:xfrm>
+                <a:prstGeom prst="rect">
+                  <a:avLst/>
+                </a:prstGeom>
+                <a:blipFill>
+                  <a:blip r:embed="rId22"/>
+                  <a:stretch>
+                    <a:fillRect b="-5263"/>
+                  </a:stretch>
+                </a:blipFill>
+              </p:spPr>
+              <p:txBody>
+                <a:bodyPr/>
+                <a:lstStyle/>
+                <a:p>
+                  <a:r>
+                    <a:rPr lang="zh-TW" altLang="en-US">
+                      <a:noFill/>
+                    </a:rPr>
+                    <a:t> </a:t>
+                  </a:r>
+                </a:p>
+              </p:txBody>
+            </p:sp>
+          </mc:Fallback>
+        </mc:AlternateContent>
+        <p:sp>
+          <p:nvSpPr>
+            <p:cNvPr id="177" name="箭號: 向右 176">
+              <a:extLst>
+                <a:ext uri="{FF2B5EF4-FFF2-40B4-BE49-F238E27FC236}">
+                  <a16:creationId xmlns:a16="http://schemas.microsoft.com/office/drawing/2014/main" id="{68CC51FC-5069-405A-9C18-903D1F5E554D}"/>
+                </a:ext>
+              </a:extLst>
+            </p:cNvPr>
+            <p:cNvSpPr/>
+            <p:nvPr/>
+          </p:nvSpPr>
+          <p:spPr>
+            <a:xfrm>
+              <a:off x="-837092" y="1356364"/>
+              <a:ext cx="92654" cy="27541"/>
+            </a:xfrm>
+            <a:prstGeom prst="rightArrow">
+              <a:avLst>
+                <a:gd name="adj1" fmla="val 50000"/>
+                <a:gd name="adj2" fmla="val 99023"/>
+              </a:avLst>
+            </a:prstGeom>
+            <a:solidFill>
+              <a:schemeClr val="tx1"/>
+            </a:solidFill>
+            <a:ln>
+              <a:solidFill>
+                <a:schemeClr val="tx1"/>
+              </a:solidFill>
+            </a:ln>
+          </p:spPr>
+          <p:style>
+            <a:lnRef idx="2">
+              <a:schemeClr val="dk1">
+                <a:shade val="50000"/>
+              </a:schemeClr>
+            </a:lnRef>
+            <a:fillRef idx="1">
+              <a:schemeClr val="dk1"/>
+            </a:fillRef>
+            <a:effectRef idx="0">
+              <a:schemeClr val="dk1"/>
+            </a:effectRef>
+            <a:fontRef idx="minor">
+              <a:schemeClr val="lt1"/>
+            </a:fontRef>
+          </p:style>
+          <p:txBody>
+            <a:bodyPr rtlCol="0" anchor="ctr"/>
+            <a:lstStyle/>
+            <a:p>
+              <a:pPr algn="ctr"/>
+              <a:endParaRPr lang="zh-TW" altLang="en-US" sz="1630">
+                <a:solidFill>
+                  <a:schemeClr val="tx1"/>
+                </a:solidFill>
+                <a:latin typeface="Times New Roman" panose="02020603050405020304" pitchFamily="18" charset="0"/>
+                <a:cs typeface="Times New Roman" panose="02020603050405020304" pitchFamily="18" charset="0"/>
+              </a:endParaRPr>
+            </a:p>
+          </p:txBody>
+        </p:sp>
+        <p:sp>
+          <p:nvSpPr>
+            <p:cNvPr id="178" name="箭號: 向右 177">
+              <a:extLst>
+                <a:ext uri="{FF2B5EF4-FFF2-40B4-BE49-F238E27FC236}">
+                  <a16:creationId xmlns:a16="http://schemas.microsoft.com/office/drawing/2014/main" id="{18727DB6-8893-4391-BE7F-362943E35244}"/>
+                </a:ext>
+              </a:extLst>
+            </p:cNvPr>
+            <p:cNvSpPr/>
+            <p:nvPr/>
+          </p:nvSpPr>
+          <p:spPr>
+            <a:xfrm rot="16200000">
+              <a:off x="-877012" y="1316853"/>
+              <a:ext cx="91764" cy="27808"/>
+            </a:xfrm>
+            <a:prstGeom prst="rightArrow">
+              <a:avLst>
+                <a:gd name="adj1" fmla="val 50000"/>
+                <a:gd name="adj2" fmla="val 99023"/>
+              </a:avLst>
+            </a:prstGeom>
+            <a:solidFill>
+              <a:schemeClr val="tx1"/>
+            </a:solidFill>
+            <a:ln>
+              <a:solidFill>
+                <a:schemeClr val="tx1"/>
+              </a:solidFill>
+            </a:ln>
+          </p:spPr>
+          <p:style>
+            <a:lnRef idx="2">
+              <a:schemeClr val="dk1">
+                <a:shade val="50000"/>
+              </a:schemeClr>
+            </a:lnRef>
+            <a:fillRef idx="1">
+              <a:schemeClr val="dk1"/>
+            </a:fillRef>
+            <a:effectRef idx="0">
+              <a:schemeClr val="dk1"/>
+            </a:effectRef>
+            <a:fontRef idx="minor">
+              <a:schemeClr val="lt1"/>
+            </a:fontRef>
+          </p:style>
+          <p:txBody>
+            <a:bodyPr rtlCol="0" anchor="ctr"/>
+            <a:lstStyle/>
+            <a:p>
+              <a:pPr algn="ctr"/>
+              <a:endParaRPr lang="zh-TW" altLang="en-US" sz="1630" dirty="0">
+                <a:solidFill>
+                  <a:schemeClr val="tx1"/>
+                </a:solidFill>
+                <a:latin typeface="Times New Roman" panose="02020603050405020304" pitchFamily="18" charset="0"/>
+                <a:cs typeface="Times New Roman" panose="02020603050405020304" pitchFamily="18" charset="0"/>
+              </a:endParaRPr>
+            </a:p>
+          </p:txBody>
+        </p:sp>
+      </p:grpSp>
+      <p:pic>
+        <p:nvPicPr>
+          <p:cNvPr id="179" name="圖片 178">
+            <a:extLst>
+              <a:ext uri="{FF2B5EF4-FFF2-40B4-BE49-F238E27FC236}">
+                <a16:creationId xmlns:a16="http://schemas.microsoft.com/office/drawing/2014/main" id="{401CCF63-AA5E-4E13-8E2E-930E6FDBEB6B}"/>
+              </a:ext>
+            </a:extLst>
+          </p:cNvPr>
+          <p:cNvPicPr>
+            <a:picLocks noChangeAspect="1"/>
+          </p:cNvPicPr>
+          <p:nvPr/>
+        </p:nvPicPr>
+        <p:blipFill rotWithShape="1">
+          <a:blip r:embed="rId23">
+            <a:clrChange>
+              <a:clrFrom>
+                <a:srgbClr val="FFFFFF"/>
+              </a:clrFrom>
+              <a:clrTo>
+                <a:srgbClr val="FFFFFF">
+                  <a:alpha val="0"/>
+                </a:srgbClr>
+              </a:clrTo>
+            </a:clrChange>
+            <a:extLst>
+              <a:ext uri="{28A0092B-C50C-407E-A947-70E740481C1C}">
+                <a14:useLocalDpi xmlns:a14="http://schemas.microsoft.com/office/drawing/2010/main" val="0"/>
+              </a:ext>
+            </a:extLst>
+          </a:blip>
+          <a:srcRect l="85347" r="8518"/>
+          <a:stretch/>
+        </p:blipFill>
+        <p:spPr>
+          <a:xfrm>
+            <a:off x="8228734" y="696804"/>
+            <a:ext cx="568960" cy="1540800"/>
+          </a:xfrm>
+          <a:prstGeom prst="rect">
+            <a:avLst/>
+          </a:prstGeom>
+        </p:spPr>
+      </p:pic>
+      <p:pic>
+        <p:nvPicPr>
+          <p:cNvPr id="180" name="圖片 179">
+            <a:extLst>
+              <a:ext uri="{FF2B5EF4-FFF2-40B4-BE49-F238E27FC236}">
+                <a16:creationId xmlns:a16="http://schemas.microsoft.com/office/drawing/2014/main" id="{2930E40C-335E-4B3F-8D1F-6609FA754C8C}"/>
+              </a:ext>
+            </a:extLst>
+          </p:cNvPr>
+          <p:cNvPicPr>
+            <a:picLocks noChangeAspect="1"/>
+          </p:cNvPicPr>
+          <p:nvPr/>
+        </p:nvPicPr>
+        <p:blipFill rotWithShape="1">
+          <a:blip r:embed="rId24">
+            <a:clrChange>
+              <a:clrFrom>
+                <a:srgbClr val="FFFFFF"/>
+              </a:clrFrom>
+              <a:clrTo>
+                <a:srgbClr val="FFFFFF">
+                  <a:alpha val="0"/>
+                </a:srgbClr>
+              </a:clrTo>
+            </a:clrChange>
+          </a:blip>
+          <a:srcRect l="45594"/>
+          <a:stretch/>
+        </p:blipFill>
+        <p:spPr>
+          <a:xfrm>
+            <a:off x="933455" y="2382596"/>
+            <a:ext cx="1473200" cy="444937"/>
+          </a:xfrm>
+          <a:prstGeom prst="rect">
+            <a:avLst/>
+          </a:prstGeom>
+        </p:spPr>
+      </p:pic>
+      <p:pic>
+        <p:nvPicPr>
+          <p:cNvPr id="181" name="圖片 180">
+            <a:extLst>
+              <a:ext uri="{FF2B5EF4-FFF2-40B4-BE49-F238E27FC236}">
+                <a16:creationId xmlns:a16="http://schemas.microsoft.com/office/drawing/2014/main" id="{B1DC3C66-376F-4DAD-9A7D-8D335ACBB7C9}"/>
+              </a:ext>
+            </a:extLst>
+          </p:cNvPr>
+          <p:cNvPicPr>
+            <a:picLocks noChangeAspect="1"/>
+          </p:cNvPicPr>
+          <p:nvPr/>
+        </p:nvPicPr>
+        <p:blipFill rotWithShape="1">
+          <a:blip r:embed="rId24">
+            <a:clrChange>
+              <a:clrFrom>
+                <a:srgbClr val="FFFFFF"/>
+              </a:clrFrom>
+              <a:clrTo>
+                <a:srgbClr val="FFFFFF">
+                  <a:alpha val="0"/>
+                </a:srgbClr>
+              </a:clrTo>
+            </a:clrChange>
+          </a:blip>
+          <a:srcRect r="56092"/>
+          <a:stretch/>
+        </p:blipFill>
+        <p:spPr>
+          <a:xfrm>
+            <a:off x="939898" y="112309"/>
+            <a:ext cx="1188922" cy="444937"/>
+          </a:xfrm>
+          <a:prstGeom prst="rect">
+            <a:avLst/>
+          </a:prstGeom>
+        </p:spPr>
+      </p:pic>
+      <p:pic>
+        <p:nvPicPr>
+          <p:cNvPr id="35" name="圖片 34">
+            <a:extLst>
+              <a:ext uri="{FF2B5EF4-FFF2-40B4-BE49-F238E27FC236}">
+                <a16:creationId xmlns:a16="http://schemas.microsoft.com/office/drawing/2014/main" id="{504F827B-338C-4CBB-B7BD-C1AEC27D17B3}"/>
+              </a:ext>
+            </a:extLst>
+          </p:cNvPr>
+          <p:cNvPicPr>
+            <a:picLocks noChangeAspect="1"/>
+          </p:cNvPicPr>
+          <p:nvPr/>
+        </p:nvPicPr>
+        <p:blipFill rotWithShape="1">
+          <a:blip r:embed="rId2">
+            <a:clrChange>
+              <a:clrFrom>
+                <a:srgbClr val="FFFFFF"/>
+              </a:clrFrom>
+              <a:clrTo>
+                <a:srgbClr val="FFFFFF">
+                  <a:alpha val="0"/>
+                </a:srgbClr>
+              </a:clrTo>
+            </a:clrChange>
+            <a:extLst>
+              <a:ext uri="{28A0092B-C50C-407E-A947-70E740481C1C}">
+                <a14:useLocalDpi xmlns:a14="http://schemas.microsoft.com/office/drawing/2010/main" val="0"/>
+              </a:ext>
+            </a:extLst>
+          </a:blip>
+          <a:srcRect l="17964" r="68104"/>
+          <a:stretch/>
+        </p:blipFill>
+        <p:spPr>
+          <a:xfrm>
+            <a:off x="2762731" y="541230"/>
+            <a:ext cx="1387366" cy="1659600"/>
+          </a:xfrm>
+          <a:prstGeom prst="rect">
+            <a:avLst/>
+          </a:prstGeom>
+        </p:spPr>
+      </p:pic>
+      <p:pic>
+        <p:nvPicPr>
+          <p:cNvPr id="36" name="圖片 35">
+            <a:extLst>
+              <a:ext uri="{FF2B5EF4-FFF2-40B4-BE49-F238E27FC236}">
+                <a16:creationId xmlns:a16="http://schemas.microsoft.com/office/drawing/2014/main" id="{BAE9D29A-557F-47E8-B840-9D8A04ABA937}"/>
+              </a:ext>
+            </a:extLst>
+          </p:cNvPr>
+          <p:cNvPicPr>
+            <a:picLocks noChangeAspect="1"/>
+          </p:cNvPicPr>
+          <p:nvPr/>
+        </p:nvPicPr>
+        <p:blipFill rotWithShape="1">
+          <a:blip r:embed="rId3">
+            <a:clrChange>
+              <a:clrFrom>
+                <a:srgbClr val="FFFFFF"/>
+              </a:clrFrom>
+              <a:clrTo>
+                <a:srgbClr val="FFFFFF">
+                  <a:alpha val="0"/>
+                </a:srgbClr>
+              </a:clrTo>
+            </a:clrChange>
+            <a:extLst>
+              <a:ext uri="{28A0092B-C50C-407E-A947-70E740481C1C}">
+                <a14:useLocalDpi xmlns:a14="http://schemas.microsoft.com/office/drawing/2010/main" val="0"/>
+              </a:ext>
+            </a:extLst>
+          </a:blip>
+          <a:srcRect l="17746" r="68310"/>
+          <a:stretch/>
+        </p:blipFill>
+        <p:spPr>
+          <a:xfrm>
+            <a:off x="2756951" y="2768522"/>
+            <a:ext cx="1387365" cy="1658288"/>
+          </a:xfrm>
+          <a:prstGeom prst="rect">
+            <a:avLst/>
+          </a:prstGeom>
+        </p:spPr>
+      </p:pic>
+      <p:pic>
+        <p:nvPicPr>
+          <p:cNvPr id="37" name="圖片 36">
+            <a:extLst>
+              <a:ext uri="{FF2B5EF4-FFF2-40B4-BE49-F238E27FC236}">
+                <a16:creationId xmlns:a16="http://schemas.microsoft.com/office/drawing/2014/main" id="{4A546662-043B-46AF-911C-8746A05C7229}"/>
+              </a:ext>
+            </a:extLst>
+          </p:cNvPr>
+          <p:cNvPicPr>
+            <a:picLocks noChangeAspect="1"/>
+          </p:cNvPicPr>
+          <p:nvPr/>
+        </p:nvPicPr>
+        <p:blipFill rotWithShape="1">
+          <a:blip r:embed="rId2">
+            <a:clrChange>
+              <a:clrFrom>
+                <a:srgbClr val="FFFFFF"/>
+              </a:clrFrom>
+              <a:clrTo>
+                <a:srgbClr val="FFFFFF">
+                  <a:alpha val="0"/>
+                </a:srgbClr>
+              </a:clrTo>
+            </a:clrChange>
+            <a:extLst>
+              <a:ext uri="{28A0092B-C50C-407E-A947-70E740481C1C}">
+                <a14:useLocalDpi xmlns:a14="http://schemas.microsoft.com/office/drawing/2010/main" val="0"/>
+              </a:ext>
+            </a:extLst>
+          </a:blip>
+          <a:srcRect l="34534" r="51322"/>
+          <a:stretch/>
+        </p:blipFill>
+        <p:spPr>
+          <a:xfrm>
+            <a:off x="4064876" y="541230"/>
+            <a:ext cx="1408386" cy="1659600"/>
+          </a:xfrm>
+          <a:prstGeom prst="rect">
+            <a:avLst/>
+          </a:prstGeom>
+        </p:spPr>
+      </p:pic>
+      <p:pic>
+        <p:nvPicPr>
+          <p:cNvPr id="38" name="圖片 37">
+            <a:extLst>
+              <a:ext uri="{FF2B5EF4-FFF2-40B4-BE49-F238E27FC236}">
+                <a16:creationId xmlns:a16="http://schemas.microsoft.com/office/drawing/2014/main" id="{5C65022C-F7D4-42D5-926B-C3FCFE4CCB85}"/>
+              </a:ext>
+            </a:extLst>
+          </p:cNvPr>
+          <p:cNvPicPr>
+            <a:picLocks noChangeAspect="1"/>
+          </p:cNvPicPr>
+          <p:nvPr/>
+        </p:nvPicPr>
+        <p:blipFill rotWithShape="1">
+          <a:blip r:embed="rId3">
+            <a:clrChange>
+              <a:clrFrom>
+                <a:srgbClr val="FFFFFF"/>
+              </a:clrFrom>
+              <a:clrTo>
+                <a:srgbClr val="FFFFFF">
+                  <a:alpha val="0"/>
+                </a:srgbClr>
+              </a:clrTo>
+            </a:clrChange>
+            <a:extLst>
+              <a:ext uri="{28A0092B-C50C-407E-A947-70E740481C1C}">
+                <a14:useLocalDpi xmlns:a14="http://schemas.microsoft.com/office/drawing/2010/main" val="0"/>
+              </a:ext>
+            </a:extLst>
+          </a:blip>
+          <a:srcRect l="34649" r="51513"/>
+          <a:stretch/>
+        </p:blipFill>
+        <p:spPr>
+          <a:xfrm>
+            <a:off x="4083006" y="2768522"/>
+            <a:ext cx="1376856" cy="1658288"/>
+          </a:xfrm>
+          <a:prstGeom prst="rect">
+            <a:avLst/>
+          </a:prstGeom>
+        </p:spPr>
+      </p:pic>
+      <p:pic>
+        <p:nvPicPr>
+          <p:cNvPr id="39" name="圖片 38">
+            <a:extLst>
+              <a:ext uri="{FF2B5EF4-FFF2-40B4-BE49-F238E27FC236}">
+                <a16:creationId xmlns:a16="http://schemas.microsoft.com/office/drawing/2014/main" id="{1287C793-AD60-4635-93A1-F4D71550E5A8}"/>
+              </a:ext>
+            </a:extLst>
+          </p:cNvPr>
+          <p:cNvPicPr>
+            <a:picLocks noChangeAspect="1"/>
+          </p:cNvPicPr>
+          <p:nvPr/>
+        </p:nvPicPr>
+        <p:blipFill rotWithShape="1">
+          <a:blip r:embed="rId2">
+            <a:clrChange>
+              <a:clrFrom>
+                <a:srgbClr val="FFFFFF"/>
+              </a:clrFrom>
+              <a:clrTo>
+                <a:srgbClr val="FFFFFF">
+                  <a:alpha val="0"/>
+                </a:srgbClr>
+              </a:clrTo>
+            </a:clrChange>
+            <a:extLst>
+              <a:ext uri="{28A0092B-C50C-407E-A947-70E740481C1C}">
+                <a14:useLocalDpi xmlns:a14="http://schemas.microsoft.com/office/drawing/2010/main" val="0"/>
+              </a:ext>
+            </a:extLst>
+          </a:blip>
+          <a:srcRect l="51317" r="34750"/>
+          <a:stretch/>
+        </p:blipFill>
+        <p:spPr>
+          <a:xfrm>
+            <a:off x="5396010" y="541230"/>
+            <a:ext cx="1387366" cy="1659600"/>
+          </a:xfrm>
+          <a:prstGeom prst="rect">
+            <a:avLst/>
+          </a:prstGeom>
+        </p:spPr>
+      </p:pic>
+      <p:pic>
+        <p:nvPicPr>
+          <p:cNvPr id="40" name="圖片 39">
+            <a:extLst>
+              <a:ext uri="{FF2B5EF4-FFF2-40B4-BE49-F238E27FC236}">
+                <a16:creationId xmlns:a16="http://schemas.microsoft.com/office/drawing/2014/main" id="{482C8D1F-4A4C-4173-A4E5-A809D17F012B}"/>
+              </a:ext>
+            </a:extLst>
+          </p:cNvPr>
+          <p:cNvPicPr>
+            <a:picLocks noChangeAspect="1"/>
+          </p:cNvPicPr>
+          <p:nvPr/>
+        </p:nvPicPr>
+        <p:blipFill rotWithShape="1">
+          <a:blip r:embed="rId3">
+            <a:clrChange>
+              <a:clrFrom>
+                <a:srgbClr val="FFFFFF"/>
+              </a:clrFrom>
+              <a:clrTo>
+                <a:srgbClr val="FFFFFF">
+                  <a:alpha val="0"/>
+                </a:srgbClr>
+              </a:clrTo>
+            </a:clrChange>
+            <a:extLst>
+              <a:ext uri="{28A0092B-C50C-407E-A947-70E740481C1C}">
+                <a14:useLocalDpi xmlns:a14="http://schemas.microsoft.com/office/drawing/2010/main" val="0"/>
+              </a:ext>
+            </a:extLst>
+          </a:blip>
+          <a:srcRect l="51550" r="34717"/>
+          <a:stretch/>
+        </p:blipFill>
+        <p:spPr>
+          <a:xfrm>
+            <a:off x="5417031" y="2768522"/>
+            <a:ext cx="1366345" cy="1658288"/>
+          </a:xfrm>
+          <a:prstGeom prst="rect">
+            <a:avLst/>
+          </a:prstGeom>
+        </p:spPr>
+      </p:pic>
+      <p:pic>
+        <p:nvPicPr>
+          <p:cNvPr id="41" name="圖片 40">
+            <a:extLst>
+              <a:ext uri="{FF2B5EF4-FFF2-40B4-BE49-F238E27FC236}">
+                <a16:creationId xmlns:a16="http://schemas.microsoft.com/office/drawing/2014/main" id="{6D7F35F3-1DB2-4177-BC1C-85B456A7B06D}"/>
+              </a:ext>
+            </a:extLst>
+          </p:cNvPr>
+          <p:cNvPicPr>
+            <a:picLocks noChangeAspect="1"/>
+          </p:cNvPicPr>
+          <p:nvPr/>
+        </p:nvPicPr>
+        <p:blipFill rotWithShape="1">
+          <a:blip r:embed="rId2">
+            <a:clrChange>
+              <a:clrFrom>
+                <a:srgbClr val="FFFFFF"/>
+              </a:clrFrom>
+              <a:clrTo>
+                <a:srgbClr val="FFFFFF">
+                  <a:alpha val="0"/>
+                </a:srgbClr>
+              </a:clrTo>
+            </a:clrChange>
+            <a:extLst>
+              <a:ext uri="{28A0092B-C50C-407E-A947-70E740481C1C}">
+                <a14:useLocalDpi xmlns:a14="http://schemas.microsoft.com/office/drawing/2010/main" val="0"/>
+              </a:ext>
+            </a:extLst>
+          </a:blip>
+          <a:srcRect l="68100" r="17862"/>
+          <a:stretch/>
+        </p:blipFill>
+        <p:spPr>
+          <a:xfrm>
+            <a:off x="6726619" y="541230"/>
+            <a:ext cx="1397877" cy="1659600"/>
+          </a:xfrm>
+          <a:prstGeom prst="rect">
+            <a:avLst/>
+          </a:prstGeom>
+        </p:spPr>
+      </p:pic>
+      <p:pic>
+        <p:nvPicPr>
+          <p:cNvPr id="42" name="圖片 41">
+            <a:extLst>
+              <a:ext uri="{FF2B5EF4-FFF2-40B4-BE49-F238E27FC236}">
+                <a16:creationId xmlns:a16="http://schemas.microsoft.com/office/drawing/2014/main" id="{AFBFFF59-6443-4AD5-8A01-24BCC156678C}"/>
+              </a:ext>
+            </a:extLst>
+          </p:cNvPr>
+          <p:cNvPicPr>
+            <a:picLocks noChangeAspect="1"/>
+          </p:cNvPicPr>
+          <p:nvPr/>
+        </p:nvPicPr>
+        <p:blipFill rotWithShape="1">
+          <a:blip r:embed="rId3">
+            <a:clrChange>
+              <a:clrFrom>
+                <a:srgbClr val="FFFFFF"/>
+              </a:clrFrom>
+              <a:clrTo>
+                <a:srgbClr val="FFFFFF">
+                  <a:alpha val="0"/>
+                </a:srgbClr>
+              </a:clrTo>
+            </a:clrChange>
+            <a:extLst>
+              <a:ext uri="{28A0092B-C50C-407E-A947-70E740481C1C}">
+                <a14:useLocalDpi xmlns:a14="http://schemas.microsoft.com/office/drawing/2010/main" val="0"/>
+              </a:ext>
+            </a:extLst>
+          </a:blip>
+          <a:srcRect l="68240" r="17365"/>
+          <a:stretch/>
+        </p:blipFill>
+        <p:spPr>
+          <a:xfrm>
+            <a:off x="6716111" y="2768522"/>
+            <a:ext cx="1432264" cy="1658288"/>
+          </a:xfrm>
+          <a:prstGeom prst="rect">
+            <a:avLst/>
+          </a:prstGeom>
+        </p:spPr>
+      </p:pic>
+      <mc:AlternateContent xmlns:mc="http://schemas.openxmlformats.org/markup-compatibility/2006">
+        <mc:Choice xmlns:a14="http://schemas.microsoft.com/office/drawing/2010/main" Requires="a14">
+          <p:sp>
+            <p:nvSpPr>
+              <p:cNvPr id="43" name="矩形 42">
+                <a:extLst>
+                  <a:ext uri="{FF2B5EF4-FFF2-40B4-BE49-F238E27FC236}">
+                    <a16:creationId xmlns:a16="http://schemas.microsoft.com/office/drawing/2014/main" id="{4748B52F-40CA-4BF8-AE07-6F1BC800491B}"/>
+                  </a:ext>
+                </a:extLst>
+              </p:cNvPr>
+              <p:cNvSpPr/>
+              <p:nvPr/>
+            </p:nvSpPr>
+            <p:spPr>
+              <a:xfrm>
+                <a:off x="798341" y="3419451"/>
+                <a:ext cx="744243" cy="343171"/>
+              </a:xfrm>
+              <a:prstGeom prst="rect">
+                <a:avLst/>
+              </a:prstGeom>
+            </p:spPr>
+            <p:txBody>
+              <a:bodyPr wrap="none">
+                <a:spAutoFit/>
+              </a:bodyPr>
+              <a:lstStyle/>
+              <a:p>
+                <a:pPr/>
+                <a14:m>
+                  <m:oMathPara xmlns:m="http://schemas.openxmlformats.org/officeDocument/2006/math">
+                    <m:oMathParaPr>
+                      <m:jc m:val="centerGroup"/>
+                    </m:oMathParaPr>
+                    <m:oMath xmlns:m="http://schemas.openxmlformats.org/officeDocument/2006/math">
+                      <m:r>
+                        <a:rPr lang="en-US" altLang="zh-TW" sz="1630" b="0" i="1" smtClean="0">
+                          <a:latin typeface="Cambria Math" panose="02040503050406030204" pitchFamily="18" charset="0"/>
+                        </a:rPr>
+                        <m:t>𝑝</m:t>
+                      </m:r>
+                      <m:r>
+                        <a:rPr lang="en-US" altLang="zh-TW" sz="1630" i="1">
+                          <a:latin typeface="Cambria Math" panose="02040503050406030204" pitchFamily="18" charset="0"/>
+                        </a:rPr>
+                        <m:t>=</m:t>
+                      </m:r>
+                      <m:r>
+                        <a:rPr lang="en-US" altLang="zh-TW" sz="1630" b="0" i="1" smtClean="0">
+                          <a:latin typeface="Cambria Math" panose="02040503050406030204" pitchFamily="18" charset="0"/>
+                        </a:rPr>
+                        <m:t>0</m:t>
+                      </m:r>
+                    </m:oMath>
+                  </m:oMathPara>
+                </a14:m>
+                <a:endParaRPr lang="zh-TW" altLang="en-US" sz="1630" dirty="0">
+                  <a:latin typeface="Times New Roman" panose="02020603050405020304" pitchFamily="18" charset="0"/>
+                  <a:cs typeface="Times New Roman" panose="02020603050405020304" pitchFamily="18" charset="0"/>
+                </a:endParaRPr>
+              </a:p>
+            </p:txBody>
+          </p:sp>
+        </mc:Choice>
+        <mc:Fallback>
+          <p:sp>
+            <p:nvSpPr>
+              <p:cNvPr id="43" name="矩形 42">
+                <a:extLst>
+                  <a:ext uri="{FF2B5EF4-FFF2-40B4-BE49-F238E27FC236}">
+                    <a16:creationId xmlns:a16="http://schemas.microsoft.com/office/drawing/2014/main" id="{4748B52F-40CA-4BF8-AE07-6F1BC800491B}"/>
+                  </a:ext>
+                </a:extLst>
+              </p:cNvPr>
+              <p:cNvSpPr>
+                <a:spLocks noRot="1" noChangeAspect="1" noMove="1" noResize="1" noEditPoints="1" noAdjustHandles="1" noChangeArrowheads="1" noChangeShapeType="1" noTextEdit="1"/>
+              </p:cNvSpPr>
+              <p:nvPr/>
+            </p:nvSpPr>
+            <p:spPr>
+              <a:xfrm>
+                <a:off x="798341" y="3419451"/>
+                <a:ext cx="744243" cy="343171"/>
+              </a:xfrm>
+              <a:prstGeom prst="rect">
+                <a:avLst/>
+              </a:prstGeom>
+              <a:blipFill>
+                <a:blip r:embed="rId25"/>
+                <a:stretch>
+                  <a:fillRect b="-5357"/>
+                </a:stretch>
+              </a:blipFill>
+            </p:spPr>
+            <p:txBody>
+              <a:bodyPr/>
+              <a:lstStyle/>
+              <a:p>
+                <a:r>
+                  <a:rPr lang="zh-TW" altLang="en-US">
+                    <a:noFill/>
+                  </a:rPr>
+                  <a:t> </a:t>
+                </a:r>
+              </a:p>
+            </p:txBody>
+          </p:sp>
+        </mc:Fallback>
+      </mc:AlternateContent>
+      <mc:AlternateContent xmlns:mc="http://schemas.openxmlformats.org/markup-compatibility/2006">
+        <mc:Choice xmlns:a14="http://schemas.microsoft.com/office/drawing/2010/main" Requires="a14">
+          <p:sp>
+            <p:nvSpPr>
+              <p:cNvPr id="44" name="矩形 43">
+                <a:extLst>
+                  <a:ext uri="{FF2B5EF4-FFF2-40B4-BE49-F238E27FC236}">
+                    <a16:creationId xmlns:a16="http://schemas.microsoft.com/office/drawing/2014/main" id="{223454FF-C932-431A-B8AA-B2514BEE2E25}"/>
+                  </a:ext>
+                </a:extLst>
+              </p:cNvPr>
+              <p:cNvSpPr/>
+              <p:nvPr/>
+            </p:nvSpPr>
+            <p:spPr>
+              <a:xfrm>
+                <a:off x="798341" y="1211433"/>
+                <a:ext cx="744243" cy="343171"/>
+              </a:xfrm>
+              <a:prstGeom prst="rect">
+                <a:avLst/>
+              </a:prstGeom>
+            </p:spPr>
+            <p:txBody>
+              <a:bodyPr wrap="none">
+                <a:spAutoFit/>
+              </a:bodyPr>
+              <a:lstStyle/>
+              <a:p>
+                <a:pPr/>
+                <a14:m>
+                  <m:oMathPara xmlns:m="http://schemas.openxmlformats.org/officeDocument/2006/math">
+                    <m:oMathParaPr>
+                      <m:jc m:val="centerGroup"/>
+                    </m:oMathParaPr>
+                    <m:oMath xmlns:m="http://schemas.openxmlformats.org/officeDocument/2006/math">
+                      <m:r>
+                        <a:rPr lang="en-US" altLang="zh-TW" sz="1630" b="0" i="1" smtClean="0">
+                          <a:latin typeface="Cambria Math" panose="02040503050406030204" pitchFamily="18" charset="0"/>
+                        </a:rPr>
+                        <m:t>𝑝</m:t>
+                      </m:r>
+                      <m:r>
+                        <a:rPr lang="en-US" altLang="zh-TW" sz="1630" i="1">
+                          <a:latin typeface="Cambria Math" panose="02040503050406030204" pitchFamily="18" charset="0"/>
+                        </a:rPr>
+                        <m:t>=</m:t>
+                      </m:r>
+                      <m:r>
+                        <a:rPr lang="en-US" altLang="zh-TW" sz="1630" b="0" i="1" smtClean="0">
+                          <a:latin typeface="Cambria Math" panose="02040503050406030204" pitchFamily="18" charset="0"/>
+                        </a:rPr>
+                        <m:t>0</m:t>
+                      </m:r>
+                    </m:oMath>
+                  </m:oMathPara>
+                </a14:m>
+                <a:endParaRPr lang="zh-TW" altLang="en-US" sz="1630" dirty="0">
+                  <a:latin typeface="Times New Roman" panose="02020603050405020304" pitchFamily="18" charset="0"/>
+                  <a:cs typeface="Times New Roman" panose="02020603050405020304" pitchFamily="18" charset="0"/>
+                </a:endParaRPr>
+              </a:p>
+            </p:txBody>
+          </p:sp>
+        </mc:Choice>
+        <mc:Fallback>
+          <p:sp>
+            <p:nvSpPr>
+              <p:cNvPr id="44" name="矩形 43">
+                <a:extLst>
+                  <a:ext uri="{FF2B5EF4-FFF2-40B4-BE49-F238E27FC236}">
+                    <a16:creationId xmlns:a16="http://schemas.microsoft.com/office/drawing/2014/main" id="{223454FF-C932-431A-B8AA-B2514BEE2E25}"/>
+                  </a:ext>
+                </a:extLst>
+              </p:cNvPr>
+              <p:cNvSpPr>
+                <a:spLocks noRot="1" noChangeAspect="1" noMove="1" noResize="1" noEditPoints="1" noAdjustHandles="1" noChangeArrowheads="1" noChangeShapeType="1" noTextEdit="1"/>
+              </p:cNvSpPr>
+              <p:nvPr/>
+            </p:nvSpPr>
+            <p:spPr>
+              <a:xfrm>
+                <a:off x="798341" y="1211433"/>
+                <a:ext cx="744243" cy="343171"/>
+              </a:xfrm>
+              <a:prstGeom prst="rect">
+                <a:avLst/>
+              </a:prstGeom>
+              <a:blipFill>
+                <a:blip r:embed="rId26"/>
+                <a:stretch>
+                  <a:fillRect b="-5357"/>
+                </a:stretch>
+              </a:blipFill>
+            </p:spPr>
+            <p:txBody>
+              <a:bodyPr/>
+              <a:lstStyle/>
+              <a:p>
+                <a:r>
+                  <a:rPr lang="zh-TW" altLang="en-US">
+                    <a:noFill/>
+                  </a:rPr>
+                  <a:t> </a:t>
+                </a:r>
+              </a:p>
+            </p:txBody>
+          </p:sp>
+        </mc:Fallback>
+      </mc:AlternateContent>
+    </p:spTree>
+    <p:extLst>
+      <p:ext uri="{BB962C8B-B14F-4D97-AF65-F5344CB8AC3E}">
+        <p14:creationId xmlns:p14="http://schemas.microsoft.com/office/powerpoint/2010/main" val="3394290110"/>
+      </p:ext>
+    </p:extLst>
+  </p:cSld>
+  <p:clrMapOvr>
+    <a:masterClrMapping/>
+  </p:clrMapOvr>
+</p:sld>
+</file>
+
 <file path=ppt/theme/theme1.xml><?xml version="1.0" encoding="utf-8"?>
 <a:theme xmlns:a="http://schemas.openxmlformats.org/drawingml/2006/main" name="Office 佈景主題">
   <a:themeElements>

--- a/Final/Figures/ffig.pptx
+++ b/Final/Figures/ffig.pptx
@@ -7,6 +7,7 @@
   <p:sldIdLst>
     <p:sldId id="256" r:id="rId2"/>
     <p:sldId id="257" r:id="rId3"/>
+    <p:sldId id="258" r:id="rId4"/>
   </p:sldIdLst>
   <p:sldSz cx="9906000" cy="4679950"/>
   <p:notesSz cx="6858000" cy="9144000"/>
@@ -244,7 +245,7 @@
           <a:p>
             <a:fld id="{CC6FB895-B65F-4EA9-9907-69D32227E72B}" type="datetimeFigureOut">
               <a:rPr lang="zh-TW" altLang="en-US" smtClean="0"/>
-              <a:t>2026/6/30</a:t>
+              <a:t>2026/7/2</a:t>
             </a:fld>
             <a:endParaRPr lang="zh-TW" altLang="en-US"/>
           </a:p>
@@ -414,7 +415,7 @@
           <a:p>
             <a:fld id="{CC6FB895-B65F-4EA9-9907-69D32227E72B}" type="datetimeFigureOut">
               <a:rPr lang="zh-TW" altLang="en-US" smtClean="0"/>
-              <a:t>2026/6/30</a:t>
+              <a:t>2026/7/2</a:t>
             </a:fld>
             <a:endParaRPr lang="zh-TW" altLang="en-US"/>
           </a:p>
@@ -594,7 +595,7 @@
           <a:p>
             <a:fld id="{CC6FB895-B65F-4EA9-9907-69D32227E72B}" type="datetimeFigureOut">
               <a:rPr lang="zh-TW" altLang="en-US" smtClean="0"/>
-              <a:t>2026/6/30</a:t>
+              <a:t>2026/7/2</a:t>
             </a:fld>
             <a:endParaRPr lang="zh-TW" altLang="en-US"/>
           </a:p>
@@ -764,7 +765,7 @@
           <a:p>
             <a:fld id="{CC6FB895-B65F-4EA9-9907-69D32227E72B}" type="datetimeFigureOut">
               <a:rPr lang="zh-TW" altLang="en-US" smtClean="0"/>
-              <a:t>2026/6/30</a:t>
+              <a:t>2026/7/2</a:t>
             </a:fld>
             <a:endParaRPr lang="zh-TW" altLang="en-US"/>
           </a:p>
@@ -1010,7 +1011,7 @@
           <a:p>
             <a:fld id="{CC6FB895-B65F-4EA9-9907-69D32227E72B}" type="datetimeFigureOut">
               <a:rPr lang="zh-TW" altLang="en-US" smtClean="0"/>
-              <a:t>2026/6/30</a:t>
+              <a:t>2026/7/2</a:t>
             </a:fld>
             <a:endParaRPr lang="zh-TW" altLang="en-US"/>
           </a:p>
@@ -1242,7 +1243,7 @@
           <a:p>
             <a:fld id="{CC6FB895-B65F-4EA9-9907-69D32227E72B}" type="datetimeFigureOut">
               <a:rPr lang="zh-TW" altLang="en-US" smtClean="0"/>
-              <a:t>2026/6/30</a:t>
+              <a:t>2026/7/2</a:t>
             </a:fld>
             <a:endParaRPr lang="zh-TW" altLang="en-US"/>
           </a:p>
@@ -1609,7 +1610,7 @@
           <a:p>
             <a:fld id="{CC6FB895-B65F-4EA9-9907-69D32227E72B}" type="datetimeFigureOut">
               <a:rPr lang="zh-TW" altLang="en-US" smtClean="0"/>
-              <a:t>2026/6/30</a:t>
+              <a:t>2026/7/2</a:t>
             </a:fld>
             <a:endParaRPr lang="zh-TW" altLang="en-US"/>
           </a:p>
@@ -1727,7 +1728,7 @@
           <a:p>
             <a:fld id="{CC6FB895-B65F-4EA9-9907-69D32227E72B}" type="datetimeFigureOut">
               <a:rPr lang="zh-TW" altLang="en-US" smtClean="0"/>
-              <a:t>2026/6/30</a:t>
+              <a:t>2026/7/2</a:t>
             </a:fld>
             <a:endParaRPr lang="zh-TW" altLang="en-US"/>
           </a:p>
@@ -1822,7 +1823,7 @@
           <a:p>
             <a:fld id="{CC6FB895-B65F-4EA9-9907-69D32227E72B}" type="datetimeFigureOut">
               <a:rPr lang="zh-TW" altLang="en-US" smtClean="0"/>
-              <a:t>2026/6/30</a:t>
+              <a:t>2026/7/2</a:t>
             </a:fld>
             <a:endParaRPr lang="zh-TW" altLang="en-US"/>
           </a:p>
@@ -2099,7 +2100,7 @@
           <a:p>
             <a:fld id="{CC6FB895-B65F-4EA9-9907-69D32227E72B}" type="datetimeFigureOut">
               <a:rPr lang="zh-TW" altLang="en-US" smtClean="0"/>
-              <a:t>2026/6/30</a:t>
+              <a:t>2026/7/2</a:t>
             </a:fld>
             <a:endParaRPr lang="zh-TW" altLang="en-US"/>
           </a:p>
@@ -2356,7 +2357,7 @@
           <a:p>
             <a:fld id="{CC6FB895-B65F-4EA9-9907-69D32227E72B}" type="datetimeFigureOut">
               <a:rPr lang="zh-TW" altLang="en-US" smtClean="0"/>
-              <a:t>2026/6/30</a:t>
+              <a:t>2026/7/2</a:t>
             </a:fld>
             <a:endParaRPr lang="zh-TW" altLang="en-US"/>
           </a:p>
@@ -2569,7 +2570,7 @@
           <a:p>
             <a:fld id="{CC6FB895-B65F-4EA9-9907-69D32227E72B}" type="datetimeFigureOut">
               <a:rPr lang="zh-TW" altLang="en-US" smtClean="0"/>
-              <a:t>2026/6/30</a:t>
+              <a:t>2026/7/2</a:t>
             </a:fld>
             <a:endParaRPr lang="zh-TW" altLang="en-US"/>
           </a:p>
@@ -3273,7 +3274,7 @@
               </p:nvSpPr>
               <p:spPr>
                 <a:xfrm>
-                  <a:off x="669509" y="1644094"/>
+                  <a:off x="690774" y="1718522"/>
                   <a:ext cx="783035" cy="343171"/>
                 </a:xfrm>
                 <a:prstGeom prst="rect">
@@ -3352,7 +3353,7 @@
               </p:nvSpPr>
               <p:spPr>
                 <a:xfrm>
-                  <a:off x="669509" y="1644094"/>
+                  <a:off x="690774" y="1718522"/>
                   <a:ext cx="783035" cy="343171"/>
                 </a:xfrm>
                 <a:prstGeom prst="rect">
@@ -3361,7 +3362,7 @@
                 <a:blipFill>
                   <a:blip r:embed="rId5"/>
                   <a:stretch>
-                    <a:fillRect b="-10714"/>
+                    <a:fillRect b="-8772"/>
                   </a:stretch>
                 </a:blipFill>
               </p:spPr>
@@ -5577,51 +5578,6 @@
           </a:prstGeom>
         </p:spPr>
       </p:pic>
-      <p:pic>
-        <p:nvPicPr>
-          <p:cNvPr id="152" name="圖片 151">
-            <a:extLst>
-              <a:ext uri="{FF2B5EF4-FFF2-40B4-BE49-F238E27FC236}">
-                <a16:creationId xmlns:a16="http://schemas.microsoft.com/office/drawing/2014/main" id="{C594AD88-73A0-42D7-B206-127223FA1ADB}"/>
-              </a:ext>
-            </a:extLst>
-          </p:cNvPr>
-          <p:cNvPicPr>
-            <a:picLocks noChangeAspect="1"/>
-          </p:cNvPicPr>
-          <p:nvPr/>
-        </p:nvPicPr>
-        <p:blipFill rotWithShape="1">
-          <a:blip r:embed="rId4">
-            <a:clrChange>
-              <a:clrFrom>
-                <a:srgbClr val="FFFFFF"/>
-              </a:clrFrom>
-              <a:clrTo>
-                <a:srgbClr val="FFFFFF">
-                  <a:alpha val="0"/>
-                </a:srgbClr>
-              </a:clrTo>
-            </a:clrChange>
-            <a:extLst>
-              <a:ext uri="{28A0092B-C50C-407E-A947-70E740481C1C}">
-                <a14:useLocalDpi xmlns:a14="http://schemas.microsoft.com/office/drawing/2010/main" val="0"/>
-              </a:ext>
-            </a:extLst>
-          </a:blip>
-          <a:srcRect l="84897" r="9472"/>
-          <a:stretch/>
-        </p:blipFill>
-        <p:spPr>
-          <a:xfrm>
-            <a:off x="8109294" y="2884537"/>
-            <a:ext cx="569632" cy="1680954"/>
-          </a:xfrm>
-          <a:prstGeom prst="rect">
-            <a:avLst/>
-          </a:prstGeom>
-        </p:spPr>
-      </p:pic>
       <p:sp>
         <p:nvSpPr>
           <p:cNvPr id="153" name="矩形: 圓角 152">
@@ -5750,8 +5706,8 @@
           </a:p>
         </p:txBody>
       </p:sp>
-      <mc:AlternateContent xmlns:mc="http://schemas.openxmlformats.org/markup-compatibility/2006">
-        <mc:Choice xmlns:a14="http://schemas.microsoft.com/office/drawing/2010/main" Requires="a14">
+      <mc:AlternateContent xmlns:mc="http://schemas.openxmlformats.org/markup-compatibility/2006" xmlns:a14="http://schemas.microsoft.com/office/drawing/2010/main">
+        <mc:Choice Requires="a14">
           <p:sp>
             <p:nvSpPr>
               <p:cNvPr id="155" name="矩形 154">
@@ -5828,7 +5784,7 @@
             </p:txBody>
           </p:sp>
         </mc:Choice>
-        <mc:Fallback>
+        <mc:Fallback xmlns="">
           <p:sp>
             <p:nvSpPr>
               <p:cNvPr id="155" name="矩形 154">
@@ -5873,8 +5829,8 @@
           </p:sp>
         </mc:Fallback>
       </mc:AlternateContent>
-      <mc:AlternateContent xmlns:mc="http://schemas.openxmlformats.org/markup-compatibility/2006">
-        <mc:Choice xmlns:a14="http://schemas.microsoft.com/office/drawing/2010/main" Requires="a14">
+      <mc:AlternateContent xmlns:mc="http://schemas.openxmlformats.org/markup-compatibility/2006" xmlns:a14="http://schemas.microsoft.com/office/drawing/2010/main">
+        <mc:Choice Requires="a14">
           <p:sp>
             <p:nvSpPr>
               <p:cNvPr id="156" name="矩形 155">
@@ -5926,7 +5882,7 @@
             </p:txBody>
           </p:sp>
         </mc:Choice>
-        <mc:Fallback>
+        <mc:Fallback xmlns="">
           <p:sp>
             <p:nvSpPr>
               <p:cNvPr id="156" name="矩形 155">
@@ -5971,8 +5927,8 @@
           </p:sp>
         </mc:Fallback>
       </mc:AlternateContent>
-      <mc:AlternateContent xmlns:mc="http://schemas.openxmlformats.org/markup-compatibility/2006">
-        <mc:Choice xmlns:a14="http://schemas.microsoft.com/office/drawing/2010/main" Requires="a14">
+      <mc:AlternateContent xmlns:mc="http://schemas.openxmlformats.org/markup-compatibility/2006" xmlns:a14="http://schemas.microsoft.com/office/drawing/2010/main">
+        <mc:Choice Requires="a14">
           <p:sp>
             <p:nvSpPr>
               <p:cNvPr id="157" name="矩形 156">
@@ -6024,7 +5980,7 @@
             </p:txBody>
           </p:sp>
         </mc:Choice>
-        <mc:Fallback>
+        <mc:Fallback xmlns="">
           <p:sp>
             <p:nvSpPr>
               <p:cNvPr id="157" name="矩形 156">
@@ -6069,8 +6025,8 @@
           </p:sp>
         </mc:Fallback>
       </mc:AlternateContent>
-      <mc:AlternateContent xmlns:mc="http://schemas.openxmlformats.org/markup-compatibility/2006">
-        <mc:Choice xmlns:a14="http://schemas.microsoft.com/office/drawing/2010/main" Requires="a14">
+      <mc:AlternateContent xmlns:mc="http://schemas.openxmlformats.org/markup-compatibility/2006" xmlns:a14="http://schemas.microsoft.com/office/drawing/2010/main">
+        <mc:Choice Requires="a14">
           <p:sp>
             <p:nvSpPr>
               <p:cNvPr id="158" name="矩形 157">
@@ -6122,7 +6078,7 @@
             </p:txBody>
           </p:sp>
         </mc:Choice>
-        <mc:Fallback>
+        <mc:Fallback xmlns="">
           <p:sp>
             <p:nvSpPr>
               <p:cNvPr id="158" name="矩形 157">
@@ -6167,8 +6123,8 @@
           </p:sp>
         </mc:Fallback>
       </mc:AlternateContent>
-      <mc:AlternateContent xmlns:mc="http://schemas.openxmlformats.org/markup-compatibility/2006">
-        <mc:Choice xmlns:a14="http://schemas.microsoft.com/office/drawing/2010/main" Requires="a14">
+      <mc:AlternateContent xmlns:mc="http://schemas.openxmlformats.org/markup-compatibility/2006" xmlns:a14="http://schemas.microsoft.com/office/drawing/2010/main">
+        <mc:Choice Requires="a14">
           <p:sp>
             <p:nvSpPr>
               <p:cNvPr id="159" name="矩形 158">
@@ -6220,7 +6176,7 @@
             </p:txBody>
           </p:sp>
         </mc:Choice>
-        <mc:Fallback>
+        <mc:Fallback xmlns="">
           <p:sp>
             <p:nvSpPr>
               <p:cNvPr id="159" name="矩形 158">
@@ -6265,8 +6221,8 @@
           </p:sp>
         </mc:Fallback>
       </mc:AlternateContent>
-      <mc:AlternateContent xmlns:mc="http://schemas.openxmlformats.org/markup-compatibility/2006">
-        <mc:Choice xmlns:a14="http://schemas.microsoft.com/office/drawing/2010/main" Requires="a14">
+      <mc:AlternateContent xmlns:mc="http://schemas.openxmlformats.org/markup-compatibility/2006" xmlns:a14="http://schemas.microsoft.com/office/drawing/2010/main">
+        <mc:Choice Requires="a14">
           <p:sp>
             <p:nvSpPr>
               <p:cNvPr id="160" name="矩形 159">
@@ -6318,7 +6274,7 @@
             </p:txBody>
           </p:sp>
         </mc:Choice>
-        <mc:Fallback>
+        <mc:Fallback xmlns="">
           <p:sp>
             <p:nvSpPr>
               <p:cNvPr id="160" name="矩形 159">
@@ -6363,8 +6319,8 @@
           </p:sp>
         </mc:Fallback>
       </mc:AlternateContent>
-      <mc:AlternateContent xmlns:mc="http://schemas.openxmlformats.org/markup-compatibility/2006">
-        <mc:Choice xmlns:a14="http://schemas.microsoft.com/office/drawing/2010/main" Requires="a14">
+      <mc:AlternateContent xmlns:mc="http://schemas.openxmlformats.org/markup-compatibility/2006" xmlns:a14="http://schemas.microsoft.com/office/drawing/2010/main">
+        <mc:Choice Requires="a14">
           <p:sp>
             <p:nvSpPr>
               <p:cNvPr id="161" name="矩形 160">
@@ -6441,7 +6397,7 @@
             </p:txBody>
           </p:sp>
         </mc:Choice>
-        <mc:Fallback>
+        <mc:Fallback xmlns="">
           <p:sp>
             <p:nvSpPr>
               <p:cNvPr id="161" name="矩形 160">
@@ -6486,8 +6442,8 @@
           </p:sp>
         </mc:Fallback>
       </mc:AlternateContent>
-      <mc:AlternateContent xmlns:mc="http://schemas.openxmlformats.org/markup-compatibility/2006">
-        <mc:Choice xmlns:a14="http://schemas.microsoft.com/office/drawing/2010/main" Requires="a14">
+      <mc:AlternateContent xmlns:mc="http://schemas.openxmlformats.org/markup-compatibility/2006" xmlns:a14="http://schemas.microsoft.com/office/drawing/2010/main">
+        <mc:Choice Requires="a14">
           <p:sp>
             <p:nvSpPr>
               <p:cNvPr id="162" name="矩形 161">
@@ -6539,7 +6495,7 @@
             </p:txBody>
           </p:sp>
         </mc:Choice>
-        <mc:Fallback>
+        <mc:Fallback xmlns="">
           <p:sp>
             <p:nvSpPr>
               <p:cNvPr id="162" name="矩形 161">
@@ -6584,8 +6540,8 @@
           </p:sp>
         </mc:Fallback>
       </mc:AlternateContent>
-      <mc:AlternateContent xmlns:mc="http://schemas.openxmlformats.org/markup-compatibility/2006">
-        <mc:Choice xmlns:a14="http://schemas.microsoft.com/office/drawing/2010/main" Requires="a14">
+      <mc:AlternateContent xmlns:mc="http://schemas.openxmlformats.org/markup-compatibility/2006" xmlns:a14="http://schemas.microsoft.com/office/drawing/2010/main">
+        <mc:Choice Requires="a14">
           <p:sp>
             <p:nvSpPr>
               <p:cNvPr id="163" name="矩形 162">
@@ -6637,7 +6593,7 @@
             </p:txBody>
           </p:sp>
         </mc:Choice>
-        <mc:Fallback>
+        <mc:Fallback xmlns="">
           <p:sp>
             <p:nvSpPr>
               <p:cNvPr id="163" name="矩形 162">
@@ -6682,8 +6638,8 @@
           </p:sp>
         </mc:Fallback>
       </mc:AlternateContent>
-      <mc:AlternateContent xmlns:mc="http://schemas.openxmlformats.org/markup-compatibility/2006">
-        <mc:Choice xmlns:a14="http://schemas.microsoft.com/office/drawing/2010/main" Requires="a14">
+      <mc:AlternateContent xmlns:mc="http://schemas.openxmlformats.org/markup-compatibility/2006" xmlns:a14="http://schemas.microsoft.com/office/drawing/2010/main">
+        <mc:Choice Requires="a14">
           <p:sp>
             <p:nvSpPr>
               <p:cNvPr id="164" name="矩形 163">
@@ -6735,7 +6691,7 @@
             </p:txBody>
           </p:sp>
         </mc:Choice>
-        <mc:Fallback>
+        <mc:Fallback xmlns="">
           <p:sp>
             <p:nvSpPr>
               <p:cNvPr id="164" name="矩形 163">
@@ -6780,8 +6736,8 @@
           </p:sp>
         </mc:Fallback>
       </mc:AlternateContent>
-      <mc:AlternateContent xmlns:mc="http://schemas.openxmlformats.org/markup-compatibility/2006">
-        <mc:Choice xmlns:a14="http://schemas.microsoft.com/office/drawing/2010/main" Requires="a14">
+      <mc:AlternateContent xmlns:mc="http://schemas.openxmlformats.org/markup-compatibility/2006" xmlns:a14="http://schemas.microsoft.com/office/drawing/2010/main">
+        <mc:Choice Requires="a14">
           <p:sp>
             <p:nvSpPr>
               <p:cNvPr id="165" name="矩形 164">
@@ -6833,7 +6789,7 @@
             </p:txBody>
           </p:sp>
         </mc:Choice>
-        <mc:Fallback>
+        <mc:Fallback xmlns="">
           <p:sp>
             <p:nvSpPr>
               <p:cNvPr id="165" name="矩形 164">
@@ -6878,8 +6834,8 @@
           </p:sp>
         </mc:Fallback>
       </mc:AlternateContent>
-      <mc:AlternateContent xmlns:mc="http://schemas.openxmlformats.org/markup-compatibility/2006">
-        <mc:Choice xmlns:a14="http://schemas.microsoft.com/office/drawing/2010/main" Requires="a14">
+      <mc:AlternateContent xmlns:mc="http://schemas.openxmlformats.org/markup-compatibility/2006" xmlns:a14="http://schemas.microsoft.com/office/drawing/2010/main">
+        <mc:Choice Requires="a14">
           <p:sp>
             <p:nvSpPr>
               <p:cNvPr id="166" name="矩形 165">
@@ -6931,7 +6887,7 @@
             </p:txBody>
           </p:sp>
         </mc:Choice>
-        <mc:Fallback>
+        <mc:Fallback xmlns="">
           <p:sp>
             <p:nvSpPr>
               <p:cNvPr id="166" name="矩形 165">
@@ -6989,9 +6945,9 @@
           <p:nvPr/>
         </p:nvSpPr>
         <p:spPr>
-          <a:xfrm rot="5400000">
-            <a:off x="8114342" y="1344256"/>
-            <a:ext cx="1359668" cy="343171"/>
+          <a:xfrm>
+            <a:off x="8160260" y="1928494"/>
+            <a:ext cx="487634" cy="343171"/>
           </a:xfrm>
           <a:prstGeom prst="rect">
             <a:avLst/>
@@ -7008,7 +6964,7 @@
                 <a:latin typeface="Times New Roman" panose="02020603050405020304" pitchFamily="18" charset="0"/>
                 <a:cs typeface="Times New Roman" panose="02020603050405020304" pitchFamily="18" charset="0"/>
               </a:rPr>
-              <a:t>arbitrary units</a:t>
+              <a:t>a.u.</a:t>
             </a:r>
             <a:endParaRPr lang="zh-TW" altLang="en-US" sz="1630" dirty="0">
               <a:latin typeface="Times New Roman" panose="02020603050405020304" pitchFamily="18" charset="0"/>
@@ -7030,9 +6986,9 @@
           <p:nvPr/>
         </p:nvSpPr>
         <p:spPr>
-          <a:xfrm rot="5400000">
-            <a:off x="8114342" y="3566116"/>
-            <a:ext cx="1359668" cy="343171"/>
+          <a:xfrm>
+            <a:off x="8135689" y="4076479"/>
+            <a:ext cx="487634" cy="343171"/>
           </a:xfrm>
           <a:prstGeom prst="rect">
             <a:avLst/>
@@ -7049,7 +7005,7 @@
                 <a:latin typeface="Times New Roman" panose="02020603050405020304" pitchFamily="18" charset="0"/>
                 <a:cs typeface="Times New Roman" panose="02020603050405020304" pitchFamily="18" charset="0"/>
               </a:rPr>
-              <a:t>arbitrary units</a:t>
+              <a:t>a.u.</a:t>
             </a:r>
             <a:endParaRPr lang="zh-TW" altLang="en-US" sz="1630" dirty="0">
               <a:latin typeface="Times New Roman" panose="02020603050405020304" pitchFamily="18" charset="0"/>
@@ -7826,51 +7782,6 @@
       </p:grpSp>
       <p:pic>
         <p:nvPicPr>
-          <p:cNvPr id="179" name="圖片 178">
-            <a:extLst>
-              <a:ext uri="{FF2B5EF4-FFF2-40B4-BE49-F238E27FC236}">
-                <a16:creationId xmlns:a16="http://schemas.microsoft.com/office/drawing/2014/main" id="{401CCF63-AA5E-4E13-8E2E-930E6FDBEB6B}"/>
-              </a:ext>
-            </a:extLst>
-          </p:cNvPr>
-          <p:cNvPicPr>
-            <a:picLocks noChangeAspect="1"/>
-          </p:cNvPicPr>
-          <p:nvPr/>
-        </p:nvPicPr>
-        <p:blipFill rotWithShape="1">
-          <a:blip r:embed="rId23">
-            <a:clrChange>
-              <a:clrFrom>
-                <a:srgbClr val="FFFFFF"/>
-              </a:clrFrom>
-              <a:clrTo>
-                <a:srgbClr val="FFFFFF">
-                  <a:alpha val="0"/>
-                </a:srgbClr>
-              </a:clrTo>
-            </a:clrChange>
-            <a:extLst>
-              <a:ext uri="{28A0092B-C50C-407E-A947-70E740481C1C}">
-                <a14:useLocalDpi xmlns:a14="http://schemas.microsoft.com/office/drawing/2010/main" val="0"/>
-              </a:ext>
-            </a:extLst>
-          </a:blip>
-          <a:srcRect l="85347" r="8518"/>
-          <a:stretch/>
-        </p:blipFill>
-        <p:spPr>
-          <a:xfrm>
-            <a:off x="8228734" y="696804"/>
-            <a:ext cx="568960" cy="1540800"/>
-          </a:xfrm>
-          <a:prstGeom prst="rect">
-            <a:avLst/>
-          </a:prstGeom>
-        </p:spPr>
-      </p:pic>
-      <p:pic>
-        <p:nvPicPr>
           <p:cNvPr id="180" name="圖片 179">
             <a:extLst>
               <a:ext uri="{FF2B5EF4-FFF2-40B4-BE49-F238E27FC236}">
@@ -7884,7 +7795,7 @@
           <p:nvPr/>
         </p:nvPicPr>
         <p:blipFill rotWithShape="1">
-          <a:blip r:embed="rId24">
+          <a:blip r:embed="rId23">
             <a:clrChange>
               <a:clrFrom>
                 <a:srgbClr val="FFFFFF"/>
@@ -7924,7 +7835,7 @@
           <p:nvPr/>
         </p:nvPicPr>
         <p:blipFill rotWithShape="1">
-          <a:blip r:embed="rId24">
+          <a:blip r:embed="rId23">
             <a:clrChange>
               <a:clrFrom>
                 <a:srgbClr val="FFFFFF"/>
@@ -8309,8 +8220,8 @@
           </a:prstGeom>
         </p:spPr>
       </p:pic>
-      <mc:AlternateContent xmlns:mc="http://schemas.openxmlformats.org/markup-compatibility/2006">
-        <mc:Choice xmlns:a14="http://schemas.microsoft.com/office/drawing/2010/main" Requires="a14">
+      <mc:AlternateContent xmlns:mc="http://schemas.openxmlformats.org/markup-compatibility/2006" xmlns:a14="http://schemas.microsoft.com/office/drawing/2010/main">
+        <mc:Choice Requires="a14">
           <p:sp>
             <p:nvSpPr>
               <p:cNvPr id="43" name="矩形 42">
@@ -8374,7 +8285,7 @@
             </p:txBody>
           </p:sp>
         </mc:Choice>
-        <mc:Fallback>
+        <mc:Fallback xmlns="">
           <p:sp>
             <p:nvSpPr>
               <p:cNvPr id="43" name="矩形 42">
@@ -8419,8 +8330,8 @@
           </p:sp>
         </mc:Fallback>
       </mc:AlternateContent>
-      <mc:AlternateContent xmlns:mc="http://schemas.openxmlformats.org/markup-compatibility/2006">
-        <mc:Choice xmlns:a14="http://schemas.microsoft.com/office/drawing/2010/main" Requires="a14">
+      <mc:AlternateContent xmlns:mc="http://schemas.openxmlformats.org/markup-compatibility/2006" xmlns:a14="http://schemas.microsoft.com/office/drawing/2010/main">
+        <mc:Choice Requires="a14">
           <p:sp>
             <p:nvSpPr>
               <p:cNvPr id="44" name="矩形 43">
@@ -8484,7 +8395,7 @@
             </p:txBody>
           </p:sp>
         </mc:Choice>
-        <mc:Fallback>
+        <mc:Fallback xmlns="">
           <p:sp>
             <p:nvSpPr>
               <p:cNvPr id="44" name="矩形 43">
@@ -8529,10 +8440,3416 @@
           </p:sp>
         </mc:Fallback>
       </mc:AlternateContent>
+      <p:pic>
+        <p:nvPicPr>
+          <p:cNvPr id="45" name="圖片 44">
+            <a:extLst>
+              <a:ext uri="{FF2B5EF4-FFF2-40B4-BE49-F238E27FC236}">
+                <a16:creationId xmlns:a16="http://schemas.microsoft.com/office/drawing/2014/main" id="{B271E383-D64D-4F4D-A358-5FFBD5B85F81}"/>
+              </a:ext>
+            </a:extLst>
+          </p:cNvPr>
+          <p:cNvPicPr>
+            <a:picLocks noChangeAspect="1"/>
+          </p:cNvPicPr>
+          <p:nvPr/>
+        </p:nvPicPr>
+        <p:blipFill rotWithShape="1">
+          <a:blip r:embed="rId27">
+            <a:clrChange>
+              <a:clrFrom>
+                <a:srgbClr val="FFFFFF"/>
+              </a:clrFrom>
+              <a:clrTo>
+                <a:srgbClr val="FFFFFF">
+                  <a:alpha val="0"/>
+                </a:srgbClr>
+              </a:clrTo>
+            </a:clrChange>
+          </a:blip>
+          <a:srcRect r="32321"/>
+          <a:stretch/>
+        </p:blipFill>
+        <p:spPr>
+          <a:xfrm>
+            <a:off x="8165045" y="2903493"/>
+            <a:ext cx="407456" cy="1328804"/>
+          </a:xfrm>
+          <a:prstGeom prst="rect">
+            <a:avLst/>
+          </a:prstGeom>
+        </p:spPr>
+      </p:pic>
+      <p:pic>
+        <p:nvPicPr>
+          <p:cNvPr id="2" name="圖片 1">
+            <a:extLst>
+              <a:ext uri="{FF2B5EF4-FFF2-40B4-BE49-F238E27FC236}">
+                <a16:creationId xmlns:a16="http://schemas.microsoft.com/office/drawing/2014/main" id="{146AE1C8-6C71-48F2-A161-21EDDF441D06}"/>
+              </a:ext>
+            </a:extLst>
+          </p:cNvPr>
+          <p:cNvPicPr>
+            <a:picLocks noChangeAspect="1"/>
+          </p:cNvPicPr>
+          <p:nvPr/>
+        </p:nvPicPr>
+        <p:blipFill rotWithShape="1">
+          <a:blip r:embed="rId28">
+            <a:clrChange>
+              <a:clrFrom>
+                <a:srgbClr val="FFFFFF"/>
+              </a:clrFrom>
+              <a:clrTo>
+                <a:srgbClr val="FFFFFF">
+                  <a:alpha val="0"/>
+                </a:srgbClr>
+              </a:clrTo>
+            </a:clrChange>
+          </a:blip>
+          <a:srcRect r="26676" b="1412"/>
+          <a:stretch/>
+        </p:blipFill>
+        <p:spPr>
+          <a:xfrm>
+            <a:off x="8177841" y="664194"/>
+            <a:ext cx="394660" cy="1346221"/>
+          </a:xfrm>
+          <a:prstGeom prst="rect">
+            <a:avLst/>
+          </a:prstGeom>
+        </p:spPr>
+      </p:pic>
+      <p:sp>
+        <p:nvSpPr>
+          <p:cNvPr id="46" name="矩形 45">
+            <a:extLst>
+              <a:ext uri="{FF2B5EF4-FFF2-40B4-BE49-F238E27FC236}">
+                <a16:creationId xmlns:a16="http://schemas.microsoft.com/office/drawing/2014/main" id="{F7DE3470-B86B-41A4-90CA-5EE3920827CC}"/>
+              </a:ext>
+            </a:extLst>
+          </p:cNvPr>
+          <p:cNvSpPr/>
+          <p:nvPr/>
+        </p:nvSpPr>
+        <p:spPr>
+          <a:xfrm>
+            <a:off x="8463801" y="531705"/>
+            <a:ext cx="288862" cy="343171"/>
+          </a:xfrm>
+          <a:prstGeom prst="rect">
+            <a:avLst/>
+          </a:prstGeom>
+        </p:spPr>
+        <p:txBody>
+          <a:bodyPr wrap="none">
+            <a:spAutoFit/>
+          </a:bodyPr>
+          <a:lstStyle/>
+          <a:p>
+            <a:r>
+              <a:rPr lang="en-US" altLang="zh-TW" sz="1630" dirty="0">
+                <a:latin typeface="Times New Roman" panose="02020603050405020304" pitchFamily="18" charset="0"/>
+                <a:cs typeface="Times New Roman" panose="02020603050405020304" pitchFamily="18" charset="0"/>
+              </a:rPr>
+              <a:t>1</a:t>
+            </a:r>
+            <a:endParaRPr lang="zh-TW" altLang="en-US" sz="1630" dirty="0">
+              <a:latin typeface="Times New Roman" panose="02020603050405020304" pitchFamily="18" charset="0"/>
+              <a:cs typeface="Times New Roman" panose="02020603050405020304" pitchFamily="18" charset="0"/>
+            </a:endParaRPr>
+          </a:p>
+        </p:txBody>
+      </p:sp>
+      <p:sp>
+        <p:nvSpPr>
+          <p:cNvPr id="47" name="矩形 46">
+            <a:extLst>
+              <a:ext uri="{FF2B5EF4-FFF2-40B4-BE49-F238E27FC236}">
+                <a16:creationId xmlns:a16="http://schemas.microsoft.com/office/drawing/2014/main" id="{D6AA29D1-BA19-4B65-AFAB-7186726D750C}"/>
+              </a:ext>
+            </a:extLst>
+          </p:cNvPr>
+          <p:cNvSpPr/>
+          <p:nvPr/>
+        </p:nvSpPr>
+        <p:spPr>
+          <a:xfrm>
+            <a:off x="8482851" y="1798530"/>
+            <a:ext cx="288862" cy="343171"/>
+          </a:xfrm>
+          <a:prstGeom prst="rect">
+            <a:avLst/>
+          </a:prstGeom>
+        </p:spPr>
+        <p:txBody>
+          <a:bodyPr wrap="none">
+            <a:spAutoFit/>
+          </a:bodyPr>
+          <a:lstStyle/>
+          <a:p>
+            <a:r>
+              <a:rPr lang="en-US" altLang="zh-TW" sz="1630" dirty="0">
+                <a:latin typeface="Times New Roman" panose="02020603050405020304" pitchFamily="18" charset="0"/>
+                <a:cs typeface="Times New Roman" panose="02020603050405020304" pitchFamily="18" charset="0"/>
+              </a:rPr>
+              <a:t>0</a:t>
+            </a:r>
+            <a:endParaRPr lang="zh-TW" altLang="en-US" sz="1630" dirty="0">
+              <a:latin typeface="Times New Roman" panose="02020603050405020304" pitchFamily="18" charset="0"/>
+              <a:cs typeface="Times New Roman" panose="02020603050405020304" pitchFamily="18" charset="0"/>
+            </a:endParaRPr>
+          </a:p>
+        </p:txBody>
+      </p:sp>
+      <p:sp>
+        <p:nvSpPr>
+          <p:cNvPr id="48" name="矩形 47">
+            <a:extLst>
+              <a:ext uri="{FF2B5EF4-FFF2-40B4-BE49-F238E27FC236}">
+                <a16:creationId xmlns:a16="http://schemas.microsoft.com/office/drawing/2014/main" id="{5C8B2CEE-BD76-45B2-946A-28A0D9883D55}"/>
+              </a:ext>
+            </a:extLst>
+          </p:cNvPr>
+          <p:cNvSpPr/>
+          <p:nvPr/>
+        </p:nvSpPr>
+        <p:spPr>
+          <a:xfrm>
+            <a:off x="8473326" y="2751030"/>
+            <a:ext cx="288862" cy="343171"/>
+          </a:xfrm>
+          <a:prstGeom prst="rect">
+            <a:avLst/>
+          </a:prstGeom>
+        </p:spPr>
+        <p:txBody>
+          <a:bodyPr wrap="none">
+            <a:spAutoFit/>
+          </a:bodyPr>
+          <a:lstStyle/>
+          <a:p>
+            <a:r>
+              <a:rPr lang="en-US" altLang="zh-TW" sz="1630" dirty="0">
+                <a:latin typeface="Times New Roman" panose="02020603050405020304" pitchFamily="18" charset="0"/>
+                <a:cs typeface="Times New Roman" panose="02020603050405020304" pitchFamily="18" charset="0"/>
+              </a:rPr>
+              <a:t>1</a:t>
+            </a:r>
+            <a:endParaRPr lang="zh-TW" altLang="en-US" sz="1630" dirty="0">
+              <a:latin typeface="Times New Roman" panose="02020603050405020304" pitchFamily="18" charset="0"/>
+              <a:cs typeface="Times New Roman" panose="02020603050405020304" pitchFamily="18" charset="0"/>
+            </a:endParaRPr>
+          </a:p>
+        </p:txBody>
+      </p:sp>
+      <p:sp>
+        <p:nvSpPr>
+          <p:cNvPr id="49" name="矩形 48">
+            <a:extLst>
+              <a:ext uri="{FF2B5EF4-FFF2-40B4-BE49-F238E27FC236}">
+                <a16:creationId xmlns:a16="http://schemas.microsoft.com/office/drawing/2014/main" id="{AA8D5E01-3896-4BC8-BD09-763BCC19DD77}"/>
+              </a:ext>
+            </a:extLst>
+          </p:cNvPr>
+          <p:cNvSpPr/>
+          <p:nvPr/>
+        </p:nvSpPr>
+        <p:spPr>
+          <a:xfrm>
+            <a:off x="8492376" y="3989280"/>
+            <a:ext cx="357790" cy="343171"/>
+          </a:xfrm>
+          <a:prstGeom prst="rect">
+            <a:avLst/>
+          </a:prstGeom>
+        </p:spPr>
+        <p:txBody>
+          <a:bodyPr wrap="none">
+            <a:spAutoFit/>
+          </a:bodyPr>
+          <a:lstStyle/>
+          <a:p>
+            <a:r>
+              <a:rPr lang="en-US" altLang="zh-TW" sz="1630" dirty="0">
+                <a:latin typeface="Times New Roman" panose="02020603050405020304" pitchFamily="18" charset="0"/>
+                <a:cs typeface="Times New Roman" panose="02020603050405020304" pitchFamily="18" charset="0"/>
+              </a:rPr>
+              <a:t>-1</a:t>
+            </a:r>
+            <a:endParaRPr lang="zh-TW" altLang="en-US" sz="1630" dirty="0">
+              <a:latin typeface="Times New Roman" panose="02020603050405020304" pitchFamily="18" charset="0"/>
+              <a:cs typeface="Times New Roman" panose="02020603050405020304" pitchFamily="18" charset="0"/>
+            </a:endParaRPr>
+          </a:p>
+        </p:txBody>
+      </p:sp>
     </p:spTree>
     <p:extLst>
       <p:ext uri="{BB962C8B-B14F-4D97-AF65-F5344CB8AC3E}">
         <p14:creationId xmlns:p14="http://schemas.microsoft.com/office/powerpoint/2010/main" val="3394290110"/>
+      </p:ext>
+    </p:extLst>
+  </p:cSld>
+  <p:clrMapOvr>
+    <a:masterClrMapping/>
+  </p:clrMapOvr>
+</p:sld>
+</file>
+
+<file path=ppt/slides/slide3.xml><?xml version="1.0" encoding="utf-8"?>
+<p:sld xmlns:a="http://schemas.openxmlformats.org/drawingml/2006/main" xmlns:r="http://schemas.openxmlformats.org/officeDocument/2006/relationships" xmlns:p="http://schemas.openxmlformats.org/presentationml/2006/main" show="0">
+  <p:cSld>
+    <p:spTree>
+      <p:nvGrpSpPr>
+        <p:cNvPr id="1" name=""/>
+        <p:cNvGrpSpPr/>
+        <p:nvPr/>
+      </p:nvGrpSpPr>
+      <p:grpSpPr>
+        <a:xfrm>
+          <a:off x="0" y="0"/>
+          <a:ext cx="0" cy="0"/>
+          <a:chOff x="0" y="0"/>
+          <a:chExt cx="0" cy="0"/>
+        </a:xfrm>
+      </p:grpSpPr>
+      <p:pic>
+        <p:nvPicPr>
+          <p:cNvPr id="36" name="圖片 35">
+            <a:extLst>
+              <a:ext uri="{FF2B5EF4-FFF2-40B4-BE49-F238E27FC236}">
+                <a16:creationId xmlns:a16="http://schemas.microsoft.com/office/drawing/2014/main" id="{BAE9D29A-557F-47E8-B840-9D8A04ABA937}"/>
+              </a:ext>
+            </a:extLst>
+          </p:cNvPr>
+          <p:cNvPicPr>
+            <a:picLocks noChangeAspect="1"/>
+          </p:cNvPicPr>
+          <p:nvPr/>
+        </p:nvPicPr>
+        <p:blipFill rotWithShape="1">
+          <a:blip r:embed="rId2">
+            <a:clrChange>
+              <a:clrFrom>
+                <a:srgbClr val="FFFFFF"/>
+              </a:clrFrom>
+              <a:clrTo>
+                <a:srgbClr val="FFFFFF">
+                  <a:alpha val="0"/>
+                </a:srgbClr>
+              </a:clrTo>
+            </a:clrChange>
+            <a:extLst>
+              <a:ext uri="{28A0092B-C50C-407E-A947-70E740481C1C}">
+                <a14:useLocalDpi xmlns:a14="http://schemas.microsoft.com/office/drawing/2010/main" val="0"/>
+              </a:ext>
+            </a:extLst>
+          </a:blip>
+          <a:srcRect l="17746" r="68310"/>
+          <a:stretch/>
+        </p:blipFill>
+        <p:spPr>
+          <a:xfrm>
+            <a:off x="2756951" y="2768522"/>
+            <a:ext cx="1387365" cy="1658288"/>
+          </a:xfrm>
+          <a:prstGeom prst="rect">
+            <a:avLst/>
+          </a:prstGeom>
+        </p:spPr>
+      </p:pic>
+      <p:pic>
+        <p:nvPicPr>
+          <p:cNvPr id="35" name="圖片 34">
+            <a:extLst>
+              <a:ext uri="{FF2B5EF4-FFF2-40B4-BE49-F238E27FC236}">
+                <a16:creationId xmlns:a16="http://schemas.microsoft.com/office/drawing/2014/main" id="{504F827B-338C-4CBB-B7BD-C1AEC27D17B3}"/>
+              </a:ext>
+            </a:extLst>
+          </p:cNvPr>
+          <p:cNvPicPr>
+            <a:picLocks noChangeAspect="1"/>
+          </p:cNvPicPr>
+          <p:nvPr/>
+        </p:nvPicPr>
+        <p:blipFill rotWithShape="1">
+          <a:blip r:embed="rId3">
+            <a:clrChange>
+              <a:clrFrom>
+                <a:srgbClr val="FFFFFF"/>
+              </a:clrFrom>
+              <a:clrTo>
+                <a:srgbClr val="FFFFFF">
+                  <a:alpha val="0"/>
+                </a:srgbClr>
+              </a:clrTo>
+            </a:clrChange>
+            <a:extLst>
+              <a:ext uri="{28A0092B-C50C-407E-A947-70E740481C1C}">
+                <a14:useLocalDpi xmlns:a14="http://schemas.microsoft.com/office/drawing/2010/main" val="0"/>
+              </a:ext>
+            </a:extLst>
+          </a:blip>
+          <a:srcRect l="17964" r="68104"/>
+          <a:stretch/>
+        </p:blipFill>
+        <p:spPr>
+          <a:xfrm>
+            <a:off x="2762731" y="807050"/>
+            <a:ext cx="1387366" cy="1659600"/>
+          </a:xfrm>
+          <a:prstGeom prst="rect">
+            <a:avLst/>
+          </a:prstGeom>
+        </p:spPr>
+      </p:pic>
+      <p:pic>
+        <p:nvPicPr>
+          <p:cNvPr id="37" name="圖片 36">
+            <a:extLst>
+              <a:ext uri="{FF2B5EF4-FFF2-40B4-BE49-F238E27FC236}">
+                <a16:creationId xmlns:a16="http://schemas.microsoft.com/office/drawing/2014/main" id="{4A546662-043B-46AF-911C-8746A05C7229}"/>
+              </a:ext>
+            </a:extLst>
+          </p:cNvPr>
+          <p:cNvPicPr>
+            <a:picLocks noChangeAspect="1"/>
+          </p:cNvPicPr>
+          <p:nvPr/>
+        </p:nvPicPr>
+        <p:blipFill rotWithShape="1">
+          <a:blip r:embed="rId3">
+            <a:clrChange>
+              <a:clrFrom>
+                <a:srgbClr val="FFFFFF"/>
+              </a:clrFrom>
+              <a:clrTo>
+                <a:srgbClr val="FFFFFF">
+                  <a:alpha val="0"/>
+                </a:srgbClr>
+              </a:clrTo>
+            </a:clrChange>
+            <a:extLst>
+              <a:ext uri="{28A0092B-C50C-407E-A947-70E740481C1C}">
+                <a14:useLocalDpi xmlns:a14="http://schemas.microsoft.com/office/drawing/2010/main" val="0"/>
+              </a:ext>
+            </a:extLst>
+          </a:blip>
+          <a:srcRect l="34534" r="51322"/>
+          <a:stretch/>
+        </p:blipFill>
+        <p:spPr>
+          <a:xfrm>
+            <a:off x="4064876" y="807050"/>
+            <a:ext cx="1408386" cy="1659600"/>
+          </a:xfrm>
+          <a:prstGeom prst="rect">
+            <a:avLst/>
+          </a:prstGeom>
+        </p:spPr>
+      </p:pic>
+      <p:pic>
+        <p:nvPicPr>
+          <p:cNvPr id="150" name="圖片 149">
+            <a:extLst>
+              <a:ext uri="{FF2B5EF4-FFF2-40B4-BE49-F238E27FC236}">
+                <a16:creationId xmlns:a16="http://schemas.microsoft.com/office/drawing/2014/main" id="{437F99CF-EE0E-4119-8643-8B0E99DCD7A8}"/>
+              </a:ext>
+            </a:extLst>
+          </p:cNvPr>
+          <p:cNvPicPr>
+            <a:picLocks noChangeAspect="1"/>
+          </p:cNvPicPr>
+          <p:nvPr/>
+        </p:nvPicPr>
+        <p:blipFill rotWithShape="1">
+          <a:blip r:embed="rId3">
+            <a:clrChange>
+              <a:clrFrom>
+                <a:srgbClr val="FFFFFF"/>
+              </a:clrFrom>
+              <a:clrTo>
+                <a:srgbClr val="FFFFFF">
+                  <a:alpha val="0"/>
+                </a:srgbClr>
+              </a:clrTo>
+            </a:clrChange>
+            <a:extLst>
+              <a:ext uri="{28A0092B-C50C-407E-A947-70E740481C1C}">
+                <a14:useLocalDpi xmlns:a14="http://schemas.microsoft.com/office/drawing/2010/main" val="0"/>
+              </a:ext>
+            </a:extLst>
+          </a:blip>
+          <a:srcRect r="84992"/>
+          <a:stretch/>
+        </p:blipFill>
+        <p:spPr>
+          <a:xfrm>
+            <a:off x="1311826" y="807050"/>
+            <a:ext cx="1494436" cy="1659600"/>
+          </a:xfrm>
+          <a:prstGeom prst="rect">
+            <a:avLst/>
+          </a:prstGeom>
+        </p:spPr>
+      </p:pic>
+      <p:pic>
+        <p:nvPicPr>
+          <p:cNvPr id="151" name="圖片 150">
+            <a:extLst>
+              <a:ext uri="{FF2B5EF4-FFF2-40B4-BE49-F238E27FC236}">
+                <a16:creationId xmlns:a16="http://schemas.microsoft.com/office/drawing/2014/main" id="{CDDCB0AA-F2C9-4DA4-BDE0-378878E44E76}"/>
+              </a:ext>
+            </a:extLst>
+          </p:cNvPr>
+          <p:cNvPicPr>
+            <a:picLocks noChangeAspect="1"/>
+          </p:cNvPicPr>
+          <p:nvPr/>
+        </p:nvPicPr>
+        <p:blipFill rotWithShape="1">
+          <a:blip r:embed="rId2">
+            <a:clrChange>
+              <a:clrFrom>
+                <a:srgbClr val="FFFFFF"/>
+              </a:clrFrom>
+              <a:clrTo>
+                <a:srgbClr val="FFFFFF">
+                  <a:alpha val="0"/>
+                </a:srgbClr>
+              </a:clrTo>
+            </a:clrChange>
+            <a:extLst>
+              <a:ext uri="{28A0092B-C50C-407E-A947-70E740481C1C}">
+                <a14:useLocalDpi xmlns:a14="http://schemas.microsoft.com/office/drawing/2010/main" val="0"/>
+              </a:ext>
+            </a:extLst>
+          </a:blip>
+          <a:srcRect r="85316"/>
+          <a:stretch/>
+        </p:blipFill>
+        <p:spPr>
+          <a:xfrm>
+            <a:off x="1351826" y="2768522"/>
+            <a:ext cx="1461006" cy="1658288"/>
+          </a:xfrm>
+          <a:prstGeom prst="rect">
+            <a:avLst/>
+          </a:prstGeom>
+        </p:spPr>
+      </p:pic>
+      <p:sp>
+        <p:nvSpPr>
+          <p:cNvPr id="153" name="矩形: 圓角 152">
+            <a:extLst>
+              <a:ext uri="{FF2B5EF4-FFF2-40B4-BE49-F238E27FC236}">
+                <a16:creationId xmlns:a16="http://schemas.microsoft.com/office/drawing/2014/main" id="{12F5DFE2-79A5-4BDB-B18F-972FD6B9518F}"/>
+              </a:ext>
+            </a:extLst>
+          </p:cNvPr>
+          <p:cNvSpPr/>
+          <p:nvPr/>
+        </p:nvSpPr>
+        <p:spPr>
+          <a:xfrm>
+            <a:off x="1424763" y="2858022"/>
+            <a:ext cx="6717600" cy="1458000"/>
+          </a:xfrm>
+          <a:prstGeom prst="roundRect">
+            <a:avLst>
+              <a:gd name="adj" fmla="val 6163"/>
+            </a:avLst>
+          </a:prstGeom>
+          <a:noFill/>
+          <a:ln w="9525" cap="flat" cmpd="sng" algn="ctr">
+            <a:solidFill>
+              <a:schemeClr val="accent2"/>
+            </a:solidFill>
+            <a:prstDash val="solid"/>
+            <a:round/>
+            <a:headEnd type="none" w="med" len="med"/>
+            <a:tailEnd type="none" w="med" len="med"/>
+          </a:ln>
+        </p:spPr>
+        <p:style>
+          <a:lnRef idx="0">
+            <a:scrgbClr r="0" g="0" b="0"/>
+          </a:lnRef>
+          <a:fillRef idx="0">
+            <a:scrgbClr r="0" g="0" b="0"/>
+          </a:fillRef>
+          <a:effectRef idx="0">
+            <a:scrgbClr r="0" g="0" b="0"/>
+          </a:effectRef>
+          <a:fontRef idx="minor">
+            <a:schemeClr val="accent2"/>
+          </a:fontRef>
+        </p:style>
+        <p:txBody>
+          <a:bodyPr rot="0" spcFirstLastPara="0" vertOverflow="overflow" horzOverflow="overflow" vert="horz" wrap="square" lIns="91440" tIns="45720" rIns="91440" bIns="45720" numCol="1" spcCol="0" rtlCol="0" fromWordArt="0" anchor="ctr" anchorCtr="0" forceAA="0" compatLnSpc="1">
+            <a:prstTxWarp prst="textNoShape">
+              <a:avLst/>
+            </a:prstTxWarp>
+            <a:noAutofit/>
+          </a:bodyPr>
+          <a:lstStyle/>
+          <a:p>
+            <a:pPr algn="ctr"/>
+            <a:endParaRPr lang="zh-TW" altLang="en-US" sz="1900" dirty="0">
+              <a:latin typeface="Times New Roman" panose="02020603050405020304" pitchFamily="18" charset="0"/>
+              <a:cs typeface="Times New Roman" panose="02020603050405020304" pitchFamily="18" charset="0"/>
+            </a:endParaRPr>
+          </a:p>
+        </p:txBody>
+      </p:sp>
+      <p:sp>
+        <p:nvSpPr>
+          <p:cNvPr id="154" name="矩形: 圓角 153">
+            <a:extLst>
+              <a:ext uri="{FF2B5EF4-FFF2-40B4-BE49-F238E27FC236}">
+                <a16:creationId xmlns:a16="http://schemas.microsoft.com/office/drawing/2014/main" id="{780B5495-D514-40F7-BAF8-40E42BE368D2}"/>
+              </a:ext>
+            </a:extLst>
+          </p:cNvPr>
+          <p:cNvSpPr/>
+          <p:nvPr/>
+        </p:nvSpPr>
+        <p:spPr>
+          <a:xfrm>
+            <a:off x="1424763" y="911563"/>
+            <a:ext cx="6717600" cy="1458000"/>
+          </a:xfrm>
+          <a:prstGeom prst="roundRect">
+            <a:avLst>
+              <a:gd name="adj" fmla="val 6163"/>
+            </a:avLst>
+          </a:prstGeom>
+          <a:noFill/>
+          <a:ln w="9525" cap="flat" cmpd="sng" algn="ctr">
+            <a:solidFill>
+              <a:schemeClr val="accent1"/>
+            </a:solidFill>
+            <a:prstDash val="solid"/>
+            <a:round/>
+            <a:headEnd type="none" w="med" len="med"/>
+            <a:tailEnd type="none" w="med" len="med"/>
+          </a:ln>
+        </p:spPr>
+        <p:style>
+          <a:lnRef idx="0">
+            <a:scrgbClr r="0" g="0" b="0"/>
+          </a:lnRef>
+          <a:fillRef idx="0">
+            <a:scrgbClr r="0" g="0" b="0"/>
+          </a:fillRef>
+          <a:effectRef idx="0">
+            <a:scrgbClr r="0" g="0" b="0"/>
+          </a:effectRef>
+          <a:fontRef idx="minor">
+            <a:schemeClr val="accent1"/>
+          </a:fontRef>
+        </p:style>
+        <p:txBody>
+          <a:bodyPr rot="0" spcFirstLastPara="0" vertOverflow="overflow" horzOverflow="overflow" vert="horz" wrap="square" lIns="91440" tIns="45720" rIns="91440" bIns="45720" numCol="1" spcCol="0" rtlCol="0" fromWordArt="0" anchor="ctr" anchorCtr="0" forceAA="0" compatLnSpc="1">
+            <a:prstTxWarp prst="textNoShape">
+              <a:avLst/>
+            </a:prstTxWarp>
+            <a:noAutofit/>
+          </a:bodyPr>
+          <a:lstStyle/>
+          <a:p>
+            <a:pPr algn="ctr"/>
+            <a:endParaRPr lang="zh-TW" altLang="en-US" sz="1900" dirty="0">
+              <a:latin typeface="Times New Roman" panose="02020603050405020304" pitchFamily="18" charset="0"/>
+              <a:cs typeface="Times New Roman" panose="02020603050405020304" pitchFamily="18" charset="0"/>
+            </a:endParaRPr>
+          </a:p>
+        </p:txBody>
+      </p:sp>
+      <mc:AlternateContent xmlns:mc="http://schemas.openxmlformats.org/markup-compatibility/2006" xmlns:a14="http://schemas.microsoft.com/office/drawing/2010/main">
+        <mc:Choice Requires="a14">
+          <p:sp>
+            <p:nvSpPr>
+              <p:cNvPr id="155" name="矩形 154">
+                <a:extLst>
+                  <a:ext uri="{FF2B5EF4-FFF2-40B4-BE49-F238E27FC236}">
+                    <a16:creationId xmlns:a16="http://schemas.microsoft.com/office/drawing/2014/main" id="{26AAC696-0C83-43C2-A7D7-AE30F4AF9AD2}"/>
+                  </a:ext>
+                </a:extLst>
+              </p:cNvPr>
+              <p:cNvSpPr/>
+              <p:nvPr/>
+            </p:nvSpPr>
+            <p:spPr>
+              <a:xfrm>
+                <a:off x="1565699" y="1915729"/>
+                <a:ext cx="783035" cy="343171"/>
+              </a:xfrm>
+              <a:prstGeom prst="rect">
+                <a:avLst/>
+              </a:prstGeom>
+            </p:spPr>
+            <p:txBody>
+              <a:bodyPr wrap="none">
+                <a:spAutoFit/>
+              </a:bodyPr>
+              <a:lstStyle/>
+              <a:p>
+                <a:pPr/>
+                <a14:m>
+                  <m:oMathPara xmlns:m="http://schemas.openxmlformats.org/officeDocument/2006/math">
+                    <m:oMathParaPr>
+                      <m:jc m:val="centerGroup"/>
+                    </m:oMathParaPr>
+                    <m:oMath xmlns:m="http://schemas.openxmlformats.org/officeDocument/2006/math">
+                      <m:r>
+                        <a:rPr lang="en-US" altLang="zh-TW" sz="1630" i="1">
+                          <a:latin typeface="Cambria Math" panose="02040503050406030204" pitchFamily="18" charset="0"/>
+                        </a:rPr>
+                        <m:t>0.1 </m:t>
+                      </m:r>
+                      <m:sSub>
+                        <m:sSubPr>
+                          <m:ctrlPr>
+                            <a:rPr lang="en-US" altLang="zh-TW" sz="1630" i="1">
+                              <a:latin typeface="Cambria Math" panose="02040503050406030204" pitchFamily="18" charset="0"/>
+                            </a:rPr>
+                          </m:ctrlPr>
+                        </m:sSubPr>
+                        <m:e>
+                          <m:r>
+                            <a:rPr lang="en-US" altLang="zh-TW" sz="1630" i="1">
+                              <a:latin typeface="Cambria Math" panose="02040503050406030204" pitchFamily="18" charset="0"/>
+                            </a:rPr>
+                            <m:t>𝑄</m:t>
+                          </m:r>
+                        </m:e>
+                        <m:sub>
+                          <m:r>
+                            <a:rPr lang="en-US" altLang="zh-TW" sz="1630" i="1">
+                              <a:latin typeface="Cambria Math" panose="02040503050406030204" pitchFamily="18" charset="0"/>
+                            </a:rPr>
+                            <m:t>𝑐</m:t>
+                          </m:r>
+                        </m:sub>
+                      </m:sSub>
+                    </m:oMath>
+                  </m:oMathPara>
+                </a14:m>
+                <a:endParaRPr lang="zh-TW" altLang="en-US" sz="1630" dirty="0">
+                  <a:latin typeface="Times New Roman" panose="02020603050405020304" pitchFamily="18" charset="0"/>
+                  <a:cs typeface="Times New Roman" panose="02020603050405020304" pitchFamily="18" charset="0"/>
+                </a:endParaRPr>
+              </a:p>
+            </p:txBody>
+          </p:sp>
+        </mc:Choice>
+        <mc:Fallback xmlns="">
+          <p:sp>
+            <p:nvSpPr>
+              <p:cNvPr id="155" name="矩形 154">
+                <a:extLst>
+                  <a:ext uri="{FF2B5EF4-FFF2-40B4-BE49-F238E27FC236}">
+                    <a16:creationId xmlns:a16="http://schemas.microsoft.com/office/drawing/2014/main" id="{26AAC696-0C83-43C2-A7D7-AE30F4AF9AD2}"/>
+                  </a:ext>
+                </a:extLst>
+              </p:cNvPr>
+              <p:cNvSpPr>
+                <a:spLocks noRot="1" noChangeAspect="1" noMove="1" noResize="1" noEditPoints="1" noAdjustHandles="1" noChangeArrowheads="1" noChangeShapeType="1" noTextEdit="1"/>
+              </p:cNvSpPr>
+              <p:nvPr/>
+            </p:nvSpPr>
+            <p:spPr>
+              <a:xfrm>
+                <a:off x="1565699" y="1915729"/>
+                <a:ext cx="783035" cy="343171"/>
+              </a:xfrm>
+              <a:prstGeom prst="rect">
+                <a:avLst/>
+              </a:prstGeom>
+              <a:blipFill>
+                <a:blip r:embed="rId4"/>
+                <a:stretch>
+                  <a:fillRect b="-8772"/>
+                </a:stretch>
+              </a:blipFill>
+            </p:spPr>
+            <p:txBody>
+              <a:bodyPr/>
+              <a:lstStyle/>
+              <a:p>
+                <a:r>
+                  <a:rPr lang="zh-TW" altLang="en-US">
+                    <a:noFill/>
+                  </a:rPr>
+                  <a:t> </a:t>
+                </a:r>
+              </a:p>
+            </p:txBody>
+          </p:sp>
+        </mc:Fallback>
+      </mc:AlternateContent>
+      <mc:AlternateContent xmlns:mc="http://schemas.openxmlformats.org/markup-compatibility/2006" xmlns:a14="http://schemas.microsoft.com/office/drawing/2010/main">
+        <mc:Choice Requires="a14">
+          <p:sp>
+            <p:nvSpPr>
+              <p:cNvPr id="161" name="矩形 160">
+                <a:extLst>
+                  <a:ext uri="{FF2B5EF4-FFF2-40B4-BE49-F238E27FC236}">
+                    <a16:creationId xmlns:a16="http://schemas.microsoft.com/office/drawing/2014/main" id="{FBD4CD20-BAE0-4BCD-AEC0-C2E3F9C8E678}"/>
+                  </a:ext>
+                </a:extLst>
+              </p:cNvPr>
+              <p:cNvSpPr/>
+              <p:nvPr/>
+            </p:nvSpPr>
+            <p:spPr>
+              <a:xfrm>
+                <a:off x="1588559" y="3897301"/>
+                <a:ext cx="783035" cy="343171"/>
+              </a:xfrm>
+              <a:prstGeom prst="rect">
+                <a:avLst/>
+              </a:prstGeom>
+            </p:spPr>
+            <p:txBody>
+              <a:bodyPr wrap="none">
+                <a:spAutoFit/>
+              </a:bodyPr>
+              <a:lstStyle/>
+              <a:p>
+                <a:pPr/>
+                <a14:m>
+                  <m:oMathPara xmlns:m="http://schemas.openxmlformats.org/officeDocument/2006/math">
+                    <m:oMathParaPr>
+                      <m:jc m:val="centerGroup"/>
+                    </m:oMathParaPr>
+                    <m:oMath xmlns:m="http://schemas.openxmlformats.org/officeDocument/2006/math">
+                      <m:r>
+                        <a:rPr lang="en-US" altLang="zh-TW" sz="1630" i="1">
+                          <a:latin typeface="Cambria Math" panose="02040503050406030204" pitchFamily="18" charset="0"/>
+                        </a:rPr>
+                        <m:t>0.1 </m:t>
+                      </m:r>
+                      <m:sSub>
+                        <m:sSubPr>
+                          <m:ctrlPr>
+                            <a:rPr lang="en-US" altLang="zh-TW" sz="1630" i="1">
+                              <a:latin typeface="Cambria Math" panose="02040503050406030204" pitchFamily="18" charset="0"/>
+                            </a:rPr>
+                          </m:ctrlPr>
+                        </m:sSubPr>
+                        <m:e>
+                          <m:r>
+                            <a:rPr lang="en-US" altLang="zh-TW" sz="1630" i="1">
+                              <a:latin typeface="Cambria Math" panose="02040503050406030204" pitchFamily="18" charset="0"/>
+                            </a:rPr>
+                            <m:t>𝑄</m:t>
+                          </m:r>
+                        </m:e>
+                        <m:sub>
+                          <m:r>
+                            <a:rPr lang="en-US" altLang="zh-TW" sz="1630" i="1">
+                              <a:latin typeface="Cambria Math" panose="02040503050406030204" pitchFamily="18" charset="0"/>
+                            </a:rPr>
+                            <m:t>𝑐</m:t>
+                          </m:r>
+                        </m:sub>
+                      </m:sSub>
+                    </m:oMath>
+                  </m:oMathPara>
+                </a14:m>
+                <a:endParaRPr lang="zh-TW" altLang="en-US" sz="1630" dirty="0">
+                  <a:latin typeface="Times New Roman" panose="02020603050405020304" pitchFamily="18" charset="0"/>
+                  <a:cs typeface="Times New Roman" panose="02020603050405020304" pitchFamily="18" charset="0"/>
+                </a:endParaRPr>
+              </a:p>
+            </p:txBody>
+          </p:sp>
+        </mc:Choice>
+        <mc:Fallback xmlns="">
+          <p:sp>
+            <p:nvSpPr>
+              <p:cNvPr id="161" name="矩形 160">
+                <a:extLst>
+                  <a:ext uri="{FF2B5EF4-FFF2-40B4-BE49-F238E27FC236}">
+                    <a16:creationId xmlns:a16="http://schemas.microsoft.com/office/drawing/2014/main" id="{FBD4CD20-BAE0-4BCD-AEC0-C2E3F9C8E678}"/>
+                  </a:ext>
+                </a:extLst>
+              </p:cNvPr>
+              <p:cNvSpPr>
+                <a:spLocks noRot="1" noChangeAspect="1" noMove="1" noResize="1" noEditPoints="1" noAdjustHandles="1" noChangeArrowheads="1" noChangeShapeType="1" noTextEdit="1"/>
+              </p:cNvSpPr>
+              <p:nvPr/>
+            </p:nvSpPr>
+            <p:spPr>
+              <a:xfrm>
+                <a:off x="1588559" y="3897301"/>
+                <a:ext cx="783035" cy="343171"/>
+              </a:xfrm>
+              <a:prstGeom prst="rect">
+                <a:avLst/>
+              </a:prstGeom>
+              <a:blipFill>
+                <a:blip r:embed="rId11"/>
+                <a:stretch>
+                  <a:fillRect b="-8772"/>
+                </a:stretch>
+              </a:blipFill>
+            </p:spPr>
+            <p:txBody>
+              <a:bodyPr/>
+              <a:lstStyle/>
+              <a:p>
+                <a:r>
+                  <a:rPr lang="zh-TW" altLang="en-US">
+                    <a:noFill/>
+                  </a:rPr>
+                  <a:t> </a:t>
+                </a:r>
+              </a:p>
+            </p:txBody>
+          </p:sp>
+        </mc:Fallback>
+      </mc:AlternateContent>
+      <p:sp>
+        <p:nvSpPr>
+          <p:cNvPr id="167" name="矩形 166">
+            <a:extLst>
+              <a:ext uri="{FF2B5EF4-FFF2-40B4-BE49-F238E27FC236}">
+                <a16:creationId xmlns:a16="http://schemas.microsoft.com/office/drawing/2014/main" id="{FD935054-9BC7-414F-889D-6ED5E09AD8B1}"/>
+              </a:ext>
+            </a:extLst>
+          </p:cNvPr>
+          <p:cNvSpPr/>
+          <p:nvPr/>
+        </p:nvSpPr>
+        <p:spPr>
+          <a:xfrm>
+            <a:off x="8160260" y="2194314"/>
+            <a:ext cx="487634" cy="343171"/>
+          </a:xfrm>
+          <a:prstGeom prst="rect">
+            <a:avLst/>
+          </a:prstGeom>
+        </p:spPr>
+        <p:txBody>
+          <a:bodyPr wrap="none">
+            <a:spAutoFit/>
+          </a:bodyPr>
+          <a:lstStyle/>
+          <a:p>
+            <a:r>
+              <a:rPr lang="en-US" altLang="zh-TW" sz="1630" dirty="0">
+                <a:latin typeface="Times New Roman" panose="02020603050405020304" pitchFamily="18" charset="0"/>
+                <a:cs typeface="Times New Roman" panose="02020603050405020304" pitchFamily="18" charset="0"/>
+              </a:rPr>
+              <a:t>a.u.</a:t>
+            </a:r>
+            <a:endParaRPr lang="zh-TW" altLang="en-US" sz="1630" dirty="0">
+              <a:latin typeface="Times New Roman" panose="02020603050405020304" pitchFamily="18" charset="0"/>
+              <a:cs typeface="Times New Roman" panose="02020603050405020304" pitchFamily="18" charset="0"/>
+            </a:endParaRPr>
+          </a:p>
+        </p:txBody>
+      </p:sp>
+      <p:sp>
+        <p:nvSpPr>
+          <p:cNvPr id="168" name="矩形 167">
+            <a:extLst>
+              <a:ext uri="{FF2B5EF4-FFF2-40B4-BE49-F238E27FC236}">
+                <a16:creationId xmlns:a16="http://schemas.microsoft.com/office/drawing/2014/main" id="{17F6D338-64FC-411F-8551-7B4F1B199F22}"/>
+              </a:ext>
+            </a:extLst>
+          </p:cNvPr>
+          <p:cNvSpPr/>
+          <p:nvPr/>
+        </p:nvSpPr>
+        <p:spPr>
+          <a:xfrm>
+            <a:off x="8135689" y="4076479"/>
+            <a:ext cx="487634" cy="343171"/>
+          </a:xfrm>
+          <a:prstGeom prst="rect">
+            <a:avLst/>
+          </a:prstGeom>
+        </p:spPr>
+        <p:txBody>
+          <a:bodyPr wrap="none">
+            <a:spAutoFit/>
+          </a:bodyPr>
+          <a:lstStyle/>
+          <a:p>
+            <a:r>
+              <a:rPr lang="en-US" altLang="zh-TW" sz="1630" dirty="0">
+                <a:latin typeface="Times New Roman" panose="02020603050405020304" pitchFamily="18" charset="0"/>
+                <a:cs typeface="Times New Roman" panose="02020603050405020304" pitchFamily="18" charset="0"/>
+              </a:rPr>
+              <a:t>a.u.</a:t>
+            </a:r>
+            <a:endParaRPr lang="zh-TW" altLang="en-US" sz="1630" dirty="0">
+              <a:latin typeface="Times New Roman" panose="02020603050405020304" pitchFamily="18" charset="0"/>
+              <a:cs typeface="Times New Roman" panose="02020603050405020304" pitchFamily="18" charset="0"/>
+            </a:endParaRPr>
+          </a:p>
+        </p:txBody>
+      </p:sp>
+      <p:grpSp>
+        <p:nvGrpSpPr>
+          <p:cNvPr id="169" name="群組 168">
+            <a:extLst>
+              <a:ext uri="{FF2B5EF4-FFF2-40B4-BE49-F238E27FC236}">
+                <a16:creationId xmlns:a16="http://schemas.microsoft.com/office/drawing/2014/main" id="{64D0A34D-253B-4A9C-98CE-AB61E23D6615}"/>
+              </a:ext>
+            </a:extLst>
+          </p:cNvPr>
+          <p:cNvGrpSpPr/>
+          <p:nvPr/>
+        </p:nvGrpSpPr>
+        <p:grpSpPr>
+          <a:xfrm>
+            <a:off x="1872502" y="1136367"/>
+            <a:ext cx="703953" cy="629156"/>
+            <a:chOff x="-1051588" y="926660"/>
+            <a:chExt cx="645259" cy="576699"/>
+          </a:xfrm>
+        </p:grpSpPr>
+        <mc:AlternateContent xmlns:mc="http://schemas.openxmlformats.org/markup-compatibility/2006" xmlns:a14="http://schemas.microsoft.com/office/drawing/2010/main">
+          <mc:Choice Requires="a14">
+            <p:sp>
+              <p:nvSpPr>
+                <p:cNvPr id="170" name="文字方塊 169">
+                  <a:extLst>
+                    <a:ext uri="{FF2B5EF4-FFF2-40B4-BE49-F238E27FC236}">
+                      <a16:creationId xmlns:a16="http://schemas.microsoft.com/office/drawing/2014/main" id="{0C1F89D7-61E2-4508-9AE9-282DD4977A7C}"/>
+                    </a:ext>
+                  </a:extLst>
+                </p:cNvPr>
+                <p:cNvSpPr txBox="1"/>
+                <p:nvPr/>
+              </p:nvSpPr>
+              <p:spPr>
+                <a:xfrm>
+                  <a:off x="-1051588" y="926660"/>
+                  <a:ext cx="323387" cy="335658"/>
+                </a:xfrm>
+                <a:prstGeom prst="rect">
+                  <a:avLst/>
+                </a:prstGeom>
+                <a:noFill/>
+              </p:spPr>
+              <p:txBody>
+                <a:bodyPr wrap="square" rtlCol="0">
+                  <a:spAutoFit/>
+                </a:bodyPr>
+                <a:lstStyle/>
+                <a:p>
+                  <a:pPr/>
+                  <a14:m>
+                    <m:oMathPara xmlns:m="http://schemas.openxmlformats.org/officeDocument/2006/math">
+                      <m:oMathParaPr>
+                        <m:jc m:val="centerGroup"/>
+                      </m:oMathParaPr>
+                      <m:oMath xmlns:m="http://schemas.openxmlformats.org/officeDocument/2006/math">
+                        <m:sSub>
+                          <m:sSubPr>
+                            <m:ctrlPr>
+                              <a:rPr lang="en-US" altLang="zh-TW" sz="1630" b="1" i="1">
+                                <a:latin typeface="Cambria Math" panose="02040503050406030204" pitchFamily="18" charset="0"/>
+                              </a:rPr>
+                            </m:ctrlPr>
+                          </m:sSubPr>
+                          <m:e>
+                            <m:r>
+                              <a:rPr lang="en-US" altLang="zh-TW" sz="1630" b="1" i="1">
+                                <a:latin typeface="Cambria Math" panose="02040503050406030204" pitchFamily="18" charset="0"/>
+                              </a:rPr>
+                              <m:t>𝒒</m:t>
+                            </m:r>
+                          </m:e>
+                          <m:sub>
+                            <m:r>
+                              <a:rPr lang="en-US" altLang="zh-TW" sz="1630" b="1" i="1">
+                                <a:latin typeface="Cambria Math" panose="02040503050406030204" pitchFamily="18" charset="0"/>
+                              </a:rPr>
+                              <m:t>𝒚</m:t>
+                            </m:r>
+                          </m:sub>
+                        </m:sSub>
+                      </m:oMath>
+                    </m:oMathPara>
+                  </a14:m>
+                  <a:endParaRPr lang="en-US" altLang="zh-TW" sz="1630" dirty="0">
+                    <a:latin typeface="Times New Roman" panose="02020603050405020304" pitchFamily="18" charset="0"/>
+                    <a:cs typeface="Times New Roman" panose="02020603050405020304" pitchFamily="18" charset="0"/>
+                  </a:endParaRPr>
+                </a:p>
+              </p:txBody>
+            </p:sp>
+          </mc:Choice>
+          <mc:Fallback xmlns="">
+            <p:sp>
+              <p:nvSpPr>
+                <p:cNvPr id="80" name="文字方塊 79">
+                  <a:extLst>
+                    <a:ext uri="{FF2B5EF4-FFF2-40B4-BE49-F238E27FC236}">
+                      <a16:creationId xmlns:a16="http://schemas.microsoft.com/office/drawing/2014/main" id="{0A2654E9-3006-4B11-B911-23ACB1C2DDC4}"/>
+                    </a:ext>
+                  </a:extLst>
+                </p:cNvPr>
+                <p:cNvSpPr txBox="1">
+                  <a:spLocks noRot="1" noChangeAspect="1" noMove="1" noResize="1" noEditPoints="1" noAdjustHandles="1" noChangeArrowheads="1" noChangeShapeType="1" noTextEdit="1"/>
+                </p:cNvSpPr>
+                <p:nvPr/>
+              </p:nvSpPr>
+              <p:spPr>
+                <a:xfrm>
+                  <a:off x="-1051588" y="926660"/>
+                  <a:ext cx="323387" cy="335658"/>
+                </a:xfrm>
+                <a:prstGeom prst="rect">
+                  <a:avLst/>
+                </a:prstGeom>
+                <a:blipFill>
+                  <a:blip r:embed="rId19"/>
+                  <a:stretch>
+                    <a:fillRect r="-3448" b="-1667"/>
+                  </a:stretch>
+                </a:blipFill>
+              </p:spPr>
+              <p:txBody>
+                <a:bodyPr/>
+                <a:lstStyle/>
+                <a:p>
+                  <a:r>
+                    <a:rPr lang="zh-TW" altLang="en-US">
+                      <a:noFill/>
+                    </a:rPr>
+                    <a:t> </a:t>
+                  </a:r>
+                </a:p>
+              </p:txBody>
+            </p:sp>
+          </mc:Fallback>
+        </mc:AlternateContent>
+        <mc:AlternateContent xmlns:mc="http://schemas.openxmlformats.org/markup-compatibility/2006" xmlns:a14="http://schemas.microsoft.com/office/drawing/2010/main">
+          <mc:Choice Requires="a14">
+            <p:sp>
+              <p:nvSpPr>
+                <p:cNvPr id="171" name="文字方塊 170">
+                  <a:extLst>
+                    <a:ext uri="{FF2B5EF4-FFF2-40B4-BE49-F238E27FC236}">
+                      <a16:creationId xmlns:a16="http://schemas.microsoft.com/office/drawing/2014/main" id="{18D72727-38CD-47C1-B52D-662A4B2FEBF9}"/>
+                    </a:ext>
+                  </a:extLst>
+                </p:cNvPr>
+                <p:cNvSpPr txBox="1"/>
+                <p:nvPr/>
+              </p:nvSpPr>
+              <p:spPr>
+                <a:xfrm>
+                  <a:off x="-813248" y="1188801"/>
+                  <a:ext cx="406919" cy="314558"/>
+                </a:xfrm>
+                <a:prstGeom prst="rect">
+                  <a:avLst/>
+                </a:prstGeom>
+                <a:noFill/>
+              </p:spPr>
+              <p:txBody>
+                <a:bodyPr wrap="square" rtlCol="0">
+                  <a:spAutoFit/>
+                </a:bodyPr>
+                <a:lstStyle/>
+                <a:p>
+                  <a:pPr/>
+                  <a14:m>
+                    <m:oMathPara xmlns:m="http://schemas.openxmlformats.org/officeDocument/2006/math">
+                      <m:oMathParaPr>
+                        <m:jc m:val="centerGroup"/>
+                      </m:oMathParaPr>
+                      <m:oMath xmlns:m="http://schemas.openxmlformats.org/officeDocument/2006/math">
+                        <m:sSub>
+                          <m:sSubPr>
+                            <m:ctrlPr>
+                              <a:rPr lang="en-US" altLang="zh-TW" sz="1630" b="1" i="1">
+                                <a:latin typeface="Cambria Math" panose="02040503050406030204" pitchFamily="18" charset="0"/>
+                              </a:rPr>
+                            </m:ctrlPr>
+                          </m:sSubPr>
+                          <m:e>
+                            <m:r>
+                              <a:rPr lang="en-US" altLang="zh-TW" sz="1630" b="1" i="1">
+                                <a:latin typeface="Cambria Math" panose="02040503050406030204" pitchFamily="18" charset="0"/>
+                              </a:rPr>
+                              <m:t>𝒒</m:t>
+                            </m:r>
+                          </m:e>
+                          <m:sub>
+                            <m:r>
+                              <a:rPr lang="en-US" altLang="zh-TW" sz="1630" b="1" i="1">
+                                <a:latin typeface="Cambria Math" panose="02040503050406030204" pitchFamily="18" charset="0"/>
+                              </a:rPr>
+                              <m:t>𝒙</m:t>
+                            </m:r>
+                          </m:sub>
+                        </m:sSub>
+                      </m:oMath>
+                    </m:oMathPara>
+                  </a14:m>
+                  <a:endParaRPr lang="en-US" altLang="zh-TW" sz="1630" dirty="0">
+                    <a:latin typeface="Times New Roman" panose="02020603050405020304" pitchFamily="18" charset="0"/>
+                    <a:cs typeface="Times New Roman" panose="02020603050405020304" pitchFamily="18" charset="0"/>
+                  </a:endParaRPr>
+                </a:p>
+              </p:txBody>
+            </p:sp>
+          </mc:Choice>
+          <mc:Fallback xmlns="">
+            <p:sp>
+              <p:nvSpPr>
+                <p:cNvPr id="81" name="文字方塊 80">
+                  <a:extLst>
+                    <a:ext uri="{FF2B5EF4-FFF2-40B4-BE49-F238E27FC236}">
+                      <a16:creationId xmlns:a16="http://schemas.microsoft.com/office/drawing/2014/main" id="{47E81467-D25E-4BB7-94DE-E307D45DD949}"/>
+                    </a:ext>
+                  </a:extLst>
+                </p:cNvPr>
+                <p:cNvSpPr txBox="1">
+                  <a:spLocks noRot="1" noChangeAspect="1" noMove="1" noResize="1" noEditPoints="1" noAdjustHandles="1" noChangeArrowheads="1" noChangeShapeType="1" noTextEdit="1"/>
+                </p:cNvSpPr>
+                <p:nvPr/>
+              </p:nvSpPr>
+              <p:spPr>
+                <a:xfrm>
+                  <a:off x="-813248" y="1188801"/>
+                  <a:ext cx="406919" cy="314558"/>
+                </a:xfrm>
+                <a:prstGeom prst="rect">
+                  <a:avLst/>
+                </a:prstGeom>
+                <a:blipFill>
+                  <a:blip r:embed="rId20"/>
+                  <a:stretch>
+                    <a:fillRect b="-5263"/>
+                  </a:stretch>
+                </a:blipFill>
+              </p:spPr>
+              <p:txBody>
+                <a:bodyPr/>
+                <a:lstStyle/>
+                <a:p>
+                  <a:r>
+                    <a:rPr lang="zh-TW" altLang="en-US">
+                      <a:noFill/>
+                    </a:rPr>
+                    <a:t> </a:t>
+                  </a:r>
+                </a:p>
+              </p:txBody>
+            </p:sp>
+          </mc:Fallback>
+        </mc:AlternateContent>
+        <p:sp>
+          <p:nvSpPr>
+            <p:cNvPr id="172" name="箭號: 向右 171">
+              <a:extLst>
+                <a:ext uri="{FF2B5EF4-FFF2-40B4-BE49-F238E27FC236}">
+                  <a16:creationId xmlns:a16="http://schemas.microsoft.com/office/drawing/2014/main" id="{49CE44A5-47F8-4FE1-B483-1DC755D3C588}"/>
+                </a:ext>
+              </a:extLst>
+            </p:cNvPr>
+            <p:cNvSpPr/>
+            <p:nvPr/>
+          </p:nvSpPr>
+          <p:spPr>
+            <a:xfrm>
+              <a:off x="-837092" y="1356364"/>
+              <a:ext cx="92654" cy="27541"/>
+            </a:xfrm>
+            <a:prstGeom prst="rightArrow">
+              <a:avLst>
+                <a:gd name="adj1" fmla="val 50000"/>
+                <a:gd name="adj2" fmla="val 99023"/>
+              </a:avLst>
+            </a:prstGeom>
+            <a:solidFill>
+              <a:schemeClr val="tx1"/>
+            </a:solidFill>
+            <a:ln>
+              <a:solidFill>
+                <a:schemeClr val="tx1"/>
+              </a:solidFill>
+            </a:ln>
+          </p:spPr>
+          <p:style>
+            <a:lnRef idx="2">
+              <a:schemeClr val="dk1">
+                <a:shade val="50000"/>
+              </a:schemeClr>
+            </a:lnRef>
+            <a:fillRef idx="1">
+              <a:schemeClr val="dk1"/>
+            </a:fillRef>
+            <a:effectRef idx="0">
+              <a:schemeClr val="dk1"/>
+            </a:effectRef>
+            <a:fontRef idx="minor">
+              <a:schemeClr val="lt1"/>
+            </a:fontRef>
+          </p:style>
+          <p:txBody>
+            <a:bodyPr rtlCol="0" anchor="ctr"/>
+            <a:lstStyle/>
+            <a:p>
+              <a:pPr algn="ctr"/>
+              <a:endParaRPr lang="zh-TW" altLang="en-US" sz="1630">
+                <a:solidFill>
+                  <a:schemeClr val="tx1"/>
+                </a:solidFill>
+                <a:latin typeface="Times New Roman" panose="02020603050405020304" pitchFamily="18" charset="0"/>
+                <a:cs typeface="Times New Roman" panose="02020603050405020304" pitchFamily="18" charset="0"/>
+              </a:endParaRPr>
+            </a:p>
+          </p:txBody>
+        </p:sp>
+        <p:sp>
+          <p:nvSpPr>
+            <p:cNvPr id="173" name="箭號: 向右 172">
+              <a:extLst>
+                <a:ext uri="{FF2B5EF4-FFF2-40B4-BE49-F238E27FC236}">
+                  <a16:creationId xmlns:a16="http://schemas.microsoft.com/office/drawing/2014/main" id="{8E1ED404-686A-4B30-8BF5-7A5FA882C890}"/>
+                </a:ext>
+              </a:extLst>
+            </p:cNvPr>
+            <p:cNvSpPr/>
+            <p:nvPr/>
+          </p:nvSpPr>
+          <p:spPr>
+            <a:xfrm rot="16200000">
+              <a:off x="-877012" y="1316853"/>
+              <a:ext cx="91764" cy="27808"/>
+            </a:xfrm>
+            <a:prstGeom prst="rightArrow">
+              <a:avLst>
+                <a:gd name="adj1" fmla="val 50000"/>
+                <a:gd name="adj2" fmla="val 99023"/>
+              </a:avLst>
+            </a:prstGeom>
+            <a:solidFill>
+              <a:schemeClr val="tx1"/>
+            </a:solidFill>
+            <a:ln>
+              <a:solidFill>
+                <a:schemeClr val="tx1"/>
+              </a:solidFill>
+            </a:ln>
+          </p:spPr>
+          <p:style>
+            <a:lnRef idx="2">
+              <a:schemeClr val="dk1">
+                <a:shade val="50000"/>
+              </a:schemeClr>
+            </a:lnRef>
+            <a:fillRef idx="1">
+              <a:schemeClr val="dk1"/>
+            </a:fillRef>
+            <a:effectRef idx="0">
+              <a:schemeClr val="dk1"/>
+            </a:effectRef>
+            <a:fontRef idx="minor">
+              <a:schemeClr val="lt1"/>
+            </a:fontRef>
+          </p:style>
+          <p:txBody>
+            <a:bodyPr rtlCol="0" anchor="ctr"/>
+            <a:lstStyle/>
+            <a:p>
+              <a:pPr algn="ctr"/>
+              <a:endParaRPr lang="zh-TW" altLang="en-US" sz="1630" dirty="0">
+                <a:solidFill>
+                  <a:schemeClr val="tx1"/>
+                </a:solidFill>
+                <a:latin typeface="Times New Roman" panose="02020603050405020304" pitchFamily="18" charset="0"/>
+                <a:cs typeface="Times New Roman" panose="02020603050405020304" pitchFamily="18" charset="0"/>
+              </a:endParaRPr>
+            </a:p>
+          </p:txBody>
+        </p:sp>
+      </p:grpSp>
+      <p:grpSp>
+        <p:nvGrpSpPr>
+          <p:cNvPr id="174" name="群組 173">
+            <a:extLst>
+              <a:ext uri="{FF2B5EF4-FFF2-40B4-BE49-F238E27FC236}">
+                <a16:creationId xmlns:a16="http://schemas.microsoft.com/office/drawing/2014/main" id="{84810C9E-44C0-4E0E-99E1-37B7522CCBDE}"/>
+              </a:ext>
+            </a:extLst>
+          </p:cNvPr>
+          <p:cNvGrpSpPr/>
+          <p:nvPr/>
+        </p:nvGrpSpPr>
+        <p:grpSpPr>
+          <a:xfrm>
+            <a:off x="1897672" y="3117080"/>
+            <a:ext cx="688366" cy="625691"/>
+            <a:chOff x="-1026188" y="931423"/>
+            <a:chExt cx="630972" cy="573523"/>
+          </a:xfrm>
+        </p:grpSpPr>
+        <mc:AlternateContent xmlns:mc="http://schemas.openxmlformats.org/markup-compatibility/2006" xmlns:a14="http://schemas.microsoft.com/office/drawing/2010/main">
+          <mc:Choice Requires="a14">
+            <p:sp>
+              <p:nvSpPr>
+                <p:cNvPr id="175" name="文字方塊 174">
+                  <a:extLst>
+                    <a:ext uri="{FF2B5EF4-FFF2-40B4-BE49-F238E27FC236}">
+                      <a16:creationId xmlns:a16="http://schemas.microsoft.com/office/drawing/2014/main" id="{1A2DDC95-5BE7-4916-B4B1-E505B5E95F8F}"/>
+                    </a:ext>
+                  </a:extLst>
+                </p:cNvPr>
+                <p:cNvSpPr txBox="1"/>
+                <p:nvPr/>
+              </p:nvSpPr>
+              <p:spPr>
+                <a:xfrm>
+                  <a:off x="-1026188" y="931423"/>
+                  <a:ext cx="323387" cy="335658"/>
+                </a:xfrm>
+                <a:prstGeom prst="rect">
+                  <a:avLst/>
+                </a:prstGeom>
+                <a:noFill/>
+              </p:spPr>
+              <p:txBody>
+                <a:bodyPr wrap="square" rtlCol="0">
+                  <a:spAutoFit/>
+                </a:bodyPr>
+                <a:lstStyle/>
+                <a:p>
+                  <a:pPr/>
+                  <a14:m>
+                    <m:oMathPara xmlns:m="http://schemas.openxmlformats.org/officeDocument/2006/math">
+                      <m:oMathParaPr>
+                        <m:jc m:val="centerGroup"/>
+                      </m:oMathParaPr>
+                      <m:oMath xmlns:m="http://schemas.openxmlformats.org/officeDocument/2006/math">
+                        <m:sSub>
+                          <m:sSubPr>
+                            <m:ctrlPr>
+                              <a:rPr lang="en-US" altLang="zh-TW" sz="1630" b="1" i="1">
+                                <a:latin typeface="Cambria Math" panose="02040503050406030204" pitchFamily="18" charset="0"/>
+                              </a:rPr>
+                            </m:ctrlPr>
+                          </m:sSubPr>
+                          <m:e>
+                            <m:r>
+                              <a:rPr lang="en-US" altLang="zh-TW" sz="1630" b="1" i="1">
+                                <a:latin typeface="Cambria Math" panose="02040503050406030204" pitchFamily="18" charset="0"/>
+                              </a:rPr>
+                              <m:t>𝒒</m:t>
+                            </m:r>
+                          </m:e>
+                          <m:sub>
+                            <m:r>
+                              <a:rPr lang="en-US" altLang="zh-TW" sz="1630" b="1" i="1">
+                                <a:latin typeface="Cambria Math" panose="02040503050406030204" pitchFamily="18" charset="0"/>
+                              </a:rPr>
+                              <m:t>𝒚</m:t>
+                            </m:r>
+                          </m:sub>
+                        </m:sSub>
+                      </m:oMath>
+                    </m:oMathPara>
+                  </a14:m>
+                  <a:endParaRPr lang="en-US" altLang="zh-TW" sz="1630" dirty="0">
+                    <a:latin typeface="Times New Roman" panose="02020603050405020304" pitchFamily="18" charset="0"/>
+                    <a:cs typeface="Times New Roman" panose="02020603050405020304" pitchFamily="18" charset="0"/>
+                  </a:endParaRPr>
+                </a:p>
+              </p:txBody>
+            </p:sp>
+          </mc:Choice>
+          <mc:Fallback xmlns="">
+            <p:sp>
+              <p:nvSpPr>
+                <p:cNvPr id="91" name="文字方塊 90">
+                  <a:extLst>
+                    <a:ext uri="{FF2B5EF4-FFF2-40B4-BE49-F238E27FC236}">
+                      <a16:creationId xmlns:a16="http://schemas.microsoft.com/office/drawing/2014/main" id="{48683BE6-7C91-45D6-99F7-2C602C34D8E5}"/>
+                    </a:ext>
+                  </a:extLst>
+                </p:cNvPr>
+                <p:cNvSpPr txBox="1">
+                  <a:spLocks noRot="1" noChangeAspect="1" noMove="1" noResize="1" noEditPoints="1" noAdjustHandles="1" noChangeArrowheads="1" noChangeShapeType="1" noTextEdit="1"/>
+                </p:cNvSpPr>
+                <p:nvPr/>
+              </p:nvSpPr>
+              <p:spPr>
+                <a:xfrm>
+                  <a:off x="-1026188" y="931423"/>
+                  <a:ext cx="323387" cy="335658"/>
+                </a:xfrm>
+                <a:prstGeom prst="rect">
+                  <a:avLst/>
+                </a:prstGeom>
+                <a:blipFill>
+                  <a:blip r:embed="rId21"/>
+                  <a:stretch>
+                    <a:fillRect r="-3448"/>
+                  </a:stretch>
+                </a:blipFill>
+              </p:spPr>
+              <p:txBody>
+                <a:bodyPr/>
+                <a:lstStyle/>
+                <a:p>
+                  <a:r>
+                    <a:rPr lang="zh-TW" altLang="en-US">
+                      <a:noFill/>
+                    </a:rPr>
+                    <a:t> </a:t>
+                  </a:r>
+                </a:p>
+              </p:txBody>
+            </p:sp>
+          </mc:Fallback>
+        </mc:AlternateContent>
+        <mc:AlternateContent xmlns:mc="http://schemas.openxmlformats.org/markup-compatibility/2006" xmlns:a14="http://schemas.microsoft.com/office/drawing/2010/main">
+          <mc:Choice Requires="a14">
+            <p:sp>
+              <p:nvSpPr>
+                <p:cNvPr id="176" name="文字方塊 175">
+                  <a:extLst>
+                    <a:ext uri="{FF2B5EF4-FFF2-40B4-BE49-F238E27FC236}">
+                      <a16:creationId xmlns:a16="http://schemas.microsoft.com/office/drawing/2014/main" id="{E6EA0AC7-EEA0-4B1E-8CA2-0525AE7DB02F}"/>
+                    </a:ext>
+                  </a:extLst>
+                </p:cNvPr>
+                <p:cNvSpPr txBox="1"/>
+                <p:nvPr/>
+              </p:nvSpPr>
+              <p:spPr>
+                <a:xfrm>
+                  <a:off x="-802135" y="1190388"/>
+                  <a:ext cx="406919" cy="314558"/>
+                </a:xfrm>
+                <a:prstGeom prst="rect">
+                  <a:avLst/>
+                </a:prstGeom>
+                <a:noFill/>
+              </p:spPr>
+              <p:txBody>
+                <a:bodyPr wrap="square" rtlCol="0">
+                  <a:spAutoFit/>
+                </a:bodyPr>
+                <a:lstStyle/>
+                <a:p>
+                  <a:pPr/>
+                  <a14:m>
+                    <m:oMathPara xmlns:m="http://schemas.openxmlformats.org/officeDocument/2006/math">
+                      <m:oMathParaPr>
+                        <m:jc m:val="centerGroup"/>
+                      </m:oMathParaPr>
+                      <m:oMath xmlns:m="http://schemas.openxmlformats.org/officeDocument/2006/math">
+                        <m:sSub>
+                          <m:sSubPr>
+                            <m:ctrlPr>
+                              <a:rPr lang="en-US" altLang="zh-TW" sz="1630" b="1" i="1">
+                                <a:latin typeface="Cambria Math" panose="02040503050406030204" pitchFamily="18" charset="0"/>
+                              </a:rPr>
+                            </m:ctrlPr>
+                          </m:sSubPr>
+                          <m:e>
+                            <m:r>
+                              <a:rPr lang="en-US" altLang="zh-TW" sz="1630" b="1" i="1">
+                                <a:latin typeface="Cambria Math" panose="02040503050406030204" pitchFamily="18" charset="0"/>
+                              </a:rPr>
+                              <m:t>𝒒</m:t>
+                            </m:r>
+                          </m:e>
+                          <m:sub>
+                            <m:r>
+                              <a:rPr lang="en-US" altLang="zh-TW" sz="1630" b="1" i="1">
+                                <a:latin typeface="Cambria Math" panose="02040503050406030204" pitchFamily="18" charset="0"/>
+                              </a:rPr>
+                              <m:t>𝒙</m:t>
+                            </m:r>
+                          </m:sub>
+                        </m:sSub>
+                      </m:oMath>
+                    </m:oMathPara>
+                  </a14:m>
+                  <a:endParaRPr lang="en-US" altLang="zh-TW" sz="1630" dirty="0">
+                    <a:latin typeface="Times New Roman" panose="02020603050405020304" pitchFamily="18" charset="0"/>
+                    <a:cs typeface="Times New Roman" panose="02020603050405020304" pitchFamily="18" charset="0"/>
+                  </a:endParaRPr>
+                </a:p>
+              </p:txBody>
+            </p:sp>
+          </mc:Choice>
+          <mc:Fallback xmlns="">
+            <p:sp>
+              <p:nvSpPr>
+                <p:cNvPr id="92" name="文字方塊 91">
+                  <a:extLst>
+                    <a:ext uri="{FF2B5EF4-FFF2-40B4-BE49-F238E27FC236}">
+                      <a16:creationId xmlns:a16="http://schemas.microsoft.com/office/drawing/2014/main" id="{9E8963A5-F392-4029-B309-DD9A00CE0887}"/>
+                    </a:ext>
+                  </a:extLst>
+                </p:cNvPr>
+                <p:cNvSpPr txBox="1">
+                  <a:spLocks noRot="1" noChangeAspect="1" noMove="1" noResize="1" noEditPoints="1" noAdjustHandles="1" noChangeArrowheads="1" noChangeShapeType="1" noTextEdit="1"/>
+                </p:cNvSpPr>
+                <p:nvPr/>
+              </p:nvSpPr>
+              <p:spPr>
+                <a:xfrm>
+                  <a:off x="-802135" y="1190388"/>
+                  <a:ext cx="406919" cy="314558"/>
+                </a:xfrm>
+                <a:prstGeom prst="rect">
+                  <a:avLst/>
+                </a:prstGeom>
+                <a:blipFill>
+                  <a:blip r:embed="rId22"/>
+                  <a:stretch>
+                    <a:fillRect b="-5263"/>
+                  </a:stretch>
+                </a:blipFill>
+              </p:spPr>
+              <p:txBody>
+                <a:bodyPr/>
+                <a:lstStyle/>
+                <a:p>
+                  <a:r>
+                    <a:rPr lang="zh-TW" altLang="en-US">
+                      <a:noFill/>
+                    </a:rPr>
+                    <a:t> </a:t>
+                  </a:r>
+                </a:p>
+              </p:txBody>
+            </p:sp>
+          </mc:Fallback>
+        </mc:AlternateContent>
+        <p:sp>
+          <p:nvSpPr>
+            <p:cNvPr id="177" name="箭號: 向右 176">
+              <a:extLst>
+                <a:ext uri="{FF2B5EF4-FFF2-40B4-BE49-F238E27FC236}">
+                  <a16:creationId xmlns:a16="http://schemas.microsoft.com/office/drawing/2014/main" id="{68CC51FC-5069-405A-9C18-903D1F5E554D}"/>
+                </a:ext>
+              </a:extLst>
+            </p:cNvPr>
+            <p:cNvSpPr/>
+            <p:nvPr/>
+          </p:nvSpPr>
+          <p:spPr>
+            <a:xfrm>
+              <a:off x="-837092" y="1356364"/>
+              <a:ext cx="92654" cy="27541"/>
+            </a:xfrm>
+            <a:prstGeom prst="rightArrow">
+              <a:avLst>
+                <a:gd name="adj1" fmla="val 50000"/>
+                <a:gd name="adj2" fmla="val 99023"/>
+              </a:avLst>
+            </a:prstGeom>
+            <a:solidFill>
+              <a:schemeClr val="tx1"/>
+            </a:solidFill>
+            <a:ln>
+              <a:solidFill>
+                <a:schemeClr val="tx1"/>
+              </a:solidFill>
+            </a:ln>
+          </p:spPr>
+          <p:style>
+            <a:lnRef idx="2">
+              <a:schemeClr val="dk1">
+                <a:shade val="50000"/>
+              </a:schemeClr>
+            </a:lnRef>
+            <a:fillRef idx="1">
+              <a:schemeClr val="dk1"/>
+            </a:fillRef>
+            <a:effectRef idx="0">
+              <a:schemeClr val="dk1"/>
+            </a:effectRef>
+            <a:fontRef idx="minor">
+              <a:schemeClr val="lt1"/>
+            </a:fontRef>
+          </p:style>
+          <p:txBody>
+            <a:bodyPr rtlCol="0" anchor="ctr"/>
+            <a:lstStyle/>
+            <a:p>
+              <a:pPr algn="ctr"/>
+              <a:endParaRPr lang="zh-TW" altLang="en-US" sz="1630">
+                <a:solidFill>
+                  <a:schemeClr val="tx1"/>
+                </a:solidFill>
+                <a:latin typeface="Times New Roman" panose="02020603050405020304" pitchFamily="18" charset="0"/>
+                <a:cs typeface="Times New Roman" panose="02020603050405020304" pitchFamily="18" charset="0"/>
+              </a:endParaRPr>
+            </a:p>
+          </p:txBody>
+        </p:sp>
+        <p:sp>
+          <p:nvSpPr>
+            <p:cNvPr id="178" name="箭號: 向右 177">
+              <a:extLst>
+                <a:ext uri="{FF2B5EF4-FFF2-40B4-BE49-F238E27FC236}">
+                  <a16:creationId xmlns:a16="http://schemas.microsoft.com/office/drawing/2014/main" id="{18727DB6-8893-4391-BE7F-362943E35244}"/>
+                </a:ext>
+              </a:extLst>
+            </p:cNvPr>
+            <p:cNvSpPr/>
+            <p:nvPr/>
+          </p:nvSpPr>
+          <p:spPr>
+            <a:xfrm rot="16200000">
+              <a:off x="-877012" y="1316853"/>
+              <a:ext cx="91764" cy="27808"/>
+            </a:xfrm>
+            <a:prstGeom prst="rightArrow">
+              <a:avLst>
+                <a:gd name="adj1" fmla="val 50000"/>
+                <a:gd name="adj2" fmla="val 99023"/>
+              </a:avLst>
+            </a:prstGeom>
+            <a:solidFill>
+              <a:schemeClr val="tx1"/>
+            </a:solidFill>
+            <a:ln>
+              <a:solidFill>
+                <a:schemeClr val="tx1"/>
+              </a:solidFill>
+            </a:ln>
+          </p:spPr>
+          <p:style>
+            <a:lnRef idx="2">
+              <a:schemeClr val="dk1">
+                <a:shade val="50000"/>
+              </a:schemeClr>
+            </a:lnRef>
+            <a:fillRef idx="1">
+              <a:schemeClr val="dk1"/>
+            </a:fillRef>
+            <a:effectRef idx="0">
+              <a:schemeClr val="dk1"/>
+            </a:effectRef>
+            <a:fontRef idx="minor">
+              <a:schemeClr val="lt1"/>
+            </a:fontRef>
+          </p:style>
+          <p:txBody>
+            <a:bodyPr rtlCol="0" anchor="ctr"/>
+            <a:lstStyle/>
+            <a:p>
+              <a:pPr algn="ctr"/>
+              <a:endParaRPr lang="zh-TW" altLang="en-US" sz="1630" dirty="0">
+                <a:solidFill>
+                  <a:schemeClr val="tx1"/>
+                </a:solidFill>
+                <a:latin typeface="Times New Roman" panose="02020603050405020304" pitchFamily="18" charset="0"/>
+                <a:cs typeface="Times New Roman" panose="02020603050405020304" pitchFamily="18" charset="0"/>
+              </a:endParaRPr>
+            </a:p>
+          </p:txBody>
+        </p:sp>
+      </p:grpSp>
+      <p:pic>
+        <p:nvPicPr>
+          <p:cNvPr id="180" name="圖片 179">
+            <a:extLst>
+              <a:ext uri="{FF2B5EF4-FFF2-40B4-BE49-F238E27FC236}">
+                <a16:creationId xmlns:a16="http://schemas.microsoft.com/office/drawing/2014/main" id="{2930E40C-335E-4B3F-8D1F-6609FA754C8C}"/>
+              </a:ext>
+            </a:extLst>
+          </p:cNvPr>
+          <p:cNvPicPr>
+            <a:picLocks noChangeAspect="1"/>
+          </p:cNvPicPr>
+          <p:nvPr/>
+        </p:nvPicPr>
+        <p:blipFill rotWithShape="1">
+          <a:blip r:embed="rId23">
+            <a:clrChange>
+              <a:clrFrom>
+                <a:srgbClr val="FFFFFF"/>
+              </a:clrFrom>
+              <a:clrTo>
+                <a:srgbClr val="FFFFFF">
+                  <a:alpha val="0"/>
+                </a:srgbClr>
+              </a:clrTo>
+            </a:clrChange>
+          </a:blip>
+          <a:srcRect l="45594" r="36360"/>
+          <a:stretch/>
+        </p:blipFill>
+        <p:spPr>
+          <a:xfrm>
+            <a:off x="1454450" y="2435761"/>
+            <a:ext cx="488650" cy="444937"/>
+          </a:xfrm>
+          <a:prstGeom prst="rect">
+            <a:avLst/>
+          </a:prstGeom>
+        </p:spPr>
+      </p:pic>
+      <p:pic>
+        <p:nvPicPr>
+          <p:cNvPr id="181" name="圖片 180">
+            <a:extLst>
+              <a:ext uri="{FF2B5EF4-FFF2-40B4-BE49-F238E27FC236}">
+                <a16:creationId xmlns:a16="http://schemas.microsoft.com/office/drawing/2014/main" id="{B1DC3C66-376F-4DAD-9A7D-8D335ACBB7C9}"/>
+              </a:ext>
+            </a:extLst>
+          </p:cNvPr>
+          <p:cNvPicPr>
+            <a:picLocks noChangeAspect="1"/>
+          </p:cNvPicPr>
+          <p:nvPr/>
+        </p:nvPicPr>
+        <p:blipFill rotWithShape="1">
+          <a:blip r:embed="rId23">
+            <a:clrChange>
+              <a:clrFrom>
+                <a:srgbClr val="FFFFFF"/>
+              </a:clrFrom>
+              <a:clrTo>
+                <a:srgbClr val="FFFFFF">
+                  <a:alpha val="0"/>
+                </a:srgbClr>
+              </a:clrTo>
+            </a:clrChange>
+          </a:blip>
+          <a:srcRect r="97142"/>
+          <a:stretch/>
+        </p:blipFill>
+        <p:spPr>
+          <a:xfrm>
+            <a:off x="1460893" y="431294"/>
+            <a:ext cx="77395" cy="444937"/>
+          </a:xfrm>
+          <a:prstGeom prst="rect">
+            <a:avLst/>
+          </a:prstGeom>
+        </p:spPr>
+      </p:pic>
+      <p:pic>
+        <p:nvPicPr>
+          <p:cNvPr id="38" name="圖片 37">
+            <a:extLst>
+              <a:ext uri="{FF2B5EF4-FFF2-40B4-BE49-F238E27FC236}">
+                <a16:creationId xmlns:a16="http://schemas.microsoft.com/office/drawing/2014/main" id="{5C65022C-F7D4-42D5-926B-C3FCFE4CCB85}"/>
+              </a:ext>
+            </a:extLst>
+          </p:cNvPr>
+          <p:cNvPicPr>
+            <a:picLocks noChangeAspect="1"/>
+          </p:cNvPicPr>
+          <p:nvPr/>
+        </p:nvPicPr>
+        <p:blipFill rotWithShape="1">
+          <a:blip r:embed="rId2">
+            <a:clrChange>
+              <a:clrFrom>
+                <a:srgbClr val="FFFFFF"/>
+              </a:clrFrom>
+              <a:clrTo>
+                <a:srgbClr val="FFFFFF">
+                  <a:alpha val="0"/>
+                </a:srgbClr>
+              </a:clrTo>
+            </a:clrChange>
+            <a:extLst>
+              <a:ext uri="{28A0092B-C50C-407E-A947-70E740481C1C}">
+                <a14:useLocalDpi xmlns:a14="http://schemas.microsoft.com/office/drawing/2010/main" val="0"/>
+              </a:ext>
+            </a:extLst>
+          </a:blip>
+          <a:srcRect l="34649" r="51513"/>
+          <a:stretch/>
+        </p:blipFill>
+        <p:spPr>
+          <a:xfrm>
+            <a:off x="4083006" y="2768522"/>
+            <a:ext cx="1376856" cy="1658288"/>
+          </a:xfrm>
+          <a:prstGeom prst="rect">
+            <a:avLst/>
+          </a:prstGeom>
+        </p:spPr>
+      </p:pic>
+      <p:pic>
+        <p:nvPicPr>
+          <p:cNvPr id="39" name="圖片 38">
+            <a:extLst>
+              <a:ext uri="{FF2B5EF4-FFF2-40B4-BE49-F238E27FC236}">
+                <a16:creationId xmlns:a16="http://schemas.microsoft.com/office/drawing/2014/main" id="{1287C793-AD60-4635-93A1-F4D71550E5A8}"/>
+              </a:ext>
+            </a:extLst>
+          </p:cNvPr>
+          <p:cNvPicPr>
+            <a:picLocks noChangeAspect="1"/>
+          </p:cNvPicPr>
+          <p:nvPr/>
+        </p:nvPicPr>
+        <p:blipFill rotWithShape="1">
+          <a:blip r:embed="rId3">
+            <a:clrChange>
+              <a:clrFrom>
+                <a:srgbClr val="FFFFFF"/>
+              </a:clrFrom>
+              <a:clrTo>
+                <a:srgbClr val="FFFFFF">
+                  <a:alpha val="0"/>
+                </a:srgbClr>
+              </a:clrTo>
+            </a:clrChange>
+            <a:extLst>
+              <a:ext uri="{28A0092B-C50C-407E-A947-70E740481C1C}">
+                <a14:useLocalDpi xmlns:a14="http://schemas.microsoft.com/office/drawing/2010/main" val="0"/>
+              </a:ext>
+            </a:extLst>
+          </a:blip>
+          <a:srcRect l="51317" r="34750"/>
+          <a:stretch/>
+        </p:blipFill>
+        <p:spPr>
+          <a:xfrm>
+            <a:off x="5396010" y="807050"/>
+            <a:ext cx="1387366" cy="1659600"/>
+          </a:xfrm>
+          <a:prstGeom prst="rect">
+            <a:avLst/>
+          </a:prstGeom>
+        </p:spPr>
+      </p:pic>
+      <p:pic>
+        <p:nvPicPr>
+          <p:cNvPr id="40" name="圖片 39">
+            <a:extLst>
+              <a:ext uri="{FF2B5EF4-FFF2-40B4-BE49-F238E27FC236}">
+                <a16:creationId xmlns:a16="http://schemas.microsoft.com/office/drawing/2014/main" id="{482C8D1F-4A4C-4173-A4E5-A809D17F012B}"/>
+              </a:ext>
+            </a:extLst>
+          </p:cNvPr>
+          <p:cNvPicPr>
+            <a:picLocks noChangeAspect="1"/>
+          </p:cNvPicPr>
+          <p:nvPr/>
+        </p:nvPicPr>
+        <p:blipFill rotWithShape="1">
+          <a:blip r:embed="rId2">
+            <a:clrChange>
+              <a:clrFrom>
+                <a:srgbClr val="FFFFFF"/>
+              </a:clrFrom>
+              <a:clrTo>
+                <a:srgbClr val="FFFFFF">
+                  <a:alpha val="0"/>
+                </a:srgbClr>
+              </a:clrTo>
+            </a:clrChange>
+            <a:extLst>
+              <a:ext uri="{28A0092B-C50C-407E-A947-70E740481C1C}">
+                <a14:useLocalDpi xmlns:a14="http://schemas.microsoft.com/office/drawing/2010/main" val="0"/>
+              </a:ext>
+            </a:extLst>
+          </a:blip>
+          <a:srcRect l="51550" r="34717"/>
+          <a:stretch/>
+        </p:blipFill>
+        <p:spPr>
+          <a:xfrm>
+            <a:off x="5417031" y="2768522"/>
+            <a:ext cx="1366345" cy="1658288"/>
+          </a:xfrm>
+          <a:prstGeom prst="rect">
+            <a:avLst/>
+          </a:prstGeom>
+        </p:spPr>
+      </p:pic>
+      <p:pic>
+        <p:nvPicPr>
+          <p:cNvPr id="41" name="圖片 40">
+            <a:extLst>
+              <a:ext uri="{FF2B5EF4-FFF2-40B4-BE49-F238E27FC236}">
+                <a16:creationId xmlns:a16="http://schemas.microsoft.com/office/drawing/2014/main" id="{6D7F35F3-1DB2-4177-BC1C-85B456A7B06D}"/>
+              </a:ext>
+            </a:extLst>
+          </p:cNvPr>
+          <p:cNvPicPr>
+            <a:picLocks noChangeAspect="1"/>
+          </p:cNvPicPr>
+          <p:nvPr/>
+        </p:nvPicPr>
+        <p:blipFill rotWithShape="1">
+          <a:blip r:embed="rId3">
+            <a:clrChange>
+              <a:clrFrom>
+                <a:srgbClr val="FFFFFF"/>
+              </a:clrFrom>
+              <a:clrTo>
+                <a:srgbClr val="FFFFFF">
+                  <a:alpha val="0"/>
+                </a:srgbClr>
+              </a:clrTo>
+            </a:clrChange>
+            <a:extLst>
+              <a:ext uri="{28A0092B-C50C-407E-A947-70E740481C1C}">
+                <a14:useLocalDpi xmlns:a14="http://schemas.microsoft.com/office/drawing/2010/main" val="0"/>
+              </a:ext>
+            </a:extLst>
+          </a:blip>
+          <a:srcRect l="68100" r="17862"/>
+          <a:stretch/>
+        </p:blipFill>
+        <p:spPr>
+          <a:xfrm>
+            <a:off x="6726619" y="807050"/>
+            <a:ext cx="1397877" cy="1659600"/>
+          </a:xfrm>
+          <a:prstGeom prst="rect">
+            <a:avLst/>
+          </a:prstGeom>
+        </p:spPr>
+      </p:pic>
+      <p:pic>
+        <p:nvPicPr>
+          <p:cNvPr id="42" name="圖片 41">
+            <a:extLst>
+              <a:ext uri="{FF2B5EF4-FFF2-40B4-BE49-F238E27FC236}">
+                <a16:creationId xmlns:a16="http://schemas.microsoft.com/office/drawing/2014/main" id="{AFBFFF59-6443-4AD5-8A01-24BCC156678C}"/>
+              </a:ext>
+            </a:extLst>
+          </p:cNvPr>
+          <p:cNvPicPr>
+            <a:picLocks noChangeAspect="1"/>
+          </p:cNvPicPr>
+          <p:nvPr/>
+        </p:nvPicPr>
+        <p:blipFill rotWithShape="1">
+          <a:blip r:embed="rId2">
+            <a:clrChange>
+              <a:clrFrom>
+                <a:srgbClr val="FFFFFF"/>
+              </a:clrFrom>
+              <a:clrTo>
+                <a:srgbClr val="FFFFFF">
+                  <a:alpha val="0"/>
+                </a:srgbClr>
+              </a:clrTo>
+            </a:clrChange>
+            <a:extLst>
+              <a:ext uri="{28A0092B-C50C-407E-A947-70E740481C1C}">
+                <a14:useLocalDpi xmlns:a14="http://schemas.microsoft.com/office/drawing/2010/main" val="0"/>
+              </a:ext>
+            </a:extLst>
+          </a:blip>
+          <a:srcRect l="68240" r="17365"/>
+          <a:stretch/>
+        </p:blipFill>
+        <p:spPr>
+          <a:xfrm>
+            <a:off x="6716111" y="2768522"/>
+            <a:ext cx="1432264" cy="1658288"/>
+          </a:xfrm>
+          <a:prstGeom prst="rect">
+            <a:avLst/>
+          </a:prstGeom>
+        </p:spPr>
+      </p:pic>
+      <p:pic>
+        <p:nvPicPr>
+          <p:cNvPr id="45" name="圖片 44">
+            <a:extLst>
+              <a:ext uri="{FF2B5EF4-FFF2-40B4-BE49-F238E27FC236}">
+                <a16:creationId xmlns:a16="http://schemas.microsoft.com/office/drawing/2014/main" id="{B271E383-D64D-4F4D-A358-5FFBD5B85F81}"/>
+              </a:ext>
+            </a:extLst>
+          </p:cNvPr>
+          <p:cNvPicPr>
+            <a:picLocks noChangeAspect="1"/>
+          </p:cNvPicPr>
+          <p:nvPr/>
+        </p:nvPicPr>
+        <p:blipFill rotWithShape="1">
+          <a:blip r:embed="rId24">
+            <a:clrChange>
+              <a:clrFrom>
+                <a:srgbClr val="FFFFFF"/>
+              </a:clrFrom>
+              <a:clrTo>
+                <a:srgbClr val="FFFFFF">
+                  <a:alpha val="0"/>
+                </a:srgbClr>
+              </a:clrTo>
+            </a:clrChange>
+          </a:blip>
+          <a:srcRect r="32321"/>
+          <a:stretch/>
+        </p:blipFill>
+        <p:spPr>
+          <a:xfrm>
+            <a:off x="8165045" y="2903493"/>
+            <a:ext cx="407456" cy="1328804"/>
+          </a:xfrm>
+          <a:prstGeom prst="rect">
+            <a:avLst/>
+          </a:prstGeom>
+        </p:spPr>
+      </p:pic>
+      <p:pic>
+        <p:nvPicPr>
+          <p:cNvPr id="2" name="圖片 1">
+            <a:extLst>
+              <a:ext uri="{FF2B5EF4-FFF2-40B4-BE49-F238E27FC236}">
+                <a16:creationId xmlns:a16="http://schemas.microsoft.com/office/drawing/2014/main" id="{146AE1C8-6C71-48F2-A161-21EDDF441D06}"/>
+              </a:ext>
+            </a:extLst>
+          </p:cNvPr>
+          <p:cNvPicPr>
+            <a:picLocks noChangeAspect="1"/>
+          </p:cNvPicPr>
+          <p:nvPr/>
+        </p:nvPicPr>
+        <p:blipFill rotWithShape="1">
+          <a:blip r:embed="rId25">
+            <a:clrChange>
+              <a:clrFrom>
+                <a:srgbClr val="FFFFFF"/>
+              </a:clrFrom>
+              <a:clrTo>
+                <a:srgbClr val="FFFFFF">
+                  <a:alpha val="0"/>
+                </a:srgbClr>
+              </a:clrTo>
+            </a:clrChange>
+          </a:blip>
+          <a:srcRect r="26676" b="1412"/>
+          <a:stretch/>
+        </p:blipFill>
+        <p:spPr>
+          <a:xfrm>
+            <a:off x="8177841" y="930014"/>
+            <a:ext cx="394660" cy="1346221"/>
+          </a:xfrm>
+          <a:prstGeom prst="rect">
+            <a:avLst/>
+          </a:prstGeom>
+        </p:spPr>
+      </p:pic>
+      <p:sp>
+        <p:nvSpPr>
+          <p:cNvPr id="46" name="矩形 45">
+            <a:extLst>
+              <a:ext uri="{FF2B5EF4-FFF2-40B4-BE49-F238E27FC236}">
+                <a16:creationId xmlns:a16="http://schemas.microsoft.com/office/drawing/2014/main" id="{F7DE3470-B86B-41A4-90CA-5EE3920827CC}"/>
+              </a:ext>
+            </a:extLst>
+          </p:cNvPr>
+          <p:cNvSpPr/>
+          <p:nvPr/>
+        </p:nvSpPr>
+        <p:spPr>
+          <a:xfrm>
+            <a:off x="8463801" y="797525"/>
+            <a:ext cx="288862" cy="343171"/>
+          </a:xfrm>
+          <a:prstGeom prst="rect">
+            <a:avLst/>
+          </a:prstGeom>
+        </p:spPr>
+        <p:txBody>
+          <a:bodyPr wrap="none">
+            <a:spAutoFit/>
+          </a:bodyPr>
+          <a:lstStyle/>
+          <a:p>
+            <a:r>
+              <a:rPr lang="en-US" altLang="zh-TW" sz="1630" dirty="0">
+                <a:latin typeface="Times New Roman" panose="02020603050405020304" pitchFamily="18" charset="0"/>
+                <a:cs typeface="Times New Roman" panose="02020603050405020304" pitchFamily="18" charset="0"/>
+              </a:rPr>
+              <a:t>1</a:t>
+            </a:r>
+            <a:endParaRPr lang="zh-TW" altLang="en-US" sz="1630" dirty="0">
+              <a:latin typeface="Times New Roman" panose="02020603050405020304" pitchFamily="18" charset="0"/>
+              <a:cs typeface="Times New Roman" panose="02020603050405020304" pitchFamily="18" charset="0"/>
+            </a:endParaRPr>
+          </a:p>
+        </p:txBody>
+      </p:sp>
+      <p:sp>
+        <p:nvSpPr>
+          <p:cNvPr id="47" name="矩形 46">
+            <a:extLst>
+              <a:ext uri="{FF2B5EF4-FFF2-40B4-BE49-F238E27FC236}">
+                <a16:creationId xmlns:a16="http://schemas.microsoft.com/office/drawing/2014/main" id="{D6AA29D1-BA19-4B65-AFAB-7186726D750C}"/>
+              </a:ext>
+            </a:extLst>
+          </p:cNvPr>
+          <p:cNvSpPr/>
+          <p:nvPr/>
+        </p:nvSpPr>
+        <p:spPr>
+          <a:xfrm>
+            <a:off x="8482851" y="2064350"/>
+            <a:ext cx="288862" cy="343171"/>
+          </a:xfrm>
+          <a:prstGeom prst="rect">
+            <a:avLst/>
+          </a:prstGeom>
+        </p:spPr>
+        <p:txBody>
+          <a:bodyPr wrap="none">
+            <a:spAutoFit/>
+          </a:bodyPr>
+          <a:lstStyle/>
+          <a:p>
+            <a:r>
+              <a:rPr lang="en-US" altLang="zh-TW" sz="1630" dirty="0">
+                <a:latin typeface="Times New Roman" panose="02020603050405020304" pitchFamily="18" charset="0"/>
+                <a:cs typeface="Times New Roman" panose="02020603050405020304" pitchFamily="18" charset="0"/>
+              </a:rPr>
+              <a:t>0</a:t>
+            </a:r>
+            <a:endParaRPr lang="zh-TW" altLang="en-US" sz="1630" dirty="0">
+              <a:latin typeface="Times New Roman" panose="02020603050405020304" pitchFamily="18" charset="0"/>
+              <a:cs typeface="Times New Roman" panose="02020603050405020304" pitchFamily="18" charset="0"/>
+            </a:endParaRPr>
+          </a:p>
+        </p:txBody>
+      </p:sp>
+      <p:sp>
+        <p:nvSpPr>
+          <p:cNvPr id="48" name="矩形 47">
+            <a:extLst>
+              <a:ext uri="{FF2B5EF4-FFF2-40B4-BE49-F238E27FC236}">
+                <a16:creationId xmlns:a16="http://schemas.microsoft.com/office/drawing/2014/main" id="{5C8B2CEE-BD76-45B2-946A-28A0D9883D55}"/>
+              </a:ext>
+            </a:extLst>
+          </p:cNvPr>
+          <p:cNvSpPr/>
+          <p:nvPr/>
+        </p:nvSpPr>
+        <p:spPr>
+          <a:xfrm>
+            <a:off x="8473326" y="2751030"/>
+            <a:ext cx="288862" cy="343171"/>
+          </a:xfrm>
+          <a:prstGeom prst="rect">
+            <a:avLst/>
+          </a:prstGeom>
+        </p:spPr>
+        <p:txBody>
+          <a:bodyPr wrap="none">
+            <a:spAutoFit/>
+          </a:bodyPr>
+          <a:lstStyle/>
+          <a:p>
+            <a:r>
+              <a:rPr lang="en-US" altLang="zh-TW" sz="1630" dirty="0">
+                <a:latin typeface="Times New Roman" panose="02020603050405020304" pitchFamily="18" charset="0"/>
+                <a:cs typeface="Times New Roman" panose="02020603050405020304" pitchFamily="18" charset="0"/>
+              </a:rPr>
+              <a:t>1</a:t>
+            </a:r>
+            <a:endParaRPr lang="zh-TW" altLang="en-US" sz="1630" dirty="0">
+              <a:latin typeface="Times New Roman" panose="02020603050405020304" pitchFamily="18" charset="0"/>
+              <a:cs typeface="Times New Roman" panose="02020603050405020304" pitchFamily="18" charset="0"/>
+            </a:endParaRPr>
+          </a:p>
+        </p:txBody>
+      </p:sp>
+      <p:sp>
+        <p:nvSpPr>
+          <p:cNvPr id="49" name="矩形 48">
+            <a:extLst>
+              <a:ext uri="{FF2B5EF4-FFF2-40B4-BE49-F238E27FC236}">
+                <a16:creationId xmlns:a16="http://schemas.microsoft.com/office/drawing/2014/main" id="{AA8D5E01-3896-4BC8-BD09-763BCC19DD77}"/>
+              </a:ext>
+            </a:extLst>
+          </p:cNvPr>
+          <p:cNvSpPr/>
+          <p:nvPr/>
+        </p:nvSpPr>
+        <p:spPr>
+          <a:xfrm>
+            <a:off x="8492376" y="3989280"/>
+            <a:ext cx="357790" cy="343171"/>
+          </a:xfrm>
+          <a:prstGeom prst="rect">
+            <a:avLst/>
+          </a:prstGeom>
+        </p:spPr>
+        <p:txBody>
+          <a:bodyPr wrap="none">
+            <a:spAutoFit/>
+          </a:bodyPr>
+          <a:lstStyle/>
+          <a:p>
+            <a:r>
+              <a:rPr lang="en-US" altLang="zh-TW" sz="1630" dirty="0">
+                <a:latin typeface="Times New Roman" panose="02020603050405020304" pitchFamily="18" charset="0"/>
+                <a:cs typeface="Times New Roman" panose="02020603050405020304" pitchFamily="18" charset="0"/>
+              </a:rPr>
+              <a:t>-1</a:t>
+            </a:r>
+            <a:endParaRPr lang="zh-TW" altLang="en-US" sz="1630" dirty="0">
+              <a:latin typeface="Times New Roman" panose="02020603050405020304" pitchFamily="18" charset="0"/>
+              <a:cs typeface="Times New Roman" panose="02020603050405020304" pitchFamily="18" charset="0"/>
+            </a:endParaRPr>
+          </a:p>
+        </p:txBody>
+      </p:sp>
+      <mc:AlternateContent xmlns:mc="http://schemas.openxmlformats.org/markup-compatibility/2006" xmlns:a14="http://schemas.microsoft.com/office/drawing/2010/main">
+        <mc:Choice Requires="a14">
+          <p:sp>
+            <p:nvSpPr>
+              <p:cNvPr id="156" name="矩形 155">
+                <a:extLst>
+                  <a:ext uri="{FF2B5EF4-FFF2-40B4-BE49-F238E27FC236}">
+                    <a16:creationId xmlns:a16="http://schemas.microsoft.com/office/drawing/2014/main" id="{9A6ABA0C-E06E-4E01-9C48-24D6DD07166A}"/>
+                  </a:ext>
+                </a:extLst>
+              </p:cNvPr>
+              <p:cNvSpPr/>
+              <p:nvPr/>
+            </p:nvSpPr>
+            <p:spPr>
+              <a:xfrm>
+                <a:off x="1623084" y="935011"/>
+                <a:ext cx="889154" cy="343171"/>
+              </a:xfrm>
+              <a:prstGeom prst="rect">
+                <a:avLst/>
+              </a:prstGeom>
+            </p:spPr>
+            <p:txBody>
+              <a:bodyPr wrap="square">
+                <a:spAutoFit/>
+              </a:bodyPr>
+              <a:lstStyle/>
+              <a:p>
+                <a:pPr/>
+                <a14:m>
+                  <m:oMathPara xmlns:m="http://schemas.openxmlformats.org/officeDocument/2006/math">
+                    <m:oMathParaPr>
+                      <m:jc m:val="centerGroup"/>
+                    </m:oMathParaPr>
+                    <m:oMath xmlns:m="http://schemas.openxmlformats.org/officeDocument/2006/math">
+                      <m:r>
+                        <a:rPr lang="en-US" altLang="zh-TW" sz="1630" i="1">
+                          <a:latin typeface="Cambria Math" panose="02040503050406030204" pitchFamily="18" charset="0"/>
+                        </a:rPr>
+                        <m:t>ℓ=−2</m:t>
+                      </m:r>
+                    </m:oMath>
+                  </m:oMathPara>
+                </a14:m>
+                <a:endParaRPr lang="zh-TW" altLang="en-US" sz="1630" dirty="0">
+                  <a:latin typeface="Times New Roman" panose="02020603050405020304" pitchFamily="18" charset="0"/>
+                  <a:cs typeface="Times New Roman" panose="02020603050405020304" pitchFamily="18" charset="0"/>
+                </a:endParaRPr>
+              </a:p>
+            </p:txBody>
+          </p:sp>
+        </mc:Choice>
+        <mc:Fallback xmlns="">
+          <p:sp>
+            <p:nvSpPr>
+              <p:cNvPr id="156" name="矩形 155">
+                <a:extLst>
+                  <a:ext uri="{FF2B5EF4-FFF2-40B4-BE49-F238E27FC236}">
+                    <a16:creationId xmlns:a16="http://schemas.microsoft.com/office/drawing/2014/main" id="{9A6ABA0C-E06E-4E01-9C48-24D6DD07166A}"/>
+                  </a:ext>
+                </a:extLst>
+              </p:cNvPr>
+              <p:cNvSpPr>
+                <a:spLocks noRot="1" noChangeAspect="1" noMove="1" noResize="1" noEditPoints="1" noAdjustHandles="1" noChangeArrowheads="1" noChangeShapeType="1" noTextEdit="1"/>
+              </p:cNvSpPr>
+              <p:nvPr/>
+            </p:nvSpPr>
+            <p:spPr>
+              <a:xfrm>
+                <a:off x="1623084" y="935011"/>
+                <a:ext cx="889154" cy="343171"/>
+              </a:xfrm>
+              <a:prstGeom prst="rect">
+                <a:avLst/>
+              </a:prstGeom>
+              <a:blipFill>
+                <a:blip r:embed="rId26"/>
+                <a:stretch>
+                  <a:fillRect/>
+                </a:stretch>
+              </a:blipFill>
+            </p:spPr>
+            <p:txBody>
+              <a:bodyPr/>
+              <a:lstStyle/>
+              <a:p>
+                <a:r>
+                  <a:rPr lang="zh-TW" altLang="en-US">
+                    <a:noFill/>
+                  </a:rPr>
+                  <a:t> </a:t>
+                </a:r>
+              </a:p>
+            </p:txBody>
+          </p:sp>
+        </mc:Fallback>
+      </mc:AlternateContent>
+      <mc:AlternateContent xmlns:mc="http://schemas.openxmlformats.org/markup-compatibility/2006" xmlns:a14="http://schemas.microsoft.com/office/drawing/2010/main">
+        <mc:Choice Requires="a14">
+          <p:sp>
+            <p:nvSpPr>
+              <p:cNvPr id="157" name="矩形 156">
+                <a:extLst>
+                  <a:ext uri="{FF2B5EF4-FFF2-40B4-BE49-F238E27FC236}">
+                    <a16:creationId xmlns:a16="http://schemas.microsoft.com/office/drawing/2014/main" id="{E4AEA160-3D8E-49BF-AABF-DF9ACA1AF8F6}"/>
+                  </a:ext>
+                </a:extLst>
+              </p:cNvPr>
+              <p:cNvSpPr/>
+              <p:nvPr/>
+            </p:nvSpPr>
+            <p:spPr>
+              <a:xfrm>
+                <a:off x="3052942" y="935011"/>
+                <a:ext cx="889154" cy="343171"/>
+              </a:xfrm>
+              <a:prstGeom prst="rect">
+                <a:avLst/>
+              </a:prstGeom>
+            </p:spPr>
+            <p:txBody>
+              <a:bodyPr wrap="square">
+                <a:spAutoFit/>
+              </a:bodyPr>
+              <a:lstStyle/>
+              <a:p>
+                <a:pPr/>
+                <a14:m>
+                  <m:oMathPara xmlns:m="http://schemas.openxmlformats.org/officeDocument/2006/math">
+                    <m:oMathParaPr>
+                      <m:jc m:val="centerGroup"/>
+                    </m:oMathParaPr>
+                    <m:oMath xmlns:m="http://schemas.openxmlformats.org/officeDocument/2006/math">
+                      <m:r>
+                        <a:rPr lang="en-US" altLang="zh-TW" sz="1630" i="1">
+                          <a:latin typeface="Cambria Math" panose="02040503050406030204" pitchFamily="18" charset="0"/>
+                        </a:rPr>
+                        <m:t>ℓ=−1</m:t>
+                      </m:r>
+                    </m:oMath>
+                  </m:oMathPara>
+                </a14:m>
+                <a:endParaRPr lang="zh-TW" altLang="en-US" sz="1630" dirty="0">
+                  <a:latin typeface="Times New Roman" panose="02020603050405020304" pitchFamily="18" charset="0"/>
+                  <a:cs typeface="Times New Roman" panose="02020603050405020304" pitchFamily="18" charset="0"/>
+                </a:endParaRPr>
+              </a:p>
+            </p:txBody>
+          </p:sp>
+        </mc:Choice>
+        <mc:Fallback xmlns="">
+          <p:sp>
+            <p:nvSpPr>
+              <p:cNvPr id="157" name="矩形 156">
+                <a:extLst>
+                  <a:ext uri="{FF2B5EF4-FFF2-40B4-BE49-F238E27FC236}">
+                    <a16:creationId xmlns:a16="http://schemas.microsoft.com/office/drawing/2014/main" id="{E4AEA160-3D8E-49BF-AABF-DF9ACA1AF8F6}"/>
+                  </a:ext>
+                </a:extLst>
+              </p:cNvPr>
+              <p:cNvSpPr>
+                <a:spLocks noRot="1" noChangeAspect="1" noMove="1" noResize="1" noEditPoints="1" noAdjustHandles="1" noChangeArrowheads="1" noChangeShapeType="1" noTextEdit="1"/>
+              </p:cNvSpPr>
+              <p:nvPr/>
+            </p:nvSpPr>
+            <p:spPr>
+              <a:xfrm>
+                <a:off x="3052942" y="935011"/>
+                <a:ext cx="889154" cy="343171"/>
+              </a:xfrm>
+              <a:prstGeom prst="rect">
+                <a:avLst/>
+              </a:prstGeom>
+              <a:blipFill>
+                <a:blip r:embed="rId27"/>
+                <a:stretch>
+                  <a:fillRect/>
+                </a:stretch>
+              </a:blipFill>
+            </p:spPr>
+            <p:txBody>
+              <a:bodyPr/>
+              <a:lstStyle/>
+              <a:p>
+                <a:r>
+                  <a:rPr lang="zh-TW" altLang="en-US">
+                    <a:noFill/>
+                  </a:rPr>
+                  <a:t> </a:t>
+                </a:r>
+              </a:p>
+            </p:txBody>
+          </p:sp>
+        </mc:Fallback>
+      </mc:AlternateContent>
+      <mc:AlternateContent xmlns:mc="http://schemas.openxmlformats.org/markup-compatibility/2006" xmlns:a14="http://schemas.microsoft.com/office/drawing/2010/main">
+        <mc:Choice Requires="a14">
+          <p:sp>
+            <p:nvSpPr>
+              <p:cNvPr id="158" name="矩形 157">
+                <a:extLst>
+                  <a:ext uri="{FF2B5EF4-FFF2-40B4-BE49-F238E27FC236}">
+                    <a16:creationId xmlns:a16="http://schemas.microsoft.com/office/drawing/2014/main" id="{F35D562F-4D39-426F-959E-9BDB7804C807}"/>
+                  </a:ext>
+                </a:extLst>
+              </p:cNvPr>
+              <p:cNvSpPr/>
+              <p:nvPr/>
+            </p:nvSpPr>
+            <p:spPr>
+              <a:xfrm>
+                <a:off x="4482800" y="935011"/>
+                <a:ext cx="733662" cy="343171"/>
+              </a:xfrm>
+              <a:prstGeom prst="rect">
+                <a:avLst/>
+              </a:prstGeom>
+            </p:spPr>
+            <p:txBody>
+              <a:bodyPr wrap="square">
+                <a:spAutoFit/>
+              </a:bodyPr>
+              <a:lstStyle/>
+              <a:p>
+                <a:pPr/>
+                <a14:m>
+                  <m:oMathPara xmlns:m="http://schemas.openxmlformats.org/officeDocument/2006/math">
+                    <m:oMathParaPr>
+                      <m:jc m:val="centerGroup"/>
+                    </m:oMathParaPr>
+                    <m:oMath xmlns:m="http://schemas.openxmlformats.org/officeDocument/2006/math">
+                      <m:r>
+                        <a:rPr lang="en-US" altLang="zh-TW" sz="1630" i="1">
+                          <a:latin typeface="Cambria Math" panose="02040503050406030204" pitchFamily="18" charset="0"/>
+                        </a:rPr>
+                        <m:t>ℓ=0</m:t>
+                      </m:r>
+                    </m:oMath>
+                  </m:oMathPara>
+                </a14:m>
+                <a:endParaRPr lang="zh-TW" altLang="en-US" sz="1630" dirty="0">
+                  <a:latin typeface="Times New Roman" panose="02020603050405020304" pitchFamily="18" charset="0"/>
+                  <a:cs typeface="Times New Roman" panose="02020603050405020304" pitchFamily="18" charset="0"/>
+                </a:endParaRPr>
+              </a:p>
+            </p:txBody>
+          </p:sp>
+        </mc:Choice>
+        <mc:Fallback xmlns="">
+          <p:sp>
+            <p:nvSpPr>
+              <p:cNvPr id="158" name="矩形 157">
+                <a:extLst>
+                  <a:ext uri="{FF2B5EF4-FFF2-40B4-BE49-F238E27FC236}">
+                    <a16:creationId xmlns:a16="http://schemas.microsoft.com/office/drawing/2014/main" id="{F35D562F-4D39-426F-959E-9BDB7804C807}"/>
+                  </a:ext>
+                </a:extLst>
+              </p:cNvPr>
+              <p:cNvSpPr>
+                <a:spLocks noRot="1" noChangeAspect="1" noMove="1" noResize="1" noEditPoints="1" noAdjustHandles="1" noChangeArrowheads="1" noChangeShapeType="1" noTextEdit="1"/>
+              </p:cNvSpPr>
+              <p:nvPr/>
+            </p:nvSpPr>
+            <p:spPr>
+              <a:xfrm>
+                <a:off x="4482800" y="935011"/>
+                <a:ext cx="733662" cy="343171"/>
+              </a:xfrm>
+              <a:prstGeom prst="rect">
+                <a:avLst/>
+              </a:prstGeom>
+              <a:blipFill>
+                <a:blip r:embed="rId28"/>
+                <a:stretch>
+                  <a:fillRect/>
+                </a:stretch>
+              </a:blipFill>
+            </p:spPr>
+            <p:txBody>
+              <a:bodyPr/>
+              <a:lstStyle/>
+              <a:p>
+                <a:r>
+                  <a:rPr lang="zh-TW" altLang="en-US">
+                    <a:noFill/>
+                  </a:rPr>
+                  <a:t> </a:t>
+                </a:r>
+              </a:p>
+            </p:txBody>
+          </p:sp>
+        </mc:Fallback>
+      </mc:AlternateContent>
+      <mc:AlternateContent xmlns:mc="http://schemas.openxmlformats.org/markup-compatibility/2006" xmlns:a14="http://schemas.microsoft.com/office/drawing/2010/main">
+        <mc:Choice Requires="a14">
+          <p:sp>
+            <p:nvSpPr>
+              <p:cNvPr id="159" name="矩形 158">
+                <a:extLst>
+                  <a:ext uri="{FF2B5EF4-FFF2-40B4-BE49-F238E27FC236}">
+                    <a16:creationId xmlns:a16="http://schemas.microsoft.com/office/drawing/2014/main" id="{5F2474C0-777F-4023-B64D-216298CD9686}"/>
+                  </a:ext>
+                </a:extLst>
+              </p:cNvPr>
+              <p:cNvSpPr/>
+              <p:nvPr/>
+            </p:nvSpPr>
+            <p:spPr>
+              <a:xfrm>
+                <a:off x="5757166" y="935011"/>
+                <a:ext cx="733662" cy="343171"/>
+              </a:xfrm>
+              <a:prstGeom prst="rect">
+                <a:avLst/>
+              </a:prstGeom>
+            </p:spPr>
+            <p:txBody>
+              <a:bodyPr wrap="square">
+                <a:spAutoFit/>
+              </a:bodyPr>
+              <a:lstStyle/>
+              <a:p>
+                <a:pPr/>
+                <a14:m>
+                  <m:oMathPara xmlns:m="http://schemas.openxmlformats.org/officeDocument/2006/math">
+                    <m:oMathParaPr>
+                      <m:jc m:val="centerGroup"/>
+                    </m:oMathParaPr>
+                    <m:oMath xmlns:m="http://schemas.openxmlformats.org/officeDocument/2006/math">
+                      <m:r>
+                        <a:rPr lang="en-US" altLang="zh-TW" sz="1630" i="1">
+                          <a:latin typeface="Cambria Math" panose="02040503050406030204" pitchFamily="18" charset="0"/>
+                        </a:rPr>
+                        <m:t>ℓ=1</m:t>
+                      </m:r>
+                    </m:oMath>
+                  </m:oMathPara>
+                </a14:m>
+                <a:endParaRPr lang="zh-TW" altLang="en-US" sz="1630" dirty="0">
+                  <a:latin typeface="Times New Roman" panose="02020603050405020304" pitchFamily="18" charset="0"/>
+                  <a:cs typeface="Times New Roman" panose="02020603050405020304" pitchFamily="18" charset="0"/>
+                </a:endParaRPr>
+              </a:p>
+            </p:txBody>
+          </p:sp>
+        </mc:Choice>
+        <mc:Fallback xmlns="">
+          <p:sp>
+            <p:nvSpPr>
+              <p:cNvPr id="159" name="矩形 158">
+                <a:extLst>
+                  <a:ext uri="{FF2B5EF4-FFF2-40B4-BE49-F238E27FC236}">
+                    <a16:creationId xmlns:a16="http://schemas.microsoft.com/office/drawing/2014/main" id="{5F2474C0-777F-4023-B64D-216298CD9686}"/>
+                  </a:ext>
+                </a:extLst>
+              </p:cNvPr>
+              <p:cNvSpPr>
+                <a:spLocks noRot="1" noChangeAspect="1" noMove="1" noResize="1" noEditPoints="1" noAdjustHandles="1" noChangeArrowheads="1" noChangeShapeType="1" noTextEdit="1"/>
+              </p:cNvSpPr>
+              <p:nvPr/>
+            </p:nvSpPr>
+            <p:spPr>
+              <a:xfrm>
+                <a:off x="5757166" y="935011"/>
+                <a:ext cx="733662" cy="343171"/>
+              </a:xfrm>
+              <a:prstGeom prst="rect">
+                <a:avLst/>
+              </a:prstGeom>
+              <a:blipFill>
+                <a:blip r:embed="rId29"/>
+                <a:stretch>
+                  <a:fillRect/>
+                </a:stretch>
+              </a:blipFill>
+            </p:spPr>
+            <p:txBody>
+              <a:bodyPr/>
+              <a:lstStyle/>
+              <a:p>
+                <a:r>
+                  <a:rPr lang="zh-TW" altLang="en-US">
+                    <a:noFill/>
+                  </a:rPr>
+                  <a:t> </a:t>
+                </a:r>
+              </a:p>
+            </p:txBody>
+          </p:sp>
+        </mc:Fallback>
+      </mc:AlternateContent>
+      <mc:AlternateContent xmlns:mc="http://schemas.openxmlformats.org/markup-compatibility/2006" xmlns:a14="http://schemas.microsoft.com/office/drawing/2010/main">
+        <mc:Choice Requires="a14">
+          <p:sp>
+            <p:nvSpPr>
+              <p:cNvPr id="160" name="矩形 159">
+                <a:extLst>
+                  <a:ext uri="{FF2B5EF4-FFF2-40B4-BE49-F238E27FC236}">
+                    <a16:creationId xmlns:a16="http://schemas.microsoft.com/office/drawing/2014/main" id="{F6079F0D-AE71-49F9-8960-E30C1BCE64BE}"/>
+                  </a:ext>
+                </a:extLst>
+              </p:cNvPr>
+              <p:cNvSpPr/>
+              <p:nvPr/>
+            </p:nvSpPr>
+            <p:spPr>
+              <a:xfrm>
+                <a:off x="7031532" y="935011"/>
+                <a:ext cx="733662" cy="343171"/>
+              </a:xfrm>
+              <a:prstGeom prst="rect">
+                <a:avLst/>
+              </a:prstGeom>
+            </p:spPr>
+            <p:txBody>
+              <a:bodyPr wrap="square">
+                <a:spAutoFit/>
+              </a:bodyPr>
+              <a:lstStyle/>
+              <a:p>
+                <a:pPr/>
+                <a14:m>
+                  <m:oMathPara xmlns:m="http://schemas.openxmlformats.org/officeDocument/2006/math">
+                    <m:oMathParaPr>
+                      <m:jc m:val="centerGroup"/>
+                    </m:oMathParaPr>
+                    <m:oMath xmlns:m="http://schemas.openxmlformats.org/officeDocument/2006/math">
+                      <m:r>
+                        <a:rPr lang="en-US" altLang="zh-TW" sz="1630" i="1">
+                          <a:latin typeface="Cambria Math" panose="02040503050406030204" pitchFamily="18" charset="0"/>
+                        </a:rPr>
+                        <m:t>ℓ=2</m:t>
+                      </m:r>
+                    </m:oMath>
+                  </m:oMathPara>
+                </a14:m>
+                <a:endParaRPr lang="zh-TW" altLang="en-US" sz="1630" dirty="0">
+                  <a:latin typeface="Times New Roman" panose="02020603050405020304" pitchFamily="18" charset="0"/>
+                  <a:cs typeface="Times New Roman" panose="02020603050405020304" pitchFamily="18" charset="0"/>
+                </a:endParaRPr>
+              </a:p>
+            </p:txBody>
+          </p:sp>
+        </mc:Choice>
+        <mc:Fallback xmlns="">
+          <p:sp>
+            <p:nvSpPr>
+              <p:cNvPr id="160" name="矩形 159">
+                <a:extLst>
+                  <a:ext uri="{FF2B5EF4-FFF2-40B4-BE49-F238E27FC236}">
+                    <a16:creationId xmlns:a16="http://schemas.microsoft.com/office/drawing/2014/main" id="{F6079F0D-AE71-49F9-8960-E30C1BCE64BE}"/>
+                  </a:ext>
+                </a:extLst>
+              </p:cNvPr>
+              <p:cNvSpPr>
+                <a:spLocks noRot="1" noChangeAspect="1" noMove="1" noResize="1" noEditPoints="1" noAdjustHandles="1" noChangeArrowheads="1" noChangeShapeType="1" noTextEdit="1"/>
+              </p:cNvSpPr>
+              <p:nvPr/>
+            </p:nvSpPr>
+            <p:spPr>
+              <a:xfrm>
+                <a:off x="7031532" y="935011"/>
+                <a:ext cx="733662" cy="343171"/>
+              </a:xfrm>
+              <a:prstGeom prst="rect">
+                <a:avLst/>
+              </a:prstGeom>
+              <a:blipFill>
+                <a:blip r:embed="rId30"/>
+                <a:stretch>
+                  <a:fillRect/>
+                </a:stretch>
+              </a:blipFill>
+            </p:spPr>
+            <p:txBody>
+              <a:bodyPr/>
+              <a:lstStyle/>
+              <a:p>
+                <a:r>
+                  <a:rPr lang="zh-TW" altLang="en-US">
+                    <a:noFill/>
+                  </a:rPr>
+                  <a:t> </a:t>
+                </a:r>
+              </a:p>
+            </p:txBody>
+          </p:sp>
+        </mc:Fallback>
+      </mc:AlternateContent>
+      <mc:AlternateContent xmlns:mc="http://schemas.openxmlformats.org/markup-compatibility/2006" xmlns:a14="http://schemas.microsoft.com/office/drawing/2010/main">
+        <mc:Choice Requires="a14">
+          <p:sp>
+            <p:nvSpPr>
+              <p:cNvPr id="162" name="矩形 161">
+                <a:extLst>
+                  <a:ext uri="{FF2B5EF4-FFF2-40B4-BE49-F238E27FC236}">
+                    <a16:creationId xmlns:a16="http://schemas.microsoft.com/office/drawing/2014/main" id="{6341AF83-F103-4236-9A0E-9C1F8A426ACD}"/>
+                  </a:ext>
+                </a:extLst>
+              </p:cNvPr>
+              <p:cNvSpPr/>
+              <p:nvPr/>
+            </p:nvSpPr>
+            <p:spPr>
+              <a:xfrm>
+                <a:off x="1623084" y="2879587"/>
+                <a:ext cx="889154" cy="343171"/>
+              </a:xfrm>
+              <a:prstGeom prst="rect">
+                <a:avLst/>
+              </a:prstGeom>
+            </p:spPr>
+            <p:txBody>
+              <a:bodyPr wrap="square">
+                <a:spAutoFit/>
+              </a:bodyPr>
+              <a:lstStyle/>
+              <a:p>
+                <a:pPr/>
+                <a14:m>
+                  <m:oMathPara xmlns:m="http://schemas.openxmlformats.org/officeDocument/2006/math">
+                    <m:oMathParaPr>
+                      <m:jc m:val="centerGroup"/>
+                    </m:oMathParaPr>
+                    <m:oMath xmlns:m="http://schemas.openxmlformats.org/officeDocument/2006/math">
+                      <m:r>
+                        <a:rPr lang="en-US" altLang="zh-TW" sz="1630" i="1">
+                          <a:latin typeface="Cambria Math" panose="02040503050406030204" pitchFamily="18" charset="0"/>
+                        </a:rPr>
+                        <m:t>ℓ=−2</m:t>
+                      </m:r>
+                    </m:oMath>
+                  </m:oMathPara>
+                </a14:m>
+                <a:endParaRPr lang="zh-TW" altLang="en-US" sz="1630" dirty="0">
+                  <a:latin typeface="Times New Roman" panose="02020603050405020304" pitchFamily="18" charset="0"/>
+                  <a:cs typeface="Times New Roman" panose="02020603050405020304" pitchFamily="18" charset="0"/>
+                </a:endParaRPr>
+              </a:p>
+            </p:txBody>
+          </p:sp>
+        </mc:Choice>
+        <mc:Fallback xmlns="">
+          <p:sp>
+            <p:nvSpPr>
+              <p:cNvPr id="162" name="矩形 161">
+                <a:extLst>
+                  <a:ext uri="{FF2B5EF4-FFF2-40B4-BE49-F238E27FC236}">
+                    <a16:creationId xmlns:a16="http://schemas.microsoft.com/office/drawing/2014/main" id="{6341AF83-F103-4236-9A0E-9C1F8A426ACD}"/>
+                  </a:ext>
+                </a:extLst>
+              </p:cNvPr>
+              <p:cNvSpPr>
+                <a:spLocks noRot="1" noChangeAspect="1" noMove="1" noResize="1" noEditPoints="1" noAdjustHandles="1" noChangeArrowheads="1" noChangeShapeType="1" noTextEdit="1"/>
+              </p:cNvSpPr>
+              <p:nvPr/>
+            </p:nvSpPr>
+            <p:spPr>
+              <a:xfrm>
+                <a:off x="1623084" y="2879587"/>
+                <a:ext cx="889154" cy="343171"/>
+              </a:xfrm>
+              <a:prstGeom prst="rect">
+                <a:avLst/>
+              </a:prstGeom>
+              <a:blipFill>
+                <a:blip r:embed="rId31"/>
+                <a:stretch>
+                  <a:fillRect/>
+                </a:stretch>
+              </a:blipFill>
+            </p:spPr>
+            <p:txBody>
+              <a:bodyPr/>
+              <a:lstStyle/>
+              <a:p>
+                <a:r>
+                  <a:rPr lang="zh-TW" altLang="en-US">
+                    <a:noFill/>
+                  </a:rPr>
+                  <a:t> </a:t>
+                </a:r>
+              </a:p>
+            </p:txBody>
+          </p:sp>
+        </mc:Fallback>
+      </mc:AlternateContent>
+      <mc:AlternateContent xmlns:mc="http://schemas.openxmlformats.org/markup-compatibility/2006" xmlns:a14="http://schemas.microsoft.com/office/drawing/2010/main">
+        <mc:Choice Requires="a14">
+          <p:sp>
+            <p:nvSpPr>
+              <p:cNvPr id="163" name="矩形 162">
+                <a:extLst>
+                  <a:ext uri="{FF2B5EF4-FFF2-40B4-BE49-F238E27FC236}">
+                    <a16:creationId xmlns:a16="http://schemas.microsoft.com/office/drawing/2014/main" id="{03A4DAB4-3182-44BE-AFC1-87879D499685}"/>
+                  </a:ext>
+                </a:extLst>
+              </p:cNvPr>
+              <p:cNvSpPr/>
+              <p:nvPr/>
+            </p:nvSpPr>
+            <p:spPr>
+              <a:xfrm>
+                <a:off x="3052942" y="2879588"/>
+                <a:ext cx="889154" cy="343171"/>
+              </a:xfrm>
+              <a:prstGeom prst="rect">
+                <a:avLst/>
+              </a:prstGeom>
+            </p:spPr>
+            <p:txBody>
+              <a:bodyPr wrap="square">
+                <a:spAutoFit/>
+              </a:bodyPr>
+              <a:lstStyle/>
+              <a:p>
+                <a:pPr/>
+                <a14:m>
+                  <m:oMathPara xmlns:m="http://schemas.openxmlformats.org/officeDocument/2006/math">
+                    <m:oMathParaPr>
+                      <m:jc m:val="centerGroup"/>
+                    </m:oMathParaPr>
+                    <m:oMath xmlns:m="http://schemas.openxmlformats.org/officeDocument/2006/math">
+                      <m:r>
+                        <a:rPr lang="en-US" altLang="zh-TW" sz="1630" i="1">
+                          <a:latin typeface="Cambria Math" panose="02040503050406030204" pitchFamily="18" charset="0"/>
+                        </a:rPr>
+                        <m:t>ℓ=−1</m:t>
+                      </m:r>
+                    </m:oMath>
+                  </m:oMathPara>
+                </a14:m>
+                <a:endParaRPr lang="zh-TW" altLang="en-US" sz="1630" dirty="0">
+                  <a:latin typeface="Times New Roman" panose="02020603050405020304" pitchFamily="18" charset="0"/>
+                  <a:cs typeface="Times New Roman" panose="02020603050405020304" pitchFamily="18" charset="0"/>
+                </a:endParaRPr>
+              </a:p>
+            </p:txBody>
+          </p:sp>
+        </mc:Choice>
+        <mc:Fallback xmlns="">
+          <p:sp>
+            <p:nvSpPr>
+              <p:cNvPr id="163" name="矩形 162">
+                <a:extLst>
+                  <a:ext uri="{FF2B5EF4-FFF2-40B4-BE49-F238E27FC236}">
+                    <a16:creationId xmlns:a16="http://schemas.microsoft.com/office/drawing/2014/main" id="{03A4DAB4-3182-44BE-AFC1-87879D499685}"/>
+                  </a:ext>
+                </a:extLst>
+              </p:cNvPr>
+              <p:cNvSpPr>
+                <a:spLocks noRot="1" noChangeAspect="1" noMove="1" noResize="1" noEditPoints="1" noAdjustHandles="1" noChangeArrowheads="1" noChangeShapeType="1" noTextEdit="1"/>
+              </p:cNvSpPr>
+              <p:nvPr/>
+            </p:nvSpPr>
+            <p:spPr>
+              <a:xfrm>
+                <a:off x="3052942" y="2879588"/>
+                <a:ext cx="889154" cy="343171"/>
+              </a:xfrm>
+              <a:prstGeom prst="rect">
+                <a:avLst/>
+              </a:prstGeom>
+              <a:blipFill>
+                <a:blip r:embed="rId32"/>
+                <a:stretch>
+                  <a:fillRect/>
+                </a:stretch>
+              </a:blipFill>
+            </p:spPr>
+            <p:txBody>
+              <a:bodyPr/>
+              <a:lstStyle/>
+              <a:p>
+                <a:r>
+                  <a:rPr lang="zh-TW" altLang="en-US">
+                    <a:noFill/>
+                  </a:rPr>
+                  <a:t> </a:t>
+                </a:r>
+              </a:p>
+            </p:txBody>
+          </p:sp>
+        </mc:Fallback>
+      </mc:AlternateContent>
+      <mc:AlternateContent xmlns:mc="http://schemas.openxmlformats.org/markup-compatibility/2006" xmlns:a14="http://schemas.microsoft.com/office/drawing/2010/main">
+        <mc:Choice Requires="a14">
+          <p:sp>
+            <p:nvSpPr>
+              <p:cNvPr id="164" name="矩形 163">
+                <a:extLst>
+                  <a:ext uri="{FF2B5EF4-FFF2-40B4-BE49-F238E27FC236}">
+                    <a16:creationId xmlns:a16="http://schemas.microsoft.com/office/drawing/2014/main" id="{2CF1161E-12B2-4CEC-8C7B-486AB3AA7034}"/>
+                  </a:ext>
+                </a:extLst>
+              </p:cNvPr>
+              <p:cNvSpPr/>
+              <p:nvPr/>
+            </p:nvSpPr>
+            <p:spPr>
+              <a:xfrm>
+                <a:off x="4482800" y="2879588"/>
+                <a:ext cx="733662" cy="343171"/>
+              </a:xfrm>
+              <a:prstGeom prst="rect">
+                <a:avLst/>
+              </a:prstGeom>
+            </p:spPr>
+            <p:txBody>
+              <a:bodyPr wrap="square">
+                <a:spAutoFit/>
+              </a:bodyPr>
+              <a:lstStyle/>
+              <a:p>
+                <a:pPr/>
+                <a14:m>
+                  <m:oMathPara xmlns:m="http://schemas.openxmlformats.org/officeDocument/2006/math">
+                    <m:oMathParaPr>
+                      <m:jc m:val="centerGroup"/>
+                    </m:oMathParaPr>
+                    <m:oMath xmlns:m="http://schemas.openxmlformats.org/officeDocument/2006/math">
+                      <m:r>
+                        <a:rPr lang="en-US" altLang="zh-TW" sz="1630" i="1">
+                          <a:latin typeface="Cambria Math" panose="02040503050406030204" pitchFamily="18" charset="0"/>
+                        </a:rPr>
+                        <m:t>ℓ=0</m:t>
+                      </m:r>
+                    </m:oMath>
+                  </m:oMathPara>
+                </a14:m>
+                <a:endParaRPr lang="zh-TW" altLang="en-US" sz="1630" dirty="0">
+                  <a:latin typeface="Times New Roman" panose="02020603050405020304" pitchFamily="18" charset="0"/>
+                  <a:cs typeface="Times New Roman" panose="02020603050405020304" pitchFamily="18" charset="0"/>
+                </a:endParaRPr>
+              </a:p>
+            </p:txBody>
+          </p:sp>
+        </mc:Choice>
+        <mc:Fallback xmlns="">
+          <p:sp>
+            <p:nvSpPr>
+              <p:cNvPr id="164" name="矩形 163">
+                <a:extLst>
+                  <a:ext uri="{FF2B5EF4-FFF2-40B4-BE49-F238E27FC236}">
+                    <a16:creationId xmlns:a16="http://schemas.microsoft.com/office/drawing/2014/main" id="{2CF1161E-12B2-4CEC-8C7B-486AB3AA7034}"/>
+                  </a:ext>
+                </a:extLst>
+              </p:cNvPr>
+              <p:cNvSpPr>
+                <a:spLocks noRot="1" noChangeAspect="1" noMove="1" noResize="1" noEditPoints="1" noAdjustHandles="1" noChangeArrowheads="1" noChangeShapeType="1" noTextEdit="1"/>
+              </p:cNvSpPr>
+              <p:nvPr/>
+            </p:nvSpPr>
+            <p:spPr>
+              <a:xfrm>
+                <a:off x="4482800" y="2879588"/>
+                <a:ext cx="733662" cy="343171"/>
+              </a:xfrm>
+              <a:prstGeom prst="rect">
+                <a:avLst/>
+              </a:prstGeom>
+              <a:blipFill>
+                <a:blip r:embed="rId33"/>
+                <a:stretch>
+                  <a:fillRect/>
+                </a:stretch>
+              </a:blipFill>
+            </p:spPr>
+            <p:txBody>
+              <a:bodyPr/>
+              <a:lstStyle/>
+              <a:p>
+                <a:r>
+                  <a:rPr lang="zh-TW" altLang="en-US">
+                    <a:noFill/>
+                  </a:rPr>
+                  <a:t> </a:t>
+                </a:r>
+              </a:p>
+            </p:txBody>
+          </p:sp>
+        </mc:Fallback>
+      </mc:AlternateContent>
+      <mc:AlternateContent xmlns:mc="http://schemas.openxmlformats.org/markup-compatibility/2006" xmlns:a14="http://schemas.microsoft.com/office/drawing/2010/main">
+        <mc:Choice Requires="a14">
+          <p:sp>
+            <p:nvSpPr>
+              <p:cNvPr id="165" name="矩形 164">
+                <a:extLst>
+                  <a:ext uri="{FF2B5EF4-FFF2-40B4-BE49-F238E27FC236}">
+                    <a16:creationId xmlns:a16="http://schemas.microsoft.com/office/drawing/2014/main" id="{971359BB-E89B-454C-B515-8239716E3FA3}"/>
+                  </a:ext>
+                </a:extLst>
+              </p:cNvPr>
+              <p:cNvSpPr/>
+              <p:nvPr/>
+            </p:nvSpPr>
+            <p:spPr>
+              <a:xfrm>
+                <a:off x="5757166" y="2879588"/>
+                <a:ext cx="733662" cy="343171"/>
+              </a:xfrm>
+              <a:prstGeom prst="rect">
+                <a:avLst/>
+              </a:prstGeom>
+            </p:spPr>
+            <p:txBody>
+              <a:bodyPr wrap="square">
+                <a:spAutoFit/>
+              </a:bodyPr>
+              <a:lstStyle/>
+              <a:p>
+                <a:pPr/>
+                <a14:m>
+                  <m:oMathPara xmlns:m="http://schemas.openxmlformats.org/officeDocument/2006/math">
+                    <m:oMathParaPr>
+                      <m:jc m:val="centerGroup"/>
+                    </m:oMathParaPr>
+                    <m:oMath xmlns:m="http://schemas.openxmlformats.org/officeDocument/2006/math">
+                      <m:r>
+                        <a:rPr lang="en-US" altLang="zh-TW" sz="1630" i="1">
+                          <a:latin typeface="Cambria Math" panose="02040503050406030204" pitchFamily="18" charset="0"/>
+                        </a:rPr>
+                        <m:t>ℓ=1</m:t>
+                      </m:r>
+                    </m:oMath>
+                  </m:oMathPara>
+                </a14:m>
+                <a:endParaRPr lang="zh-TW" altLang="en-US" sz="1630" dirty="0">
+                  <a:latin typeface="Times New Roman" panose="02020603050405020304" pitchFamily="18" charset="0"/>
+                  <a:cs typeface="Times New Roman" panose="02020603050405020304" pitchFamily="18" charset="0"/>
+                </a:endParaRPr>
+              </a:p>
+            </p:txBody>
+          </p:sp>
+        </mc:Choice>
+        <mc:Fallback xmlns="">
+          <p:sp>
+            <p:nvSpPr>
+              <p:cNvPr id="165" name="矩形 164">
+                <a:extLst>
+                  <a:ext uri="{FF2B5EF4-FFF2-40B4-BE49-F238E27FC236}">
+                    <a16:creationId xmlns:a16="http://schemas.microsoft.com/office/drawing/2014/main" id="{971359BB-E89B-454C-B515-8239716E3FA3}"/>
+                  </a:ext>
+                </a:extLst>
+              </p:cNvPr>
+              <p:cNvSpPr>
+                <a:spLocks noRot="1" noChangeAspect="1" noMove="1" noResize="1" noEditPoints="1" noAdjustHandles="1" noChangeArrowheads="1" noChangeShapeType="1" noTextEdit="1"/>
+              </p:cNvSpPr>
+              <p:nvPr/>
+            </p:nvSpPr>
+            <p:spPr>
+              <a:xfrm>
+                <a:off x="5757166" y="2879588"/>
+                <a:ext cx="733662" cy="343171"/>
+              </a:xfrm>
+              <a:prstGeom prst="rect">
+                <a:avLst/>
+              </a:prstGeom>
+              <a:blipFill>
+                <a:blip r:embed="rId34"/>
+                <a:stretch>
+                  <a:fillRect/>
+                </a:stretch>
+              </a:blipFill>
+            </p:spPr>
+            <p:txBody>
+              <a:bodyPr/>
+              <a:lstStyle/>
+              <a:p>
+                <a:r>
+                  <a:rPr lang="zh-TW" altLang="en-US">
+                    <a:noFill/>
+                  </a:rPr>
+                  <a:t> </a:t>
+                </a:r>
+              </a:p>
+            </p:txBody>
+          </p:sp>
+        </mc:Fallback>
+      </mc:AlternateContent>
+      <mc:AlternateContent xmlns:mc="http://schemas.openxmlformats.org/markup-compatibility/2006" xmlns:a14="http://schemas.microsoft.com/office/drawing/2010/main">
+        <mc:Choice Requires="a14">
+          <p:sp>
+            <p:nvSpPr>
+              <p:cNvPr id="166" name="矩形 165">
+                <a:extLst>
+                  <a:ext uri="{FF2B5EF4-FFF2-40B4-BE49-F238E27FC236}">
+                    <a16:creationId xmlns:a16="http://schemas.microsoft.com/office/drawing/2014/main" id="{8F2EF964-F807-4324-AE87-A67C87F4357E}"/>
+                  </a:ext>
+                </a:extLst>
+              </p:cNvPr>
+              <p:cNvSpPr/>
+              <p:nvPr/>
+            </p:nvSpPr>
+            <p:spPr>
+              <a:xfrm>
+                <a:off x="7031532" y="2879588"/>
+                <a:ext cx="733662" cy="343171"/>
+              </a:xfrm>
+              <a:prstGeom prst="rect">
+                <a:avLst/>
+              </a:prstGeom>
+            </p:spPr>
+            <p:txBody>
+              <a:bodyPr wrap="square">
+                <a:spAutoFit/>
+              </a:bodyPr>
+              <a:lstStyle/>
+              <a:p>
+                <a:pPr/>
+                <a14:m>
+                  <m:oMathPara xmlns:m="http://schemas.openxmlformats.org/officeDocument/2006/math">
+                    <m:oMathParaPr>
+                      <m:jc m:val="centerGroup"/>
+                    </m:oMathParaPr>
+                    <m:oMath xmlns:m="http://schemas.openxmlformats.org/officeDocument/2006/math">
+                      <m:r>
+                        <a:rPr lang="en-US" altLang="zh-TW" sz="1630" i="1">
+                          <a:latin typeface="Cambria Math" panose="02040503050406030204" pitchFamily="18" charset="0"/>
+                        </a:rPr>
+                        <m:t>ℓ=2</m:t>
+                      </m:r>
+                    </m:oMath>
+                  </m:oMathPara>
+                </a14:m>
+                <a:endParaRPr lang="zh-TW" altLang="en-US" sz="1630" dirty="0">
+                  <a:latin typeface="Times New Roman" panose="02020603050405020304" pitchFamily="18" charset="0"/>
+                  <a:cs typeface="Times New Roman" panose="02020603050405020304" pitchFamily="18" charset="0"/>
+                </a:endParaRPr>
+              </a:p>
+            </p:txBody>
+          </p:sp>
+        </mc:Choice>
+        <mc:Fallback xmlns="">
+          <p:sp>
+            <p:nvSpPr>
+              <p:cNvPr id="166" name="矩形 165">
+                <a:extLst>
+                  <a:ext uri="{FF2B5EF4-FFF2-40B4-BE49-F238E27FC236}">
+                    <a16:creationId xmlns:a16="http://schemas.microsoft.com/office/drawing/2014/main" id="{8F2EF964-F807-4324-AE87-A67C87F4357E}"/>
+                  </a:ext>
+                </a:extLst>
+              </p:cNvPr>
+              <p:cNvSpPr>
+                <a:spLocks noRot="1" noChangeAspect="1" noMove="1" noResize="1" noEditPoints="1" noAdjustHandles="1" noChangeArrowheads="1" noChangeShapeType="1" noTextEdit="1"/>
+              </p:cNvSpPr>
+              <p:nvPr/>
+            </p:nvSpPr>
+            <p:spPr>
+              <a:xfrm>
+                <a:off x="7031532" y="2879588"/>
+                <a:ext cx="733662" cy="343171"/>
+              </a:xfrm>
+              <a:prstGeom prst="rect">
+                <a:avLst/>
+              </a:prstGeom>
+              <a:blipFill>
+                <a:blip r:embed="rId35"/>
+                <a:stretch>
+                  <a:fillRect/>
+                </a:stretch>
+              </a:blipFill>
+            </p:spPr>
+            <p:txBody>
+              <a:bodyPr/>
+              <a:lstStyle/>
+              <a:p>
+                <a:r>
+                  <a:rPr lang="zh-TW" altLang="en-US">
+                    <a:noFill/>
+                  </a:rPr>
+                  <a:t> </a:t>
+                </a:r>
+              </a:p>
+            </p:txBody>
+          </p:sp>
+        </mc:Fallback>
+      </mc:AlternateContent>
+      <p:pic>
+        <p:nvPicPr>
+          <p:cNvPr id="4" name="圖形 3">
+            <a:extLst>
+              <a:ext uri="{FF2B5EF4-FFF2-40B4-BE49-F238E27FC236}">
+                <a16:creationId xmlns:a16="http://schemas.microsoft.com/office/drawing/2014/main" id="{350EBB08-3334-4E46-95C4-4B20AF750E45}"/>
+              </a:ext>
+            </a:extLst>
+          </p:cNvPr>
+          <p:cNvPicPr>
+            <a:picLocks noChangeAspect="1"/>
+          </p:cNvPicPr>
+          <p:nvPr/>
+        </p:nvPicPr>
+        <p:blipFill rotWithShape="1">
+          <a:blip r:embed="rId36">
+            <a:extLst>
+              <a:ext uri="{28A0092B-C50C-407E-A947-70E740481C1C}">
+                <a14:useLocalDpi xmlns:a14="http://schemas.microsoft.com/office/drawing/2010/main" val="0"/>
+              </a:ext>
+              <a:ext uri="{96DAC541-7B7A-43D3-8B79-37D633B846F1}">
+                <asvg:svgBlip xmlns:asvg="http://schemas.microsoft.com/office/drawing/2016/SVG/main" r:embed="rId37"/>
+              </a:ext>
+            </a:extLst>
+          </a:blip>
+          <a:srcRect l="27035" r="3958"/>
+          <a:stretch/>
+        </p:blipFill>
+        <p:spPr>
+          <a:xfrm>
+            <a:off x="1924050" y="2473406"/>
+            <a:ext cx="1244600" cy="370378"/>
+          </a:xfrm>
+          <a:prstGeom prst="rect">
+            <a:avLst/>
+          </a:prstGeom>
+        </p:spPr>
+      </p:pic>
+      <p:pic>
+        <p:nvPicPr>
+          <p:cNvPr id="50" name="圖片 49">
+            <a:extLst>
+              <a:ext uri="{FF2B5EF4-FFF2-40B4-BE49-F238E27FC236}">
+                <a16:creationId xmlns:a16="http://schemas.microsoft.com/office/drawing/2014/main" id="{02FACD5B-F1E9-451F-A3F9-66ACC2C52873}"/>
+              </a:ext>
+            </a:extLst>
+          </p:cNvPr>
+          <p:cNvPicPr>
+            <a:picLocks noChangeAspect="1"/>
+          </p:cNvPicPr>
+          <p:nvPr/>
+        </p:nvPicPr>
+        <p:blipFill rotWithShape="1">
+          <a:blip r:embed="rId23">
+            <a:clrChange>
+              <a:clrFrom>
+                <a:srgbClr val="FFFFFF"/>
+              </a:clrFrom>
+              <a:clrTo>
+                <a:srgbClr val="FFFFFF">
+                  <a:alpha val="0"/>
+                </a:srgbClr>
+              </a:clrTo>
+            </a:clrChange>
+          </a:blip>
+          <a:srcRect l="96481"/>
+          <a:stretch/>
+        </p:blipFill>
+        <p:spPr>
+          <a:xfrm>
+            <a:off x="3159125" y="2435761"/>
+            <a:ext cx="95290" cy="444937"/>
+          </a:xfrm>
+          <a:prstGeom prst="rect">
+            <a:avLst/>
+          </a:prstGeom>
+        </p:spPr>
+      </p:pic>
+      <p:pic>
+        <p:nvPicPr>
+          <p:cNvPr id="51" name="圖形 50">
+            <a:extLst>
+              <a:ext uri="{FF2B5EF4-FFF2-40B4-BE49-F238E27FC236}">
+                <a16:creationId xmlns:a16="http://schemas.microsoft.com/office/drawing/2014/main" id="{6DBA4B07-935B-4A9E-9F54-9D2ACBFB954C}"/>
+              </a:ext>
+            </a:extLst>
+          </p:cNvPr>
+          <p:cNvPicPr>
+            <a:picLocks noChangeAspect="1"/>
+          </p:cNvPicPr>
+          <p:nvPr/>
+        </p:nvPicPr>
+        <p:blipFill rotWithShape="1">
+          <a:blip r:embed="rId36">
+            <a:extLst>
+              <a:ext uri="{28A0092B-C50C-407E-A947-70E740481C1C}">
+                <a14:useLocalDpi xmlns:a14="http://schemas.microsoft.com/office/drawing/2010/main" val="0"/>
+              </a:ext>
+              <a:ext uri="{96DAC541-7B7A-43D3-8B79-37D633B846F1}">
+                <asvg:svgBlip xmlns:asvg="http://schemas.microsoft.com/office/drawing/2016/SVG/main" r:embed="rId37"/>
+              </a:ext>
+            </a:extLst>
+          </a:blip>
+          <a:srcRect l="27035" r="3958"/>
+          <a:stretch/>
+        </p:blipFill>
+        <p:spPr>
+          <a:xfrm>
+            <a:off x="1541406" y="499207"/>
+            <a:ext cx="1244600" cy="370378"/>
+          </a:xfrm>
+          <a:prstGeom prst="rect">
+            <a:avLst/>
+          </a:prstGeom>
+        </p:spPr>
+      </p:pic>
+      <p:pic>
+        <p:nvPicPr>
+          <p:cNvPr id="52" name="圖片 51">
+            <a:extLst>
+              <a:ext uri="{FF2B5EF4-FFF2-40B4-BE49-F238E27FC236}">
+                <a16:creationId xmlns:a16="http://schemas.microsoft.com/office/drawing/2014/main" id="{B00070E0-A41C-4115-85C4-AF53AAE3F019}"/>
+              </a:ext>
+            </a:extLst>
+          </p:cNvPr>
+          <p:cNvPicPr>
+            <a:picLocks noChangeAspect="1"/>
+          </p:cNvPicPr>
+          <p:nvPr/>
+        </p:nvPicPr>
+        <p:blipFill rotWithShape="1">
+          <a:blip r:embed="rId23">
+            <a:clrChange>
+              <a:clrFrom>
+                <a:srgbClr val="FFFFFF"/>
+              </a:clrFrom>
+              <a:clrTo>
+                <a:srgbClr val="FFFFFF">
+                  <a:alpha val="0"/>
+                </a:srgbClr>
+              </a:clrTo>
+            </a:clrChange>
+          </a:blip>
+          <a:srcRect l="35990" r="56092"/>
+          <a:stretch/>
+        </p:blipFill>
+        <p:spPr>
+          <a:xfrm>
+            <a:off x="2767013" y="431294"/>
+            <a:ext cx="214402" cy="444937"/>
+          </a:xfrm>
+          <a:prstGeom prst="rect">
+            <a:avLst/>
+          </a:prstGeom>
+        </p:spPr>
+      </p:pic>
+    </p:spTree>
+    <p:extLst>
+      <p:ext uri="{BB962C8B-B14F-4D97-AF65-F5344CB8AC3E}">
+        <p14:creationId xmlns:p14="http://schemas.microsoft.com/office/powerpoint/2010/main" val="3421939083"/>
       </p:ext>
     </p:extLst>
   </p:cSld>

--- a/Final/Figures/ffig.pptx
+++ b/Final/Figures/ffig.pptx
@@ -245,7 +245,7 @@
           <a:p>
             <a:fld id="{CC6FB895-B65F-4EA9-9907-69D32227E72B}" type="datetimeFigureOut">
               <a:rPr lang="zh-TW" altLang="en-US" smtClean="0"/>
-              <a:t>2026/7/2</a:t>
+              <a:t>2026/7/9</a:t>
             </a:fld>
             <a:endParaRPr lang="zh-TW" altLang="en-US"/>
           </a:p>
@@ -415,7 +415,7 @@
           <a:p>
             <a:fld id="{CC6FB895-B65F-4EA9-9907-69D32227E72B}" type="datetimeFigureOut">
               <a:rPr lang="zh-TW" altLang="en-US" smtClean="0"/>
-              <a:t>2026/7/2</a:t>
+              <a:t>2026/7/9</a:t>
             </a:fld>
             <a:endParaRPr lang="zh-TW" altLang="en-US"/>
           </a:p>
@@ -595,7 +595,7 @@
           <a:p>
             <a:fld id="{CC6FB895-B65F-4EA9-9907-69D32227E72B}" type="datetimeFigureOut">
               <a:rPr lang="zh-TW" altLang="en-US" smtClean="0"/>
-              <a:t>2026/7/2</a:t>
+              <a:t>2026/7/9</a:t>
             </a:fld>
             <a:endParaRPr lang="zh-TW" altLang="en-US"/>
           </a:p>
@@ -765,7 +765,7 @@
           <a:p>
             <a:fld id="{CC6FB895-B65F-4EA9-9907-69D32227E72B}" type="datetimeFigureOut">
               <a:rPr lang="zh-TW" altLang="en-US" smtClean="0"/>
-              <a:t>2026/7/2</a:t>
+              <a:t>2026/7/9</a:t>
             </a:fld>
             <a:endParaRPr lang="zh-TW" altLang="en-US"/>
           </a:p>
@@ -1011,7 +1011,7 @@
           <a:p>
             <a:fld id="{CC6FB895-B65F-4EA9-9907-69D32227E72B}" type="datetimeFigureOut">
               <a:rPr lang="zh-TW" altLang="en-US" smtClean="0"/>
-              <a:t>2026/7/2</a:t>
+              <a:t>2026/7/9</a:t>
             </a:fld>
             <a:endParaRPr lang="zh-TW" altLang="en-US"/>
           </a:p>
@@ -1243,7 +1243,7 @@
           <a:p>
             <a:fld id="{CC6FB895-B65F-4EA9-9907-69D32227E72B}" type="datetimeFigureOut">
               <a:rPr lang="zh-TW" altLang="en-US" smtClean="0"/>
-              <a:t>2026/7/2</a:t>
+              <a:t>2026/7/9</a:t>
             </a:fld>
             <a:endParaRPr lang="zh-TW" altLang="en-US"/>
           </a:p>
@@ -1610,7 +1610,7 @@
           <a:p>
             <a:fld id="{CC6FB895-B65F-4EA9-9907-69D32227E72B}" type="datetimeFigureOut">
               <a:rPr lang="zh-TW" altLang="en-US" smtClean="0"/>
-              <a:t>2026/7/2</a:t>
+              <a:t>2026/7/9</a:t>
             </a:fld>
             <a:endParaRPr lang="zh-TW" altLang="en-US"/>
           </a:p>
@@ -1728,7 +1728,7 @@
           <a:p>
             <a:fld id="{CC6FB895-B65F-4EA9-9907-69D32227E72B}" type="datetimeFigureOut">
               <a:rPr lang="zh-TW" altLang="en-US" smtClean="0"/>
-              <a:t>2026/7/2</a:t>
+              <a:t>2026/7/9</a:t>
             </a:fld>
             <a:endParaRPr lang="zh-TW" altLang="en-US"/>
           </a:p>
@@ -1823,7 +1823,7 @@
           <a:p>
             <a:fld id="{CC6FB895-B65F-4EA9-9907-69D32227E72B}" type="datetimeFigureOut">
               <a:rPr lang="zh-TW" altLang="en-US" smtClean="0"/>
-              <a:t>2026/7/2</a:t>
+              <a:t>2026/7/9</a:t>
             </a:fld>
             <a:endParaRPr lang="zh-TW" altLang="en-US"/>
           </a:p>
@@ -2100,7 +2100,7 @@
           <a:p>
             <a:fld id="{CC6FB895-B65F-4EA9-9907-69D32227E72B}" type="datetimeFigureOut">
               <a:rPr lang="zh-TW" altLang="en-US" smtClean="0"/>
-              <a:t>2026/7/2</a:t>
+              <a:t>2026/7/9</a:t>
             </a:fld>
             <a:endParaRPr lang="zh-TW" altLang="en-US"/>
           </a:p>
@@ -2357,7 +2357,7 @@
           <a:p>
             <a:fld id="{CC6FB895-B65F-4EA9-9907-69D32227E72B}" type="datetimeFigureOut">
               <a:rPr lang="zh-TW" altLang="en-US" smtClean="0"/>
-              <a:t>2026/7/2</a:t>
+              <a:t>2026/7/9</a:t>
             </a:fld>
             <a:endParaRPr lang="zh-TW" altLang="en-US"/>
           </a:p>
@@ -2570,7 +2570,7 @@
           <a:p>
             <a:fld id="{CC6FB895-B65F-4EA9-9907-69D32227E72B}" type="datetimeFigureOut">
               <a:rPr lang="zh-TW" altLang="en-US" smtClean="0"/>
-              <a:t>2026/7/2</a:t>
+              <a:t>2026/7/9</a:t>
             </a:fld>
             <a:endParaRPr lang="zh-TW" altLang="en-US"/>
           </a:p>
@@ -2977,10 +2977,10 @@
       </p:grpSpPr>
       <p:grpSp>
         <p:nvGrpSpPr>
-          <p:cNvPr id="5" name="群組 4">
+          <p:cNvPr id="2" name="群組 1">
             <a:extLst>
               <a:ext uri="{FF2B5EF4-FFF2-40B4-BE49-F238E27FC236}">
-                <a16:creationId xmlns:a16="http://schemas.microsoft.com/office/drawing/2014/main" id="{AB1E4B8F-4446-4613-9FA1-663A1EE4D451}"/>
+                <a16:creationId xmlns:a16="http://schemas.microsoft.com/office/drawing/2014/main" id="{2D83FACA-69AE-469C-927C-AC78EDDFD866}"/>
               </a:ext>
             </a:extLst>
           </p:cNvPr>
@@ -2989,10 +2989,10 @@
         </p:nvGrpSpPr>
         <p:grpSpPr>
           <a:xfrm>
-            <a:off x="414726" y="112309"/>
-            <a:ext cx="9076553" cy="4455332"/>
-            <a:chOff x="411915" y="170289"/>
-            <a:chExt cx="9076553" cy="4455332"/>
+            <a:off x="128649" y="112309"/>
+            <a:ext cx="9648702" cy="4455332"/>
+            <a:chOff x="217963" y="112309"/>
+            <a:chExt cx="9648702" cy="4455332"/>
           </a:xfrm>
         </p:grpSpPr>
         <p:pic>
@@ -3032,7 +3032,7 @@
           </p:blipFill>
           <p:spPr>
             <a:xfrm>
-              <a:off x="415636" y="599210"/>
+              <a:off x="793833" y="541230"/>
               <a:ext cx="8285234" cy="1659600"/>
             </a:xfrm>
             <a:prstGeom prst="rect">
@@ -3077,7 +3077,7 @@
           </p:blipFill>
           <p:spPr>
             <a:xfrm>
-              <a:off x="417535" y="2826502"/>
+              <a:off x="795732" y="2768522"/>
               <a:ext cx="8222015" cy="1658288"/>
             </a:xfrm>
             <a:prstGeom prst="rect">
@@ -3122,7 +3122,7 @@
           </p:blipFill>
           <p:spPr>
             <a:xfrm>
-              <a:off x="8632001" y="2942517"/>
+              <a:off x="9010198" y="2884537"/>
               <a:ext cx="569632" cy="1680954"/>
             </a:xfrm>
             <a:prstGeom prst="rect">
@@ -3144,8 +3144,8 @@
           </p:nvSpPr>
           <p:spPr>
             <a:xfrm>
-              <a:off x="428977" y="2905369"/>
-              <a:ext cx="8258198" cy="1720252"/>
+              <a:off x="240631" y="2847389"/>
+              <a:ext cx="8824741" cy="1720252"/>
             </a:xfrm>
             <a:prstGeom prst="roundRect">
               <a:avLst>
@@ -3208,8 +3208,8 @@
           </p:nvSpPr>
           <p:spPr>
             <a:xfrm>
-              <a:off x="428999" y="629292"/>
-              <a:ext cx="8258346" cy="1719011"/>
+              <a:off x="240642" y="571312"/>
+              <a:ext cx="8824900" cy="1719011"/>
             </a:xfrm>
             <a:prstGeom prst="roundRect">
               <a:avLst>
@@ -3258,8 +3258,8 @@
             </a:p>
           </p:txBody>
         </p:sp>
-        <mc:AlternateContent xmlns:mc="http://schemas.openxmlformats.org/markup-compatibility/2006" xmlns:a14="http://schemas.microsoft.com/office/drawing/2010/main">
-          <mc:Choice Requires="a14">
+        <mc:AlternateContent xmlns:mc="http://schemas.openxmlformats.org/markup-compatibility/2006">
+          <mc:Choice xmlns:a14="http://schemas.microsoft.com/office/drawing/2010/main" Requires="a14">
             <p:sp>
               <p:nvSpPr>
                 <p:cNvPr id="155" name="矩形 154">
@@ -3274,7 +3274,7 @@
               </p:nvSpPr>
               <p:spPr>
                 <a:xfrm>
-                  <a:off x="690774" y="1718522"/>
+                  <a:off x="1068971" y="1660542"/>
                   <a:ext cx="783035" cy="343171"/>
                 </a:xfrm>
                 <a:prstGeom prst="rect">
@@ -3336,7 +3336,7 @@
               </p:txBody>
             </p:sp>
           </mc:Choice>
-          <mc:Fallback xmlns="">
+          <mc:Fallback>
             <p:sp>
               <p:nvSpPr>
                 <p:cNvPr id="155" name="矩形 154">
@@ -3353,7 +3353,7 @@
               </p:nvSpPr>
               <p:spPr>
                 <a:xfrm>
-                  <a:off x="690774" y="1718522"/>
+                  <a:off x="1068971" y="1660542"/>
                   <a:ext cx="783035" cy="343171"/>
                 </a:xfrm>
                 <a:prstGeom prst="rect">
@@ -3381,8 +3381,8 @@
             </p:sp>
           </mc:Fallback>
         </mc:AlternateContent>
-        <mc:AlternateContent xmlns:mc="http://schemas.openxmlformats.org/markup-compatibility/2006" xmlns:a14="http://schemas.microsoft.com/office/drawing/2010/main">
-          <mc:Choice Requires="a14">
+        <mc:AlternateContent xmlns:mc="http://schemas.openxmlformats.org/markup-compatibility/2006">
+          <mc:Choice xmlns:a14="http://schemas.microsoft.com/office/drawing/2010/main" Requires="a14">
             <p:sp>
               <p:nvSpPr>
                 <p:cNvPr id="156" name="矩形 155">
@@ -3397,7 +3397,7 @@
               </p:nvSpPr>
               <p:spPr>
                 <a:xfrm>
-                  <a:off x="726894" y="2013711"/>
+                  <a:off x="1105091" y="1955731"/>
                   <a:ext cx="889154" cy="343171"/>
                 </a:xfrm>
                 <a:prstGeom prst="rect">
@@ -3434,7 +3434,7 @@
               </p:txBody>
             </p:sp>
           </mc:Choice>
-          <mc:Fallback xmlns="">
+          <mc:Fallback>
             <p:sp>
               <p:nvSpPr>
                 <p:cNvPr id="156" name="矩形 155">
@@ -3451,7 +3451,7 @@
               </p:nvSpPr>
               <p:spPr>
                 <a:xfrm>
-                  <a:off x="726894" y="2013711"/>
+                  <a:off x="1105091" y="1955731"/>
                   <a:ext cx="889154" cy="343171"/>
                 </a:xfrm>
                 <a:prstGeom prst="rect">
@@ -3479,8 +3479,8 @@
             </p:sp>
           </mc:Fallback>
         </mc:AlternateContent>
-        <mc:AlternateContent xmlns:mc="http://schemas.openxmlformats.org/markup-compatibility/2006" xmlns:a14="http://schemas.microsoft.com/office/drawing/2010/main">
-          <mc:Choice Requires="a14">
+        <mc:AlternateContent xmlns:mc="http://schemas.openxmlformats.org/markup-compatibility/2006">
+          <mc:Choice xmlns:a14="http://schemas.microsoft.com/office/drawing/2010/main" Requires="a14">
             <p:sp>
               <p:nvSpPr>
                 <p:cNvPr id="157" name="矩形 156">
@@ -3495,7 +3495,7 @@
               </p:nvSpPr>
               <p:spPr>
                 <a:xfrm>
-                  <a:off x="2509177" y="2013711"/>
+                  <a:off x="2887374" y="1955731"/>
                   <a:ext cx="889154" cy="343171"/>
                 </a:xfrm>
                 <a:prstGeom prst="rect">
@@ -3532,7 +3532,7 @@
               </p:txBody>
             </p:sp>
           </mc:Choice>
-          <mc:Fallback xmlns="">
+          <mc:Fallback>
             <p:sp>
               <p:nvSpPr>
                 <p:cNvPr id="157" name="矩形 156">
@@ -3549,7 +3549,7 @@
               </p:nvSpPr>
               <p:spPr>
                 <a:xfrm>
-                  <a:off x="2509177" y="2013711"/>
+                  <a:off x="2887374" y="1955731"/>
                   <a:ext cx="889154" cy="343171"/>
                 </a:xfrm>
                 <a:prstGeom prst="rect">
@@ -3577,8 +3577,8 @@
             </p:sp>
           </mc:Fallback>
         </mc:AlternateContent>
-        <mc:AlternateContent xmlns:mc="http://schemas.openxmlformats.org/markup-compatibility/2006" xmlns:a14="http://schemas.microsoft.com/office/drawing/2010/main">
-          <mc:Choice Requires="a14">
+        <mc:AlternateContent xmlns:mc="http://schemas.openxmlformats.org/markup-compatibility/2006">
+          <mc:Choice xmlns:a14="http://schemas.microsoft.com/office/drawing/2010/main" Requires="a14">
             <p:sp>
               <p:nvSpPr>
                 <p:cNvPr id="158" name="矩形 157">
@@ -3593,7 +3593,7 @@
               </p:nvSpPr>
               <p:spPr>
                 <a:xfrm>
-                  <a:off x="4215260" y="2013711"/>
+                  <a:off x="4593457" y="1955731"/>
                   <a:ext cx="733662" cy="343171"/>
                 </a:xfrm>
                 <a:prstGeom prst="rect">
@@ -3630,7 +3630,7 @@
               </p:txBody>
             </p:sp>
           </mc:Choice>
-          <mc:Fallback xmlns="">
+          <mc:Fallback>
             <p:sp>
               <p:nvSpPr>
                 <p:cNvPr id="158" name="矩形 157">
@@ -3647,7 +3647,7 @@
               </p:nvSpPr>
               <p:spPr>
                 <a:xfrm>
-                  <a:off x="4215260" y="2013711"/>
+                  <a:off x="4593457" y="1955731"/>
                   <a:ext cx="733662" cy="343171"/>
                 </a:xfrm>
                 <a:prstGeom prst="rect">
@@ -3675,8 +3675,8 @@
             </p:sp>
           </mc:Fallback>
         </mc:AlternateContent>
-        <mc:AlternateContent xmlns:mc="http://schemas.openxmlformats.org/markup-compatibility/2006" xmlns:a14="http://schemas.microsoft.com/office/drawing/2010/main">
-          <mc:Choice Requires="a14">
+        <mc:AlternateContent xmlns:mc="http://schemas.openxmlformats.org/markup-compatibility/2006">
+          <mc:Choice xmlns:a14="http://schemas.microsoft.com/office/drawing/2010/main" Requires="a14">
             <p:sp>
               <p:nvSpPr>
                 <p:cNvPr id="159" name="矩形 158">
@@ -3691,7 +3691,7 @@
               </p:nvSpPr>
               <p:spPr>
                 <a:xfrm>
-                  <a:off x="5918251" y="2013711"/>
+                  <a:off x="6296448" y="1955731"/>
                   <a:ext cx="733662" cy="343171"/>
                 </a:xfrm>
                 <a:prstGeom prst="rect">
@@ -3728,7 +3728,7 @@
               </p:txBody>
             </p:sp>
           </mc:Choice>
-          <mc:Fallback xmlns="">
+          <mc:Fallback>
             <p:sp>
               <p:nvSpPr>
                 <p:cNvPr id="159" name="矩形 158">
@@ -3745,7 +3745,7 @@
               </p:nvSpPr>
               <p:spPr>
                 <a:xfrm>
-                  <a:off x="5918251" y="2013711"/>
+                  <a:off x="6296448" y="1955731"/>
                   <a:ext cx="733662" cy="343171"/>
                 </a:xfrm>
                 <a:prstGeom prst="rect">
@@ -3773,8 +3773,8 @@
             </p:sp>
           </mc:Fallback>
         </mc:AlternateContent>
-        <mc:AlternateContent xmlns:mc="http://schemas.openxmlformats.org/markup-compatibility/2006" xmlns:a14="http://schemas.microsoft.com/office/drawing/2010/main">
-          <mc:Choice Requires="a14">
+        <mc:AlternateContent xmlns:mc="http://schemas.openxmlformats.org/markup-compatibility/2006">
+          <mc:Choice xmlns:a14="http://schemas.microsoft.com/office/drawing/2010/main" Requires="a14">
             <p:sp>
               <p:nvSpPr>
                 <p:cNvPr id="160" name="矩形 159">
@@ -3789,7 +3789,7 @@
               </p:nvSpPr>
               <p:spPr>
                 <a:xfrm>
-                  <a:off x="7545042" y="2013711"/>
+                  <a:off x="7923239" y="1955731"/>
                   <a:ext cx="733662" cy="343171"/>
                 </a:xfrm>
                 <a:prstGeom prst="rect">
@@ -3826,7 +3826,7 @@
               </p:txBody>
             </p:sp>
           </mc:Choice>
-          <mc:Fallback xmlns="">
+          <mc:Fallback>
             <p:sp>
               <p:nvSpPr>
                 <p:cNvPr id="160" name="矩形 159">
@@ -3843,7 +3843,7 @@
               </p:nvSpPr>
               <p:spPr>
                 <a:xfrm>
-                  <a:off x="7545042" y="2013711"/>
+                  <a:off x="7923239" y="1955731"/>
                   <a:ext cx="733662" cy="343171"/>
                 </a:xfrm>
                 <a:prstGeom prst="rect">
@@ -3871,8 +3871,8 @@
             </p:sp>
           </mc:Fallback>
         </mc:AlternateContent>
-        <mc:AlternateContent xmlns:mc="http://schemas.openxmlformats.org/markup-compatibility/2006" xmlns:a14="http://schemas.microsoft.com/office/drawing/2010/main">
-          <mc:Choice Requires="a14">
+        <mc:AlternateContent xmlns:mc="http://schemas.openxmlformats.org/markup-compatibility/2006">
+          <mc:Choice xmlns:a14="http://schemas.microsoft.com/office/drawing/2010/main" Requires="a14">
             <p:sp>
               <p:nvSpPr>
                 <p:cNvPr id="161" name="矩形 160">
@@ -3887,7 +3887,7 @@
               </p:nvSpPr>
               <p:spPr>
                 <a:xfrm>
-                  <a:off x="669509" y="3955281"/>
+                  <a:off x="1047706" y="3897301"/>
                   <a:ext cx="783035" cy="343171"/>
                 </a:xfrm>
                 <a:prstGeom prst="rect">
@@ -3949,7 +3949,7 @@
               </p:txBody>
             </p:sp>
           </mc:Choice>
-          <mc:Fallback xmlns="">
+          <mc:Fallback>
             <p:sp>
               <p:nvSpPr>
                 <p:cNvPr id="161" name="矩形 160">
@@ -3966,7 +3966,7 @@
               </p:nvSpPr>
               <p:spPr>
                 <a:xfrm>
-                  <a:off x="669509" y="3955281"/>
+                  <a:off x="1047706" y="3897301"/>
                   <a:ext cx="783035" cy="343171"/>
                 </a:xfrm>
                 <a:prstGeom prst="rect">
@@ -3994,8 +3994,8 @@
             </p:sp>
           </mc:Fallback>
         </mc:AlternateContent>
-        <mc:AlternateContent xmlns:mc="http://schemas.openxmlformats.org/markup-compatibility/2006" xmlns:a14="http://schemas.microsoft.com/office/drawing/2010/main">
-          <mc:Choice Requires="a14">
+        <mc:AlternateContent xmlns:mc="http://schemas.openxmlformats.org/markup-compatibility/2006">
+          <mc:Choice xmlns:a14="http://schemas.microsoft.com/office/drawing/2010/main" Requires="a14">
             <p:sp>
               <p:nvSpPr>
                 <p:cNvPr id="162" name="矩形 161">
@@ -4010,7 +4010,7 @@
               </p:nvSpPr>
               <p:spPr>
                 <a:xfrm>
-                  <a:off x="726894" y="4277272"/>
+                  <a:off x="1105091" y="4219292"/>
                   <a:ext cx="889154" cy="343171"/>
                 </a:xfrm>
                 <a:prstGeom prst="rect">
@@ -4047,7 +4047,7 @@
               </p:txBody>
             </p:sp>
           </mc:Choice>
-          <mc:Fallback xmlns="">
+          <mc:Fallback>
             <p:sp>
               <p:nvSpPr>
                 <p:cNvPr id="162" name="矩形 161">
@@ -4064,7 +4064,7 @@
               </p:nvSpPr>
               <p:spPr>
                 <a:xfrm>
-                  <a:off x="726894" y="4277272"/>
+                  <a:off x="1105091" y="4219292"/>
                   <a:ext cx="889154" cy="343171"/>
                 </a:xfrm>
                 <a:prstGeom prst="rect">
@@ -4092,8 +4092,8 @@
             </p:sp>
           </mc:Fallback>
         </mc:AlternateContent>
-        <mc:AlternateContent xmlns:mc="http://schemas.openxmlformats.org/markup-compatibility/2006" xmlns:a14="http://schemas.microsoft.com/office/drawing/2010/main">
-          <mc:Choice Requires="a14">
+        <mc:AlternateContent xmlns:mc="http://schemas.openxmlformats.org/markup-compatibility/2006">
+          <mc:Choice xmlns:a14="http://schemas.microsoft.com/office/drawing/2010/main" Requires="a14">
             <p:sp>
               <p:nvSpPr>
                 <p:cNvPr id="163" name="矩形 162">
@@ -4108,7 +4108,7 @@
               </p:nvSpPr>
               <p:spPr>
                 <a:xfrm>
-                  <a:off x="2509177" y="4277273"/>
+                  <a:off x="2887374" y="4219293"/>
                   <a:ext cx="889154" cy="343171"/>
                 </a:xfrm>
                 <a:prstGeom prst="rect">
@@ -4145,7 +4145,7 @@
               </p:txBody>
             </p:sp>
           </mc:Choice>
-          <mc:Fallback xmlns="">
+          <mc:Fallback>
             <p:sp>
               <p:nvSpPr>
                 <p:cNvPr id="163" name="矩形 162">
@@ -4162,7 +4162,7 @@
               </p:nvSpPr>
               <p:spPr>
                 <a:xfrm>
-                  <a:off x="2509177" y="4277273"/>
+                  <a:off x="2887374" y="4219293"/>
                   <a:ext cx="889154" cy="343171"/>
                 </a:xfrm>
                 <a:prstGeom prst="rect">
@@ -4190,8 +4190,8 @@
             </p:sp>
           </mc:Fallback>
         </mc:AlternateContent>
-        <mc:AlternateContent xmlns:mc="http://schemas.openxmlformats.org/markup-compatibility/2006" xmlns:a14="http://schemas.microsoft.com/office/drawing/2010/main">
-          <mc:Choice Requires="a14">
+        <mc:AlternateContent xmlns:mc="http://schemas.openxmlformats.org/markup-compatibility/2006">
+          <mc:Choice xmlns:a14="http://schemas.microsoft.com/office/drawing/2010/main" Requires="a14">
             <p:sp>
               <p:nvSpPr>
                 <p:cNvPr id="164" name="矩形 163">
@@ -4206,7 +4206,7 @@
               </p:nvSpPr>
               <p:spPr>
                 <a:xfrm>
-                  <a:off x="4215260" y="4277273"/>
+                  <a:off x="4593457" y="4219293"/>
                   <a:ext cx="733662" cy="343171"/>
                 </a:xfrm>
                 <a:prstGeom prst="rect">
@@ -4243,7 +4243,7 @@
               </p:txBody>
             </p:sp>
           </mc:Choice>
-          <mc:Fallback xmlns="">
+          <mc:Fallback>
             <p:sp>
               <p:nvSpPr>
                 <p:cNvPr id="164" name="矩形 163">
@@ -4260,7 +4260,7 @@
               </p:nvSpPr>
               <p:spPr>
                 <a:xfrm>
-                  <a:off x="4215260" y="4277273"/>
+                  <a:off x="4593457" y="4219293"/>
                   <a:ext cx="733662" cy="343171"/>
                 </a:xfrm>
                 <a:prstGeom prst="rect">
@@ -4288,8 +4288,8 @@
             </p:sp>
           </mc:Fallback>
         </mc:AlternateContent>
-        <mc:AlternateContent xmlns:mc="http://schemas.openxmlformats.org/markup-compatibility/2006" xmlns:a14="http://schemas.microsoft.com/office/drawing/2010/main">
-          <mc:Choice Requires="a14">
+        <mc:AlternateContent xmlns:mc="http://schemas.openxmlformats.org/markup-compatibility/2006">
+          <mc:Choice xmlns:a14="http://schemas.microsoft.com/office/drawing/2010/main" Requires="a14">
             <p:sp>
               <p:nvSpPr>
                 <p:cNvPr id="165" name="矩形 164">
@@ -4304,7 +4304,7 @@
               </p:nvSpPr>
               <p:spPr>
                 <a:xfrm>
-                  <a:off x="5918251" y="4277273"/>
+                  <a:off x="6296448" y="4219293"/>
                   <a:ext cx="733662" cy="343171"/>
                 </a:xfrm>
                 <a:prstGeom prst="rect">
@@ -4341,7 +4341,7 @@
               </p:txBody>
             </p:sp>
           </mc:Choice>
-          <mc:Fallback xmlns="">
+          <mc:Fallback>
             <p:sp>
               <p:nvSpPr>
                 <p:cNvPr id="165" name="矩形 164">
@@ -4358,7 +4358,7 @@
               </p:nvSpPr>
               <p:spPr>
                 <a:xfrm>
-                  <a:off x="5918251" y="4277273"/>
+                  <a:off x="6296448" y="4219293"/>
                   <a:ext cx="733662" cy="343171"/>
                 </a:xfrm>
                 <a:prstGeom prst="rect">
@@ -4386,8 +4386,8 @@
             </p:sp>
           </mc:Fallback>
         </mc:AlternateContent>
-        <mc:AlternateContent xmlns:mc="http://schemas.openxmlformats.org/markup-compatibility/2006" xmlns:a14="http://schemas.microsoft.com/office/drawing/2010/main">
-          <mc:Choice Requires="a14">
+        <mc:AlternateContent xmlns:mc="http://schemas.openxmlformats.org/markup-compatibility/2006">
+          <mc:Choice xmlns:a14="http://schemas.microsoft.com/office/drawing/2010/main" Requires="a14">
             <p:sp>
               <p:nvSpPr>
                 <p:cNvPr id="166" name="矩形 165">
@@ -4402,7 +4402,7 @@
               </p:nvSpPr>
               <p:spPr>
                 <a:xfrm>
-                  <a:off x="7545042" y="4277273"/>
+                  <a:off x="7923239" y="4219293"/>
                   <a:ext cx="733662" cy="343171"/>
                 </a:xfrm>
                 <a:prstGeom prst="rect">
@@ -4439,7 +4439,7 @@
               </p:txBody>
             </p:sp>
           </mc:Choice>
-          <mc:Fallback xmlns="">
+          <mc:Fallback>
             <p:sp>
               <p:nvSpPr>
                 <p:cNvPr id="166" name="矩形 165">
@@ -4456,7 +4456,7 @@
               </p:nvSpPr>
               <p:spPr>
                 <a:xfrm>
-                  <a:off x="7545042" y="4277273"/>
+                  <a:off x="7923239" y="4219293"/>
                   <a:ext cx="733662" cy="343171"/>
                 </a:xfrm>
                 <a:prstGeom prst="rect">
@@ -4498,7 +4498,7 @@
           </p:nvSpPr>
           <p:spPr>
             <a:xfrm rot="5400000">
-              <a:off x="8637049" y="1402236"/>
+              <a:off x="9015246" y="1344256"/>
               <a:ext cx="1359668" cy="343171"/>
             </a:xfrm>
             <a:prstGeom prst="rect">
@@ -4539,7 +4539,7 @@
           </p:nvSpPr>
           <p:spPr>
             <a:xfrm rot="5400000">
-              <a:off x="8637049" y="3624096"/>
+              <a:off x="9015246" y="3566116"/>
               <a:ext cx="1359668" cy="343171"/>
             </a:xfrm>
             <a:prstGeom prst="rect">
@@ -4580,7 +4580,7 @@
           </p:nvGrpSpPr>
           <p:grpSpPr>
             <a:xfrm>
-              <a:off x="976312" y="928527"/>
+              <a:off x="1354509" y="870547"/>
               <a:ext cx="703953" cy="629156"/>
               <a:chOff x="-1051588" y="926660"/>
               <a:chExt cx="645259" cy="576699"/>
@@ -4963,7 +4963,7 @@
           </p:nvGrpSpPr>
           <p:grpSpPr>
             <a:xfrm>
-              <a:off x="978622" y="3175060"/>
+              <a:off x="1356819" y="3117080"/>
               <a:ext cx="688366" cy="625691"/>
               <a:chOff x="-1026188" y="931423"/>
               <a:chExt cx="630972" cy="573523"/>
@@ -5369,7 +5369,7 @@
           </p:blipFill>
           <p:spPr>
             <a:xfrm>
-              <a:off x="8751441" y="754784"/>
+              <a:off x="9129638" y="696804"/>
               <a:ext cx="568960" cy="1540800"/>
             </a:xfrm>
             <a:prstGeom prst="rect">
@@ -5409,7 +5409,7 @@
           </p:blipFill>
           <p:spPr>
             <a:xfrm>
-              <a:off x="411915" y="2440576"/>
+              <a:off x="790112" y="2382596"/>
               <a:ext cx="1473200" cy="444937"/>
             </a:xfrm>
             <a:prstGeom prst="rect">
@@ -5449,7 +5449,7 @@
           </p:blipFill>
           <p:spPr>
             <a:xfrm>
-              <a:off x="418358" y="170289"/>
+              <a:off x="796555" y="112309"/>
               <a:ext cx="1188922" cy="444937"/>
             </a:xfrm>
             <a:prstGeom prst="rect">
@@ -5457,6 +5457,226 @@
             </a:prstGeom>
           </p:spPr>
         </p:pic>
+        <mc:AlternateContent xmlns:mc="http://schemas.openxmlformats.org/markup-compatibility/2006">
+          <mc:Choice xmlns:a14="http://schemas.microsoft.com/office/drawing/2010/main" Requires="a14">
+            <p:sp>
+              <p:nvSpPr>
+                <p:cNvPr id="35" name="矩形 34">
+                  <a:extLst>
+                    <a:ext uri="{FF2B5EF4-FFF2-40B4-BE49-F238E27FC236}">
+                      <a16:creationId xmlns:a16="http://schemas.microsoft.com/office/drawing/2014/main" id="{24CB750D-8657-4021-94E6-881C9D6EC4FE}"/>
+                    </a:ext>
+                  </a:extLst>
+                </p:cNvPr>
+                <p:cNvSpPr/>
+                <p:nvPr/>
+              </p:nvSpPr>
+              <p:spPr>
+                <a:xfrm>
+                  <a:off x="217963" y="1174481"/>
+                  <a:ext cx="744243" cy="343171"/>
+                </a:xfrm>
+                <a:prstGeom prst="rect">
+                  <a:avLst/>
+                </a:prstGeom>
+              </p:spPr>
+              <p:txBody>
+                <a:bodyPr wrap="none">
+                  <a:spAutoFit/>
+                </a:bodyPr>
+                <a:lstStyle/>
+                <a:p>
+                  <a:pPr/>
+                  <a14:m>
+                    <m:oMathPara xmlns:m="http://schemas.openxmlformats.org/officeDocument/2006/math">
+                      <m:oMathParaPr>
+                        <m:jc m:val="centerGroup"/>
+                      </m:oMathParaPr>
+                      <m:oMath xmlns:m="http://schemas.openxmlformats.org/officeDocument/2006/math">
+                        <m:r>
+                          <a:rPr lang="en-US" altLang="zh-TW" sz="1630" b="0" i="1" smtClean="0">
+                            <a:latin typeface="Cambria Math" panose="02040503050406030204" pitchFamily="18" charset="0"/>
+                          </a:rPr>
+                          <m:t>𝑝</m:t>
+                        </m:r>
+                        <m:r>
+                          <a:rPr lang="en-US" altLang="zh-TW" sz="1630" i="1">
+                            <a:latin typeface="Cambria Math" panose="02040503050406030204" pitchFamily="18" charset="0"/>
+                          </a:rPr>
+                          <m:t>=</m:t>
+                        </m:r>
+                        <m:r>
+                          <a:rPr lang="en-US" altLang="zh-TW" sz="1630" i="1">
+                            <a:latin typeface="Cambria Math" panose="02040503050406030204" pitchFamily="18" charset="0"/>
+                          </a:rPr>
+                          <m:t>0</m:t>
+                        </m:r>
+                      </m:oMath>
+                    </m:oMathPara>
+                  </a14:m>
+                  <a:endParaRPr lang="zh-TW" altLang="en-US" sz="1630" dirty="0">
+                    <a:latin typeface="Times New Roman" panose="02020603050405020304" pitchFamily="18" charset="0"/>
+                    <a:cs typeface="Times New Roman" panose="02020603050405020304" pitchFamily="18" charset="0"/>
+                  </a:endParaRPr>
+                </a:p>
+              </p:txBody>
+            </p:sp>
+          </mc:Choice>
+          <mc:Fallback>
+            <p:sp>
+              <p:nvSpPr>
+                <p:cNvPr id="35" name="矩形 34">
+                  <a:extLst>
+                    <a:ext uri="{FF2B5EF4-FFF2-40B4-BE49-F238E27FC236}">
+                      <a16:creationId xmlns:a16="http://schemas.microsoft.com/office/drawing/2014/main" id="{24CB750D-8657-4021-94E6-881C9D6EC4FE}"/>
+                    </a:ext>
+                  </a:extLst>
+                </p:cNvPr>
+                <p:cNvSpPr>
+                  <a:spLocks noRot="1" noChangeAspect="1" noMove="1" noResize="1" noEditPoints="1" noAdjustHandles="1" noChangeArrowheads="1" noChangeShapeType="1" noTextEdit="1"/>
+                </p:cNvSpPr>
+                <p:nvPr/>
+              </p:nvSpPr>
+              <p:spPr>
+                <a:xfrm>
+                  <a:off x="217963" y="1174481"/>
+                  <a:ext cx="744243" cy="343171"/>
+                </a:xfrm>
+                <a:prstGeom prst="rect">
+                  <a:avLst/>
+                </a:prstGeom>
+                <a:blipFill>
+                  <a:blip r:embed="rId25"/>
+                  <a:stretch>
+                    <a:fillRect b="-5357"/>
+                  </a:stretch>
+                </a:blipFill>
+              </p:spPr>
+              <p:txBody>
+                <a:bodyPr/>
+                <a:lstStyle/>
+                <a:p>
+                  <a:r>
+                    <a:rPr lang="zh-TW" altLang="en-US">
+                      <a:noFill/>
+                    </a:rPr>
+                    <a:t> </a:t>
+                  </a:r>
+                </a:p>
+              </p:txBody>
+            </p:sp>
+          </mc:Fallback>
+        </mc:AlternateContent>
+        <mc:AlternateContent xmlns:mc="http://schemas.openxmlformats.org/markup-compatibility/2006">
+          <mc:Choice xmlns:a14="http://schemas.microsoft.com/office/drawing/2010/main" Requires="a14">
+            <p:sp>
+              <p:nvSpPr>
+                <p:cNvPr id="36" name="矩形 35">
+                  <a:extLst>
+                    <a:ext uri="{FF2B5EF4-FFF2-40B4-BE49-F238E27FC236}">
+                      <a16:creationId xmlns:a16="http://schemas.microsoft.com/office/drawing/2014/main" id="{0A696C94-0B6A-4970-B9D6-88CA84806F2F}"/>
+                    </a:ext>
+                  </a:extLst>
+                </p:cNvPr>
+                <p:cNvSpPr/>
+                <p:nvPr/>
+              </p:nvSpPr>
+              <p:spPr>
+                <a:xfrm>
+                  <a:off x="217963" y="3438042"/>
+                  <a:ext cx="744243" cy="343171"/>
+                </a:xfrm>
+                <a:prstGeom prst="rect">
+                  <a:avLst/>
+                </a:prstGeom>
+              </p:spPr>
+              <p:txBody>
+                <a:bodyPr wrap="none">
+                  <a:spAutoFit/>
+                </a:bodyPr>
+                <a:lstStyle/>
+                <a:p>
+                  <a:pPr/>
+                  <a14:m>
+                    <m:oMathPara xmlns:m="http://schemas.openxmlformats.org/officeDocument/2006/math">
+                      <m:oMathParaPr>
+                        <m:jc m:val="centerGroup"/>
+                      </m:oMathParaPr>
+                      <m:oMath xmlns:m="http://schemas.openxmlformats.org/officeDocument/2006/math">
+                        <m:r>
+                          <a:rPr lang="en-US" altLang="zh-TW" sz="1630" b="0" i="1" smtClean="0">
+                            <a:latin typeface="Cambria Math" panose="02040503050406030204" pitchFamily="18" charset="0"/>
+                          </a:rPr>
+                          <m:t>𝑝</m:t>
+                        </m:r>
+                        <m:r>
+                          <a:rPr lang="en-US" altLang="zh-TW" sz="1630" i="1">
+                            <a:latin typeface="Cambria Math" panose="02040503050406030204" pitchFamily="18" charset="0"/>
+                          </a:rPr>
+                          <m:t>=</m:t>
+                        </m:r>
+                        <m:r>
+                          <a:rPr lang="en-US" altLang="zh-TW" sz="1630" i="1">
+                            <a:latin typeface="Cambria Math" panose="02040503050406030204" pitchFamily="18" charset="0"/>
+                          </a:rPr>
+                          <m:t>0</m:t>
+                        </m:r>
+                      </m:oMath>
+                    </m:oMathPara>
+                  </a14:m>
+                  <a:endParaRPr lang="zh-TW" altLang="en-US" sz="1630" dirty="0">
+                    <a:latin typeface="Times New Roman" panose="02020603050405020304" pitchFamily="18" charset="0"/>
+                    <a:cs typeface="Times New Roman" panose="02020603050405020304" pitchFamily="18" charset="0"/>
+                  </a:endParaRPr>
+                </a:p>
+              </p:txBody>
+            </p:sp>
+          </mc:Choice>
+          <mc:Fallback>
+            <p:sp>
+              <p:nvSpPr>
+                <p:cNvPr id="36" name="矩形 35">
+                  <a:extLst>
+                    <a:ext uri="{FF2B5EF4-FFF2-40B4-BE49-F238E27FC236}">
+                      <a16:creationId xmlns:a16="http://schemas.microsoft.com/office/drawing/2014/main" id="{0A696C94-0B6A-4970-B9D6-88CA84806F2F}"/>
+                    </a:ext>
+                  </a:extLst>
+                </p:cNvPr>
+                <p:cNvSpPr>
+                  <a:spLocks noRot="1" noChangeAspect="1" noMove="1" noResize="1" noEditPoints="1" noAdjustHandles="1" noChangeArrowheads="1" noChangeShapeType="1" noTextEdit="1"/>
+                </p:cNvSpPr>
+                <p:nvPr/>
+              </p:nvSpPr>
+              <p:spPr>
+                <a:xfrm>
+                  <a:off x="217963" y="3438042"/>
+                  <a:ext cx="744243" cy="343171"/>
+                </a:xfrm>
+                <a:prstGeom prst="rect">
+                  <a:avLst/>
+                </a:prstGeom>
+                <a:blipFill>
+                  <a:blip r:embed="rId26"/>
+                  <a:stretch>
+                    <a:fillRect b="-5357"/>
+                  </a:stretch>
+                </a:blipFill>
+              </p:spPr>
+              <p:txBody>
+                <a:bodyPr/>
+                <a:lstStyle/>
+                <a:p>
+                  <a:r>
+                    <a:rPr lang="zh-TW" altLang="en-US">
+                      <a:noFill/>
+                    </a:rPr>
+                    <a:t> </a:t>
+                  </a:r>
+                </a:p>
+              </p:txBody>
+            </p:sp>
+          </mc:Fallback>
+        </mc:AlternateContent>
       </p:grpSp>
     </p:spTree>
     <p:extLst>
